--- a/lessons/lesson-13/slides.pptx
+++ b/lessons/lesson-13/slides.pptx
@@ -407,7 +407,7 @@
           <a:lstStyle xmlns:a="http://schemas.openxmlformats.org/drawingml/2006/main"/>
           <a:p xmlns:a="http://schemas.openxmlformats.org/drawingml/2006/main">
             <a:r>
-              <a:t>第 13 课工作流评价与结论边界。屏显按现行逐页母稿压缩为课堂可读对象，完整说明保留在讲义与教师备注。</a:t>
+              <a:t>第13讲 工作流评价、结果分析与失败复盘</a:t>
             </a:r>
           </a:p>
           <a:p xmlns:a="http://schemas.openxmlformats.org/drawingml/2006/main">
@@ -417,17 +417,92 @@
           </a:p>
           <a:p xmlns:a="http://schemas.openxmlformats.org/drawingml/2006/main">
             <a:r>
+              <a:t>讲义对应：§导读；课程入口</a:t>
+            </a:r>
+          </a:p>
+          <a:p xmlns:a="http://schemas.openxmlformats.org/drawingml/2006/main">
+            <a:r>
+              <a:t/>
+            </a:r>
+          </a:p>
+          <a:p xmlns:a="http://schemas.openxmlformats.org/drawingml/2006/main">
+            <a:r>
+              <a:t>[Teaching]</a:t>
+            </a:r>
+          </a:p>
+          <a:p xmlns:a="http://schemas.openxmlformats.org/drawingml/2006/main">
+            <a:r>
+              <a:t>开场放下工作流原型。第 10-12 课你完成了受限 Agent 执行、实验自动化和个人 Agent Workflow 设计，但"能运行"和"经过评价"之间还有距离。本课把原型收口为评价材料，并完成第三次正式提交——验证门。</a:t>
+            </a:r>
+          </a:p>
+          <a:p xmlns:a="http://schemas.openxmlformats.org/drawingml/2006/main">
+            <a:r>
+              <a:t/>
+            </a:r>
+          </a:p>
+          <a:p xmlns:a="http://schemas.openxmlformats.org/drawingml/2006/main">
+            <a:r>
+              <a:t>[Student action]</a:t>
+            </a:r>
+          </a:p>
+          <a:p xmlns:a="http://schemas.openxmlformats.org/drawingml/2006/main">
+            <a:r>
+              <a:t>不展开课程行政信息，直接进入下一页回扣。</a:t>
+            </a:r>
+          </a:p>
+          <a:p xmlns:a="http://schemas.openxmlformats.org/drawingml/2006/main">
+            <a:r>
+              <a:t/>
+            </a:r>
+          </a:p>
+          <a:p xmlns:a="http://schemas.openxmlformats.org/drawingml/2006/main">
+            <a:r>
+              <a:t>[Timing]</a:t>
+            </a:r>
+          </a:p>
+          <a:p xmlns:a="http://schemas.openxmlformats.org/drawingml/2006/main">
+            <a:r>
+              <a:t>2 分钟。</a:t>
+            </a:r>
+          </a:p>
+          <a:p xmlns:a="http://schemas.openxmlformats.org/drawingml/2006/main">
+            <a:r>
+              <a:t/>
+            </a:r>
+          </a:p>
+          <a:p xmlns:a="http://schemas.openxmlformats.org/drawingml/2006/main">
+            <a:r>
+              <a:t>[Evidence boundary]</a:t>
+            </a:r>
+          </a:p>
+          <a:p xmlns:a="http://schemas.openxmlformats.org/drawingml/2006/main">
+            <a:r>
+              <a:t>课程定位以 [syllabus.md](../../course/syllabus.md) 与 [备课规划.md](../备课规划.md) 第 13 课段为准。</a:t>
+            </a:r>
+          </a:p>
+          <a:p xmlns:a="http://schemas.openxmlformats.org/drawingml/2006/main">
+            <a:r>
+              <a:t/>
+            </a:r>
+          </a:p>
+          <a:p xmlns:a="http://schemas.openxmlformats.org/drawingml/2006/main">
+            <a:r>
               <a:t>[Sources]</a:t>
             </a:r>
           </a:p>
           <a:p xmlns:a="http://schemas.openxmlformats.org/drawingml/2006/main">
             <a:r>
-              <a:t>- /Users/bright/Projects/courses/graduate/lessons/lesson-13/slides.md</a:t>
-            </a:r>
-          </a:p>
-          <a:p xmlns:a="http://schemas.openxmlformats.org/drawingml/2006/main">
-            <a:r>
-              <a:t>- /Users/bright/Projects/courses/graduate/lessons/lesson-13/handout.md</a:t>
+              <a:t>- lessons/lesson-13/slides.md P01</a:t>
+            </a:r>
+          </a:p>
+          <a:p xmlns:a="http://schemas.openxmlformats.org/drawingml/2006/main">
+            <a:r>
+              <a:t>- lessons/lesson-13/handout.md §导读；课程入口</a:t>
+            </a:r>
+          </a:p>
+          <a:p xmlns:a="http://schemas.openxmlformats.org/drawingml/2006/main">
+            <a:r>
+              <a:t>- lessons/lesson-13/teaching-plan.md</a:t>
             </a:r>
           </a:p>
           <a:p xmlns:a="http://schemas.openxmlformats.org/drawingml/2006/main">
@@ -502,7 +577,7 @@
           <a:lstStyle xmlns:a="http://schemas.openxmlformats.org/drawingml/2006/main"/>
           <a:p xmlns:a="http://schemas.openxmlformats.org/drawingml/2006/main">
             <a:r>
-              <a:t>第 13 课工作流评价与结论边界。屏显按现行逐页母稿压缩为课堂可读对象，完整说明保留在讲义与教师备注。</a:t>
+              <a:t>证据地图显示替代解释仍未排除</a:t>
             </a:r>
           </a:p>
           <a:p xmlns:a="http://schemas.openxmlformats.org/drawingml/2006/main">
@@ -512,17 +587,102 @@
           </a:p>
           <a:p xmlns:a="http://schemas.openxmlformats.org/drawingml/2006/main">
             <a:r>
+              <a:t>讲义对应：§三·3 证据充分性检查</a:t>
+            </a:r>
+          </a:p>
+          <a:p xmlns:a="http://schemas.openxmlformats.org/drawingml/2006/main">
+            <a:r>
+              <a:t/>
+            </a:r>
+          </a:p>
+          <a:p xmlns:a="http://schemas.openxmlformats.org/drawingml/2006/main">
+            <a:r>
+              <a:t>[Teaching]</a:t>
+            </a:r>
+          </a:p>
+          <a:p xmlns:a="http://schemas.openxmlformats.org/drawingml/2006/main">
+            <a:r>
+              <a:t>证据充分性检查是验证门条件之九的核心。贯穿案例的方向性结果尚不足以区分 H1 与 A1/A2/A3，因此机制状态是“仍不能判断”，不能标 `stable`。独立证据指来源、测量、重复实验、对照、消融或分析路径的实质差异，不是两个网页。</a:t>
+            </a:r>
+          </a:p>
+          <a:p xmlns:a="http://schemas.openxmlformats.org/drawingml/2006/main">
+            <a:r>
+              <a:t/>
+            </a:r>
+          </a:p>
+          <a:p xmlns:a="http://schemas.openxmlformats.org/drawingml/2006/main">
+            <a:r>
+              <a:t>[Student action]</a:t>
+            </a:r>
+          </a:p>
+          <a:p xmlns:a="http://schemas.openxmlformats.org/drawingml/2006/main">
+            <a:r>
+              <a:t>让学生为自己的关键结论填这张表。检查 `stable` 标记是否满足两项独立证据。</a:t>
+            </a:r>
+          </a:p>
+          <a:p xmlns:a="http://schemas.openxmlformats.org/drawingml/2006/main">
+            <a:r>
+              <a:t/>
+            </a:r>
+          </a:p>
+          <a:p xmlns:a="http://schemas.openxmlformats.org/drawingml/2006/main">
+            <a:r>
+              <a:t>[Timing]</a:t>
+            </a:r>
+          </a:p>
+          <a:p xmlns:a="http://schemas.openxmlformats.org/drawingml/2006/main">
+            <a:r>
+              <a:t>3 分钟。</a:t>
+            </a:r>
+          </a:p>
+          <a:p xmlns:a="http://schemas.openxmlformats.org/drawingml/2006/main">
+            <a:r>
+              <a:t/>
+            </a:r>
+          </a:p>
+          <a:p xmlns:a="http://schemas.openxmlformats.org/drawingml/2006/main">
+            <a:r>
+              <a:t>[Evidence boundary]</a:t>
+            </a:r>
+          </a:p>
+          <a:p xmlns:a="http://schemas.openxmlformats.org/drawingml/2006/main">
+            <a:r>
+              <a:t>本页数值、论文反例与运行 ID 属课程虚构教学示例，不是实际学生实验结果。</a:t>
+            </a:r>
+          </a:p>
+          <a:p xmlns:a="http://schemas.openxmlformats.org/drawingml/2006/main">
+            <a:r>
+              <a:t/>
+            </a:r>
+          </a:p>
+          <a:p xmlns:a="http://schemas.openxmlformats.org/drawingml/2006/main">
+            <a:r>
+              <a:t>讲义 §三·3；[AGENTS.md](../../AGENTS.md)；[project-template.md](../../course/project-template.md) §8.4。</a:t>
+            </a:r>
+          </a:p>
+          <a:p xmlns:a="http://schemas.openxmlformats.org/drawingml/2006/main">
+            <a:r>
+              <a:t/>
+            </a:r>
+          </a:p>
+          <a:p xmlns:a="http://schemas.openxmlformats.org/drawingml/2006/main">
+            <a:r>
               <a:t>[Sources]</a:t>
             </a:r>
           </a:p>
           <a:p xmlns:a="http://schemas.openxmlformats.org/drawingml/2006/main">
             <a:r>
-              <a:t>- /Users/bright/Projects/courses/graduate/lessons/lesson-13/slides.md</a:t>
-            </a:r>
-          </a:p>
-          <a:p xmlns:a="http://schemas.openxmlformats.org/drawingml/2006/main">
-            <a:r>
-              <a:t>- /Users/bright/Projects/courses/graduate/lessons/lesson-13/handout.md</a:t>
+              <a:t>- lessons/lesson-13/slides.md P10</a:t>
+            </a:r>
+          </a:p>
+          <a:p xmlns:a="http://schemas.openxmlformats.org/drawingml/2006/main">
+            <a:r>
+              <a:t>- lessons/lesson-13/handout.md §三·3 证据充分性检查</a:t>
+            </a:r>
+          </a:p>
+          <a:p xmlns:a="http://schemas.openxmlformats.org/drawingml/2006/main">
+            <a:r>
+              <a:t>- lessons/lesson-13/teaching-plan.md</a:t>
             </a:r>
           </a:p>
           <a:p xmlns:a="http://schemas.openxmlformats.org/drawingml/2006/main">
@@ -597,7 +757,7 @@
           <a:lstStyle xmlns:a="http://schemas.openxmlformats.org/drawingml/2006/main"/>
           <a:p xmlns:a="http://schemas.openxmlformats.org/drawingml/2006/main">
             <a:r>
-              <a:t>第 13 课工作流评价与结论边界。屏显按现行逐页母稿压缩为课堂可读对象，完整说明保留在讲义与教师备注。</a:t>
+              <a:t>有效性威胁贴在同一结果上</a:t>
             </a:r>
           </a:p>
           <a:p xmlns:a="http://schemas.openxmlformats.org/drawingml/2006/main">
@@ -607,17 +767,102 @@
           </a:p>
           <a:p xmlns:a="http://schemas.openxmlformats.org/drawingml/2006/main">
             <a:r>
+              <a:t>讲义对应：§三·4 威胁有效性</a:t>
+            </a:r>
+          </a:p>
+          <a:p xmlns:a="http://schemas.openxmlformats.org/drawingml/2006/main">
+            <a:r>
+              <a:t/>
+            </a:r>
+          </a:p>
+          <a:p xmlns:a="http://schemas.openxmlformats.org/drawingml/2006/main">
+            <a:r>
+              <a:t>[Teaching]</a:t>
+            </a:r>
+          </a:p>
+          <a:p xmlns:a="http://schemas.openxmlformats.org/drawingml/2006/main">
+            <a:r>
+              <a:t>威胁有效性每条要写具体：对照哪里可能不公平？样本为什么不能外推？人工基准遗漏率是否覆盖目标动作？构念有效性不能退化成检查字段是否填满。</a:t>
+            </a:r>
+          </a:p>
+          <a:p xmlns:a="http://schemas.openxmlformats.org/drawingml/2006/main">
+            <a:r>
+              <a:t/>
+            </a:r>
+          </a:p>
+          <a:p xmlns:a="http://schemas.openxmlformats.org/drawingml/2006/main">
+            <a:r>
+              <a:t>[Student action]</a:t>
+            </a:r>
+          </a:p>
+          <a:p xmlns:a="http://schemas.openxmlformats.org/drawingml/2006/main">
+            <a:r>
+              <a:t>让学生写出自己项目的至少两类具体威胁。</a:t>
+            </a:r>
+          </a:p>
+          <a:p xmlns:a="http://schemas.openxmlformats.org/drawingml/2006/main">
+            <a:r>
+              <a:t/>
+            </a:r>
+          </a:p>
+          <a:p xmlns:a="http://schemas.openxmlformats.org/drawingml/2006/main">
+            <a:r>
+              <a:t>[Timing]</a:t>
+            </a:r>
+          </a:p>
+          <a:p xmlns:a="http://schemas.openxmlformats.org/drawingml/2006/main">
+            <a:r>
+              <a:t>2 分钟。</a:t>
+            </a:r>
+          </a:p>
+          <a:p xmlns:a="http://schemas.openxmlformats.org/drawingml/2006/main">
+            <a:r>
+              <a:t/>
+            </a:r>
+          </a:p>
+          <a:p xmlns:a="http://schemas.openxmlformats.org/drawingml/2006/main">
+            <a:r>
+              <a:t>[Evidence boundary]</a:t>
+            </a:r>
+          </a:p>
+          <a:p xmlns:a="http://schemas.openxmlformats.org/drawingml/2006/main">
+            <a:r>
+              <a:t>本页数值、论文反例与运行 ID 属课程虚构教学示例，不是实际学生实验结果。</a:t>
+            </a:r>
+          </a:p>
+          <a:p xmlns:a="http://schemas.openxmlformats.org/drawingml/2006/main">
+            <a:r>
+              <a:t/>
+            </a:r>
+          </a:p>
+          <a:p xmlns:a="http://schemas.openxmlformats.org/drawingml/2006/main">
+            <a:r>
+              <a:t>讲义 §三·4；[project-template.md](../../course/project-template.md) §8.3。</a:t>
+            </a:r>
+          </a:p>
+          <a:p xmlns:a="http://schemas.openxmlformats.org/drawingml/2006/main">
+            <a:r>
+              <a:t/>
+            </a:r>
+          </a:p>
+          <a:p xmlns:a="http://schemas.openxmlformats.org/drawingml/2006/main">
+            <a:r>
               <a:t>[Sources]</a:t>
             </a:r>
           </a:p>
           <a:p xmlns:a="http://schemas.openxmlformats.org/drawingml/2006/main">
             <a:r>
-              <a:t>- /Users/bright/Projects/courses/graduate/lessons/lesson-13/slides.md</a:t>
-            </a:r>
-          </a:p>
-          <a:p xmlns:a="http://schemas.openxmlformats.org/drawingml/2006/main">
-            <a:r>
-              <a:t>- /Users/bright/Projects/courses/graduate/lessons/lesson-13/handout.md</a:t>
+              <a:t>- lessons/lesson-13/slides.md P11</a:t>
+            </a:r>
+          </a:p>
+          <a:p xmlns:a="http://schemas.openxmlformats.org/drawingml/2006/main">
+            <a:r>
+              <a:t>- lessons/lesson-13/handout.md §三·4 威胁有效性</a:t>
+            </a:r>
+          </a:p>
+          <a:p xmlns:a="http://schemas.openxmlformats.org/drawingml/2006/main">
+            <a:r>
+              <a:t>- lessons/lesson-13/teaching-plan.md</a:t>
             </a:r>
           </a:p>
           <a:p xmlns:a="http://schemas.openxmlformats.org/drawingml/2006/main">
@@ -692,7 +937,7 @@
           <a:lstStyle xmlns:a="http://schemas.openxmlformats.org/drawingml/2006/main"/>
           <a:p xmlns:a="http://schemas.openxmlformats.org/drawingml/2006/main">
             <a:r>
-              <a:t>第 13 课工作流评价与结论边界。屏显按现行逐页母稿压缩为课堂可读对象，完整说明保留在讲义与教师备注。</a:t>
+              <a:t>失败必须留在运行账本中</a:t>
             </a:r>
           </a:p>
           <a:p xmlns:a="http://schemas.openxmlformats.org/drawingml/2006/main">
@@ -702,17 +947,102 @@
           </a:p>
           <a:p xmlns:a="http://schemas.openxmlformats.org/drawingml/2006/main">
             <a:r>
+              <a:t>讲义对应：§四·1 失败审计原则</a:t>
+            </a:r>
+          </a:p>
+          <a:p xmlns:a="http://schemas.openxmlformats.org/drawingml/2006/main">
+            <a:r>
+              <a:t/>
+            </a:r>
+          </a:p>
+          <a:p xmlns:a="http://schemas.openxmlformats.org/drawingml/2006/main">
+            <a:r>
+              <a:t>[Teaching]</a:t>
+            </a:r>
+          </a:p>
+          <a:p xmlns:a="http://schemas.openxmlformats.org/drawingml/2006/main">
+            <a:r>
+              <a:t>失败审计要对每次失败做根因。最严重的错误是静默重跑删除失败痕迹——这是学术规范红线。第 1 课 §五·4 已说"失败不是重跑到成功，而是工作流评价材料"，本课把它落到验证门。</a:t>
+            </a:r>
+          </a:p>
+          <a:p xmlns:a="http://schemas.openxmlformats.org/drawingml/2006/main">
+            <a:r>
+              <a:t/>
+            </a:r>
+          </a:p>
+          <a:p xmlns:a="http://schemas.openxmlformats.org/drawingml/2006/main">
+            <a:r>
+              <a:t>[Student action]</a:t>
+            </a:r>
+          </a:p>
+          <a:p xmlns:a="http://schemas.openxmlformats.org/drawingml/2006/main">
+            <a:r>
+              <a:t>让学生检查自己的实验目录：失败运行的日志还在吗？还是被删了？</a:t>
+            </a:r>
+          </a:p>
+          <a:p xmlns:a="http://schemas.openxmlformats.org/drawingml/2006/main">
+            <a:r>
+              <a:t/>
+            </a:r>
+          </a:p>
+          <a:p xmlns:a="http://schemas.openxmlformats.org/drawingml/2006/main">
+            <a:r>
+              <a:t>[Timing]</a:t>
+            </a:r>
+          </a:p>
+          <a:p xmlns:a="http://schemas.openxmlformats.org/drawingml/2006/main">
+            <a:r>
+              <a:t>3 分钟。</a:t>
+            </a:r>
+          </a:p>
+          <a:p xmlns:a="http://schemas.openxmlformats.org/drawingml/2006/main">
+            <a:r>
+              <a:t/>
+            </a:r>
+          </a:p>
+          <a:p xmlns:a="http://schemas.openxmlformats.org/drawingml/2006/main">
+            <a:r>
+              <a:t>[Evidence boundary]</a:t>
+            </a:r>
+          </a:p>
+          <a:p xmlns:a="http://schemas.openxmlformats.org/drawingml/2006/main">
+            <a:r>
+              <a:t>本页数值、论文反例与运行 ID 属课程虚构教学示例，不是实际学生实验结果。</a:t>
+            </a:r>
+          </a:p>
+          <a:p xmlns:a="http://schemas.openxmlformats.org/drawingml/2006/main">
+            <a:r>
+              <a:t/>
+            </a:r>
+          </a:p>
+          <a:p xmlns:a="http://schemas.openxmlformats.org/drawingml/2006/main">
+            <a:r>
+              <a:t>讲义 §四·1；[AGENTS.md](../../AGENTS.md)；[assessment.md](../../course/assessment.md) 学术规范红线；第 1 课 §五·4。</a:t>
+            </a:r>
+          </a:p>
+          <a:p xmlns:a="http://schemas.openxmlformats.org/drawingml/2006/main">
+            <a:r>
+              <a:t/>
+            </a:r>
+          </a:p>
+          <a:p xmlns:a="http://schemas.openxmlformats.org/drawingml/2006/main">
+            <a:r>
               <a:t>[Sources]</a:t>
             </a:r>
           </a:p>
           <a:p xmlns:a="http://schemas.openxmlformats.org/drawingml/2006/main">
             <a:r>
-              <a:t>- /Users/bright/Projects/courses/graduate/lessons/lesson-13/slides.md</a:t>
-            </a:r>
-          </a:p>
-          <a:p xmlns:a="http://schemas.openxmlformats.org/drawingml/2006/main">
-            <a:r>
-              <a:t>- /Users/bright/Projects/courses/graduate/lessons/lesson-13/handout.md</a:t>
+              <a:t>- lessons/lesson-13/slides.md P12</a:t>
+            </a:r>
+          </a:p>
+          <a:p xmlns:a="http://schemas.openxmlformats.org/drawingml/2006/main">
+            <a:r>
+              <a:t>- lessons/lesson-13/handout.md §四·1 失败审计原则</a:t>
+            </a:r>
+          </a:p>
+          <a:p xmlns:a="http://schemas.openxmlformats.org/drawingml/2006/main">
+            <a:r>
+              <a:t>- lessons/lesson-13/teaching-plan.md</a:t>
             </a:r>
           </a:p>
           <a:p xmlns:a="http://schemas.openxmlformats.org/drawingml/2006/main">
@@ -787,7 +1117,7 @@
           <a:lstStyle xmlns:a="http://schemas.openxmlformats.org/drawingml/2006/main"/>
           <a:p xmlns:a="http://schemas.openxmlformats.org/drawingml/2006/main">
             <a:r>
-              <a:t>第 13 课工作流评价与结论边界。屏显按现行逐页母稿压缩为课堂可读对象，完整说明保留在讲义与教师备注。</a:t>
+              <a:t>六类根因围绕一次失败定位</a:t>
             </a:r>
           </a:p>
           <a:p xmlns:a="http://schemas.openxmlformats.org/drawingml/2006/main">
@@ -797,17 +1127,117 @@
           </a:p>
           <a:p xmlns:a="http://schemas.openxmlformats.org/drawingml/2006/main">
             <a:r>
+              <a:t>讲义对应：§四·2 失败分类与根因（Sculley et al. 骨架）</a:t>
+            </a:r>
+          </a:p>
+          <a:p xmlns:a="http://schemas.openxmlformats.org/drawingml/2006/main">
+            <a:r>
+              <a:t/>
+            </a:r>
+          </a:p>
+          <a:p xmlns:a="http://schemas.openxmlformats.org/drawingml/2006/main">
+            <a:r>
+              <a:t>[Teaching]</a:t>
+            </a:r>
+          </a:p>
+          <a:p xmlns:a="http://schemas.openxmlformats.org/drawingml/2006/main">
+            <a:r>
+              <a:t>Sculley 等人的论文讨论 ML 系统隐性技术债，本课借用其分类思路组织六类审计问题。中央 run-042 为虚构教学记录，示例将任务契约与文档结构不匹配列为待复测的根因解释。学生为自己的一次失败写具体表现、候选根因和验证动作，不能只写“模型不行”，也不能把示例分类当成已经证明的机制。</a:t>
+            </a:r>
+          </a:p>
+          <a:p xmlns:a="http://schemas.openxmlformats.org/drawingml/2006/main">
+            <a:r>
+              <a:t/>
+            </a:r>
+          </a:p>
+          <a:p xmlns:a="http://schemas.openxmlformats.org/drawingml/2006/main">
+            <a:r>
+              <a:t>[Student action]</a:t>
+            </a:r>
+          </a:p>
+          <a:p xmlns:a="http://schemas.openxmlformats.org/drawingml/2006/main">
+            <a:r>
+              <a:t>让学生为自己的一次失败用六类骨架归类。</a:t>
+            </a:r>
+          </a:p>
+          <a:p xmlns:a="http://schemas.openxmlformats.org/drawingml/2006/main">
+            <a:r>
+              <a:t/>
+            </a:r>
+          </a:p>
+          <a:p xmlns:a="http://schemas.openxmlformats.org/drawingml/2006/main">
+            <a:r>
+              <a:t>[Timing]</a:t>
+            </a:r>
+          </a:p>
+          <a:p xmlns:a="http://schemas.openxmlformats.org/drawingml/2006/main">
+            <a:r>
+              <a:t>3 分钟。</a:t>
+            </a:r>
+          </a:p>
+          <a:p xmlns:a="http://schemas.openxmlformats.org/drawingml/2006/main">
+            <a:r>
+              <a:t/>
+            </a:r>
+          </a:p>
+          <a:p xmlns:a="http://schemas.openxmlformats.org/drawingml/2006/main">
+            <a:r>
+              <a:t>[Evidence boundary]</a:t>
+            </a:r>
+          </a:p>
+          <a:p xmlns:a="http://schemas.openxmlformats.org/drawingml/2006/main">
+            <a:r>
+              <a:t>直接来源：[正式来源](https://research.google/pubs/hidden-technical-debt-in-machine-learning-systems/)。</a:t>
+            </a:r>
+          </a:p>
+          <a:p xmlns:a="http://schemas.openxmlformats.org/drawingml/2006/main">
+            <a:r>
+              <a:t/>
+            </a:r>
+          </a:p>
+          <a:p xmlns:a="http://schemas.openxmlformats.org/drawingml/2006/main">
+            <a:r>
+              <a:t>本页数值、论文反例与运行 ID 属课程虚构教学示例，不是实际学生实验结果。六类是课程借用技术债思路的审计框架，不是 Sculley 原文中的固定六类。</a:t>
+            </a:r>
+          </a:p>
+          <a:p xmlns:a="http://schemas.openxmlformats.org/drawingml/2006/main">
+            <a:r>
+              <a:t/>
+            </a:r>
+          </a:p>
+          <a:p xmlns:a="http://schemas.openxmlformats.org/drawingml/2006/main">
+            <a:r>
+              <a:t>讲义 §四·2；Sculley et al. 2015（[reading-list.md](../../course/reading-list.md) 第 13 课核心阅读）。</a:t>
+            </a:r>
+          </a:p>
+          <a:p xmlns:a="http://schemas.openxmlformats.org/drawingml/2006/main">
+            <a:r>
+              <a:t/>
+            </a:r>
+          </a:p>
+          <a:p xmlns:a="http://schemas.openxmlformats.org/drawingml/2006/main">
+            <a:r>
               <a:t>[Sources]</a:t>
             </a:r>
           </a:p>
           <a:p xmlns:a="http://schemas.openxmlformats.org/drawingml/2006/main">
             <a:r>
-              <a:t>- /Users/bright/Projects/courses/graduate/lessons/lesson-13/slides.md</a:t>
-            </a:r>
-          </a:p>
-          <a:p xmlns:a="http://schemas.openxmlformats.org/drawingml/2006/main">
-            <a:r>
-              <a:t>- /Users/bright/Projects/courses/graduate/lessons/lesson-13/handout.md</a:t>
+              <a:t>- lessons/lesson-13/slides.md P13</a:t>
+            </a:r>
+          </a:p>
+          <a:p xmlns:a="http://schemas.openxmlformats.org/drawingml/2006/main">
+            <a:r>
+              <a:t>- lessons/lesson-13/handout.md §四·2 失败分类与根因（Sculley et al. 骨架）</a:t>
+            </a:r>
+          </a:p>
+          <a:p xmlns:a="http://schemas.openxmlformats.org/drawingml/2006/main">
+            <a:r>
+              <a:t>- lessons/lesson-13/teaching-plan.md</a:t>
+            </a:r>
+          </a:p>
+          <a:p xmlns:a="http://schemas.openxmlformats.org/drawingml/2006/main">
+            <a:r>
+              <a:t>- https://research.google/pubs/hidden-technical-debt-in-machine-learning-systems/</a:t>
             </a:r>
           </a:p>
           <a:p xmlns:a="http://schemas.openxmlformats.org/drawingml/2006/main">
@@ -882,7 +1312,7 @@
           <a:lstStyle xmlns:a="http://schemas.openxmlformats.org/drawingml/2006/main"/>
           <a:p xmlns:a="http://schemas.openxmlformats.org/drawingml/2006/main">
             <a:r>
-              <a:t>第 13 课工作流评价与结论边界。屏显按现行逐页母稿压缩为课堂可读对象，完整说明保留在讲义与教师备注。</a:t>
+              <a:t>运行 ID 连接失败日志与人工审核</a:t>
             </a:r>
           </a:p>
           <a:p xmlns:a="http://schemas.openxmlformats.org/drawingml/2006/main">
@@ -892,17 +1322,127 @@
           </a:p>
           <a:p xmlns:a="http://schemas.openxmlformats.org/drawingml/2006/main">
             <a:r>
+              <a:t>讲义对应：§四·3 失败日志与 §四·4 人工审核记录</a:t>
+            </a:r>
+          </a:p>
+          <a:p xmlns:a="http://schemas.openxmlformats.org/drawingml/2006/main">
+            <a:r>
+              <a:t/>
+            </a:r>
+          </a:p>
+          <a:p xmlns:a="http://schemas.openxmlformats.org/drawingml/2006/main">
+            <a:r>
+              <a:t>[Teaching]</a:t>
+            </a:r>
+          </a:p>
+          <a:p xmlns:a="http://schemas.openxmlformats.org/drawingml/2006/main">
+            <a:r>
+              <a:t>本页“根因”记录是虚构案例的待复测解释，补字段后的修订状态仍为待验证；不能据此把 A3 文档结构认定为已排除。</a:t>
+            </a:r>
+          </a:p>
+          <a:p xmlns:a="http://schemas.openxmlformats.org/drawingml/2006/main">
+            <a:r>
+              <a:t/>
+            </a:r>
+          </a:p>
+          <a:p xmlns:a="http://schemas.openxmlformats.org/drawingml/2006/main">
+            <a:r>
+              <a:t>普通技术失败进入修复与复盘，不自动成为红线；越权、擅改评价协议、编造、隐瞒或伪造记录才按学术规范红线处理。人工审核要留下可追溯记录；被拒绝的建议可进入失败审计，成为工作流的局限证据。</a:t>
+            </a:r>
+          </a:p>
+          <a:p xmlns:a="http://schemas.openxmlformats.org/drawingml/2006/main">
+            <a:r>
+              <a:t/>
+            </a:r>
+          </a:p>
+          <a:p xmlns:a="http://schemas.openxmlformats.org/drawingml/2006/main">
+            <a:r>
+              <a:t>[Student action]</a:t>
+            </a:r>
+          </a:p>
+          <a:p xmlns:a="http://schemas.openxmlformats.org/drawingml/2006/main">
+            <a:r>
+              <a:t>让学生为自己的工作流写一条失败日志（六字段）和一条人工审核记录（五字段）。</a:t>
+            </a:r>
+          </a:p>
+          <a:p xmlns:a="http://schemas.openxmlformats.org/drawingml/2006/main">
+            <a:r>
+              <a:t/>
+            </a:r>
+          </a:p>
+          <a:p xmlns:a="http://schemas.openxmlformats.org/drawingml/2006/main">
+            <a:r>
+              <a:t>[Timing]</a:t>
+            </a:r>
+          </a:p>
+          <a:p xmlns:a="http://schemas.openxmlformats.org/drawingml/2006/main">
+            <a:r>
+              <a:t>4 分钟。</a:t>
+            </a:r>
+          </a:p>
+          <a:p xmlns:a="http://schemas.openxmlformats.org/drawingml/2006/main">
+            <a:r>
+              <a:t/>
+            </a:r>
+          </a:p>
+          <a:p xmlns:a="http://schemas.openxmlformats.org/drawingml/2006/main">
+            <a:r>
+              <a:t>[Evidence boundary]</a:t>
+            </a:r>
+          </a:p>
+          <a:p xmlns:a="http://schemas.openxmlformats.org/drawingml/2006/main">
+            <a:r>
+              <a:t>直接来源：[正式来源](https://proceedings.mlr.press/v235/huang24y.html)。</a:t>
+            </a:r>
+          </a:p>
+          <a:p xmlns:a="http://schemas.openxmlformats.org/drawingml/2006/main">
+            <a:r>
+              <a:t/>
+            </a:r>
+          </a:p>
+          <a:p xmlns:a="http://schemas.openxmlformats.org/drawingml/2006/main">
+            <a:r>
+              <a:t>本页数值、论文反例与运行 ID 属课程虚构教学示例，不是实际学生实验结果。</a:t>
+            </a:r>
+          </a:p>
+          <a:p xmlns:a="http://schemas.openxmlformats.org/drawingml/2006/main">
+            <a:r>
+              <a:t/>
+            </a:r>
+          </a:p>
+          <a:p xmlns:a="http://schemas.openxmlformats.org/drawingml/2006/main">
+            <a:r>
+              <a:t>讲义 §四·3+§四·4；Huang et al. MLAgentBench（[reading-list.md](../../course/reading-list.md) 第 13 课课堂案例）；[assignments.md](../../course/assignments.md) Checkpoint 3 条件之七。</a:t>
+            </a:r>
+          </a:p>
+          <a:p xmlns:a="http://schemas.openxmlformats.org/drawingml/2006/main">
+            <a:r>
+              <a:t/>
+            </a:r>
+          </a:p>
+          <a:p xmlns:a="http://schemas.openxmlformats.org/drawingml/2006/main">
+            <a:r>
               <a:t>[Sources]</a:t>
             </a:r>
           </a:p>
           <a:p xmlns:a="http://schemas.openxmlformats.org/drawingml/2006/main">
             <a:r>
-              <a:t>- /Users/bright/Projects/courses/graduate/lessons/lesson-13/slides.md</a:t>
-            </a:r>
-          </a:p>
-          <a:p xmlns:a="http://schemas.openxmlformats.org/drawingml/2006/main">
-            <a:r>
-              <a:t>- /Users/bright/Projects/courses/graduate/lessons/lesson-13/handout.md</a:t>
+              <a:t>- lessons/lesson-13/slides.md P14</a:t>
+            </a:r>
+          </a:p>
+          <a:p xmlns:a="http://schemas.openxmlformats.org/drawingml/2006/main">
+            <a:r>
+              <a:t>- lessons/lesson-13/handout.md §四·3 失败日志与 §四·4 人工审核记录</a:t>
+            </a:r>
+          </a:p>
+          <a:p xmlns:a="http://schemas.openxmlformats.org/drawingml/2006/main">
+            <a:r>
+              <a:t>- lessons/lesson-13/teaching-plan.md</a:t>
+            </a:r>
+          </a:p>
+          <a:p xmlns:a="http://schemas.openxmlformats.org/drawingml/2006/main">
+            <a:r>
+              <a:t>- https://proceedings.mlr.press/v235/huang24y.html</a:t>
             </a:r>
           </a:p>
           <a:p xmlns:a="http://schemas.openxmlformats.org/drawingml/2006/main">
@@ -977,7 +1517,7 @@
           <a:lstStyle xmlns:a="http://schemas.openxmlformats.org/drawingml/2006/main"/>
           <a:p xmlns:a="http://schemas.openxmlformats.org/drawingml/2006/main">
             <a:r>
-              <a:t>第 13 课工作流评价与结论边界。屏显按现行逐页母稿压缩为课堂可读对象，完整说明保留在讲义与教师备注。</a:t>
+              <a:t>验证门 10 项检查当前项目版本</a:t>
             </a:r>
           </a:p>
           <a:p xmlns:a="http://schemas.openxmlformats.org/drawingml/2006/main">
@@ -987,17 +1527,92 @@
           </a:p>
           <a:p xmlns:a="http://schemas.openxmlformats.org/drawingml/2006/main">
             <a:r>
+              <a:t>讲义对应：§六·2 验证门 10 项条件自查清单</a:t>
+            </a:r>
+          </a:p>
+          <a:p xmlns:a="http://schemas.openxmlformats.org/drawingml/2006/main">
+            <a:r>
+              <a:t/>
+            </a:r>
+          </a:p>
+          <a:p xmlns:a="http://schemas.openxmlformats.org/drawingml/2006/main">
+            <a:r>
+              <a:t>[Teaching]</a:t>
+            </a:r>
+          </a:p>
+          <a:p xmlns:a="http://schemas.openxmlformats.org/drawingml/2006/main">
+            <a:r>
+              <a:t>本页只定位验证门字段，不逐条复述。第 1–4 项承接第 12 课，本课课堂先推进第 5、6、8、9 项所需的对照、失败/局限与判断修订，其余课后补全。验证门检查当前项目版本，不重新制作材料。</a:t>
+            </a:r>
+          </a:p>
+          <a:p xmlns:a="http://schemas.openxmlformats.org/drawingml/2006/main">
+            <a:r>
+              <a:t/>
+            </a:r>
+          </a:p>
+          <a:p xmlns:a="http://schemas.openxmlformats.org/drawingml/2006/main">
+            <a:r>
+              <a:t>[Student action]</a:t>
+            </a:r>
+          </a:p>
+          <a:p xmlns:a="http://schemas.openxmlformats.org/drawingml/2006/main">
+            <a:r>
+              <a:t>让学生对照清单，标注当前项目哪些已满足、哪些待补全。</a:t>
+            </a:r>
+          </a:p>
+          <a:p xmlns:a="http://schemas.openxmlformats.org/drawingml/2006/main">
+            <a:r>
+              <a:t/>
+            </a:r>
+          </a:p>
+          <a:p xmlns:a="http://schemas.openxmlformats.org/drawingml/2006/main">
+            <a:r>
+              <a:t>[Timing]</a:t>
+            </a:r>
+          </a:p>
+          <a:p xmlns:a="http://schemas.openxmlformats.org/drawingml/2006/main">
+            <a:r>
+              <a:t>2 分钟。</a:t>
+            </a:r>
+          </a:p>
+          <a:p xmlns:a="http://schemas.openxmlformats.org/drawingml/2006/main">
+            <a:r>
+              <a:t/>
+            </a:r>
+          </a:p>
+          <a:p xmlns:a="http://schemas.openxmlformats.org/drawingml/2006/main">
+            <a:r>
+              <a:t>[Evidence boundary]</a:t>
+            </a:r>
+          </a:p>
+          <a:p xmlns:a="http://schemas.openxmlformats.org/drawingml/2006/main">
+            <a:r>
+              <a:t>[assignments.md](../../course/assignments.md) Checkpoint 3 验证门条件（权威来源）；[project-template.md](../../course/project-template.md) §6、§8、§10 字段模板。</a:t>
+            </a:r>
+          </a:p>
+          <a:p xmlns:a="http://schemas.openxmlformats.org/drawingml/2006/main">
+            <a:r>
+              <a:t/>
+            </a:r>
+          </a:p>
+          <a:p xmlns:a="http://schemas.openxmlformats.org/drawingml/2006/main">
+            <a:r>
               <a:t>[Sources]</a:t>
             </a:r>
           </a:p>
           <a:p xmlns:a="http://schemas.openxmlformats.org/drawingml/2006/main">
             <a:r>
-              <a:t>- /Users/bright/Projects/courses/graduate/lessons/lesson-13/slides.md</a:t>
-            </a:r>
-          </a:p>
-          <a:p xmlns:a="http://schemas.openxmlformats.org/drawingml/2006/main">
-            <a:r>
-              <a:t>- /Users/bright/Projects/courses/graduate/lessons/lesson-13/handout.md</a:t>
+              <a:t>- lessons/lesson-13/slides.md P15</a:t>
+            </a:r>
+          </a:p>
+          <a:p xmlns:a="http://schemas.openxmlformats.org/drawingml/2006/main">
+            <a:r>
+              <a:t>- lessons/lesson-13/handout.md §六·2 验证门 10 项条件自查清单</a:t>
+            </a:r>
+          </a:p>
+          <a:p xmlns:a="http://schemas.openxmlformats.org/drawingml/2006/main">
+            <a:r>
+              <a:t>- lessons/lesson-13/teaching-plan.md</a:t>
             </a:r>
           </a:p>
           <a:p xmlns:a="http://schemas.openxmlformats.org/drawingml/2006/main">
@@ -1072,7 +1687,7 @@
           <a:lstStyle xmlns:a="http://schemas.openxmlformats.org/drawingml/2006/main"/>
           <a:p xmlns:a="http://schemas.openxmlformats.org/drawingml/2006/main">
             <a:r>
-              <a:t>第 13 课工作流评价与结论边界。屏显按现行逐页母稿压缩为课堂可读对象，完整说明保留在讲义与教师备注。</a:t>
+              <a:t>工作流原型收口为三件评价工件</a:t>
             </a:r>
           </a:p>
           <a:p xmlns:a="http://schemas.openxmlformats.org/drawingml/2006/main">
@@ -1082,17 +1697,102 @@
           </a:p>
           <a:p xmlns:a="http://schemas.openxmlformats.org/drawingml/2006/main">
             <a:r>
+              <a:t>讲义对应：§五 贯穿案例第一至八步</a:t>
+            </a:r>
+          </a:p>
+          <a:p xmlns:a="http://schemas.openxmlformats.org/drawingml/2006/main">
+            <a:r>
+              <a:t/>
+            </a:r>
+          </a:p>
+          <a:p xmlns:a="http://schemas.openxmlformats.org/drawingml/2006/main">
+            <a:r>
+              <a:t>[Teaching]</a:t>
+            </a:r>
+          </a:p>
+          <a:p xmlns:a="http://schemas.openxmlformats.org/drawingml/2006/main">
+            <a:r>
+              <a:t>贯穿案例延续第 10–12 课同一工作流。教师重点演示如何从课前已有结果形成对照、局限和判断修订；0.18/0.31 与图表论文反例均为虚构教学示例。学生不在课堂从零运行完整研究。</a:t>
+            </a:r>
+          </a:p>
+          <a:p xmlns:a="http://schemas.openxmlformats.org/drawingml/2006/main">
+            <a:r>
+              <a:t/>
+            </a:r>
+          </a:p>
+          <a:p xmlns:a="http://schemas.openxmlformats.org/drawingml/2006/main">
+            <a:r>
+              <a:t>[Student action]</a:t>
+            </a:r>
+          </a:p>
+          <a:p xmlns:a="http://schemas.openxmlformats.org/drawingml/2006/main">
+            <a:r>
+              <a:t>让学生对照九步，标注自己已跑通哪几步、还缺哪几步。</a:t>
+            </a:r>
+          </a:p>
+          <a:p xmlns:a="http://schemas.openxmlformats.org/drawingml/2006/main">
+            <a:r>
+              <a:t/>
+            </a:r>
+          </a:p>
+          <a:p xmlns:a="http://schemas.openxmlformats.org/drawingml/2006/main">
+            <a:r>
+              <a:t>[Timing]</a:t>
+            </a:r>
+          </a:p>
+          <a:p xmlns:a="http://schemas.openxmlformats.org/drawingml/2006/main">
+            <a:r>
+              <a:t>3 分钟。</a:t>
+            </a:r>
+          </a:p>
+          <a:p xmlns:a="http://schemas.openxmlformats.org/drawingml/2006/main">
+            <a:r>
+              <a:t/>
+            </a:r>
+          </a:p>
+          <a:p xmlns:a="http://schemas.openxmlformats.org/drawingml/2006/main">
+            <a:r>
+              <a:t>[Evidence boundary]</a:t>
+            </a:r>
+          </a:p>
+          <a:p xmlns:a="http://schemas.openxmlformats.org/drawingml/2006/main">
+            <a:r>
+              <a:t>本页数值、论文反例与运行 ID 属课程虚构教学示例，不是实际学生实验结果。</a:t>
+            </a:r>
+          </a:p>
+          <a:p xmlns:a="http://schemas.openxmlformats.org/drawingml/2006/main">
+            <a:r>
+              <a:t/>
+            </a:r>
+          </a:p>
+          <a:p xmlns:a="http://schemas.openxmlformats.org/drawingml/2006/main">
+            <a:r>
+              <a:t>讲义 §五 贯穿案例；第 12 课工作流原型；第 9 课实验规格与 baseline。</a:t>
+            </a:r>
+          </a:p>
+          <a:p xmlns:a="http://schemas.openxmlformats.org/drawingml/2006/main">
+            <a:r>
+              <a:t/>
+            </a:r>
+          </a:p>
+          <a:p xmlns:a="http://schemas.openxmlformats.org/drawingml/2006/main">
+            <a:r>
               <a:t>[Sources]</a:t>
             </a:r>
           </a:p>
           <a:p xmlns:a="http://schemas.openxmlformats.org/drawingml/2006/main">
             <a:r>
-              <a:t>- /Users/bright/Projects/courses/graduate/lessons/lesson-13/slides.md</a:t>
-            </a:r>
-          </a:p>
-          <a:p xmlns:a="http://schemas.openxmlformats.org/drawingml/2006/main">
-            <a:r>
-              <a:t>- /Users/bright/Projects/courses/graduate/lessons/lesson-13/handout.md</a:t>
+              <a:t>- lessons/lesson-13/slides.md P16</a:t>
+            </a:r>
+          </a:p>
+          <a:p xmlns:a="http://schemas.openxmlformats.org/drawingml/2006/main">
+            <a:r>
+              <a:t>- lessons/lesson-13/handout.md §五 贯穿案例第一至八步</a:t>
+            </a:r>
+          </a:p>
+          <a:p xmlns:a="http://schemas.openxmlformats.org/drawingml/2006/main">
+            <a:r>
+              <a:t>- lessons/lesson-13/teaching-plan.md</a:t>
             </a:r>
           </a:p>
           <a:p xmlns:a="http://schemas.openxmlformats.org/drawingml/2006/main">
@@ -1167,7 +1867,7 @@
           <a:lstStyle xmlns:a="http://schemas.openxmlformats.org/drawingml/2006/main"/>
           <a:p xmlns:a="http://schemas.openxmlformats.org/drawingml/2006/main">
             <a:r>
-              <a:t>第 13 课工作流评价与结论边界。屏显按现行逐页母稿压缩为课堂可读对象，完整说明保留在讲义与教师备注。</a:t>
+              <a:t>实践停留页：完成三件最低产出</a:t>
             </a:r>
           </a:p>
           <a:p xmlns:a="http://schemas.openxmlformats.org/drawingml/2006/main">
@@ -1177,17 +1877,92 @@
           </a:p>
           <a:p xmlns:a="http://schemas.openxmlformats.org/drawingml/2006/main">
             <a:r>
+              <a:t>讲义对应：两段个人实践，中间教师点评 | 课堂最低产出</a:t>
+            </a:r>
+          </a:p>
+          <a:p xmlns:a="http://schemas.openxmlformats.org/drawingml/2006/main">
+            <a:r>
+              <a:t/>
+            </a:r>
+          </a:p>
+          <a:p xmlns:a="http://schemas.openxmlformats.org/drawingml/2006/main">
+            <a:r>
+              <a:t>[Teaching]</a:t>
+            </a:r>
+          </a:p>
+          <a:p xmlns:a="http://schemas.openxmlformats.org/drawingml/2006/main">
+            <a:r>
+              <a:t>第一段先完成对照表与结果状态；教师中点点评统一纠正不公平对照、字段填满率和机制过推。第二段补一项失败/局限并修订一条判断。不能读取个人结果者使用教师预置同口径虚构数据包。</a:t>
+            </a:r>
+          </a:p>
+          <a:p xmlns:a="http://schemas.openxmlformats.org/drawingml/2006/main">
+            <a:r>
+              <a:t/>
+            </a:r>
+          </a:p>
+          <a:p xmlns:a="http://schemas.openxmlformats.org/drawingml/2006/main">
+            <a:r>
+              <a:t>[Student action]</a:t>
+            </a:r>
+          </a:p>
+          <a:p xmlns:a="http://schemas.openxmlformats.org/drawingml/2006/main">
+            <a:r>
+              <a:t>个人实践第一段后暂停，听取教师中点点评，再继续第二段。</a:t>
+            </a:r>
+          </a:p>
+          <a:p xmlns:a="http://schemas.openxmlformats.org/drawingml/2006/main">
+            <a:r>
+              <a:t/>
+            </a:r>
+          </a:p>
+          <a:p xmlns:a="http://schemas.openxmlformats.org/drawingml/2006/main">
+            <a:r>
+              <a:t>[Timing]</a:t>
+            </a:r>
+          </a:p>
+          <a:p xmlns:a="http://schemas.openxmlformats.org/drawingml/2006/main">
+            <a:r>
+              <a:t>30 分钟：个人实践 12 分钟 + 教师中点点评 5 分钟 + 个人实践 13 分钟。</a:t>
+            </a:r>
+          </a:p>
+          <a:p xmlns:a="http://schemas.openxmlformats.org/drawingml/2006/main">
+            <a:r>
+              <a:t/>
+            </a:r>
+          </a:p>
+          <a:p xmlns:a="http://schemas.openxmlformats.org/drawingml/2006/main">
+            <a:r>
+              <a:t>[Evidence boundary]</a:t>
+            </a:r>
+          </a:p>
+          <a:p xmlns:a="http://schemas.openxmlformats.org/drawingml/2006/main">
+            <a:r>
+              <a:t>讲义 §六·3；[project-template.md](../../course/project-template.md)；[assignments.md](../../course/assignments.md) Checkpoint 3。</a:t>
+            </a:r>
+          </a:p>
+          <a:p xmlns:a="http://schemas.openxmlformats.org/drawingml/2006/main">
+            <a:r>
+              <a:t/>
+            </a:r>
+          </a:p>
+          <a:p xmlns:a="http://schemas.openxmlformats.org/drawingml/2006/main">
+            <a:r>
               <a:t>[Sources]</a:t>
             </a:r>
           </a:p>
           <a:p xmlns:a="http://schemas.openxmlformats.org/drawingml/2006/main">
             <a:r>
-              <a:t>- /Users/bright/Projects/courses/graduate/lessons/lesson-13/slides.md</a:t>
-            </a:r>
-          </a:p>
-          <a:p xmlns:a="http://schemas.openxmlformats.org/drawingml/2006/main">
-            <a:r>
-              <a:t>- /Users/bright/Projects/courses/graduate/lessons/lesson-13/handout.md</a:t>
+              <a:t>- lessons/lesson-13/slides.md P17</a:t>
+            </a:r>
+          </a:p>
+          <a:p xmlns:a="http://schemas.openxmlformats.org/drawingml/2006/main">
+            <a:r>
+              <a:t>- lessons/lesson-13/handout.md 两段个人实践，中间教师点评 | 课堂最低产出</a:t>
+            </a:r>
+          </a:p>
+          <a:p xmlns:a="http://schemas.openxmlformats.org/drawingml/2006/main">
+            <a:r>
+              <a:t>- lessons/lesson-13/teaching-plan.md</a:t>
             </a:r>
           </a:p>
           <a:p xmlns:a="http://schemas.openxmlformats.org/drawingml/2006/main">
@@ -1262,7 +2037,7 @@
           <a:lstStyle xmlns:a="http://schemas.openxmlformats.org/drawingml/2006/main"/>
           <a:p xmlns:a="http://schemas.openxmlformats.org/drawingml/2006/main">
             <a:r>
-              <a:t>第 13 课工作流评价与结论边界。屏显按现行逐页母稿压缩为课堂可读对象，完整说明保留在讲义与教师备注。</a:t>
+              <a:t>同伴只问证据是否足够</a:t>
             </a:r>
           </a:p>
           <a:p xmlns:a="http://schemas.openxmlformats.org/drawingml/2006/main">
@@ -1272,17 +2047,92 @@
           </a:p>
           <a:p xmlns:a="http://schemas.openxmlformats.org/drawingml/2006/main">
             <a:r>
+              <a:t>讲义对应：同伴质询与作者处理 | 互查记录</a:t>
+            </a:r>
+          </a:p>
+          <a:p xmlns:a="http://schemas.openxmlformats.org/drawingml/2006/main">
+            <a:r>
+              <a:t/>
+            </a:r>
+          </a:p>
+          <a:p xmlns:a="http://schemas.openxmlformats.org/drawingml/2006/main">
+            <a:r>
+              <a:t>[Teaching]</a:t>
+            </a:r>
+          </a:p>
+          <a:p xmlns:a="http://schemas.openxmlformats.org/drawingml/2006/main">
+            <a:r>
+              <a:t>每位作者简述对照、失败/局限和判断修订；同伴只问证据是否足以支持该结果状态。作者记录采纳、澄清、补证、保留异议或暂缓及真实理由，不形成共同提交。</a:t>
+            </a:r>
+          </a:p>
+          <a:p xmlns:a="http://schemas.openxmlformats.org/drawingml/2006/main">
+            <a:r>
+              <a:t/>
+            </a:r>
+          </a:p>
+          <a:p xmlns:a="http://schemas.openxmlformats.org/drawingml/2006/main">
+            <a:r>
+              <a:t>[Student action]</a:t>
+            </a:r>
+          </a:p>
+          <a:p xmlns:a="http://schemas.openxmlformats.org/drawingml/2006/main">
+            <a:r>
+              <a:t>同伴互查；人数为奇数时组成三人组。</a:t>
+            </a:r>
+          </a:p>
+          <a:p xmlns:a="http://schemas.openxmlformats.org/drawingml/2006/main">
+            <a:r>
+              <a:t/>
+            </a:r>
+          </a:p>
+          <a:p xmlns:a="http://schemas.openxmlformats.org/drawingml/2006/main">
+            <a:r>
+              <a:t>[Timing]</a:t>
+            </a:r>
+          </a:p>
+          <a:p xmlns:a="http://schemas.openxmlformats.org/drawingml/2006/main">
+            <a:r>
+              <a:t>15 分钟。</a:t>
+            </a:r>
+          </a:p>
+          <a:p xmlns:a="http://schemas.openxmlformats.org/drawingml/2006/main">
+            <a:r>
+              <a:t/>
+            </a:r>
+          </a:p>
+          <a:p xmlns:a="http://schemas.openxmlformats.org/drawingml/2006/main">
+            <a:r>
+              <a:t>[Evidence boundary]</a:t>
+            </a:r>
+          </a:p>
+          <a:p xmlns:a="http://schemas.openxmlformats.org/drawingml/2006/main">
+            <a:r>
+              <a:t>同伴反馈为形成性活动，不单独计分，不共同提交（[assignments.md](../../course/assignments.md)）。</a:t>
+            </a:r>
+          </a:p>
+          <a:p xmlns:a="http://schemas.openxmlformats.org/drawingml/2006/main">
+            <a:r>
+              <a:t/>
+            </a:r>
+          </a:p>
+          <a:p xmlns:a="http://schemas.openxmlformats.org/drawingml/2006/main">
+            <a:r>
               <a:t>[Sources]</a:t>
             </a:r>
           </a:p>
           <a:p xmlns:a="http://schemas.openxmlformats.org/drawingml/2006/main">
             <a:r>
-              <a:t>- /Users/bright/Projects/courses/graduate/lessons/lesson-13/slides.md</a:t>
-            </a:r>
-          </a:p>
-          <a:p xmlns:a="http://schemas.openxmlformats.org/drawingml/2006/main">
-            <a:r>
-              <a:t>- /Users/bright/Projects/courses/graduate/lessons/lesson-13/handout.md</a:t>
+              <a:t>- lessons/lesson-13/slides.md P18</a:t>
+            </a:r>
+          </a:p>
+          <a:p xmlns:a="http://schemas.openxmlformats.org/drawingml/2006/main">
+            <a:r>
+              <a:t>- lessons/lesson-13/handout.md 同伴质询与作者处理 | 互查记录</a:t>
+            </a:r>
+          </a:p>
+          <a:p xmlns:a="http://schemas.openxmlformats.org/drawingml/2006/main">
+            <a:r>
+              <a:t>- lessons/lesson-13/teaching-plan.md</a:t>
             </a:r>
           </a:p>
           <a:p xmlns:a="http://schemas.openxmlformats.org/drawingml/2006/main">
@@ -1357,7 +2207,7 @@
           <a:lstStyle xmlns:a="http://schemas.openxmlformats.org/drawingml/2006/main"/>
           <a:p xmlns:a="http://schemas.openxmlformats.org/drawingml/2006/main">
             <a:r>
-              <a:t>第 13 课工作流评价与结论边界。屏显按现行逐页母稿压缩为课堂可读对象，完整说明保留在讲义与教师备注。</a:t>
+              <a:t>本讲知识点总结</a:t>
             </a:r>
           </a:p>
           <a:p xmlns:a="http://schemas.openxmlformats.org/drawingml/2006/main">
@@ -1367,17 +2217,92 @@
           </a:p>
           <a:p xmlns:a="http://schemas.openxmlformats.org/drawingml/2006/main">
             <a:r>
+              <a:t>讲义对应：§二-§六 本讲核心链路与边界总结</a:t>
+            </a:r>
+          </a:p>
+          <a:p xmlns:a="http://schemas.openxmlformats.org/drawingml/2006/main">
+            <a:r>
+              <a:t/>
+            </a:r>
+          </a:p>
+          <a:p xmlns:a="http://schemas.openxmlformats.org/drawingml/2006/main">
+            <a:r>
+              <a:t>[Teaching]</a:t>
+            </a:r>
+          </a:p>
+          <a:p xmlns:a="http://schemas.openxmlformats.org/drawingml/2006/main">
+            <a:r>
+              <a:t>回收评价、结果映射、失败复盘与验证门的关系。本页不新增任务。</a:t>
+            </a:r>
+          </a:p>
+          <a:p xmlns:a="http://schemas.openxmlformats.org/drawingml/2006/main">
+            <a:r>
+              <a:t/>
+            </a:r>
+          </a:p>
+          <a:p xmlns:a="http://schemas.openxmlformats.org/drawingml/2006/main">
+            <a:r>
+              <a:t>[Student action]</a:t>
+            </a:r>
+          </a:p>
+          <a:p xmlns:a="http://schemas.openxmlformats.org/drawingml/2006/main">
+            <a:r>
+              <a:t>学生指出自己验证门材料中最需要补齐的一项。</a:t>
+            </a:r>
+          </a:p>
+          <a:p xmlns:a="http://schemas.openxmlformats.org/drawingml/2006/main">
+            <a:r>
+              <a:t/>
+            </a:r>
+          </a:p>
+          <a:p xmlns:a="http://schemas.openxmlformats.org/drawingml/2006/main">
+            <a:r>
+              <a:t>[Timing]</a:t>
+            </a:r>
+          </a:p>
+          <a:p xmlns:a="http://schemas.openxmlformats.org/drawingml/2006/main">
+            <a:r>
+              <a:t>2 分钟。</a:t>
+            </a:r>
+          </a:p>
+          <a:p xmlns:a="http://schemas.openxmlformats.org/drawingml/2006/main">
+            <a:r>
+              <a:t/>
+            </a:r>
+          </a:p>
+          <a:p xmlns:a="http://schemas.openxmlformats.org/drawingml/2006/main">
+            <a:r>
+              <a:t>[Evidence boundary]</a:t>
+            </a:r>
+          </a:p>
+          <a:p xmlns:a="http://schemas.openxmlformats.org/drawingml/2006/main">
+            <a:r>
+              <a:t>[handout.md](./handout.md) §二-§六；[assignments.md](../../course/assignments.md) Checkpoint 3。</a:t>
+            </a:r>
+          </a:p>
+          <a:p xmlns:a="http://schemas.openxmlformats.org/drawingml/2006/main">
+            <a:r>
+              <a:t/>
+            </a:r>
+          </a:p>
+          <a:p xmlns:a="http://schemas.openxmlformats.org/drawingml/2006/main">
+            <a:r>
               <a:t>[Sources]</a:t>
             </a:r>
           </a:p>
           <a:p xmlns:a="http://schemas.openxmlformats.org/drawingml/2006/main">
             <a:r>
-              <a:t>- /Users/bright/Projects/courses/graduate/lessons/lesson-13/slides.md</a:t>
-            </a:r>
-          </a:p>
-          <a:p xmlns:a="http://schemas.openxmlformats.org/drawingml/2006/main">
-            <a:r>
-              <a:t>- /Users/bright/Projects/courses/graduate/lessons/lesson-13/handout.md</a:t>
+              <a:t>- lessons/lesson-13/slides.md P19</a:t>
+            </a:r>
+          </a:p>
+          <a:p xmlns:a="http://schemas.openxmlformats.org/drawingml/2006/main">
+            <a:r>
+              <a:t>- lessons/lesson-13/handout.md §二-§六 本讲核心链路与边界总结</a:t>
+            </a:r>
+          </a:p>
+          <a:p xmlns:a="http://schemas.openxmlformats.org/drawingml/2006/main">
+            <a:r>
+              <a:t>- lessons/lesson-13/teaching-plan.md</a:t>
             </a:r>
           </a:p>
           <a:p xmlns:a="http://schemas.openxmlformats.org/drawingml/2006/main">
@@ -1452,7 +2377,7 @@
           <a:lstStyle xmlns:a="http://schemas.openxmlformats.org/drawingml/2006/main"/>
           <a:p xmlns:a="http://schemas.openxmlformats.org/drawingml/2006/main">
             <a:r>
-              <a:t>第 13 课工作流评价与结论边界。屏显按现行逐页母稿压缩为课堂可读对象，完整说明保留在讲义与教师备注。</a:t>
+              <a:t>工作流原型还缺评价闭环</a:t>
             </a:r>
           </a:p>
           <a:p xmlns:a="http://schemas.openxmlformats.org/drawingml/2006/main">
@@ -1462,17 +2387,92 @@
           </a:p>
           <a:p xmlns:a="http://schemas.openxmlformats.org/drawingml/2006/main">
             <a:r>
+              <a:t>讲义对应：§一 在研究链路中的位置；§导读（承接第 10-12 课）</a:t>
+            </a:r>
+          </a:p>
+          <a:p xmlns:a="http://schemas.openxmlformats.org/drawingml/2006/main">
+            <a:r>
+              <a:t/>
+            </a:r>
+          </a:p>
+          <a:p xmlns:a="http://schemas.openxmlformats.org/drawingml/2006/main">
+            <a:r>
+              <a:t>[Teaching]</a:t>
+            </a:r>
+          </a:p>
+          <a:p xmlns:a="http://schemas.openxmlformats.org/drawingml/2006/main">
+            <a:r>
+              <a:t>回扣第 10-12 课：任务契约、执行循环和工作流原型让"做什么"和"怎么做"可见，但没有回答"是否改善了目标科研动作""结果支持还是反驳假设""失败怎么处理"。本课进入阶段七成案+评价，把原型变成验证门可检查材料。</a:t>
+            </a:r>
+          </a:p>
+          <a:p xmlns:a="http://schemas.openxmlformats.org/drawingml/2006/main">
+            <a:r>
+              <a:t/>
+            </a:r>
+          </a:p>
+          <a:p xmlns:a="http://schemas.openxmlformats.org/drawingml/2006/main">
+            <a:r>
+              <a:t>[Student action]</a:t>
+            </a:r>
+          </a:p>
+          <a:p xmlns:a="http://schemas.openxmlformats.org/drawingml/2006/main">
+            <a:r>
+              <a:t>快问：你第 12 课的工作流原型跑过几次？有没有 baseline 对比？只听回答，不评价。</a:t>
+            </a:r>
+          </a:p>
+          <a:p xmlns:a="http://schemas.openxmlformats.org/drawingml/2006/main">
+            <a:r>
+              <a:t/>
+            </a:r>
+          </a:p>
+          <a:p xmlns:a="http://schemas.openxmlformats.org/drawingml/2006/main">
+            <a:r>
+              <a:t>[Timing]</a:t>
+            </a:r>
+          </a:p>
+          <a:p xmlns:a="http://schemas.openxmlformats.org/drawingml/2006/main">
+            <a:r>
+              <a:t>3 分钟。</a:t>
+            </a:r>
+          </a:p>
+          <a:p xmlns:a="http://schemas.openxmlformats.org/drawingml/2006/main">
+            <a:r>
+              <a:t/>
+            </a:r>
+          </a:p>
+          <a:p xmlns:a="http://schemas.openxmlformats.org/drawingml/2006/main">
+            <a:r>
+              <a:t>[Evidence boundary]</a:t>
+            </a:r>
+          </a:p>
+          <a:p xmlns:a="http://schemas.openxmlformats.org/drawingml/2006/main">
+            <a:r>
+              <a:t>回扣第 10-12 课讲义；[AGENTS.md](../../AGENTS.md) 证据标准。</a:t>
+            </a:r>
+          </a:p>
+          <a:p xmlns:a="http://schemas.openxmlformats.org/drawingml/2006/main">
+            <a:r>
+              <a:t/>
+            </a:r>
+          </a:p>
+          <a:p xmlns:a="http://schemas.openxmlformats.org/drawingml/2006/main">
+            <a:r>
               <a:t>[Sources]</a:t>
             </a:r>
           </a:p>
           <a:p xmlns:a="http://schemas.openxmlformats.org/drawingml/2006/main">
             <a:r>
-              <a:t>- /Users/bright/Projects/courses/graduate/lessons/lesson-13/slides.md</a:t>
-            </a:r>
-          </a:p>
-          <a:p xmlns:a="http://schemas.openxmlformats.org/drawingml/2006/main">
-            <a:r>
-              <a:t>- /Users/bright/Projects/courses/graduate/lessons/lesson-13/handout.md</a:t>
+              <a:t>- lessons/lesson-13/slides.md P02</a:t>
+            </a:r>
+          </a:p>
+          <a:p xmlns:a="http://schemas.openxmlformats.org/drawingml/2006/main">
+            <a:r>
+              <a:t>- lessons/lesson-13/handout.md §一 在研究链路中的位置；§导读（承接第 10-12 课）</a:t>
+            </a:r>
+          </a:p>
+          <a:p xmlns:a="http://schemas.openxmlformats.org/drawingml/2006/main">
+            <a:r>
+              <a:t>- lessons/lesson-13/teaching-plan.md</a:t>
             </a:r>
           </a:p>
           <a:p xmlns:a="http://schemas.openxmlformats.org/drawingml/2006/main">
@@ -1547,7 +2547,7 @@
           <a:lstStyle xmlns:a="http://schemas.openxmlformats.org/drawingml/2006/main"/>
           <a:p xmlns:a="http://schemas.openxmlformats.org/drawingml/2006/main">
             <a:r>
-              <a:t>第 13 课工作流评价与结论边界。屏显按现行逐页母稿压缩为课堂可读对象，完整说明保留在讲义与教师备注。</a:t>
+              <a:t>评价材料直接进入第 14 课写作</a:t>
             </a:r>
           </a:p>
           <a:p xmlns:a="http://schemas.openxmlformats.org/drawingml/2006/main">
@@ -1557,17 +2557,112 @@
           </a:p>
           <a:p xmlns:a="http://schemas.openxmlformats.org/drawingml/2006/main">
             <a:r>
+              <a:t>讲义对应：§六·1 提交方式；§六·4 未通过时；第 14 课预告</a:t>
+            </a:r>
+          </a:p>
+          <a:p xmlns:a="http://schemas.openxmlformats.org/drawingml/2006/main">
+            <a:r>
+              <a:t/>
+            </a:r>
+          </a:p>
+          <a:p xmlns:a="http://schemas.openxmlformats.org/drawingml/2006/main">
+            <a:r>
+              <a:t>[Teaching]</a:t>
+            </a:r>
+          </a:p>
+          <a:p xmlns:a="http://schemas.openxmlformats.org/drawingml/2006/main">
+            <a:r>
+              <a:t>回扣课堂最低产出：一张对照、一项失败/局限和一条判断修订。课后补齐人工审核、证据充分性、威胁有效性、伦理说明和 10 项自查后提交验证门材料包。第 14 课直接使用对照、判断修订与局限段落，不重新组织一套结果。</a:t>
+            </a:r>
+          </a:p>
+          <a:p xmlns:a="http://schemas.openxmlformats.org/drawingml/2006/main">
+            <a:r>
+              <a:t/>
+            </a:r>
+          </a:p>
+          <a:p xmlns:a="http://schemas.openxmlformats.org/drawingml/2006/main">
+            <a:r>
+              <a:t>[Student action]</a:t>
+            </a:r>
+          </a:p>
+          <a:p xmlns:a="http://schemas.openxmlformats.org/drawingml/2006/main">
+            <a:r>
+              <a:t>学生提交退出卡或保存在个人项目。教师收集共性问题，用于第 14 课前调整。</a:t>
+            </a:r>
+          </a:p>
+          <a:p xmlns:a="http://schemas.openxmlformats.org/drawingml/2006/main">
+            <a:r>
+              <a:t/>
+            </a:r>
+          </a:p>
+          <a:p xmlns:a="http://schemas.openxmlformats.org/drawingml/2006/main">
+            <a:r>
+              <a:t>[Timing]</a:t>
+            </a:r>
+          </a:p>
+          <a:p xmlns:a="http://schemas.openxmlformats.org/drawingml/2006/main">
+            <a:r>
+              <a:t>3 分钟。</a:t>
+            </a:r>
+          </a:p>
+          <a:p xmlns:a="http://schemas.openxmlformats.org/drawingml/2006/main">
+            <a:r>
+              <a:t/>
+            </a:r>
+          </a:p>
+          <a:p xmlns:a="http://schemas.openxmlformats.org/drawingml/2006/main">
+            <a:r>
+              <a:t>[Evidence boundary]</a:t>
+            </a:r>
+          </a:p>
+          <a:p xmlns:a="http://schemas.openxmlformats.org/drawingml/2006/main">
+            <a:r>
+              <a:t>- Sculley, D. et al. *NeurIPS 2015*, 2503-2511. [Google Research 正式页面](https://research.google/pubs/hidden-technical-debt-in-machine-learning-systems/)。</a:t>
+            </a:r>
+          </a:p>
+          <a:p xmlns:a="http://schemas.openxmlformats.org/drawingml/2006/main">
+            <a:r>
+              <a:t>- Bouthillier, X. et al. *MLSys* 3 (2021). [MLSys 正式页面](https://proceedings.mlsys.org/paper_files/paper/2021/hash/0184b0cd3cfb185989f858a1d9f5c1eb-Abstract.html)。</a:t>
+            </a:r>
+          </a:p>
+          <a:p xmlns:a="http://schemas.openxmlformats.org/drawingml/2006/main">
+            <a:r>
+              <a:t>- Breck, E. et al. *IEEE Big Data 2017*. [Google Research 正式页面](https://research.google/pubs/the-ml-test-score-a-rubric-for-ml-production-readiness-and-technical-debt-reduction/)。</a:t>
+            </a:r>
+          </a:p>
+          <a:p xmlns:a="http://schemas.openxmlformats.org/drawingml/2006/main">
+            <a:r>
+              <a:t>- 阅读规则见 [reading-list.md](../../course/reading-list.md)。</a:t>
+            </a:r>
+          </a:p>
+          <a:p xmlns:a="http://schemas.openxmlformats.org/drawingml/2006/main">
+            <a:r>
+              <a:t>- 验证门条件见 [assignments.md](../../course/assignments.md) Checkpoint 3。</a:t>
+            </a:r>
+          </a:p>
+          <a:p xmlns:a="http://schemas.openxmlformats.org/drawingml/2006/main">
+            <a:r>
+              <a:t/>
+            </a:r>
+          </a:p>
+          <a:p xmlns:a="http://schemas.openxmlformats.org/drawingml/2006/main">
+            <a:r>
               <a:t>[Sources]</a:t>
             </a:r>
           </a:p>
           <a:p xmlns:a="http://schemas.openxmlformats.org/drawingml/2006/main">
             <a:r>
-              <a:t>- /Users/bright/Projects/courses/graduate/lessons/lesson-13/slides.md</a:t>
-            </a:r>
-          </a:p>
-          <a:p xmlns:a="http://schemas.openxmlformats.org/drawingml/2006/main">
-            <a:r>
-              <a:t>- /Users/bright/Projects/courses/graduate/lessons/lesson-13/handout.md</a:t>
+              <a:t>- lessons/lesson-13/slides.md P20</a:t>
+            </a:r>
+          </a:p>
+          <a:p xmlns:a="http://schemas.openxmlformats.org/drawingml/2006/main">
+            <a:r>
+              <a:t>- lessons/lesson-13/handout.md §六·1 提交方式；§六·4 未通过时；第 14 课预告</a:t>
+            </a:r>
+          </a:p>
+          <a:p xmlns:a="http://schemas.openxmlformats.org/drawingml/2006/main">
+            <a:r>
+              <a:t>- lessons/lesson-13/teaching-plan.md</a:t>
             </a:r>
           </a:p>
           <a:p xmlns:a="http://schemas.openxmlformats.org/drawingml/2006/main">
@@ -1642,7 +2737,7 @@
           <a:lstStyle xmlns:a="http://schemas.openxmlformats.org/drawingml/2006/main"/>
           <a:p xmlns:a="http://schemas.openxmlformats.org/drawingml/2006/main">
             <a:r>
-              <a:t>第 13 课工作流评价与结论边界。屏显按现行逐页母稿压缩为课堂可读对象，完整说明保留在讲义与教师备注。</a:t>
+              <a:t>评价报告先完成三个可检查字段</a:t>
             </a:r>
           </a:p>
           <a:p xmlns:a="http://schemas.openxmlformats.org/drawingml/2006/main">
@@ -1652,17 +2747,92 @@
           </a:p>
           <a:p xmlns:a="http://schemas.openxmlformats.org/drawingml/2006/main">
             <a:r>
+              <a:t>讲义对应：§学习目标；§六 验证门提交清单</a:t>
+            </a:r>
+          </a:p>
+          <a:p xmlns:a="http://schemas.openxmlformats.org/drawingml/2006/main">
+            <a:r>
+              <a:t/>
+            </a:r>
+          </a:p>
+          <a:p xmlns:a="http://schemas.openxmlformats.org/drawingml/2006/main">
+            <a:r>
+              <a:t>[Teaching]</a:t>
+            </a:r>
+          </a:p>
+          <a:p xmlns:a="http://schemas.openxmlformats.org/drawingml/2006/main">
+            <a:r>
+              <a:t>明确边界：课堂只把课前已有结果收口为三项最低产出，不现场重跑完整研究。验证门条件仍以 [assignments.md](../../course/assignments.md) Checkpoint 3 为权威来源，其余字段课后补全。</a:t>
+            </a:r>
+          </a:p>
+          <a:p xmlns:a="http://schemas.openxmlformats.org/drawingml/2006/main">
+            <a:r>
+              <a:t/>
+            </a:r>
+          </a:p>
+          <a:p xmlns:a="http://schemas.openxmlformats.org/drawingml/2006/main">
+            <a:r>
+              <a:t>[Student action]</a:t>
+            </a:r>
+          </a:p>
+          <a:p xmlns:a="http://schemas.openxmlformats.org/drawingml/2006/main">
+            <a:r>
+              <a:t>无。</a:t>
+            </a:r>
+          </a:p>
+          <a:p xmlns:a="http://schemas.openxmlformats.org/drawingml/2006/main">
+            <a:r>
+              <a:t/>
+            </a:r>
+          </a:p>
+          <a:p xmlns:a="http://schemas.openxmlformats.org/drawingml/2006/main">
+            <a:r>
+              <a:t>[Timing]</a:t>
+            </a:r>
+          </a:p>
+          <a:p xmlns:a="http://schemas.openxmlformats.org/drawingml/2006/main">
+            <a:r>
+              <a:t>2 分钟。</a:t>
+            </a:r>
+          </a:p>
+          <a:p xmlns:a="http://schemas.openxmlformats.org/drawingml/2006/main">
+            <a:r>
+              <a:t/>
+            </a:r>
+          </a:p>
+          <a:p xmlns:a="http://schemas.openxmlformats.org/drawingml/2006/main">
+            <a:r>
+              <a:t>[Evidence boundary]</a:t>
+            </a:r>
+          </a:p>
+          <a:p xmlns:a="http://schemas.openxmlformats.org/drawingml/2006/main">
+            <a:r>
+              <a:t>[备课规划.md](../备课规划.md) 第 13 课目标段；[assignments.md](../../course/assignments.md) Checkpoint 3 验证门条件。</a:t>
+            </a:r>
+          </a:p>
+          <a:p xmlns:a="http://schemas.openxmlformats.org/drawingml/2006/main">
+            <a:r>
+              <a:t/>
+            </a:r>
+          </a:p>
+          <a:p xmlns:a="http://schemas.openxmlformats.org/drawingml/2006/main">
+            <a:r>
               <a:t>[Sources]</a:t>
             </a:r>
           </a:p>
           <a:p xmlns:a="http://schemas.openxmlformats.org/drawingml/2006/main">
             <a:r>
-              <a:t>- /Users/bright/Projects/courses/graduate/lessons/lesson-13/slides.md</a:t>
-            </a:r>
-          </a:p>
-          <a:p xmlns:a="http://schemas.openxmlformats.org/drawingml/2006/main">
-            <a:r>
-              <a:t>- /Users/bright/Projects/courses/graduate/lessons/lesson-13/handout.md</a:t>
+              <a:t>- lessons/lesson-13/slides.md P03</a:t>
+            </a:r>
+          </a:p>
+          <a:p xmlns:a="http://schemas.openxmlformats.org/drawingml/2006/main">
+            <a:r>
+              <a:t>- lessons/lesson-13/handout.md §学习目标；§六 验证门提交清单</a:t>
+            </a:r>
+          </a:p>
+          <a:p xmlns:a="http://schemas.openxmlformats.org/drawingml/2006/main">
+            <a:r>
+              <a:t>- lessons/lesson-13/teaching-plan.md</a:t>
             </a:r>
           </a:p>
           <a:p xmlns:a="http://schemas.openxmlformats.org/drawingml/2006/main">
@@ -1737,7 +2907,7 @@
           <a:lstStyle xmlns:a="http://schemas.openxmlformats.org/drawingml/2006/main"/>
           <a:p xmlns:a="http://schemas.openxmlformats.org/drawingml/2006/main">
             <a:r>
-              <a:t>第 13 课工作流评价与结论边界。屏显按现行逐页母稿压缩为课堂可读对象，完整说明保留在讲义与教师备注。</a:t>
+              <a:t>实际影响需要结果对照与结论边界</a:t>
             </a:r>
           </a:p>
           <a:p xmlns:a="http://schemas.openxmlformats.org/drawingml/2006/main">
@@ -1747,17 +2917,117 @@
           </a:p>
           <a:p xmlns:a="http://schemas.openxmlformats.org/drawingml/2006/main">
             <a:r>
+              <a:t>讲义对应：§二·1 评价不是功能清单</a:t>
+            </a:r>
+          </a:p>
+          <a:p xmlns:a="http://schemas.openxmlformats.org/drawingml/2006/main">
+            <a:r>
+              <a:t/>
+            </a:r>
+          </a:p>
+          <a:p xmlns:a="http://schemas.openxmlformats.org/drawingml/2006/main">
+            <a:r>
+              <a:t>[Teaching]</a:t>
+            </a:r>
+          </a:p>
+          <a:p xmlns:a="http://schemas.openxmlformats.org/drawingml/2006/main">
+            <a:r>
+              <a:t>最常见的错误是把评价写成功能清单。功能清单回答“能做什么”，但验证门要的是“改善了哪个科研动作、改变了哪个判断、哪些没变”。右侧把结果对照与结论边界放在一起：方向一致不等于机制已被证明。</a:t>
+            </a:r>
+          </a:p>
+          <a:p xmlns:a="http://schemas.openxmlformats.org/drawingml/2006/main">
+            <a:r>
+              <a:t/>
+            </a:r>
+          </a:p>
+          <a:p xmlns:a="http://schemas.openxmlformats.org/drawingml/2006/main">
+            <a:r>
+              <a:t>[Student action]</a:t>
+            </a:r>
+          </a:p>
+          <a:p xmlns:a="http://schemas.openxmlformats.org/drawingml/2006/main">
+            <a:r>
+              <a:t>让学生把自己的工作流评价改写为实际影响表述。如果写不出 baseline 和指标变化，说明还停留在功能清单。</a:t>
+            </a:r>
+          </a:p>
+          <a:p xmlns:a="http://schemas.openxmlformats.org/drawingml/2006/main">
+            <a:r>
+              <a:t/>
+            </a:r>
+          </a:p>
+          <a:p xmlns:a="http://schemas.openxmlformats.org/drawingml/2006/main">
+            <a:r>
+              <a:t>[Timing]</a:t>
+            </a:r>
+          </a:p>
+          <a:p xmlns:a="http://schemas.openxmlformats.org/drawingml/2006/main">
+            <a:r>
+              <a:t>2 分钟。</a:t>
+            </a:r>
+          </a:p>
+          <a:p xmlns:a="http://schemas.openxmlformats.org/drawingml/2006/main">
+            <a:r>
+              <a:t/>
+            </a:r>
+          </a:p>
+          <a:p xmlns:a="http://schemas.openxmlformats.org/drawingml/2006/main">
+            <a:r>
+              <a:t>[Evidence boundary]</a:t>
+            </a:r>
+          </a:p>
+          <a:p xmlns:a="http://schemas.openxmlformats.org/drawingml/2006/main">
+            <a:r>
+              <a:t>直接来源：[正式来源](https://research.google/pubs/the-ml-test-score-a-rubric-for-ml-production-readiness-and-technical-debt-reduction/)。</a:t>
+            </a:r>
+          </a:p>
+          <a:p xmlns:a="http://schemas.openxmlformats.org/drawingml/2006/main">
+            <a:r>
+              <a:t/>
+            </a:r>
+          </a:p>
+          <a:p xmlns:a="http://schemas.openxmlformats.org/drawingml/2006/main">
+            <a:r>
+              <a:t>本页数值、论文反例与运行 ID 属课程虚构教学示例，不是实际学生实验结果。</a:t>
+            </a:r>
+          </a:p>
+          <a:p xmlns:a="http://schemas.openxmlformats.org/drawingml/2006/main">
+            <a:r>
+              <a:t/>
+            </a:r>
+          </a:p>
+          <a:p xmlns:a="http://schemas.openxmlformats.org/drawingml/2006/main">
+            <a:r>
+              <a:t>讲义 §二·1；[assignments.md](../../course/assignments.md) Checkpoint 3 条件之八。</a:t>
+            </a:r>
+          </a:p>
+          <a:p xmlns:a="http://schemas.openxmlformats.org/drawingml/2006/main">
+            <a:r>
+              <a:t/>
+            </a:r>
+          </a:p>
+          <a:p xmlns:a="http://schemas.openxmlformats.org/drawingml/2006/main">
+            <a:r>
               <a:t>[Sources]</a:t>
             </a:r>
           </a:p>
           <a:p xmlns:a="http://schemas.openxmlformats.org/drawingml/2006/main">
             <a:r>
-              <a:t>- /Users/bright/Projects/courses/graduate/lessons/lesson-13/slides.md</a:t>
-            </a:r>
-          </a:p>
-          <a:p xmlns:a="http://schemas.openxmlformats.org/drawingml/2006/main">
-            <a:r>
-              <a:t>- /Users/bright/Projects/courses/graduate/lessons/lesson-13/handout.md</a:t>
+              <a:t>- lessons/lesson-13/slides.md P04</a:t>
+            </a:r>
+          </a:p>
+          <a:p xmlns:a="http://schemas.openxmlformats.org/drawingml/2006/main">
+            <a:r>
+              <a:t>- lessons/lesson-13/handout.md §二·1 评价不是功能清单</a:t>
+            </a:r>
+          </a:p>
+          <a:p xmlns:a="http://schemas.openxmlformats.org/drawingml/2006/main">
+            <a:r>
+              <a:t>- lessons/lesson-13/teaching-plan.md</a:t>
+            </a:r>
+          </a:p>
+          <a:p xmlns:a="http://schemas.openxmlformats.org/drawingml/2006/main">
+            <a:r>
+              <a:t>- https://research.google/pubs/the-ml-test-score-a-rubric-for-ml-production-readiness-and-technical-debt-reduction/</a:t>
             </a:r>
           </a:p>
           <a:p xmlns:a="http://schemas.openxmlformats.org/drawingml/2006/main">
@@ -1832,7 +3102,7 @@
           <a:lstStyle xmlns:a="http://schemas.openxmlformats.org/drawingml/2006/main"/>
           <a:p xmlns:a="http://schemas.openxmlformats.org/drawingml/2006/main">
             <a:r>
-              <a:t>第 13 课工作流评价与结论边界。屏显按现行逐页母稿压缩为课堂可读对象，完整说明保留在讲义与教师备注。</a:t>
+              <a:t>评价维度由科研问题决定</a:t>
             </a:r>
           </a:p>
           <a:p xmlns:a="http://schemas.openxmlformats.org/drawingml/2006/main">
@@ -1842,17 +3112,92 @@
           </a:p>
           <a:p xmlns:a="http://schemas.openxmlformats.org/drawingml/2006/main">
             <a:r>
+              <a:t>讲义对应：§二·2 评价维度</a:t>
+            </a:r>
+          </a:p>
+          <a:p xmlns:a="http://schemas.openxmlformats.org/drawingml/2006/main">
+            <a:r>
+              <a:t/>
+            </a:r>
+          </a:p>
+          <a:p xmlns:a="http://schemas.openxmlformats.org/drawingml/2006/main">
+            <a:r>
+              <a:t>[Teaching]</a:t>
+            </a:r>
+          </a:p>
+          <a:p xmlns:a="http://schemas.openxmlformats.org/drawingml/2006/main">
+            <a:r>
+              <a:t>先由科研问题确定主指标。贯穿案例主指标为人工基准限定条件遗漏率；屏显另列运行失败、人工修订代价与权限风险，帮助观察工作流的局限，不要求把每个维度都做成研究假设。评价必须有 baseline、前后对比、对照或与研究问题相称的等价依据。</a:t>
+            </a:r>
+          </a:p>
+          <a:p xmlns:a="http://schemas.openxmlformats.org/drawingml/2006/main">
+            <a:r>
+              <a:t/>
+            </a:r>
+          </a:p>
+          <a:p xmlns:a="http://schemas.openxmlformats.org/drawingml/2006/main">
+            <a:r>
+              <a:t>[Student action]</a:t>
+            </a:r>
+          </a:p>
+          <a:p xmlns:a="http://schemas.openxmlformats.org/drawingml/2006/main">
+            <a:r>
+              <a:t>让学生为自己的工作流选至少 2 个维度，并说明为什么不选其他。</a:t>
+            </a:r>
+          </a:p>
+          <a:p xmlns:a="http://schemas.openxmlformats.org/drawingml/2006/main">
+            <a:r>
+              <a:t/>
+            </a:r>
+          </a:p>
+          <a:p xmlns:a="http://schemas.openxmlformats.org/drawingml/2006/main">
+            <a:r>
+              <a:t>[Timing]</a:t>
+            </a:r>
+          </a:p>
+          <a:p xmlns:a="http://schemas.openxmlformats.org/drawingml/2006/main">
+            <a:r>
+              <a:t>2 分钟。</a:t>
+            </a:r>
+          </a:p>
+          <a:p xmlns:a="http://schemas.openxmlformats.org/drawingml/2006/main">
+            <a:r>
+              <a:t/>
+            </a:r>
+          </a:p>
+          <a:p xmlns:a="http://schemas.openxmlformats.org/drawingml/2006/main">
+            <a:r>
+              <a:t>[Evidence boundary]</a:t>
+            </a:r>
+          </a:p>
+          <a:p xmlns:a="http://schemas.openxmlformats.org/drawingml/2006/main">
+            <a:r>
+              <a:t>讲义 §二·2；[备课规划.md](../备课规划.md) 第 13 课评价维度段。</a:t>
+            </a:r>
+          </a:p>
+          <a:p xmlns:a="http://schemas.openxmlformats.org/drawingml/2006/main">
+            <a:r>
+              <a:t/>
+            </a:r>
+          </a:p>
+          <a:p xmlns:a="http://schemas.openxmlformats.org/drawingml/2006/main">
+            <a:r>
               <a:t>[Sources]</a:t>
             </a:r>
           </a:p>
           <a:p xmlns:a="http://schemas.openxmlformats.org/drawingml/2006/main">
             <a:r>
-              <a:t>- /Users/bright/Projects/courses/graduate/lessons/lesson-13/slides.md</a:t>
-            </a:r>
-          </a:p>
-          <a:p xmlns:a="http://schemas.openxmlformats.org/drawingml/2006/main">
-            <a:r>
-              <a:t>- /Users/bright/Projects/courses/graduate/lessons/lesson-13/handout.md</a:t>
+              <a:t>- lessons/lesson-13/slides.md P05</a:t>
+            </a:r>
+          </a:p>
+          <a:p xmlns:a="http://schemas.openxmlformats.org/drawingml/2006/main">
+            <a:r>
+              <a:t>- lessons/lesson-13/handout.md §二·2 评价维度</a:t>
+            </a:r>
+          </a:p>
+          <a:p xmlns:a="http://schemas.openxmlformats.org/drawingml/2006/main">
+            <a:r>
+              <a:t>- lessons/lesson-13/teaching-plan.md</a:t>
             </a:r>
           </a:p>
           <a:p xmlns:a="http://schemas.openxmlformats.org/drawingml/2006/main">
@@ -1927,7 +3272,7 @@
           <a:lstStyle xmlns:a="http://schemas.openxmlformats.org/drawingml/2006/main"/>
           <a:p xmlns:a="http://schemas.openxmlformats.org/drawingml/2006/main">
             <a:r>
-              <a:t>第 13 课工作流评价与结论边界。屏显按现行逐页母稿压缩为课堂可读对象，完整说明保留在讲义与教师备注。</a:t>
+              <a:t>评价协议固定输入、对照与独立评分</a:t>
             </a:r>
           </a:p>
           <a:p xmlns:a="http://schemas.openxmlformats.org/drawingml/2006/main">
@@ -1937,17 +3282,107 @@
           </a:p>
           <a:p xmlns:a="http://schemas.openxmlformats.org/drawingml/2006/main">
             <a:r>
+              <a:t>讲义对应：§二·3 可重复评价与 baseline/前后对比/对照</a:t>
+            </a:r>
+          </a:p>
+          <a:p xmlns:a="http://schemas.openxmlformats.org/drawingml/2006/main">
+            <a:r>
+              <a:t/>
+            </a:r>
+          </a:p>
+          <a:p xmlns:a="http://schemas.openxmlformats.org/drawingml/2006/main">
+            <a:r>
+              <a:t>[Teaching]</a:t>
+            </a:r>
+          </a:p>
+          <a:p xmlns:a="http://schemas.openxmlformats.org/drawingml/2006/main">
+            <a:r>
+              <a:t>可重复评价要求另一位检查者用同一份输入、配置、协议得到可比结果。最常见缺失是固定输入集合——学生"随手挑几篇"跑一次就声称方法有效。Bouthillier 等说明随机性 ML benchmark 中需要报告方差与不确定性；这支持对该类项目采用多种子，不构成所有项目“≥3 次”的统一门槛。单次评价必须写明理由、边界并标记待验证，不能写成稳定结论。</a:t>
+            </a:r>
+          </a:p>
+          <a:p xmlns:a="http://schemas.openxmlformats.org/drawingml/2006/main">
+            <a:r>
+              <a:t/>
+            </a:r>
+          </a:p>
+          <a:p xmlns:a="http://schemas.openxmlformats.org/drawingml/2006/main">
+            <a:r>
+              <a:t>[Student action]</a:t>
+            </a:r>
+          </a:p>
+          <a:p xmlns:a="http://schemas.openxmlformats.org/drawingml/2006/main">
+            <a:r>
+              <a:t>让学生对照四项，标注自己的评价缺哪一项。</a:t>
+            </a:r>
+          </a:p>
+          <a:p xmlns:a="http://schemas.openxmlformats.org/drawingml/2006/main">
+            <a:r>
+              <a:t/>
+            </a:r>
+          </a:p>
+          <a:p xmlns:a="http://schemas.openxmlformats.org/drawingml/2006/main">
+            <a:r>
+              <a:t>[Timing]</a:t>
+            </a:r>
+          </a:p>
+          <a:p xmlns:a="http://schemas.openxmlformats.org/drawingml/2006/main">
+            <a:r>
+              <a:t>2 分钟。</a:t>
+            </a:r>
+          </a:p>
+          <a:p xmlns:a="http://schemas.openxmlformats.org/drawingml/2006/main">
+            <a:r>
+              <a:t/>
+            </a:r>
+          </a:p>
+          <a:p xmlns:a="http://schemas.openxmlformats.org/drawingml/2006/main">
+            <a:r>
+              <a:t>[Evidence boundary]</a:t>
+            </a:r>
+          </a:p>
+          <a:p xmlns:a="http://schemas.openxmlformats.org/drawingml/2006/main">
+            <a:r>
+              <a:t>直接来源：[正式来源](https://proceedings.mlsys.org/paper_files/paper/2021/hash/0184b0cd3cfb185989f858a1d9f5c1eb-Abstract.html)。</a:t>
+            </a:r>
+          </a:p>
+          <a:p xmlns:a="http://schemas.openxmlformats.org/drawingml/2006/main">
+            <a:r>
+              <a:t/>
+            </a:r>
+          </a:p>
+          <a:p xmlns:a="http://schemas.openxmlformats.org/drawingml/2006/main">
+            <a:r>
+              <a:t>讲义 §二·3；Bouthillier et al. 2021（[reading-list.md](../../course/reading-list.md) 第 13 课，第 9 课已用作 baseline 公平性来源，本课重读比较协议部分）。</a:t>
+            </a:r>
+          </a:p>
+          <a:p xmlns:a="http://schemas.openxmlformats.org/drawingml/2006/main">
+            <a:r>
+              <a:t/>
+            </a:r>
+          </a:p>
+          <a:p xmlns:a="http://schemas.openxmlformats.org/drawingml/2006/main">
+            <a:r>
               <a:t>[Sources]</a:t>
             </a:r>
           </a:p>
           <a:p xmlns:a="http://schemas.openxmlformats.org/drawingml/2006/main">
             <a:r>
-              <a:t>- /Users/bright/Projects/courses/graduate/lessons/lesson-13/slides.md</a:t>
-            </a:r>
-          </a:p>
-          <a:p xmlns:a="http://schemas.openxmlformats.org/drawingml/2006/main">
-            <a:r>
-              <a:t>- /Users/bright/Projects/courses/graduate/lessons/lesson-13/handout.md</a:t>
+              <a:t>- lessons/lesson-13/slides.md P06</a:t>
+            </a:r>
+          </a:p>
+          <a:p xmlns:a="http://schemas.openxmlformats.org/drawingml/2006/main">
+            <a:r>
+              <a:t>- lessons/lesson-13/handout.md §二·3 可重复评价与 baseline/前后对比/对照</a:t>
+            </a:r>
+          </a:p>
+          <a:p xmlns:a="http://schemas.openxmlformats.org/drawingml/2006/main">
+            <a:r>
+              <a:t>- lessons/lesson-13/teaching-plan.md</a:t>
+            </a:r>
+          </a:p>
+          <a:p xmlns:a="http://schemas.openxmlformats.org/drawingml/2006/main">
+            <a:r>
+              <a:t>- https://proceedings.mlsys.org/paper_files/paper/2021/hash/0184b0cd3cfb185989f858a1d9f5c1eb-Abstract.html</a:t>
             </a:r>
           </a:p>
           <a:p xmlns:a="http://schemas.openxmlformats.org/drawingml/2006/main">
@@ -2022,7 +3457,7 @@
           <a:lstStyle xmlns:a="http://schemas.openxmlformats.org/drawingml/2006/main"/>
           <a:p xmlns:a="http://schemas.openxmlformats.org/drawingml/2006/main">
             <a:r>
-              <a:t>第 13 课工作流评价与结论边界。屏显按现行逐页母稿压缩为课堂可读对象，完整说明保留在讲义与教师备注。</a:t>
+              <a:t>评价报告必须写出判断变化</a:t>
             </a:r>
           </a:p>
           <a:p xmlns:a="http://schemas.openxmlformats.org/drawingml/2006/main">
@@ -2032,17 +3467,102 @@
           </a:p>
           <a:p xmlns:a="http://schemas.openxmlformats.org/drawingml/2006/main">
             <a:r>
+              <a:t>讲义对应：§二·4 评价报告说明实际影响</a:t>
+            </a:r>
+          </a:p>
+          <a:p xmlns:a="http://schemas.openxmlformats.org/drawingml/2006/main">
+            <a:r>
+              <a:t/>
+            </a:r>
+          </a:p>
+          <a:p xmlns:a="http://schemas.openxmlformats.org/drawingml/2006/main">
+            <a:r>
+              <a:t>[Teaching]</a:t>
+            </a:r>
+          </a:p>
+          <a:p xmlns:a="http://schemas.openxmlformats.org/drawingml/2006/main">
+            <a:r>
+              <a:t>评价报告必须回答"工作流改变了哪个研究判断"。如果回答不出，说明评价还停留在功能清单层。组件保留/修改/移除的判断要写依据，不能只写"感觉有用"。</a:t>
+            </a:r>
+          </a:p>
+          <a:p xmlns:a="http://schemas.openxmlformats.org/drawingml/2006/main">
+            <a:r>
+              <a:t/>
+            </a:r>
+          </a:p>
+          <a:p xmlns:a="http://schemas.openxmlformats.org/drawingml/2006/main">
+            <a:r>
+              <a:t>[Student action]</a:t>
+            </a:r>
+          </a:p>
+          <a:p xmlns:a="http://schemas.openxmlformats.org/drawingml/2006/main">
+            <a:r>
+              <a:t>让学生检查自己的评价报告是否回答了"改变了哪个判断"。</a:t>
+            </a:r>
+          </a:p>
+          <a:p xmlns:a="http://schemas.openxmlformats.org/drawingml/2006/main">
+            <a:r>
+              <a:t/>
+            </a:r>
+          </a:p>
+          <a:p xmlns:a="http://schemas.openxmlformats.org/drawingml/2006/main">
+            <a:r>
+              <a:t>[Timing]</a:t>
+            </a:r>
+          </a:p>
+          <a:p xmlns:a="http://schemas.openxmlformats.org/drawingml/2006/main">
+            <a:r>
+              <a:t>2 分钟。</a:t>
+            </a:r>
+          </a:p>
+          <a:p xmlns:a="http://schemas.openxmlformats.org/drawingml/2006/main">
+            <a:r>
+              <a:t/>
+            </a:r>
+          </a:p>
+          <a:p xmlns:a="http://schemas.openxmlformats.org/drawingml/2006/main">
+            <a:r>
+              <a:t>[Evidence boundary]</a:t>
+            </a:r>
+          </a:p>
+          <a:p xmlns:a="http://schemas.openxmlformats.org/drawingml/2006/main">
+            <a:r>
+              <a:t>本页数值、论文反例与运行 ID 属课程虚构教学示例，不是实际学生实验结果。</a:t>
+            </a:r>
+          </a:p>
+          <a:p xmlns:a="http://schemas.openxmlformats.org/drawingml/2006/main">
+            <a:r>
+              <a:t/>
+            </a:r>
+          </a:p>
+          <a:p xmlns:a="http://schemas.openxmlformats.org/drawingml/2006/main">
+            <a:r>
+              <a:t>讲义 §二·4；[project-template.md](../../course/project-template.md) §8.5-8.6。</a:t>
+            </a:r>
+          </a:p>
+          <a:p xmlns:a="http://schemas.openxmlformats.org/drawingml/2006/main">
+            <a:r>
+              <a:t/>
+            </a:r>
+          </a:p>
+          <a:p xmlns:a="http://schemas.openxmlformats.org/drawingml/2006/main">
+            <a:r>
               <a:t>[Sources]</a:t>
             </a:r>
           </a:p>
           <a:p xmlns:a="http://schemas.openxmlformats.org/drawingml/2006/main">
             <a:r>
-              <a:t>- /Users/bright/Projects/courses/graduate/lessons/lesson-13/slides.md</a:t>
-            </a:r>
-          </a:p>
-          <a:p xmlns:a="http://schemas.openxmlformats.org/drawingml/2006/main">
-            <a:r>
-              <a:t>- /Users/bright/Projects/courses/graduate/lessons/lesson-13/handout.md</a:t>
+              <a:t>- lessons/lesson-13/slides.md P07</a:t>
+            </a:r>
+          </a:p>
+          <a:p xmlns:a="http://schemas.openxmlformats.org/drawingml/2006/main">
+            <a:r>
+              <a:t>- lessons/lesson-13/handout.md §二·4 评价报告说明实际影响</a:t>
+            </a:r>
+          </a:p>
+          <a:p xmlns:a="http://schemas.openxmlformats.org/drawingml/2006/main">
+            <a:r>
+              <a:t>- lessons/lesson-13/teaching-plan.md</a:t>
             </a:r>
           </a:p>
           <a:p xmlns:a="http://schemas.openxmlformats.org/drawingml/2006/main">
@@ -2117,7 +3637,7 @@
           <a:lstStyle xmlns:a="http://schemas.openxmlformats.org/drawingml/2006/main"/>
           <a:p xmlns:a="http://schemas.openxmlformats.org/drawingml/2006/main">
             <a:r>
-              <a:t>第 13 课工作流评价与结论边界。屏显按现行逐页母稿压缩为课堂可读对象，完整说明保留在讲义与教师备注。</a:t>
+              <a:t>结果进入三态判断，机制仍待区分</a:t>
             </a:r>
           </a:p>
           <a:p xmlns:a="http://schemas.openxmlformats.org/drawingml/2006/main">
@@ -2127,17 +3647,102 @@
           </a:p>
           <a:p xmlns:a="http://schemas.openxmlformats.org/drawingml/2006/main">
             <a:r>
+              <a:t>讲义对应：§三·1 结果与原假设关系</a:t>
+            </a:r>
+          </a:p>
+          <a:p xmlns:a="http://schemas.openxmlformats.org/drawingml/2006/main">
+            <a:r>
+              <a:t/>
+            </a:r>
+          </a:p>
+          <a:p xmlns:a="http://schemas.openxmlformats.org/drawingml/2006/main">
+            <a:r>
+              <a:t>[Teaching]</a:t>
+            </a:r>
+          </a:p>
+          <a:p xmlns:a="http://schemas.openxmlformats.org/drawingml/2006/main">
+            <a:r>
+              <a:t>最常见的错误是报告数字而不映射回假设。学生必须回答“支持、反驳还是仍不能判断”。当前结果方向与 H1 一致，不等于机制已被证明；A1/A2/A3 未被排除就应写“仍不能判断”。不显著也不能直接证明某个机制不存在。</a:t>
+            </a:r>
+          </a:p>
+          <a:p xmlns:a="http://schemas.openxmlformats.org/drawingml/2006/main">
+            <a:r>
+              <a:t/>
+            </a:r>
+          </a:p>
+          <a:p xmlns:a="http://schemas.openxmlformats.org/drawingml/2006/main">
+            <a:r>
+              <a:t>[Student action]</a:t>
+            </a:r>
+          </a:p>
+          <a:p xmlns:a="http://schemas.openxmlformats.org/drawingml/2006/main">
+            <a:r>
+              <a:t>让学生把自己的最近一次运行结果映射回 H1 和 A1/A2/A3。</a:t>
+            </a:r>
+          </a:p>
+          <a:p xmlns:a="http://schemas.openxmlformats.org/drawingml/2006/main">
+            <a:r>
+              <a:t/>
+            </a:r>
+          </a:p>
+          <a:p xmlns:a="http://schemas.openxmlformats.org/drawingml/2006/main">
+            <a:r>
+              <a:t>[Timing]</a:t>
+            </a:r>
+          </a:p>
+          <a:p xmlns:a="http://schemas.openxmlformats.org/drawingml/2006/main">
+            <a:r>
+              <a:t>3 分钟。</a:t>
+            </a:r>
+          </a:p>
+          <a:p xmlns:a="http://schemas.openxmlformats.org/drawingml/2006/main">
+            <a:r>
+              <a:t/>
+            </a:r>
+          </a:p>
+          <a:p xmlns:a="http://schemas.openxmlformats.org/drawingml/2006/main">
+            <a:r>
+              <a:t>[Evidence boundary]</a:t>
+            </a:r>
+          </a:p>
+          <a:p xmlns:a="http://schemas.openxmlformats.org/drawingml/2006/main">
+            <a:r>
+              <a:t>本页数值、论文反例与运行 ID 属课程虚构教学示例，不是实际学生实验结果。</a:t>
+            </a:r>
+          </a:p>
+          <a:p xmlns:a="http://schemas.openxmlformats.org/drawingml/2006/main">
+            <a:r>
+              <a:t/>
+            </a:r>
+          </a:p>
+          <a:p xmlns:a="http://schemas.openxmlformats.org/drawingml/2006/main">
+            <a:r>
+              <a:t>讲义 §三·1；[AGENTS.md](../../AGENTS.md) 证据标准。</a:t>
+            </a:r>
+          </a:p>
+          <a:p xmlns:a="http://schemas.openxmlformats.org/drawingml/2006/main">
+            <a:r>
+              <a:t/>
+            </a:r>
+          </a:p>
+          <a:p xmlns:a="http://schemas.openxmlformats.org/drawingml/2006/main">
+            <a:r>
               <a:t>[Sources]</a:t>
             </a:r>
           </a:p>
           <a:p xmlns:a="http://schemas.openxmlformats.org/drawingml/2006/main">
             <a:r>
-              <a:t>- /Users/bright/Projects/courses/graduate/lessons/lesson-13/slides.md</a:t>
-            </a:r>
-          </a:p>
-          <a:p xmlns:a="http://schemas.openxmlformats.org/drawingml/2006/main">
-            <a:r>
-              <a:t>- /Users/bright/Projects/courses/graduate/lessons/lesson-13/handout.md</a:t>
+              <a:t>- lessons/lesson-13/slides.md P08</a:t>
+            </a:r>
+          </a:p>
+          <a:p xmlns:a="http://schemas.openxmlformats.org/drawingml/2006/main">
+            <a:r>
+              <a:t>- lessons/lesson-13/handout.md §三·1 结果与原假设关系</a:t>
+            </a:r>
+          </a:p>
+          <a:p xmlns:a="http://schemas.openxmlformats.org/drawingml/2006/main">
+            <a:r>
+              <a:t>- lessons/lesson-13/teaching-plan.md</a:t>
             </a:r>
           </a:p>
           <a:p xmlns:a="http://schemas.openxmlformats.org/drawingml/2006/main">
@@ -2212,7 +3817,7 @@
           <a:lstStyle xmlns:a="http://schemas.openxmlformats.org/drawingml/2006/main"/>
           <a:p xmlns:a="http://schemas.openxmlformats.org/drawingml/2006/main">
             <a:r>
-              <a:t>第 13 课工作流评价与结论边界。屏显按现行逐页母稿压缩为课堂可读对象，完整说明保留在讲义与教师备注。</a:t>
+              <a:t>正向、负向与冲突结果在同一记录中</a:t>
             </a:r>
           </a:p>
           <a:p xmlns:a="http://schemas.openxmlformats.org/drawingml/2006/main">
@@ -2222,17 +3827,102 @@
           </a:p>
           <a:p xmlns:a="http://schemas.openxmlformats.org/drawingml/2006/main">
             <a:r>
+              <a:t>讲义对应：§三·2 正向与负向均记录</a:t>
+            </a:r>
+          </a:p>
+          <a:p xmlns:a="http://schemas.openxmlformats.org/drawingml/2006/main">
+            <a:r>
+              <a:t/>
+            </a:r>
+          </a:p>
+          <a:p xmlns:a="http://schemas.openxmlformats.org/drawingml/2006/main">
+            <a:r>
+              <a:t>[Teaching]</a:t>
+            </a:r>
+          </a:p>
+          <a:p xmlns:a="http://schemas.openxmlformats.org/drawingml/2006/main">
+            <a:r>
+              <a:t>与当前结论相关的正向、负向和冲突结果应进入同一记录；隐瞒失败或选择性删除结果属于规范问题。虚构案例的两篇图表为主论文提示可能存在任务契约或文档结构边界，保留对应运行并复测后才能判断机制。它们仍计入总体汇总。</a:t>
+            </a:r>
+          </a:p>
+          <a:p xmlns:a="http://schemas.openxmlformats.org/drawingml/2006/main">
+            <a:r>
+              <a:t/>
+            </a:r>
+          </a:p>
+          <a:p xmlns:a="http://schemas.openxmlformats.org/drawingml/2006/main">
+            <a:r>
+              <a:t>[Student action]</a:t>
+            </a:r>
+          </a:p>
+          <a:p xmlns:a="http://schemas.openxmlformats.org/drawingml/2006/main">
+            <a:r>
+              <a:t>让学生检查自己的实验目录：有没有保留失败运行的日志？还是只展示成功？</a:t>
+            </a:r>
+          </a:p>
+          <a:p xmlns:a="http://schemas.openxmlformats.org/drawingml/2006/main">
+            <a:r>
+              <a:t/>
+            </a:r>
+          </a:p>
+          <a:p xmlns:a="http://schemas.openxmlformats.org/drawingml/2006/main">
+            <a:r>
+              <a:t>[Timing]</a:t>
+            </a:r>
+          </a:p>
+          <a:p xmlns:a="http://schemas.openxmlformats.org/drawingml/2006/main">
+            <a:r>
+              <a:t>2 分钟。</a:t>
+            </a:r>
+          </a:p>
+          <a:p xmlns:a="http://schemas.openxmlformats.org/drawingml/2006/main">
+            <a:r>
+              <a:t/>
+            </a:r>
+          </a:p>
+          <a:p xmlns:a="http://schemas.openxmlformats.org/drawingml/2006/main">
+            <a:r>
+              <a:t>[Evidence boundary]</a:t>
+            </a:r>
+          </a:p>
+          <a:p xmlns:a="http://schemas.openxmlformats.org/drawingml/2006/main">
+            <a:r>
+              <a:t>本页数值、论文反例与运行 ID 属课程虚构教学示例，不是实际学生实验结果。</a:t>
+            </a:r>
+          </a:p>
+          <a:p xmlns:a="http://schemas.openxmlformats.org/drawingml/2006/main">
+            <a:r>
+              <a:t/>
+            </a:r>
+          </a:p>
+          <a:p xmlns:a="http://schemas.openxmlformats.org/drawingml/2006/main">
+            <a:r>
+              <a:t>讲义 §三·2；[AGENTS.md](../../AGENTS.md)；[assessment.md](../../course/assessment.md) 学术规范红线。</a:t>
+            </a:r>
+          </a:p>
+          <a:p xmlns:a="http://schemas.openxmlformats.org/drawingml/2006/main">
+            <a:r>
+              <a:t/>
+            </a:r>
+          </a:p>
+          <a:p xmlns:a="http://schemas.openxmlformats.org/drawingml/2006/main">
+            <a:r>
               <a:t>[Sources]</a:t>
             </a:r>
           </a:p>
           <a:p xmlns:a="http://schemas.openxmlformats.org/drawingml/2006/main">
             <a:r>
-              <a:t>- /Users/bright/Projects/courses/graduate/lessons/lesson-13/slides.md</a:t>
-            </a:r>
-          </a:p>
-          <a:p xmlns:a="http://schemas.openxmlformats.org/drawingml/2006/main">
-            <a:r>
-              <a:t>- /Users/bright/Projects/courses/graduate/lessons/lesson-13/handout.md</a:t>
+              <a:t>- lessons/lesson-13/slides.md P09</a:t>
+            </a:r>
+          </a:p>
+          <a:p xmlns:a="http://schemas.openxmlformats.org/drawingml/2006/main">
+            <a:r>
+              <a:t>- lessons/lesson-13/handout.md §三·2 正向与负向均记录</a:t>
+            </a:r>
+          </a:p>
+          <a:p xmlns:a="http://schemas.openxmlformats.org/drawingml/2006/main">
+            <a:r>
+              <a:t>- lessons/lesson-13/teaching-plan.md</a:t>
             </a:r>
           </a:p>
           <a:p xmlns:a="http://schemas.openxmlformats.org/drawingml/2006/main">
@@ -6553,7 +8243,7 @@
                 <a:ea typeface="微软雅黑"/>
                 <a:cs typeface="微软雅黑"/>
               </a:rPr>
-              <a:t>run-041</a:t>
+              <a:t>run-041（虚构）</a:t>
             </a:r>
           </a:p>
         </p:txBody>
@@ -6701,7 +8391,7 @@
                 <a:ea typeface="微软雅黑"/>
                 <a:cs typeface="微软雅黑"/>
               </a:rPr>
-              <a:t>run-042</a:t>
+              <a:t>run-042（虚构）</a:t>
             </a:r>
           </a:p>
         </p:txBody>
@@ -6849,7 +8539,7 @@
                 <a:ea typeface="微软雅黑"/>
                 <a:cs typeface="微软雅黑"/>
               </a:rPr>
-              <a:t>run-043</a:t>
+              <a:t>run-043（虚构）</a:t>
             </a:r>
           </a:p>
         </p:txBody>
@@ -7154,7 +8844,7 @@
                 <a:ea typeface="微软雅黑"/>
                 <a:cs typeface="微软雅黑"/>
               </a:rPr>
-              <a:t>六类根因围绕一次真实失败定位</a:t>
+              <a:t>六类根因围绕一次失败定位</a:t>
             </a:r>
             <a:endParaRPr/>
           </a:p>
@@ -7294,7 +8984,7 @@
                 <a:ea typeface="微软雅黑"/>
                 <a:cs typeface="微软雅黑"/>
               </a:rPr>
-              <a:t>六类根因围绕一次真实失败定位</a:t>
+              <a:t>六类根因围绕一次失败定位</a:t>
             </a:r>
           </a:p>
         </p:txBody>
@@ -7472,7 +9162,7 @@
                 <a:ea typeface="微软雅黑"/>
                 <a:cs typeface="微软雅黑"/>
               </a:rPr>
-              <a:t>run-042 failure trace</a:t>
+              <a:t>run-042｜虚构教学记录</a:t>
             </a:r>
           </a:p>
         </p:txBody>

--- a/lessons/lesson-13/slides.pptx
+++ b/lessons/lesson-13/slides.pptx
@@ -417,7 +417,12 @@
           </a:p>
           <a:p xmlns:a="http://schemas.openxmlformats.org/drawingml/2006/main">
             <a:r>
-              <a:t>讲义位置：本课讲义；见逐页母稿映射表</a:t>
+              <a:t>讲述与校准：</a:t>
+            </a:r>
+          </a:p>
+          <a:p xmlns:a="http://schemas.openxmlformats.org/drawingml/2006/main">
+            <a:r>
+              <a:t>开场放下工作流原型。第 10-12 课你完成了受限 Agent 执行、实验自动化和个人 Agent Workflow 设计，但"能运行"和"经过评价"之间还有距离。本课把原型收口为评价材料，并完成第三次正式提交——验证门。</a:t>
             </a:r>
           </a:p>
           <a:p xmlns:a="http://schemas.openxmlformats.org/drawingml/2006/main">
@@ -427,22 +432,12 @@
           </a:p>
           <a:p xmlns:a="http://schemas.openxmlformats.org/drawingml/2006/main">
             <a:r>
-              <a:t>屏显核对：</a:t>
-            </a:r>
-          </a:p>
-          <a:p xmlns:a="http://schemas.openxmlformats.org/drawingml/2006/main">
-            <a:r>
-              <a:t>```text</a:t>
-            </a:r>
-          </a:p>
-          <a:p xmlns:a="http://schemas.openxmlformats.org/drawingml/2006/main">
-            <a:r>
-              <a:t>第13讲 工作流评价、结果分析与失败复盘</a:t>
-            </a:r>
-          </a:p>
-          <a:p xmlns:a="http://schemas.openxmlformats.org/drawingml/2006/main">
-            <a:r>
-              <a:t>```</a:t>
+              <a:t>学生动作：</a:t>
+            </a:r>
+          </a:p>
+          <a:p xmlns:a="http://schemas.openxmlformats.org/drawingml/2006/main">
+            <a:r>
+              <a:t>不展开课程行政信息，直接进入下一页回扣。</a:t>
             </a:r>
           </a:p>
           <a:p xmlns:a="http://schemas.openxmlformats.org/drawingml/2006/main">
@@ -452,12 +447,7 @@
           </a:p>
           <a:p xmlns:a="http://schemas.openxmlformats.org/drawingml/2006/main">
             <a:r>
-              <a:t>教师讲述：</a:t>
-            </a:r>
-          </a:p>
-          <a:p xmlns:a="http://schemas.openxmlformats.org/drawingml/2006/main">
-            <a:r>
-              <a:t>开场放下工作流原型。第 10-12 课你完成了受限 Agent 执行、实验自动化和个人 Agent Workflow 设计，但"能运行"和"经过评价"之间还有距离。本课把原型收口为评价材料，并完成第三次正式提交——验证门。</a:t>
+              <a:t>课堂安排：按本稿下方 90 分钟教学路由安排；此页不另占独立时段。</a:t>
             </a:r>
           </a:p>
           <a:p xmlns:a="http://schemas.openxmlformats.org/drawingml/2006/main">
@@ -467,12 +457,12 @@
           </a:p>
           <a:p xmlns:a="http://schemas.openxmlformats.org/drawingml/2006/main">
             <a:r>
-              <a:t>学生动作：</a:t>
-            </a:r>
-          </a:p>
-          <a:p xmlns:a="http://schemas.openxmlformats.org/drawingml/2006/main">
-            <a:r>
-              <a:t>不展开课程行政信息，直接进入下一页回扣。</a:t>
+              <a:t>[Sources]</a:t>
+            </a:r>
+          </a:p>
+          <a:p xmlns:a="http://schemas.openxmlformats.org/drawingml/2006/main">
+            <a:r>
+              <a:t>课程定位以 [syllabus.md](../../course/syllabus.md) 与 [备课规划.md](../备课规划.md) 第 13 课段为准。</a:t>
             </a:r>
           </a:p>
           <a:p xmlns:a="http://schemas.openxmlformats.org/drawingml/2006/main">
@@ -482,57 +472,7 @@
           </a:p>
           <a:p xmlns:a="http://schemas.openxmlformats.org/drawingml/2006/main">
             <a:r>
-              <a:t>来源与边界：</a:t>
-            </a:r>
-          </a:p>
-          <a:p xmlns:a="http://schemas.openxmlformats.org/drawingml/2006/main">
-            <a:r>
-              <a:t>课程定位以 [syllabus.md](../../course/syllabus.md) 与 [备课规划.md](../备课规划.md) 第 13 课段为准。</a:t>
-            </a:r>
-          </a:p>
-          <a:p xmlns:a="http://schemas.openxmlformats.org/drawingml/2006/main">
-            <a:r>
-              <a:t/>
-            </a:r>
-          </a:p>
-          <a:p xmlns:a="http://schemas.openxmlformats.org/drawingml/2006/main">
-            <a:r>
-              <a:t>---</a:t>
-            </a:r>
-          </a:p>
-          <a:p xmlns:a="http://schemas.openxmlformats.org/drawingml/2006/main">
-            <a:r>
-              <a:t/>
-            </a:r>
-          </a:p>
-          <a:p xmlns:a="http://schemas.openxmlformats.org/drawingml/2006/main">
-            <a:r>
-              <a:t>[Sources]</a:t>
-            </a:r>
-          </a:p>
-          <a:p xmlns:a="http://schemas.openxmlformats.org/drawingml/2006/main">
-            <a:r>
-              <a:t/>
-            </a:r>
-          </a:p>
-          <a:p xmlns:a="http://schemas.openxmlformats.org/drawingml/2006/main">
-            <a:r>
-              <a:t>- 本课 handout.md 与 slides.md</a:t>
-            </a:r>
-          </a:p>
-          <a:p xmlns:a="http://schemas.openxmlformats.org/drawingml/2006/main">
-            <a:r>
-              <a:t/>
-            </a:r>
-          </a:p>
-          <a:p xmlns:a="http://schemas.openxmlformats.org/drawingml/2006/main">
-            <a:r>
-              <a:t>- ../../course/reading-card-case.md</a:t>
-            </a:r>
-          </a:p>
-          <a:p xmlns:a="http://schemas.openxmlformats.org/drawingml/2006/main">
-            <a:r>
-              <a:t/>
+              <a:t>本课 handout.md、judgment-task.md；../../course/judgment-path.md。</a:t>
             </a:r>
           </a:p>
           <a:p xmlns:a="http://schemas.openxmlformats.org/drawingml/2006/main">
@@ -617,7 +557,12 @@
           </a:p>
           <a:p xmlns:a="http://schemas.openxmlformats.org/drawingml/2006/main">
             <a:r>
-              <a:t>讲义位置：handout.md §三、结果分析；四、失败审计；五、贯穿案例</a:t>
+              <a:t>讲述与校准：</a:t>
+            </a:r>
+          </a:p>
+          <a:p xmlns:a="http://schemas.openxmlformats.org/drawingml/2006/main">
+            <a:r>
+              <a:t>从T03提出“图表条件提取不足”候选解释；没有消融、过程检查或重复对照前不能写成确诊原因。</a:t>
             </a:r>
           </a:p>
           <a:p xmlns:a="http://schemas.openxmlformats.org/drawingml/2006/main">
@@ -627,27 +572,12 @@
           </a:p>
           <a:p xmlns:a="http://schemas.openxmlformats.org/drawingml/2006/main">
             <a:r>
-              <a:t>屏显核对：</a:t>
-            </a:r>
-          </a:p>
-          <a:p xmlns:a="http://schemas.openxmlformats.org/drawingml/2006/main">
-            <a:r>
-              <a:t>已观察：哪些限定条件被遗漏。</a:t>
-            </a:r>
-          </a:p>
-          <a:p xmlns:a="http://schemas.openxmlformats.org/drawingml/2006/main">
-            <a:r>
-              <a:t>未区分：H1 与 A2。</a:t>
-            </a:r>
-          </a:p>
-          <a:p xmlns:a="http://schemas.openxmlformats.org/drawingml/2006/main">
-            <a:r>
-              <a:t>未测量：其他事实错误与总质量代价。</a:t>
-            </a:r>
-          </a:p>
-          <a:p xmlns:a="http://schemas.openxmlformats.org/drawingml/2006/main">
-            <a:r>
-              <a:t>范围线索：T03 涉及图示条件且出现负向结果。</a:t>
+              <a:t>学生动作：</a:t>
+            </a:r>
+          </a:p>
+          <a:p xmlns:a="http://schemas.openxmlformats.org/drawingml/2006/main">
+            <a:r>
+              <a:t>为一个候选原因补一项能区分它的诊断观察。</a:t>
             </a:r>
           </a:p>
           <a:p xmlns:a="http://schemas.openxmlformats.org/drawingml/2006/main">
@@ -657,7 +587,7 @@
           </a:p>
           <a:p xmlns:a="http://schemas.openxmlformats.org/drawingml/2006/main">
             <a:r>
-              <a:t>线索可以提出后续检查，不能直接命名根因。</a:t>
+              <a:t>课堂安排：按本稿下方 90 分钟教学路由安排；此页不另占独立时段。</a:t>
             </a:r>
           </a:p>
           <a:p xmlns:a="http://schemas.openxmlformats.org/drawingml/2006/main">
@@ -667,12 +597,12 @@
           </a:p>
           <a:p xmlns:a="http://schemas.openxmlformats.org/drawingml/2006/main">
             <a:r>
-              <a:t>教师讲述：</a:t>
-            </a:r>
-          </a:p>
-          <a:p xmlns:a="http://schemas.openxmlformats.org/drawingml/2006/main">
-            <a:r>
-              <a:t>从T03提出“图表条件提取不足”候选解释；没有消融、过程检查或重复对照前不能写成确诊原因。</a:t>
+              <a:t>[Sources]</a:t>
+            </a:r>
+          </a:p>
+          <a:p xmlns:a="http://schemas.openxmlformats.org/drawingml/2006/main">
+            <a:r>
+              <a:t>./handout.md；课堂示例与构造数据见 ../../course/reading-card-case.md</a:t>
             </a:r>
           </a:p>
           <a:p xmlns:a="http://schemas.openxmlformats.org/drawingml/2006/main">
@@ -682,62 +612,7 @@
           </a:p>
           <a:p xmlns:a="http://schemas.openxmlformats.org/drawingml/2006/main">
             <a:r>
-              <a:t>学生动作：</a:t>
-            </a:r>
-          </a:p>
-          <a:p xmlns:a="http://schemas.openxmlformats.org/drawingml/2006/main">
-            <a:r>
-              <a:t>为一个候选原因补一项能区分它的诊断观察。</a:t>
-            </a:r>
-          </a:p>
-          <a:p xmlns:a="http://schemas.openxmlformats.org/drawingml/2006/main">
-            <a:r>
-              <a:t/>
-            </a:r>
-          </a:p>
-          <a:p xmlns:a="http://schemas.openxmlformats.org/drawingml/2006/main">
-            <a:r>
-              <a:t>来源与边界：</a:t>
-            </a:r>
-          </a:p>
-          <a:p xmlns:a="http://schemas.openxmlformats.org/drawingml/2006/main">
-            <a:r>
-              <a:t>./handout.md；课堂示例与构造数据见 ../../course/reading-card-case.md</a:t>
-            </a:r>
-          </a:p>
-          <a:p xmlns:a="http://schemas.openxmlformats.org/drawingml/2006/main">
-            <a:r>
-              <a:t/>
-            </a:r>
-          </a:p>
-          <a:p xmlns:a="http://schemas.openxmlformats.org/drawingml/2006/main">
-            <a:r>
-              <a:t>[Sources]</a:t>
-            </a:r>
-          </a:p>
-          <a:p xmlns:a="http://schemas.openxmlformats.org/drawingml/2006/main">
-            <a:r>
-              <a:t/>
-            </a:r>
-          </a:p>
-          <a:p xmlns:a="http://schemas.openxmlformats.org/drawingml/2006/main">
-            <a:r>
-              <a:t>- 本课 handout.md 与 slides.md</a:t>
-            </a:r>
-          </a:p>
-          <a:p xmlns:a="http://schemas.openxmlformats.org/drawingml/2006/main">
-            <a:r>
-              <a:t/>
-            </a:r>
-          </a:p>
-          <a:p xmlns:a="http://schemas.openxmlformats.org/drawingml/2006/main">
-            <a:r>
-              <a:t>- ../../course/reading-card-case.md</a:t>
-            </a:r>
-          </a:p>
-          <a:p xmlns:a="http://schemas.openxmlformats.org/drawingml/2006/main">
-            <a:r>
-              <a:t/>
+              <a:t>本课 handout.md、judgment-task.md；../../course/judgment-path.md。</a:t>
             </a:r>
           </a:p>
           <a:p xmlns:a="http://schemas.openxmlformats.org/drawingml/2006/main">
@@ -822,7 +697,12 @@
           </a:p>
           <a:p xmlns:a="http://schemas.openxmlformats.org/drawingml/2006/main">
             <a:r>
-              <a:t>讲义位置：handout.md §三、结果分析；四、失败审计；五、贯穿案例</a:t>
+              <a:t>讲述与校准：</a:t>
+            </a:r>
+          </a:p>
+          <a:p xmlns:a="http://schemas.openxmlformats.org/drawingml/2006/main">
+            <a:r>
+              <a:t>原结论判断段内用 4 分钟检查 RSI 证据角色与区间。异质量 K=16 均匀减随机选择损失区间低于零，K=4/64 跨零；不普遍化分配方式，不宣称新的补测机制。没有显著提升可能精度不足；反驳有意义改善需预定效应边界，机制还需区分证据。阅读卡原有质量、固定回放和非独立盲评边界仍保留。</a:t>
             </a:r>
           </a:p>
           <a:p xmlns:a="http://schemas.openxmlformats.org/drawingml/2006/main">
@@ -832,27 +712,7 @@
           </a:p>
           <a:p xmlns:a="http://schemas.openxmlformats.org/drawingml/2006/main">
             <a:r>
-              <a:t>屏显核对：</a:t>
-            </a:r>
-          </a:p>
-          <a:p xmlns:a="http://schemas.openxmlformats.org/drawingml/2006/main">
-            <a:r>
-              <a:t>3 份教学构造文本，不代表真实论文总体。</a:t>
-            </a:r>
-          </a:p>
-          <a:p xmlns:a="http://schemas.openxmlformats.org/drawingml/2006/main">
-            <a:r>
-              <a:t>固定输出回放，不估计模型随机波动。</a:t>
-            </a:r>
-          </a:p>
-          <a:p xmlns:a="http://schemas.openxmlformats.org/drawingml/2006/main">
-            <a:r>
-              <a:t>参考标注需人工核验，不等于独立盲评。</a:t>
-            </a:r>
-          </a:p>
-          <a:p xmlns:a="http://schemas.openxmlformats.org/drawingml/2006/main">
-            <a:r>
-              <a:t>只测限定条件遗漏，未覆盖全部质量。</a:t>
+              <a:t>每个边界都对应实际设计的局限，避免空泛“样本有限”后继续写普遍结论。若换成个人项目，边界必须根据其实际方法重写。</a:t>
             </a:r>
           </a:p>
           <a:p xmlns:a="http://schemas.openxmlformats.org/drawingml/2006/main">
@@ -862,12 +722,12 @@
           </a:p>
           <a:p xmlns:a="http://schemas.openxmlformats.org/drawingml/2006/main">
             <a:r>
-              <a:t>教师讲述：</a:t>
-            </a:r>
-          </a:p>
-          <a:p xmlns:a="http://schemas.openxmlformats.org/drawingml/2006/main">
-            <a:r>
-              <a:t>每个边界都对应实际设计的局限，避免空泛“样本有限”后继续写普遍结论。若换成个人项目，边界必须根据其实际方法重写。</a:t>
+              <a:t>学生动作：</a:t>
+            </a:r>
+          </a:p>
+          <a:p xmlns:a="http://schemas.openxmlformats.org/drawingml/2006/main">
+            <a:r>
+              <a:t>圈出当前结论超出了哪一项设计允许的范围。</a:t>
             </a:r>
           </a:p>
           <a:p xmlns:a="http://schemas.openxmlformats.org/drawingml/2006/main">
@@ -877,12 +737,7 @@
           </a:p>
           <a:p xmlns:a="http://schemas.openxmlformats.org/drawingml/2006/main">
             <a:r>
-              <a:t>学生动作：</a:t>
-            </a:r>
-          </a:p>
-          <a:p xmlns:a="http://schemas.openxmlformats.org/drawingml/2006/main">
-            <a:r>
-              <a:t>圈出当前结论超出了哪一项设计允许的范围。</a:t>
+              <a:t>课堂安排：按本稿下方 90 分钟教学路由安排；此页不另占独立时段。</a:t>
             </a:r>
           </a:p>
           <a:p xmlns:a="http://schemas.openxmlformats.org/drawingml/2006/main">
@@ -892,7 +747,7 @@
           </a:p>
           <a:p xmlns:a="http://schemas.openxmlformats.org/drawingml/2006/main">
             <a:r>
-              <a:t>来源与边界：</a:t>
+              <a:t>[Sources]</a:t>
             </a:r>
           </a:p>
           <a:p xmlns:a="http://schemas.openxmlformats.org/drawingml/2006/main">
@@ -907,32 +762,7 @@
           </a:p>
           <a:p xmlns:a="http://schemas.openxmlformats.org/drawingml/2006/main">
             <a:r>
-              <a:t>[Sources]</a:t>
-            </a:r>
-          </a:p>
-          <a:p xmlns:a="http://schemas.openxmlformats.org/drawingml/2006/main">
-            <a:r>
-              <a:t/>
-            </a:r>
-          </a:p>
-          <a:p xmlns:a="http://schemas.openxmlformats.org/drawingml/2006/main">
-            <a:r>
-              <a:t>- 本课 handout.md 与 slides.md</a:t>
-            </a:r>
-          </a:p>
-          <a:p xmlns:a="http://schemas.openxmlformats.org/drawingml/2006/main">
-            <a:r>
-              <a:t/>
-            </a:r>
-          </a:p>
-          <a:p xmlns:a="http://schemas.openxmlformats.org/drawingml/2006/main">
-            <a:r>
-              <a:t>- ../../course/reading-card-case.md</a:t>
-            </a:r>
-          </a:p>
-          <a:p xmlns:a="http://schemas.openxmlformats.org/drawingml/2006/main">
-            <a:r>
-              <a:t/>
+              <a:t>本课 handout.md、judgment-task.md；../../course/judgment-path.md。</a:t>
             </a:r>
           </a:p>
           <a:p xmlns:a="http://schemas.openxmlformats.org/drawingml/2006/main">
@@ -1017,7 +847,12 @@
           </a:p>
           <a:p xmlns:a="http://schemas.openxmlformats.org/drawingml/2006/main">
             <a:r>
-              <a:t>讲义位置：本课讲义；见逐页母稿映射表</a:t>
+              <a:t>讲述与校准：</a:t>
+            </a:r>
+          </a:p>
+          <a:p xmlns:a="http://schemas.openxmlformats.org/drawingml/2006/main">
+            <a:r>
+              <a:t>失败审计要对每次失败做根因。最严重的错误是静默重跑删除失败痕迹——这是学术规范红线。第 1 课 §五·4 已说"失败不是重跑到成功，而是工作流评价材料"，本课把它落到验证门。</a:t>
             </a:r>
           </a:p>
           <a:p xmlns:a="http://schemas.openxmlformats.org/drawingml/2006/main">
@@ -1027,32 +862,12 @@
           </a:p>
           <a:p xmlns:a="http://schemas.openxmlformats.org/drawingml/2006/main">
             <a:r>
-              <a:t>屏显核对：</a:t>
-            </a:r>
-          </a:p>
-          <a:p xmlns:a="http://schemas.openxmlformats.org/drawingml/2006/main">
-            <a:r>
-              <a:t>| 记录类型 | 可打开的对象 | 处理 |</a:t>
-            </a:r>
-          </a:p>
-          <a:p xmlns:a="http://schemas.openxmlformats.org/drawingml/2006/main">
-            <a:r>
-              <a:t>| --- | --- | --- |</a:t>
-            </a:r>
-          </a:p>
-          <a:p xmlns:a="http://schemas.openxmlformats.org/drawingml/2006/main">
-            <a:r>
-              <a:t>| 技术失败 | run-003：T02-card 受控失败 | 保留；run-004 恢复 |</a:t>
-            </a:r>
-          </a:p>
-          <a:p xmlns:a="http://schemas.openxmlformats.org/drawingml/2006/main">
-            <a:r>
-              <a:t>| 研究负例 | T03：阅读卡 2/2，自由摘要 1/2 | 照常进入评价 |</a:t>
-            </a:r>
-          </a:p>
-          <a:p xmlns:a="http://schemas.openxmlformats.org/drawingml/2006/main">
-            <a:r>
-              <a:t>| 接口拒绝 | access_denied：executor 请求 gold | 拒绝并记录边界 |</a:t>
+              <a:t>学生动作：</a:t>
+            </a:r>
+          </a:p>
+          <a:p xmlns:a="http://schemas.openxmlformats.org/drawingml/2006/main">
+            <a:r>
+              <a:t>让学生检查自己的实验目录：失败运行的日志还在吗？还是被删了？</a:t>
             </a:r>
           </a:p>
           <a:p xmlns:a="http://schemas.openxmlformats.org/drawingml/2006/main">
@@ -1062,7 +877,7 @@
           </a:p>
           <a:p xmlns:a="http://schemas.openxmlformats.org/drawingml/2006/main">
             <a:r>
-              <a:t>不得删除失败、事后偷改协议或伪造记录。</a:t>
+              <a:t>课堂安排：按本稿下方 90 分钟教学路由安排；此页不另占独立时段。</a:t>
             </a:r>
           </a:p>
           <a:p xmlns:a="http://schemas.openxmlformats.org/drawingml/2006/main">
@@ -1072,12 +887,12 @@
           </a:p>
           <a:p xmlns:a="http://schemas.openxmlformats.org/drawingml/2006/main">
             <a:r>
-              <a:t>教师讲述：</a:t>
-            </a:r>
-          </a:p>
-          <a:p xmlns:a="http://schemas.openxmlformats.org/drawingml/2006/main">
-            <a:r>
-              <a:t>失败审计要对每次失败做根因。最严重的错误是静默重跑删除失败痕迹——这是学术规范红线。第 1 课 §五·4 已说"失败不是重跑到成功，而是工作流评价材料"，本课把它落到验证门。</a:t>
+              <a:t>[Sources]</a:t>
+            </a:r>
+          </a:p>
+          <a:p xmlns:a="http://schemas.openxmlformats.org/drawingml/2006/main">
+            <a:r>
+              <a:t>本页数值、论文反例与运行 ID 属课程虚构教学示例，不是实际学生实验结果。</a:t>
             </a:r>
           </a:p>
           <a:p xmlns:a="http://schemas.openxmlformats.org/drawingml/2006/main">
@@ -1087,12 +902,7 @@
           </a:p>
           <a:p xmlns:a="http://schemas.openxmlformats.org/drawingml/2006/main">
             <a:r>
-              <a:t>学生动作：</a:t>
-            </a:r>
-          </a:p>
-          <a:p xmlns:a="http://schemas.openxmlformats.org/drawingml/2006/main">
-            <a:r>
-              <a:t>让学生检查自己的实验目录：失败运行的日志还在吗？还是被删了？</a:t>
+              <a:t>讲义 §四·1；[AGENTS.md](../../AGENTS.md)；[assessment.md](../../course/assessment.md) 学术规范红线；第 1 课 §五·4。</a:t>
             </a:r>
           </a:p>
           <a:p xmlns:a="http://schemas.openxmlformats.org/drawingml/2006/main">
@@ -1102,67 +912,7 @@
           </a:p>
           <a:p xmlns:a="http://schemas.openxmlformats.org/drawingml/2006/main">
             <a:r>
-              <a:t>来源与边界：</a:t>
-            </a:r>
-          </a:p>
-          <a:p xmlns:a="http://schemas.openxmlformats.org/drawingml/2006/main">
-            <a:r>
-              <a:t>本页数值、论文反例与运行 ID 属课程虚构教学示例，不是实际学生实验结果。</a:t>
-            </a:r>
-          </a:p>
-          <a:p xmlns:a="http://schemas.openxmlformats.org/drawingml/2006/main">
-            <a:r>
-              <a:t/>
-            </a:r>
-          </a:p>
-          <a:p xmlns:a="http://schemas.openxmlformats.org/drawingml/2006/main">
-            <a:r>
-              <a:t>讲义 §四·1；[AGENTS.md](../../AGENTS.md)；[assessment.md](../../course/assessment.md) 学术规范红线；第 1 课 §五·4。</a:t>
-            </a:r>
-          </a:p>
-          <a:p xmlns:a="http://schemas.openxmlformats.org/drawingml/2006/main">
-            <a:r>
-              <a:t/>
-            </a:r>
-          </a:p>
-          <a:p xmlns:a="http://schemas.openxmlformats.org/drawingml/2006/main">
-            <a:r>
-              <a:t>---</a:t>
-            </a:r>
-          </a:p>
-          <a:p xmlns:a="http://schemas.openxmlformats.org/drawingml/2006/main">
-            <a:r>
-              <a:t/>
-            </a:r>
-          </a:p>
-          <a:p xmlns:a="http://schemas.openxmlformats.org/drawingml/2006/main">
-            <a:r>
-              <a:t>[Sources]</a:t>
-            </a:r>
-          </a:p>
-          <a:p xmlns:a="http://schemas.openxmlformats.org/drawingml/2006/main">
-            <a:r>
-              <a:t/>
-            </a:r>
-          </a:p>
-          <a:p xmlns:a="http://schemas.openxmlformats.org/drawingml/2006/main">
-            <a:r>
-              <a:t>- 本课 handout.md 与 slides.md</a:t>
-            </a:r>
-          </a:p>
-          <a:p xmlns:a="http://schemas.openxmlformats.org/drawingml/2006/main">
-            <a:r>
-              <a:t/>
-            </a:r>
-          </a:p>
-          <a:p xmlns:a="http://schemas.openxmlformats.org/drawingml/2006/main">
-            <a:r>
-              <a:t>- ../../course/reading-card-case.md</a:t>
-            </a:r>
-          </a:p>
-          <a:p xmlns:a="http://schemas.openxmlformats.org/drawingml/2006/main">
-            <a:r>
-              <a:t/>
+              <a:t>本课 handout.md、judgment-task.md；../../course/judgment-path.md。</a:t>
             </a:r>
           </a:p>
           <a:p xmlns:a="http://schemas.openxmlformats.org/drawingml/2006/main">
@@ -1247,7 +997,12 @@
           </a:p>
           <a:p xmlns:a="http://schemas.openxmlformats.org/drawingml/2006/main">
             <a:r>
-              <a:t>讲义位置：handout.md §三、结果分析；四、失败审计；五、贯穿案例</a:t>
+              <a:t>讲述与校准：</a:t>
+            </a:r>
+          </a:p>
+          <a:p xmlns:a="http://schemas.openxmlformats.org/drawingml/2006/main">
+            <a:r>
+              <a:t>把技术中断与研究负例分开：前者可用受控失败演示恢复；后者不能靠重跑删除。讲义的根因分类是检查线索，不是现成诊断答案。</a:t>
             </a:r>
           </a:p>
           <a:p xmlns:a="http://schemas.openxmlformats.org/drawingml/2006/main">
@@ -1257,27 +1012,12 @@
           </a:p>
           <a:p xmlns:a="http://schemas.openxmlformats.org/drawingml/2006/main">
             <a:r>
-              <a:t>屏显核对：</a:t>
-            </a:r>
-          </a:p>
-          <a:p xmlns:a="http://schemas.openxmlformats.org/drawingml/2006/main">
-            <a:r>
-              <a:t>观察：T03 阅读卡遗漏 2/2，自由摘要遗漏 1/2。</a:t>
-            </a:r>
-          </a:p>
-          <a:p xmlns:a="http://schemas.openxmlformats.org/drawingml/2006/main">
-            <a:r>
-              <a:t>候选原因：图示条件没有被正确提取。</a:t>
-            </a:r>
-          </a:p>
-          <a:p xmlns:a="http://schemas.openxmlformats.org/drawingml/2006/main">
-            <a:r>
-              <a:t>待补证据：检查定位/提取过程或做针对性对照。</a:t>
-            </a:r>
-          </a:p>
-          <a:p xmlns:a="http://schemas.openxmlformats.org/drawingml/2006/main">
-            <a:r>
-              <a:t>新版本：依据诊断再修订，保留旧输出和旧负例。</a:t>
+              <a:t>学生动作：</a:t>
+            </a:r>
+          </a:p>
+          <a:p xmlns:a="http://schemas.openxmlformats.org/drawingml/2006/main">
+            <a:r>
+              <a:t>写“观察—候选原因—诊断—修订”四项，不虚构已经完成的实验。</a:t>
             </a:r>
           </a:p>
           <a:p xmlns:a="http://schemas.openxmlformats.org/drawingml/2006/main">
@@ -1287,12 +1027,7 @@
           </a:p>
           <a:p xmlns:a="http://schemas.openxmlformats.org/drawingml/2006/main">
             <a:r>
-              <a:t>教师讲述：</a:t>
-            </a:r>
-          </a:p>
-          <a:p xmlns:a="http://schemas.openxmlformats.org/drawingml/2006/main">
-            <a:r>
-              <a:t>把技术中断与研究负例分开：前者可用受控失败演示恢复；后者不能靠重跑删除。讲义的根因分类是检查线索，不是现成诊断答案。</a:t>
+              <a:t>课堂安排：按本稿下方 90 分钟教学路由安排；此页不另占独立时段。</a:t>
             </a:r>
           </a:p>
           <a:p xmlns:a="http://schemas.openxmlformats.org/drawingml/2006/main">
@@ -1302,12 +1037,12 @@
           </a:p>
           <a:p xmlns:a="http://schemas.openxmlformats.org/drawingml/2006/main">
             <a:r>
-              <a:t>学生动作：</a:t>
-            </a:r>
-          </a:p>
-          <a:p xmlns:a="http://schemas.openxmlformats.org/drawingml/2006/main">
-            <a:r>
-              <a:t>写“观察—候选原因—诊断—修订”四项，不虚构已经完成的实验。</a:t>
+              <a:t>[Sources]</a:t>
+            </a:r>
+          </a:p>
+          <a:p xmlns:a="http://schemas.openxmlformats.org/drawingml/2006/main">
+            <a:r>
+              <a:t>./handout.md；课堂示例与构造数据见 ../../course/reading-card-case.md</a:t>
             </a:r>
           </a:p>
           <a:p xmlns:a="http://schemas.openxmlformats.org/drawingml/2006/main">
@@ -1317,57 +1052,7 @@
           </a:p>
           <a:p xmlns:a="http://schemas.openxmlformats.org/drawingml/2006/main">
             <a:r>
-              <a:t>来源与边界：</a:t>
-            </a:r>
-          </a:p>
-          <a:p xmlns:a="http://schemas.openxmlformats.org/drawingml/2006/main">
-            <a:r>
-              <a:t>./handout.md；课堂示例与构造数据见 ../../course/reading-card-case.md</a:t>
-            </a:r>
-          </a:p>
-          <a:p xmlns:a="http://schemas.openxmlformats.org/drawingml/2006/main">
-            <a:r>
-              <a:t/>
-            </a:r>
-          </a:p>
-          <a:p xmlns:a="http://schemas.openxmlformats.org/drawingml/2006/main">
-            <a:r>
-              <a:t>[Sources]</a:t>
-            </a:r>
-          </a:p>
-          <a:p xmlns:a="http://schemas.openxmlformats.org/drawingml/2006/main">
-            <a:r>
-              <a:t/>
-            </a:r>
-          </a:p>
-          <a:p xmlns:a="http://schemas.openxmlformats.org/drawingml/2006/main">
-            <a:r>
-              <a:t>- https://research.google/pubs/hidden-technical-debt-in-machine-learning-systems/</a:t>
-            </a:r>
-          </a:p>
-          <a:p xmlns:a="http://schemas.openxmlformats.org/drawingml/2006/main">
-            <a:r>
-              <a:t/>
-            </a:r>
-          </a:p>
-          <a:p xmlns:a="http://schemas.openxmlformats.org/drawingml/2006/main">
-            <a:r>
-              <a:t>- 本课 handout.md 与 slides.md</a:t>
-            </a:r>
-          </a:p>
-          <a:p xmlns:a="http://schemas.openxmlformats.org/drawingml/2006/main">
-            <a:r>
-              <a:t/>
-            </a:r>
-          </a:p>
-          <a:p xmlns:a="http://schemas.openxmlformats.org/drawingml/2006/main">
-            <a:r>
-              <a:t>- ../../course/reading-card-case.md</a:t>
-            </a:r>
-          </a:p>
-          <a:p xmlns:a="http://schemas.openxmlformats.org/drawingml/2006/main">
-            <a:r>
-              <a:t/>
+              <a:t>本课 handout.md、judgment-task.md；../../course/judgment-path.md。</a:t>
             </a:r>
           </a:p>
           <a:p xmlns:a="http://schemas.openxmlformats.org/drawingml/2006/main">
@@ -1452,7 +1137,12 @@
           </a:p>
           <a:p xmlns:a="http://schemas.openxmlformats.org/drawingml/2006/main">
             <a:r>
-              <a:t>讲义位置：handout.md §三、结果分析；四、失败审计；五、贯穿案例</a:t>
+              <a:t>讲述与校准：</a:t>
+            </a:r>
+          </a:p>
+          <a:p xmlns:a="http://schemas.openxmlformats.org/drawingml/2006/main">
+            <a:r>
+              <a:t>只引用实际日志中的run_id，不写死虚构编号。打开events找到旧失败，再打开evaluation找到T03负例，确认这两个对象没有混为一谈。</a:t>
             </a:r>
           </a:p>
           <a:p xmlns:a="http://schemas.openxmlformats.org/drawingml/2006/main">
@@ -1462,27 +1152,12 @@
           </a:p>
           <a:p xmlns:a="http://schemas.openxmlformats.org/drawingml/2006/main">
             <a:r>
-              <a:t>屏显核对：</a:t>
-            </a:r>
-          </a:p>
-          <a:p xmlns:a="http://schemas.openxmlformats.org/drawingml/2006/main">
-            <a:r>
-              <a:t>T02-card：受控失败事件</a:t>
-            </a:r>
-          </a:p>
-          <a:p xmlns:a="http://schemas.openxmlformats.org/drawingml/2006/main">
-            <a:r>
-              <a:t>同一任务：新的调用恢复成功</a:t>
-            </a:r>
-          </a:p>
-          <a:p xmlns:a="http://schemas.openxmlformats.org/drawingml/2006/main">
-            <a:r>
-              <a:t>输入摘要：保持一致</a:t>
-            </a:r>
-          </a:p>
-          <a:p xmlns:a="http://schemas.openxmlformats.org/drawingml/2006/main">
-            <a:r>
-              <a:t>评价记录：使用最终完整的六份固定输出</a:t>
+              <a:t>学生动作：</a:t>
+            </a:r>
+          </a:p>
+          <a:p xmlns:a="http://schemas.openxmlformats.org/drawingml/2006/main">
+            <a:r>
+              <a:t>各指出一条技术失败和一条负向研究观察的位置。</a:t>
             </a:r>
           </a:p>
           <a:p xmlns:a="http://schemas.openxmlformats.org/drawingml/2006/main">
@@ -1492,7 +1167,7 @@
           </a:p>
           <a:p xmlns:a="http://schemas.openxmlformats.org/drawingml/2006/main">
             <a:r>
-              <a:t>技术恢复与研究负例分别保留。</a:t>
+              <a:t>课堂安排：按本稿下方 90 分钟教学路由安排；此页不另占独立时段。</a:t>
             </a:r>
           </a:p>
           <a:p xmlns:a="http://schemas.openxmlformats.org/drawingml/2006/main">
@@ -1502,12 +1177,12 @@
           </a:p>
           <a:p xmlns:a="http://schemas.openxmlformats.org/drawingml/2006/main">
             <a:r>
-              <a:t>教师讲述：</a:t>
-            </a:r>
-          </a:p>
-          <a:p xmlns:a="http://schemas.openxmlformats.org/drawingml/2006/main">
-            <a:r>
-              <a:t>只引用实际日志中的run_id，不写死虚构编号。打开events找到旧失败，再打开evaluation找到T03负例，确认这两个对象没有混为一谈。</a:t>
+              <a:t>[Sources]</a:t>
+            </a:r>
+          </a:p>
+          <a:p xmlns:a="http://schemas.openxmlformats.org/drawingml/2006/main">
+            <a:r>
+              <a:t>./handout.md；课堂示例与构造数据见 ../../course/reading-card-case.md</a:t>
             </a:r>
           </a:p>
           <a:p xmlns:a="http://schemas.openxmlformats.org/drawingml/2006/main">
@@ -1517,72 +1192,7 @@
           </a:p>
           <a:p xmlns:a="http://schemas.openxmlformats.org/drawingml/2006/main">
             <a:r>
-              <a:t>学生动作：</a:t>
-            </a:r>
-          </a:p>
-          <a:p xmlns:a="http://schemas.openxmlformats.org/drawingml/2006/main">
-            <a:r>
-              <a:t>各指出一条技术失败和一条负向研究观察的位置。</a:t>
-            </a:r>
-          </a:p>
-          <a:p xmlns:a="http://schemas.openxmlformats.org/drawingml/2006/main">
-            <a:r>
-              <a:t/>
-            </a:r>
-          </a:p>
-          <a:p xmlns:a="http://schemas.openxmlformats.org/drawingml/2006/main">
-            <a:r>
-              <a:t>来源与边界：</a:t>
-            </a:r>
-          </a:p>
-          <a:p xmlns:a="http://schemas.openxmlformats.org/drawingml/2006/main">
-            <a:r>
-              <a:t>./handout.md；课堂示例与构造数据见 ../../course/reading-card-case.md</a:t>
-            </a:r>
-          </a:p>
-          <a:p xmlns:a="http://schemas.openxmlformats.org/drawingml/2006/main">
-            <a:r>
-              <a:t/>
-            </a:r>
-          </a:p>
-          <a:p xmlns:a="http://schemas.openxmlformats.org/drawingml/2006/main">
-            <a:r>
-              <a:t>[Sources]</a:t>
-            </a:r>
-          </a:p>
-          <a:p xmlns:a="http://schemas.openxmlformats.org/drawingml/2006/main">
-            <a:r>
-              <a:t/>
-            </a:r>
-          </a:p>
-          <a:p xmlns:a="http://schemas.openxmlformats.org/drawingml/2006/main">
-            <a:r>
-              <a:t>- https://proceedings.mlr.press/v235/huang24y.html</a:t>
-            </a:r>
-          </a:p>
-          <a:p xmlns:a="http://schemas.openxmlformats.org/drawingml/2006/main">
-            <a:r>
-              <a:t/>
-            </a:r>
-          </a:p>
-          <a:p xmlns:a="http://schemas.openxmlformats.org/drawingml/2006/main">
-            <a:r>
-              <a:t>- 本课 handout.md 与 slides.md</a:t>
-            </a:r>
-          </a:p>
-          <a:p xmlns:a="http://schemas.openxmlformats.org/drawingml/2006/main">
-            <a:r>
-              <a:t/>
-            </a:r>
-          </a:p>
-          <a:p xmlns:a="http://schemas.openxmlformats.org/drawingml/2006/main">
-            <a:r>
-              <a:t>- ../../course/reading-card-case.md</a:t>
-            </a:r>
-          </a:p>
-          <a:p xmlns:a="http://schemas.openxmlformats.org/drawingml/2006/main">
-            <a:r>
-              <a:t/>
+              <a:t>本课 handout.md、judgment-task.md；../../course/judgment-path.md。</a:t>
             </a:r>
           </a:p>
           <a:p xmlns:a="http://schemas.openxmlformats.org/drawingml/2006/main">
@@ -1667,7 +1277,12 @@
           </a:p>
           <a:p xmlns:a="http://schemas.openxmlformats.org/drawingml/2006/main">
             <a:r>
-              <a:t>讲义位置：本课讲义；见逐页母稿映射表</a:t>
+              <a:t>讲述与校准：</a:t>
+            </a:r>
+          </a:p>
+          <a:p xmlns:a="http://schemas.openxmlformats.org/drawingml/2006/main">
+            <a:r>
+              <a:t>本页只定位验证门字段，不逐条复述。第 1–4 项承接第 12 课，本课课堂先推进第 5、6、8、9 项所需的对照、失败/局限与判断修订，其余课后补全。验证门检查当前项目版本，不重新制作材料。</a:t>
             </a:r>
           </a:p>
           <a:p xmlns:a="http://schemas.openxmlformats.org/drawingml/2006/main">
@@ -1677,17 +1292,12 @@
           </a:p>
           <a:p xmlns:a="http://schemas.openxmlformats.org/drawingml/2006/main">
             <a:r>
-              <a:t>屏显核对：</a:t>
-            </a:r>
-          </a:p>
-          <a:p xmlns:a="http://schemas.openxmlformats.org/drawingml/2006/main">
-            <a:r>
-              <a:t>```text</a:t>
-            </a:r>
-          </a:p>
-          <a:p xmlns:a="http://schemas.openxmlformats.org/drawingml/2006/main">
-            <a:r>
-              <a:t>验证门 10 项检查当前项目版本</a:t>
+              <a:t>学生动作：</a:t>
+            </a:r>
+          </a:p>
+          <a:p xmlns:a="http://schemas.openxmlformats.org/drawingml/2006/main">
+            <a:r>
+              <a:t>让学生对照清单，标注当前项目哪些已满足、哪些待补全。</a:t>
             </a:r>
           </a:p>
           <a:p xmlns:a="http://schemas.openxmlformats.org/drawingml/2006/main">
@@ -1697,67 +1307,7 @@
           </a:p>
           <a:p xmlns:a="http://schemas.openxmlformats.org/drawingml/2006/main">
             <a:r>
-              <a:t>第 12 课已建立</a:t>
-            </a:r>
-          </a:p>
-          <a:p xmlns:a="http://schemas.openxmlformats.org/drawingml/2006/main">
-            <a:r>
-              <a:t>本课收口与课后补全</a:t>
-            </a:r>
-          </a:p>
-          <a:p xmlns:a="http://schemas.openxmlformats.org/drawingml/2006/main">
-            <a:r>
-              <a:t>— 1 明确科研动作与边界</a:t>
-            </a:r>
-          </a:p>
-          <a:p xmlns:a="http://schemas.openxmlformats.org/drawingml/2006/main">
-            <a:r>
-              <a:t>— 2 可运行或可演示原型</a:t>
-            </a:r>
-          </a:p>
-          <a:p xmlns:a="http://schemas.openxmlformats.org/drawingml/2006/main">
-            <a:r>
-              <a:t>— 3 Context / 状态 / 数据来源</a:t>
-            </a:r>
-          </a:p>
-          <a:p xmlns:a="http://schemas.openxmlformats.org/drawingml/2006/main">
-            <a:r>
-              <a:t>— 4 权限 / 预算 / 停止</a:t>
-            </a:r>
-          </a:p>
-          <a:p xmlns:a="http://schemas.openxmlformats.org/drawingml/2006/main">
-            <a:r>
-              <a:t>— 5 可重复评价</a:t>
-            </a:r>
-          </a:p>
-          <a:p xmlns:a="http://schemas.openxmlformats.org/drawingml/2006/main">
-            <a:r>
-              <a:t>— 6 失败或局限</a:t>
-            </a:r>
-          </a:p>
-          <a:p xmlns:a="http://schemas.openxmlformats.org/drawingml/2006/main">
-            <a:r>
-              <a:t>— 7 人工审核</a:t>
-            </a:r>
-          </a:p>
-          <a:p xmlns:a="http://schemas.openxmlformats.org/drawingml/2006/main">
-            <a:r>
-              <a:t>— 8 实际影响</a:t>
-            </a:r>
-          </a:p>
-          <a:p xmlns:a="http://schemas.openxmlformats.org/drawingml/2006/main">
-            <a:r>
-              <a:t>— 9 证据与风险</a:t>
-            </a:r>
-          </a:p>
-          <a:p xmlns:a="http://schemas.openxmlformats.org/drawingml/2006/main">
-            <a:r>
-              <a:t>— 10 伦理与合规</a:t>
-            </a:r>
-          </a:p>
-          <a:p xmlns:a="http://schemas.openxmlformats.org/drawingml/2006/main">
-            <a:r>
-              <a:t>```</a:t>
+              <a:t>课堂安排：按本稿下方 90 分钟教学路由安排；此页不另占独立时段。</a:t>
             </a:r>
           </a:p>
           <a:p xmlns:a="http://schemas.openxmlformats.org/drawingml/2006/main">
@@ -1767,7 +1317,12 @@
           </a:p>
           <a:p xmlns:a="http://schemas.openxmlformats.org/drawingml/2006/main">
             <a:r>
-              <a:t>屏显来源页脚：来源：lesson-13/slides.md；课程工件与讲义见 speaker notes。</a:t>
+              <a:t>[Sources]</a:t>
+            </a:r>
+          </a:p>
+          <a:p xmlns:a="http://schemas.openxmlformats.org/drawingml/2006/main">
+            <a:r>
+              <a:t>[assignments.md](../../course/assignments.md) Checkpoint 3 验证门条件（权威来源）；[project-template.md](../../course/project-template.md) §6、§8、§10 字段模板。</a:t>
             </a:r>
           </a:p>
           <a:p xmlns:a="http://schemas.openxmlformats.org/drawingml/2006/main">
@@ -1777,87 +1332,7 @@
           </a:p>
           <a:p xmlns:a="http://schemas.openxmlformats.org/drawingml/2006/main">
             <a:r>
-              <a:t>教师讲述：</a:t>
-            </a:r>
-          </a:p>
-          <a:p xmlns:a="http://schemas.openxmlformats.org/drawingml/2006/main">
-            <a:r>
-              <a:t>本页只定位验证门字段，不逐条复述。第 1–4 项承接第 12 课，本课课堂先推进第 5、6、8、9 项所需的对照、失败/局限与判断修订，其余课后补全。验证门检查当前项目版本，不重新制作材料。</a:t>
-            </a:r>
-          </a:p>
-          <a:p xmlns:a="http://schemas.openxmlformats.org/drawingml/2006/main">
-            <a:r>
-              <a:t/>
-            </a:r>
-          </a:p>
-          <a:p xmlns:a="http://schemas.openxmlformats.org/drawingml/2006/main">
-            <a:r>
-              <a:t>学生动作：</a:t>
-            </a:r>
-          </a:p>
-          <a:p xmlns:a="http://schemas.openxmlformats.org/drawingml/2006/main">
-            <a:r>
-              <a:t>让学生对照清单，标注当前项目哪些已满足、哪些待补全。</a:t>
-            </a:r>
-          </a:p>
-          <a:p xmlns:a="http://schemas.openxmlformats.org/drawingml/2006/main">
-            <a:r>
-              <a:t/>
-            </a:r>
-          </a:p>
-          <a:p xmlns:a="http://schemas.openxmlformats.org/drawingml/2006/main">
-            <a:r>
-              <a:t>来源与边界：</a:t>
-            </a:r>
-          </a:p>
-          <a:p xmlns:a="http://schemas.openxmlformats.org/drawingml/2006/main">
-            <a:r>
-              <a:t>[assignments.md](../../course/assignments.md) Checkpoint 3 验证门条件（权威来源）；[project-template.md](../../course/project-template.md) §6、§8、§10 字段模板。</a:t>
-            </a:r>
-          </a:p>
-          <a:p xmlns:a="http://schemas.openxmlformats.org/drawingml/2006/main">
-            <a:r>
-              <a:t/>
-            </a:r>
-          </a:p>
-          <a:p xmlns:a="http://schemas.openxmlformats.org/drawingml/2006/main">
-            <a:r>
-              <a:t>---</a:t>
-            </a:r>
-          </a:p>
-          <a:p xmlns:a="http://schemas.openxmlformats.org/drawingml/2006/main">
-            <a:r>
-              <a:t/>
-            </a:r>
-          </a:p>
-          <a:p xmlns:a="http://schemas.openxmlformats.org/drawingml/2006/main">
-            <a:r>
-              <a:t>[Sources]</a:t>
-            </a:r>
-          </a:p>
-          <a:p xmlns:a="http://schemas.openxmlformats.org/drawingml/2006/main">
-            <a:r>
-              <a:t/>
-            </a:r>
-          </a:p>
-          <a:p xmlns:a="http://schemas.openxmlformats.org/drawingml/2006/main">
-            <a:r>
-              <a:t>- 本课 handout.md 与 slides.md</a:t>
-            </a:r>
-          </a:p>
-          <a:p xmlns:a="http://schemas.openxmlformats.org/drawingml/2006/main">
-            <a:r>
-              <a:t/>
-            </a:r>
-          </a:p>
-          <a:p xmlns:a="http://schemas.openxmlformats.org/drawingml/2006/main">
-            <a:r>
-              <a:t>- ../../course/reading-card-case.md</a:t>
-            </a:r>
-          </a:p>
-          <a:p xmlns:a="http://schemas.openxmlformats.org/drawingml/2006/main">
-            <a:r>
-              <a:t/>
+              <a:t>本课 handout.md、judgment-task.md；../../course/judgment-path.md。</a:t>
             </a:r>
           </a:p>
           <a:p xmlns:a="http://schemas.openxmlformats.org/drawingml/2006/main">
@@ -1942,7 +1417,12 @@
           </a:p>
           <a:p xmlns:a="http://schemas.openxmlformats.org/drawingml/2006/main">
             <a:r>
-              <a:t>讲义位置：本课讲义；见逐页母稿映射表</a:t>
+              <a:t>讲述与校准：</a:t>
+            </a:r>
+          </a:p>
+          <a:p xmlns:a="http://schemas.openxmlformats.org/drawingml/2006/main">
+            <a:r>
+              <a:t>贯穿案例延续第 10–12 课同一工作流。教师重点演示如何从课前已有结果形成对照、局限和判断修订；0.375/0.500 与图表论文反例均为虚构教学示例。学生不在课堂从零运行完整研究。</a:t>
             </a:r>
           </a:p>
           <a:p xmlns:a="http://schemas.openxmlformats.org/drawingml/2006/main">
@@ -1952,12 +1432,12 @@
           </a:p>
           <a:p xmlns:a="http://schemas.openxmlformats.org/drawingml/2006/main">
             <a:r>
-              <a:t>屏显核对：</a:t>
-            </a:r>
-          </a:p>
-          <a:p xmlns:a="http://schemas.openxmlformats.org/drawingml/2006/main">
-            <a:r>
-              <a:t>课堂收口为三件工件：</a:t>
+              <a:t>学生动作：</a:t>
+            </a:r>
+          </a:p>
+          <a:p xmlns:a="http://schemas.openxmlformats.org/drawingml/2006/main">
+            <a:r>
+              <a:t>让学生对照九步，标注自己已跑通哪几步、还缺哪几步。</a:t>
             </a:r>
           </a:p>
           <a:p xmlns:a="http://schemas.openxmlformats.org/drawingml/2006/main">
@@ -1967,17 +1447,7 @@
           </a:p>
           <a:p xmlns:a="http://schemas.openxmlformats.org/drawingml/2006/main">
             <a:r>
-              <a:t>结果对照：阅读卡 3/8，自由摘要 4/8。</a:t>
-            </a:r>
-          </a:p>
-          <a:p xmlns:a="http://schemas.openxmlformats.org/drawingml/2006/main">
-            <a:r>
-              <a:t>失败与局限：T02 受控失败、T03 负向结果分别保留。</a:t>
-            </a:r>
-          </a:p>
-          <a:p xmlns:a="http://schemas.openxmlformats.org/drawingml/2006/main">
-            <a:r>
-              <a:t>判断修订：Q1 包内方向一致；H1/A2 仍不能区分。</a:t>
+              <a:t>课堂安排：按本稿下方 90 分钟教学路由安排；此页不另占独立时段。</a:t>
             </a:r>
           </a:p>
           <a:p xmlns:a="http://schemas.openxmlformats.org/drawingml/2006/main">
@@ -1987,7 +1457,12 @@
           </a:p>
           <a:p xmlns:a="http://schemas.openxmlformats.org/drawingml/2006/main">
             <a:r>
-              <a:t>课后补全人工审核、有效性威胁、伦理与十项验证门自查。</a:t>
+              <a:t>[Sources]</a:t>
+            </a:r>
+          </a:p>
+          <a:p xmlns:a="http://schemas.openxmlformats.org/drawingml/2006/main">
+            <a:r>
+              <a:t>本页数值、论文反例与运行 ID 属课程虚构教学示例，不是实际学生实验结果。</a:t>
             </a:r>
           </a:p>
           <a:p xmlns:a="http://schemas.openxmlformats.org/drawingml/2006/main">
@@ -1997,12 +1472,7 @@
           </a:p>
           <a:p xmlns:a="http://schemas.openxmlformats.org/drawingml/2006/main">
             <a:r>
-              <a:t>教师讲述：</a:t>
-            </a:r>
-          </a:p>
-          <a:p xmlns:a="http://schemas.openxmlformats.org/drawingml/2006/main">
-            <a:r>
-              <a:t>贯穿案例延续第 10–12 课同一工作流。教师重点演示如何从课前已有结果形成对照、局限和判断修订；0.375/0.500 与图表论文反例均为虚构教学示例。学生不在课堂从零运行完整研究。</a:t>
+              <a:t>讲义 §五 贯穿案例；第 12 课工作流原型；第 9 课实验规格与 baseline。</a:t>
             </a:r>
           </a:p>
           <a:p xmlns:a="http://schemas.openxmlformats.org/drawingml/2006/main">
@@ -2012,82 +1482,7 @@
           </a:p>
           <a:p xmlns:a="http://schemas.openxmlformats.org/drawingml/2006/main">
             <a:r>
-              <a:t>学生动作：</a:t>
-            </a:r>
-          </a:p>
-          <a:p xmlns:a="http://schemas.openxmlformats.org/drawingml/2006/main">
-            <a:r>
-              <a:t>让学生对照九步，标注自己已跑通哪几步、还缺哪几步。</a:t>
-            </a:r>
-          </a:p>
-          <a:p xmlns:a="http://schemas.openxmlformats.org/drawingml/2006/main">
-            <a:r>
-              <a:t/>
-            </a:r>
-          </a:p>
-          <a:p xmlns:a="http://schemas.openxmlformats.org/drawingml/2006/main">
-            <a:r>
-              <a:t>来源与边界：</a:t>
-            </a:r>
-          </a:p>
-          <a:p xmlns:a="http://schemas.openxmlformats.org/drawingml/2006/main">
-            <a:r>
-              <a:t>本页数值、论文反例与运行 ID 属课程虚构教学示例，不是实际学生实验结果。</a:t>
-            </a:r>
-          </a:p>
-          <a:p xmlns:a="http://schemas.openxmlformats.org/drawingml/2006/main">
-            <a:r>
-              <a:t/>
-            </a:r>
-          </a:p>
-          <a:p xmlns:a="http://schemas.openxmlformats.org/drawingml/2006/main">
-            <a:r>
-              <a:t>讲义 §五 贯穿案例；第 12 课工作流原型；第 9 课实验规格与 baseline。</a:t>
-            </a:r>
-          </a:p>
-          <a:p xmlns:a="http://schemas.openxmlformats.org/drawingml/2006/main">
-            <a:r>
-              <a:t/>
-            </a:r>
-          </a:p>
-          <a:p xmlns:a="http://schemas.openxmlformats.org/drawingml/2006/main">
-            <a:r>
-              <a:t>---</a:t>
-            </a:r>
-          </a:p>
-          <a:p xmlns:a="http://schemas.openxmlformats.org/drawingml/2006/main">
-            <a:r>
-              <a:t/>
-            </a:r>
-          </a:p>
-          <a:p xmlns:a="http://schemas.openxmlformats.org/drawingml/2006/main">
-            <a:r>
-              <a:t>[Sources]</a:t>
-            </a:r>
-          </a:p>
-          <a:p xmlns:a="http://schemas.openxmlformats.org/drawingml/2006/main">
-            <a:r>
-              <a:t/>
-            </a:r>
-          </a:p>
-          <a:p xmlns:a="http://schemas.openxmlformats.org/drawingml/2006/main">
-            <a:r>
-              <a:t>- 本课 handout.md 与 slides.md</a:t>
-            </a:r>
-          </a:p>
-          <a:p xmlns:a="http://schemas.openxmlformats.org/drawingml/2006/main">
-            <a:r>
-              <a:t/>
-            </a:r>
-          </a:p>
-          <a:p xmlns:a="http://schemas.openxmlformats.org/drawingml/2006/main">
-            <a:r>
-              <a:t>- ../../course/reading-card-case.md</a:t>
-            </a:r>
-          </a:p>
-          <a:p xmlns:a="http://schemas.openxmlformats.org/drawingml/2006/main">
-            <a:r>
-              <a:t/>
+              <a:t>本课 handout.md、judgment-task.md；../../course/judgment-path.md。</a:t>
             </a:r>
           </a:p>
           <a:p xmlns:a="http://schemas.openxmlformats.org/drawingml/2006/main">
@@ -2162,7 +1557,7 @@
           <a:lstStyle xmlns:a="http://schemas.openxmlformats.org/drawingml/2006/main"/>
           <a:p xmlns:a="http://schemas.openxmlformats.org/drawingml/2006/main">
             <a:r>
-              <a:t>页面：P17 实践停留页：完成三件最低产出</a:t>
+              <a:t>页面：P17 本人项目：决定、核验与回写</a:t>
             </a:r>
           </a:p>
           <a:p xmlns:a="http://schemas.openxmlformats.org/drawingml/2006/main">
@@ -2172,7 +1567,12 @@
           </a:p>
           <a:p xmlns:a="http://schemas.openxmlformats.org/drawingml/2006/main">
             <a:r>
-              <a:t>讲义位置：本课讲义；见逐页母稿映射表</a:t>
+              <a:t>讲述与校准：</a:t>
+            </a:r>
+          </a:p>
+          <a:p xmlns:a="http://schemas.openxmlformats.org/drawingml/2006/main">
+            <a:r>
+              <a:t>第一段作决定并查证据；中点处理共性卡点；第二段实际回写并验证。条件加权差为 -1/8=-0.125；文本等权 card=(0+1/3+1)/3=4/9，free=1/2，差=-1/18。两种估计对象不同，不应混用。T03 负向必须保留；8 条条件不是 8 篇独立论文。丙计数正确但仍不足以支持全面采用/机制；公开构造数据只能支撑此材料的审计。工程题评价坏项拦截与正常项误拒，不能靠少处理记录改善指标。</a:t>
             </a:r>
           </a:p>
           <a:p xmlns:a="http://schemas.openxmlformats.org/drawingml/2006/main">
@@ -2182,17 +1582,12 @@
           </a:p>
           <a:p xmlns:a="http://schemas.openxmlformats.org/drawingml/2006/main">
             <a:r>
-              <a:t>屏显核对：</a:t>
-            </a:r>
-          </a:p>
-          <a:p xmlns:a="http://schemas.openxmlformats.org/drawingml/2006/main">
-            <a:r>
-              <a:t>```text</a:t>
-            </a:r>
-          </a:p>
-          <a:p xmlns:a="http://schemas.openxmlformats.org/drawingml/2006/main">
-            <a:r>
-              <a:t>实践停留页：完成三件最低产出</a:t>
+              <a:t>学生动作：</a:t>
+            </a:r>
+          </a:p>
+          <a:p xmlns:a="http://schemas.openxmlformats.org/drawingml/2006/main">
+            <a:r>
+              <a:t>在同一输入上比较 baseline 与实质修改版，分别报告正确处理、误拒、失败和成本；实际执行证据与构造输出分开。给出结论强度与一项采用/修订/停止决定。</a:t>
             </a:r>
           </a:p>
           <a:p xmlns:a="http://schemas.openxmlformats.org/drawingml/2006/main">
@@ -2202,42 +1597,7 @@
           </a:p>
           <a:p xmlns:a="http://schemas.openxmlformats.org/drawingml/2006/main">
             <a:r>
-              <a:t>1</a:t>
-            </a:r>
-          </a:p>
-          <a:p xmlns:a="http://schemas.openxmlformats.org/drawingml/2006/main">
-            <a:r>
-              <a:t>一张对照｜输入、条件、运行数、指标、结果</a:t>
-            </a:r>
-          </a:p>
-          <a:p xmlns:a="http://schemas.openxmlformats.org/drawingml/2006/main">
-            <a:r>
-              <a:t>2</a:t>
-            </a:r>
-          </a:p>
-          <a:p xmlns:a="http://schemas.openxmlformats.org/drawingml/2006/main">
-            <a:r>
-              <a:t>一项失败或局限｜表现、根因、边界、下一步</a:t>
-            </a:r>
-          </a:p>
-          <a:p xmlns:a="http://schemas.openxmlformats.org/drawingml/2006/main">
-            <a:r>
-              <a:t>3</a:t>
-            </a:r>
-          </a:p>
-          <a:p xmlns:a="http://schemas.openxmlformats.org/drawingml/2006/main">
-            <a:r>
-              <a:t>一条判断修订｜支持 / 反驳 / 仍不能判断</a:t>
-            </a:r>
-          </a:p>
-          <a:p xmlns:a="http://schemas.openxmlformats.org/drawingml/2006/main">
-            <a:r>
-              <a:t>evaluation-report.md</a:t>
-            </a:r>
-          </a:p>
-          <a:p xmlns:a="http://schemas.openxmlformats.org/drawingml/2006/main">
-            <a:r>
-              <a:t>完成标志</a:t>
+              <a:t>课堂安排：按本稿下方 90 分钟教学路由安排；此页不另占独立时段。</a:t>
             </a:r>
           </a:p>
           <a:p xmlns:a="http://schemas.openxmlformats.org/drawingml/2006/main">
@@ -2247,17 +1607,12 @@
           </a:p>
           <a:p xmlns:a="http://schemas.openxmlformats.org/drawingml/2006/main">
             <a:r>
-              <a:t>三项都有证据项</a:t>
-            </a:r>
-          </a:p>
-          <a:p xmlns:a="http://schemas.openxmlformats.org/drawingml/2006/main">
-            <a:r>
-              <a:t>并保留未决解释</a:t>
-            </a:r>
-          </a:p>
-          <a:p xmlns:a="http://schemas.openxmlformats.org/drawingml/2006/main">
-            <a:r>
-              <a:t>```</a:t>
+              <a:t>[Sources]</a:t>
+            </a:r>
+          </a:p>
+          <a:p xmlns:a="http://schemas.openxmlformats.org/drawingml/2006/main">
+            <a:r>
+              <a:t>讲义 §六·3；[project-template.md](../../course/project-template.md)；[assignments.md](../../course/assignments.md) Checkpoint 3。</a:t>
             </a:r>
           </a:p>
           <a:p xmlns:a="http://schemas.openxmlformats.org/drawingml/2006/main">
@@ -2267,97 +1622,7 @@
           </a:p>
           <a:p xmlns:a="http://schemas.openxmlformats.org/drawingml/2006/main">
             <a:r>
-              <a:t>屏显来源页脚：来源：lesson-13/slides.md；课程工件与讲义见 speaker notes。</a:t>
-            </a:r>
-          </a:p>
-          <a:p xmlns:a="http://schemas.openxmlformats.org/drawingml/2006/main">
-            <a:r>
-              <a:t/>
-            </a:r>
-          </a:p>
-          <a:p xmlns:a="http://schemas.openxmlformats.org/drawingml/2006/main">
-            <a:r>
-              <a:t>教师讲述：</a:t>
-            </a:r>
-          </a:p>
-          <a:p xmlns:a="http://schemas.openxmlformats.org/drawingml/2006/main">
-            <a:r>
-              <a:t>第一段先完成对照表与结果状态；教师中点点评统一纠正不公平对照、字段填满率和机制过推。第二段补一项失败/局限并修订一条判断。不能读取个人结果者使用教师预置同口径虚构数据包。</a:t>
-            </a:r>
-          </a:p>
-          <a:p xmlns:a="http://schemas.openxmlformats.org/drawingml/2006/main">
-            <a:r>
-              <a:t/>
-            </a:r>
-          </a:p>
-          <a:p xmlns:a="http://schemas.openxmlformats.org/drawingml/2006/main">
-            <a:r>
-              <a:t>学生动作：</a:t>
-            </a:r>
-          </a:p>
-          <a:p xmlns:a="http://schemas.openxmlformats.org/drawingml/2006/main">
-            <a:r>
-              <a:t>个人实践第一段后暂停，听取教师中点点评，再继续第二段。</a:t>
-            </a:r>
-          </a:p>
-          <a:p xmlns:a="http://schemas.openxmlformats.org/drawingml/2006/main">
-            <a:r>
-              <a:t/>
-            </a:r>
-          </a:p>
-          <a:p xmlns:a="http://schemas.openxmlformats.org/drawingml/2006/main">
-            <a:r>
-              <a:t>来源与边界：</a:t>
-            </a:r>
-          </a:p>
-          <a:p xmlns:a="http://schemas.openxmlformats.org/drawingml/2006/main">
-            <a:r>
-              <a:t>讲义 §六·3；[project-template.md](../../course/project-template.md)；[assignments.md](../../course/assignments.md) Checkpoint 3。</a:t>
-            </a:r>
-          </a:p>
-          <a:p xmlns:a="http://schemas.openxmlformats.org/drawingml/2006/main">
-            <a:r>
-              <a:t/>
-            </a:r>
-          </a:p>
-          <a:p xmlns:a="http://schemas.openxmlformats.org/drawingml/2006/main">
-            <a:r>
-              <a:t>---</a:t>
-            </a:r>
-          </a:p>
-          <a:p xmlns:a="http://schemas.openxmlformats.org/drawingml/2006/main">
-            <a:r>
-              <a:t/>
-            </a:r>
-          </a:p>
-          <a:p xmlns:a="http://schemas.openxmlformats.org/drawingml/2006/main">
-            <a:r>
-              <a:t>[Sources]</a:t>
-            </a:r>
-          </a:p>
-          <a:p xmlns:a="http://schemas.openxmlformats.org/drawingml/2006/main">
-            <a:r>
-              <a:t/>
-            </a:r>
-          </a:p>
-          <a:p xmlns:a="http://schemas.openxmlformats.org/drawingml/2006/main">
-            <a:r>
-              <a:t>- 本课 handout.md 与 slides.md</a:t>
-            </a:r>
-          </a:p>
-          <a:p xmlns:a="http://schemas.openxmlformats.org/drawingml/2006/main">
-            <a:r>
-              <a:t/>
-            </a:r>
-          </a:p>
-          <a:p xmlns:a="http://schemas.openxmlformats.org/drawingml/2006/main">
-            <a:r>
-              <a:t>- ../../course/reading-card-case.md</a:t>
-            </a:r>
-          </a:p>
-          <a:p xmlns:a="http://schemas.openxmlformats.org/drawingml/2006/main">
-            <a:r>
-              <a:t/>
+              <a:t>本课 handout.md、judgment-task.md；../../course/judgment-path.md。教学构造仅用于方法判断；本人结果以实际记录为准。</a:t>
             </a:r>
           </a:p>
           <a:p xmlns:a="http://schemas.openxmlformats.org/drawingml/2006/main">
@@ -2442,7 +1707,12 @@
           </a:p>
           <a:p xmlns:a="http://schemas.openxmlformats.org/drawingml/2006/main">
             <a:r>
-              <a:t>讲义位置：本课讲义；见逐页母稿映射表</a:t>
+              <a:t>讲述与校准：</a:t>
+            </a:r>
+          </a:p>
+          <a:p xmlns:a="http://schemas.openxmlformats.org/drawingml/2006/main">
+            <a:r>
+              <a:t>替换原同伴互查中的一条问题，不新增活动或评分：另一项目多次查看所谓最终测试并改方法，问角色、结论和补证。答案：反馈已参与开发，只能报告限定探索结果；冻结后用未参与开发证据验证。</a:t>
             </a:r>
           </a:p>
           <a:p xmlns:a="http://schemas.openxmlformats.org/drawingml/2006/main">
@@ -2452,17 +1722,7 @@
           </a:p>
           <a:p xmlns:a="http://schemas.openxmlformats.org/drawingml/2006/main">
             <a:r>
-              <a:t>屏显核对：</a:t>
-            </a:r>
-          </a:p>
-          <a:p xmlns:a="http://schemas.openxmlformats.org/drawingml/2006/main">
-            <a:r>
-              <a:t>```text</a:t>
-            </a:r>
-          </a:p>
-          <a:p xmlns:a="http://schemas.openxmlformats.org/drawingml/2006/main">
-            <a:r>
-              <a:t>同伴只问证据是否足够</a:t>
+              <a:t>每位作者简述对照、失败/局限和判断修订；同伴只问证据是否足以支持该结果状态。作者记录采纳、澄清、补证、保留异议或暂缓及真实理由，不形成共同提交。</a:t>
             </a:r>
           </a:p>
           <a:p xmlns:a="http://schemas.openxmlformats.org/drawingml/2006/main">
@@ -2472,52 +1732,12 @@
           </a:p>
           <a:p xmlns:a="http://schemas.openxmlformats.org/drawingml/2006/main">
             <a:r>
-              <a:t>作者的三项最低产出</a:t>
-            </a:r>
-          </a:p>
-          <a:p xmlns:a="http://schemas.openxmlformats.org/drawingml/2006/main">
-            <a:r>
-              <a:t>结果对照｜口径可比吗</a:t>
-            </a:r>
-          </a:p>
-          <a:p xmlns:a="http://schemas.openxmlformats.org/drawingml/2006/main">
-            <a:r>
-              <a:t>失败 / 局限｜根因具体吗</a:t>
-            </a:r>
-          </a:p>
-          <a:p xmlns:a="http://schemas.openxmlformats.org/drawingml/2006/main">
-            <a:r>
-              <a:t>判断修订｜证据支持三态吗</a:t>
-            </a:r>
-          </a:p>
-          <a:p xmlns:a="http://schemas.openxmlformats.org/drawingml/2006/main">
-            <a:r>
-              <a:t>同伴问题</a:t>
-            </a:r>
-          </a:p>
-          <a:p xmlns:a="http://schemas.openxmlformats.org/drawingml/2006/main">
-            <a:r>
-              <a:t>契约 / 评价 / 证据 / 伦理</a:t>
-            </a:r>
-          </a:p>
-          <a:p xmlns:a="http://schemas.openxmlformats.org/drawingml/2006/main">
-            <a:r>
-              <a:t>作者处理</a:t>
-            </a:r>
-          </a:p>
-          <a:p xmlns:a="http://schemas.openxmlformats.org/drawingml/2006/main">
-            <a:r>
-              <a:t>采纳 / 澄清 / 补证</a:t>
-            </a:r>
-          </a:p>
-          <a:p xmlns:a="http://schemas.openxmlformats.org/drawingml/2006/main">
-            <a:r>
-              <a:t>保留异议 / 暂缓</a:t>
-            </a:r>
-          </a:p>
-          <a:p xmlns:a="http://schemas.openxmlformats.org/drawingml/2006/main">
-            <a:r>
-              <a:t>```</a:t>
+              <a:t>学生动作：</a:t>
+            </a:r>
+          </a:p>
+          <a:p xmlns:a="http://schemas.openxmlformats.org/drawingml/2006/main">
+            <a:r>
+              <a:t>同伴互查；人数为奇数时组成三人组。</a:t>
             </a:r>
           </a:p>
           <a:p xmlns:a="http://schemas.openxmlformats.org/drawingml/2006/main">
@@ -2527,7 +1747,7 @@
           </a:p>
           <a:p xmlns:a="http://schemas.openxmlformats.org/drawingml/2006/main">
             <a:r>
-              <a:t>屏显来源页脚：来源：lesson-13/slides.md；课程工件与讲义见 speaker notes。</a:t>
+              <a:t>课堂安排：按本稿下方 90 分钟教学路由安排；此页不另占独立时段。</a:t>
             </a:r>
           </a:p>
           <a:p xmlns:a="http://schemas.openxmlformats.org/drawingml/2006/main">
@@ -2537,12 +1757,12 @@
           </a:p>
           <a:p xmlns:a="http://schemas.openxmlformats.org/drawingml/2006/main">
             <a:r>
-              <a:t>教师讲述：</a:t>
-            </a:r>
-          </a:p>
-          <a:p xmlns:a="http://schemas.openxmlformats.org/drawingml/2006/main">
-            <a:r>
-              <a:t>每位作者简述对照、失败/局限和判断修订；同伴只问证据是否足以支持该结果状态。作者记录采纳、澄清、补证、保留异议或暂缓及真实理由，不形成共同提交。</a:t>
+              <a:t>[Sources]</a:t>
+            </a:r>
+          </a:p>
+          <a:p xmlns:a="http://schemas.openxmlformats.org/drawingml/2006/main">
+            <a:r>
+              <a:t>同伴反馈为形成性活动，不单独计分，不共同提交（[assignments.md](../../course/assignments.md)）。</a:t>
             </a:r>
           </a:p>
           <a:p xmlns:a="http://schemas.openxmlformats.org/drawingml/2006/main">
@@ -2552,72 +1772,7 @@
           </a:p>
           <a:p xmlns:a="http://schemas.openxmlformats.org/drawingml/2006/main">
             <a:r>
-              <a:t>学生动作：</a:t>
-            </a:r>
-          </a:p>
-          <a:p xmlns:a="http://schemas.openxmlformats.org/drawingml/2006/main">
-            <a:r>
-              <a:t>同伴互查；人数为奇数时组成三人组。</a:t>
-            </a:r>
-          </a:p>
-          <a:p xmlns:a="http://schemas.openxmlformats.org/drawingml/2006/main">
-            <a:r>
-              <a:t/>
-            </a:r>
-          </a:p>
-          <a:p xmlns:a="http://schemas.openxmlformats.org/drawingml/2006/main">
-            <a:r>
-              <a:t>来源与边界：</a:t>
-            </a:r>
-          </a:p>
-          <a:p xmlns:a="http://schemas.openxmlformats.org/drawingml/2006/main">
-            <a:r>
-              <a:t>同伴反馈为形成性活动，不单独计分，不共同提交（[assignments.md](../../course/assignments.md)）。</a:t>
-            </a:r>
-          </a:p>
-          <a:p xmlns:a="http://schemas.openxmlformats.org/drawingml/2006/main">
-            <a:r>
-              <a:t/>
-            </a:r>
-          </a:p>
-          <a:p xmlns:a="http://schemas.openxmlformats.org/drawingml/2006/main">
-            <a:r>
-              <a:t>---</a:t>
-            </a:r>
-          </a:p>
-          <a:p xmlns:a="http://schemas.openxmlformats.org/drawingml/2006/main">
-            <a:r>
-              <a:t/>
-            </a:r>
-          </a:p>
-          <a:p xmlns:a="http://schemas.openxmlformats.org/drawingml/2006/main">
-            <a:r>
-              <a:t>[Sources]</a:t>
-            </a:r>
-          </a:p>
-          <a:p xmlns:a="http://schemas.openxmlformats.org/drawingml/2006/main">
-            <a:r>
-              <a:t/>
-            </a:r>
-          </a:p>
-          <a:p xmlns:a="http://schemas.openxmlformats.org/drawingml/2006/main">
-            <a:r>
-              <a:t>- 本课 handout.md 与 slides.md</a:t>
-            </a:r>
-          </a:p>
-          <a:p xmlns:a="http://schemas.openxmlformats.org/drawingml/2006/main">
-            <a:r>
-              <a:t/>
-            </a:r>
-          </a:p>
-          <a:p xmlns:a="http://schemas.openxmlformats.org/drawingml/2006/main">
-            <a:r>
-              <a:t>- ../../course/reading-card-case.md</a:t>
-            </a:r>
-          </a:p>
-          <a:p xmlns:a="http://schemas.openxmlformats.org/drawingml/2006/main">
-            <a:r>
-              <a:t/>
+              <a:t>本课 handout.md、judgment-task.md；../../course/judgment-path.md。</a:t>
             </a:r>
           </a:p>
           <a:p xmlns:a="http://schemas.openxmlformats.org/drawingml/2006/main">
@@ -2702,7 +1857,12 @@
           </a:p>
           <a:p xmlns:a="http://schemas.openxmlformats.org/drawingml/2006/main">
             <a:r>
-              <a:t>讲义位置：本课讲义；见逐页母稿映射表</a:t>
+              <a:t>讲述与校准：</a:t>
+            </a:r>
+          </a:p>
+          <a:p xmlns:a="http://schemas.openxmlformats.org/drawingml/2006/main">
+            <a:r>
+              <a:t>回收评价、结果映射、失败复盘与验证门的关系。本页不新增任务。</a:t>
             </a:r>
           </a:p>
           <a:p xmlns:a="http://schemas.openxmlformats.org/drawingml/2006/main">
@@ -2712,17 +1872,12 @@
           </a:p>
           <a:p xmlns:a="http://schemas.openxmlformats.org/drawingml/2006/main">
             <a:r>
-              <a:t>屏显核对：</a:t>
-            </a:r>
-          </a:p>
-          <a:p xmlns:a="http://schemas.openxmlformats.org/drawingml/2006/main">
-            <a:r>
-              <a:t>```text</a:t>
-            </a:r>
-          </a:p>
-          <a:p xmlns:a="http://schemas.openxmlformats.org/drawingml/2006/main">
-            <a:r>
-              <a:t>本讲知识点总结</a:t>
+              <a:t>学生动作：</a:t>
+            </a:r>
+          </a:p>
+          <a:p xmlns:a="http://schemas.openxmlformats.org/drawingml/2006/main">
+            <a:r>
+              <a:t>学生指出自己验证门材料中最需要补齐的一项。</a:t>
             </a:r>
           </a:p>
           <a:p xmlns:a="http://schemas.openxmlformats.org/drawingml/2006/main">
@@ -2732,62 +1887,7 @@
           </a:p>
           <a:p xmlns:a="http://schemas.openxmlformats.org/drawingml/2006/main">
             <a:r>
-              <a:t>固定对照</a:t>
-            </a:r>
-          </a:p>
-          <a:p xmlns:a="http://schemas.openxmlformats.org/drawingml/2006/main">
-            <a:r>
-              <a:t>→</a:t>
-            </a:r>
-          </a:p>
-          <a:p xmlns:a="http://schemas.openxmlformats.org/drawingml/2006/main">
-            <a:r>
-              <a:t>本讲输入</a:t>
-            </a:r>
-          </a:p>
-          <a:p xmlns:a="http://schemas.openxmlformats.org/drawingml/2006/main">
-            <a:r>
-              <a:t>结果三态</a:t>
-            </a:r>
-          </a:p>
-          <a:p xmlns:a="http://schemas.openxmlformats.org/drawingml/2006/main">
-            <a:r>
-              <a:t>→</a:t>
-            </a:r>
-          </a:p>
-          <a:p xmlns:a="http://schemas.openxmlformats.org/drawingml/2006/main">
-            <a:r>
-              <a:t>本讲执行</a:t>
-            </a:r>
-          </a:p>
-          <a:p xmlns:a="http://schemas.openxmlformats.org/drawingml/2006/main">
-            <a:r>
-              <a:t>失败审计</a:t>
-            </a:r>
-          </a:p>
-          <a:p xmlns:a="http://schemas.openxmlformats.org/drawingml/2006/main">
-            <a:r>
-              <a:t>→</a:t>
-            </a:r>
-          </a:p>
-          <a:p xmlns:a="http://schemas.openxmlformats.org/drawingml/2006/main">
-            <a:r>
-              <a:t>本讲证据</a:t>
-            </a:r>
-          </a:p>
-          <a:p xmlns:a="http://schemas.openxmlformats.org/drawingml/2006/main">
-            <a:r>
-              <a:t>验证门</a:t>
-            </a:r>
-          </a:p>
-          <a:p xmlns:a="http://schemas.openxmlformats.org/drawingml/2006/main">
-            <a:r>
-              <a:t>下一步</a:t>
-            </a:r>
-          </a:p>
-          <a:p xmlns:a="http://schemas.openxmlformats.org/drawingml/2006/main">
-            <a:r>
-              <a:t>```</a:t>
+              <a:t>课堂安排：按本稿下方 90 分钟教学路由安排；此页不另占独立时段。</a:t>
             </a:r>
           </a:p>
           <a:p xmlns:a="http://schemas.openxmlformats.org/drawingml/2006/main">
@@ -2797,7 +1897,12 @@
           </a:p>
           <a:p xmlns:a="http://schemas.openxmlformats.org/drawingml/2006/main">
             <a:r>
-              <a:t>屏显来源页脚：来源：lesson-13/slides.md；课程工件与讲义见 speaker notes。</a:t>
+              <a:t>[Sources]</a:t>
+            </a:r>
+          </a:p>
+          <a:p xmlns:a="http://schemas.openxmlformats.org/drawingml/2006/main">
+            <a:r>
+              <a:t>[handout.md](./handout.md) §二-§六；[assignments.md](../../course/assignments.md) Checkpoint 3。</a:t>
             </a:r>
           </a:p>
           <a:p xmlns:a="http://schemas.openxmlformats.org/drawingml/2006/main">
@@ -2807,87 +1912,7 @@
           </a:p>
           <a:p xmlns:a="http://schemas.openxmlformats.org/drawingml/2006/main">
             <a:r>
-              <a:t>教师讲述：</a:t>
-            </a:r>
-          </a:p>
-          <a:p xmlns:a="http://schemas.openxmlformats.org/drawingml/2006/main">
-            <a:r>
-              <a:t>回收评价、结果映射、失败复盘与验证门的关系。本页不新增任务。</a:t>
-            </a:r>
-          </a:p>
-          <a:p xmlns:a="http://schemas.openxmlformats.org/drawingml/2006/main">
-            <a:r>
-              <a:t/>
-            </a:r>
-          </a:p>
-          <a:p xmlns:a="http://schemas.openxmlformats.org/drawingml/2006/main">
-            <a:r>
-              <a:t>学生动作：</a:t>
-            </a:r>
-          </a:p>
-          <a:p xmlns:a="http://schemas.openxmlformats.org/drawingml/2006/main">
-            <a:r>
-              <a:t>学生指出自己验证门材料中最需要补齐的一项。</a:t>
-            </a:r>
-          </a:p>
-          <a:p xmlns:a="http://schemas.openxmlformats.org/drawingml/2006/main">
-            <a:r>
-              <a:t/>
-            </a:r>
-          </a:p>
-          <a:p xmlns:a="http://schemas.openxmlformats.org/drawingml/2006/main">
-            <a:r>
-              <a:t>来源与边界：</a:t>
-            </a:r>
-          </a:p>
-          <a:p xmlns:a="http://schemas.openxmlformats.org/drawingml/2006/main">
-            <a:r>
-              <a:t>[handout.md](./handout.md) §二-§六；[assignments.md](../../course/assignments.md) Checkpoint 3。</a:t>
-            </a:r>
-          </a:p>
-          <a:p xmlns:a="http://schemas.openxmlformats.org/drawingml/2006/main">
-            <a:r>
-              <a:t/>
-            </a:r>
-          </a:p>
-          <a:p xmlns:a="http://schemas.openxmlformats.org/drawingml/2006/main">
-            <a:r>
-              <a:t>---</a:t>
-            </a:r>
-          </a:p>
-          <a:p xmlns:a="http://schemas.openxmlformats.org/drawingml/2006/main">
-            <a:r>
-              <a:t/>
-            </a:r>
-          </a:p>
-          <a:p xmlns:a="http://schemas.openxmlformats.org/drawingml/2006/main">
-            <a:r>
-              <a:t>[Sources]</a:t>
-            </a:r>
-          </a:p>
-          <a:p xmlns:a="http://schemas.openxmlformats.org/drawingml/2006/main">
-            <a:r>
-              <a:t/>
-            </a:r>
-          </a:p>
-          <a:p xmlns:a="http://schemas.openxmlformats.org/drawingml/2006/main">
-            <a:r>
-              <a:t>- 本课 handout.md 与 slides.md</a:t>
-            </a:r>
-          </a:p>
-          <a:p xmlns:a="http://schemas.openxmlformats.org/drawingml/2006/main">
-            <a:r>
-              <a:t/>
-            </a:r>
-          </a:p>
-          <a:p xmlns:a="http://schemas.openxmlformats.org/drawingml/2006/main">
-            <a:r>
-              <a:t>- ../../course/reading-card-case.md</a:t>
-            </a:r>
-          </a:p>
-          <a:p xmlns:a="http://schemas.openxmlformats.org/drawingml/2006/main">
-            <a:r>
-              <a:t/>
+              <a:t>本课 handout.md、judgment-task.md；../../course/judgment-path.md。</a:t>
             </a:r>
           </a:p>
           <a:p xmlns:a="http://schemas.openxmlformats.org/drawingml/2006/main">
@@ -2972,7 +1997,12 @@
           </a:p>
           <a:p xmlns:a="http://schemas.openxmlformats.org/drawingml/2006/main">
             <a:r>
-              <a:t>讲义位置：本课讲义；见逐页母稿映射表</a:t>
+              <a:t>讲述与校准：</a:t>
+            </a:r>
+          </a:p>
+          <a:p xmlns:a="http://schemas.openxmlformats.org/drawingml/2006/main">
+            <a:r>
+              <a:t>回扣第 10-12 课：任务契约、执行循环和工作流原型让"做什么"和"怎么做"可见，但没有回答"是否改善了目标科研动作""结果支持还是反驳假设""失败怎么处理"。本课进入阶段七成案+评价，把原型变成验证门可检查材料。</a:t>
             </a:r>
           </a:p>
           <a:p xmlns:a="http://schemas.openxmlformats.org/drawingml/2006/main">
@@ -2982,17 +2012,12 @@
           </a:p>
           <a:p xmlns:a="http://schemas.openxmlformats.org/drawingml/2006/main">
             <a:r>
-              <a:t>屏显核对：</a:t>
-            </a:r>
-          </a:p>
-          <a:p xmlns:a="http://schemas.openxmlformats.org/drawingml/2006/main">
-            <a:r>
-              <a:t>```text</a:t>
-            </a:r>
-          </a:p>
-          <a:p xmlns:a="http://schemas.openxmlformats.org/drawingml/2006/main">
-            <a:r>
-              <a:t>工作流原型还缺评价闭环</a:t>
+              <a:t>学生动作：</a:t>
+            </a:r>
+          </a:p>
+          <a:p xmlns:a="http://schemas.openxmlformats.org/drawingml/2006/main">
+            <a:r>
+              <a:t>快问：你第 12 课的工作流原型跑过几次？有没有 baseline 对比？只听回答，不评价。</a:t>
             </a:r>
           </a:p>
           <a:p xmlns:a="http://schemas.openxmlformats.org/drawingml/2006/main">
@@ -3002,42 +2027,7 @@
           </a:p>
           <a:p xmlns:a="http://schemas.openxmlformats.org/drawingml/2006/main">
             <a:r>
-              <a:t>agent-workflow/</a:t>
-            </a:r>
-          </a:p>
-          <a:p xmlns:a="http://schemas.openxmlformats.org/drawingml/2006/main">
-            <a:r>
-              <a:t>contract.md          ✓</a:t>
-            </a:r>
-          </a:p>
-          <a:p xmlns:a="http://schemas.openxmlformats.org/drawingml/2006/main">
-            <a:r>
-              <a:t>runs/                ✓</a:t>
-            </a:r>
-          </a:p>
-          <a:p xmlns:a="http://schemas.openxmlformats.org/drawingml/2006/main">
-            <a:r>
-              <a:t>failure-trace.jsonl  ✓</a:t>
-            </a:r>
-          </a:p>
-          <a:p xmlns:a="http://schemas.openxmlformats.org/drawingml/2006/main">
-            <a:r>
-              <a:t>baseline-report.md   ?</a:t>
-            </a:r>
-          </a:p>
-          <a:p xmlns:a="http://schemas.openxmlformats.org/drawingml/2006/main">
-            <a:r>
-              <a:t>evaluation-report.md ?</a:t>
-            </a:r>
-          </a:p>
-          <a:p xmlns:a="http://schemas.openxmlformats.org/drawingml/2006/main">
-            <a:r>
-              <a:t>judgment-revision.md ?</a:t>
-            </a:r>
-          </a:p>
-          <a:p xmlns:a="http://schemas.openxmlformats.org/drawingml/2006/main">
-            <a:r>
-              <a:t>本课补齐</a:t>
+              <a:t>课堂安排：按本稿下方 90 分钟教学路由安排；此页不另占独立时段。</a:t>
             </a:r>
           </a:p>
           <a:p xmlns:a="http://schemas.openxmlformats.org/drawingml/2006/main">
@@ -3047,22 +2037,12 @@
           </a:p>
           <a:p xmlns:a="http://schemas.openxmlformats.org/drawingml/2006/main">
             <a:r>
-              <a:t>一张对照</a:t>
-            </a:r>
-          </a:p>
-          <a:p xmlns:a="http://schemas.openxmlformats.org/drawingml/2006/main">
-            <a:r>
-              <a:t>一项失败 / 局限</a:t>
-            </a:r>
-          </a:p>
-          <a:p xmlns:a="http://schemas.openxmlformats.org/drawingml/2006/main">
-            <a:r>
-              <a:t>一条判断修订</a:t>
-            </a:r>
-          </a:p>
-          <a:p xmlns:a="http://schemas.openxmlformats.org/drawingml/2006/main">
-            <a:r>
-              <a:t>```</a:t>
+              <a:t>[Sources]</a:t>
+            </a:r>
+          </a:p>
+          <a:p xmlns:a="http://schemas.openxmlformats.org/drawingml/2006/main">
+            <a:r>
+              <a:t>回扣第 10-12 课讲义；[AGENTS.md](../../AGENTS.md) 证据标准。</a:t>
             </a:r>
           </a:p>
           <a:p xmlns:a="http://schemas.openxmlformats.org/drawingml/2006/main">
@@ -3072,152 +2052,7 @@
           </a:p>
           <a:p xmlns:a="http://schemas.openxmlformats.org/drawingml/2006/main">
             <a:r>
-              <a:t>屏显来源页脚：来源：lesson-13/slides.md；课程工件与讲义见 speaker notes。</a:t>
-            </a:r>
-          </a:p>
-          <a:p xmlns:a="http://schemas.openxmlformats.org/drawingml/2006/main">
-            <a:r>
-              <a:t/>
-            </a:r>
-          </a:p>
-          <a:p xmlns:a="http://schemas.openxmlformats.org/drawingml/2006/main">
-            <a:r>
-              <a:t>教师讲述：</a:t>
-            </a:r>
-          </a:p>
-          <a:p xmlns:a="http://schemas.openxmlformats.org/drawingml/2006/main">
-            <a:r>
-              <a:t>回扣第 10-12 课：任务契约、执行循环和工作流原型让"做什么"和"怎么做"可见，但没有回答"是否改善了目标科研动作""结果支持还是反驳假设""失败怎么处理"。本课进入阶段七成案+评价，把原型变成验证门可检查材料。</a:t>
-            </a:r>
-          </a:p>
-          <a:p xmlns:a="http://schemas.openxmlformats.org/drawingml/2006/main">
-            <a:r>
-              <a:t/>
-            </a:r>
-          </a:p>
-          <a:p xmlns:a="http://schemas.openxmlformats.org/drawingml/2006/main">
-            <a:r>
-              <a:t>学生动作：</a:t>
-            </a:r>
-          </a:p>
-          <a:p xmlns:a="http://schemas.openxmlformats.org/drawingml/2006/main">
-            <a:r>
-              <a:t>快问：你第 12 课的工作流原型跑过几次？有没有 baseline 对比？只听回答，不评价。</a:t>
-            </a:r>
-          </a:p>
-          <a:p xmlns:a="http://schemas.openxmlformats.org/drawingml/2006/main">
-            <a:r>
-              <a:t/>
-            </a:r>
-          </a:p>
-          <a:p xmlns:a="http://schemas.openxmlformats.org/drawingml/2006/main">
-            <a:r>
-              <a:t>本课板书、诊断与串词：</a:t>
-            </a:r>
-          </a:p>
-          <a:p xmlns:a="http://schemas.openxmlformats.org/drawingml/2006/main">
-            <a:r>
-              <a:t>本节替换同类口头提示，不增加既有时段。开场诊断嵌入现有开场/回顾，后续再沿原实践时段操作。</a:t>
-            </a:r>
-          </a:p>
-          <a:p xmlns:a="http://schemas.openxmlformats.org/drawingml/2006/main">
-            <a:r>
-              <a:t/>
-            </a:r>
-          </a:p>
-          <a:p xmlns:a="http://schemas.openxmlformats.org/drawingml/2006/main">
-            <a:r>
-              <a:t>- **板书主线**：观察 → 候选原因 → 诊断证据 → 新版本。</a:t>
-            </a:r>
-          </a:p>
-          <a:p xmlns:a="http://schemas.openxmlformats.org/drawingml/2006/main">
-            <a:r>
-              <a:t>- **诊断问题**：T03更差，能否直接认定图表提取是根因？</a:t>
-            </a:r>
-          </a:p>
-          <a:p xmlns:a="http://schemas.openxmlformats.org/drawingml/2006/main">
-            <a:r>
-              <a:t>- **预期回答**：只能列候选原因，需过程检查或针对性对照。</a:t>
-            </a:r>
-          </a:p>
-          <a:p xmlns:a="http://schemas.openxmlformats.org/drawingml/2006/main">
-            <a:r>
-              <a:t>- **常见误答后的追问**：若删负例，要求恢复并解释它怎样限制主张。</a:t>
-            </a:r>
-          </a:p>
-          <a:p xmlns:a="http://schemas.openxmlformats.org/drawingml/2006/main">
-            <a:r>
-              <a:t>- **过渡串词**：“结果与边界清楚之后，下一课把它写成能反查的段落。”</a:t>
-            </a:r>
-          </a:p>
-          <a:p xmlns:a="http://schemas.openxmlformats.org/drawingml/2006/main">
-            <a:r>
-              <a:t>- **当堂最小产出**：一张对照、一项失败/局限、一条判断修订。</a:t>
-            </a:r>
-          </a:p>
-          <a:p xmlns:a="http://schemas.openxmlformats.org/drawingml/2006/main">
-            <a:r>
-              <a:t>- **退出记录**：写“已完成的动作、本人项目仍缺的证据/工件、下次补齐位置”。使用教师包时标明课堂方法练习，不能据此宣称本人研究门通过；正式提交课次仍为第 6、9、13、16 课。</a:t>
-            </a:r>
-          </a:p>
-          <a:p xmlns:a="http://schemas.openxmlformats.org/drawingml/2006/main">
-            <a:r>
-              <a:t/>
-            </a:r>
-          </a:p>
-          <a:p xmlns:a="http://schemas.openxmlformats.org/drawingml/2006/main">
-            <a:r>
-              <a:t>来源与边界：</a:t>
-            </a:r>
-          </a:p>
-          <a:p xmlns:a="http://schemas.openxmlformats.org/drawingml/2006/main">
-            <a:r>
-              <a:t>回扣第 10-12 课讲义；[AGENTS.md](../../AGENTS.md) 证据标准。</a:t>
-            </a:r>
-          </a:p>
-          <a:p xmlns:a="http://schemas.openxmlformats.org/drawingml/2006/main">
-            <a:r>
-              <a:t/>
-            </a:r>
-          </a:p>
-          <a:p xmlns:a="http://schemas.openxmlformats.org/drawingml/2006/main">
-            <a:r>
-              <a:t>---</a:t>
-            </a:r>
-          </a:p>
-          <a:p xmlns:a="http://schemas.openxmlformats.org/drawingml/2006/main">
-            <a:r>
-              <a:t/>
-            </a:r>
-          </a:p>
-          <a:p xmlns:a="http://schemas.openxmlformats.org/drawingml/2006/main">
-            <a:r>
-              <a:t>[Sources]</a:t>
-            </a:r>
-          </a:p>
-          <a:p xmlns:a="http://schemas.openxmlformats.org/drawingml/2006/main">
-            <a:r>
-              <a:t/>
-            </a:r>
-          </a:p>
-          <a:p xmlns:a="http://schemas.openxmlformats.org/drawingml/2006/main">
-            <a:r>
-              <a:t>- 本课 handout.md 与 slides.md</a:t>
-            </a:r>
-          </a:p>
-          <a:p xmlns:a="http://schemas.openxmlformats.org/drawingml/2006/main">
-            <a:r>
-              <a:t/>
-            </a:r>
-          </a:p>
-          <a:p xmlns:a="http://schemas.openxmlformats.org/drawingml/2006/main">
-            <a:r>
-              <a:t>- ../../course/reading-card-case.md</a:t>
-            </a:r>
-          </a:p>
-          <a:p xmlns:a="http://schemas.openxmlformats.org/drawingml/2006/main">
-            <a:r>
-              <a:t/>
+              <a:t>本课 handout.md、judgment-task.md；../../course/judgment-path.md。</a:t>
             </a:r>
           </a:p>
           <a:p xmlns:a="http://schemas.openxmlformats.org/drawingml/2006/main">
@@ -3292,7 +2127,7 @@
           <a:lstStyle xmlns:a="http://schemas.openxmlformats.org/drawingml/2006/main"/>
           <a:p xmlns:a="http://schemas.openxmlformats.org/drawingml/2006/main">
             <a:r>
-              <a:t>页面：P20 评价材料直接进入第 14 课写作</a:t>
+              <a:t>页面：P20 保留本课决定，准备下一课输入</a:t>
             </a:r>
           </a:p>
           <a:p xmlns:a="http://schemas.openxmlformats.org/drawingml/2006/main">
@@ -3302,7 +2137,12 @@
           </a:p>
           <a:p xmlns:a="http://schemas.openxmlformats.org/drawingml/2006/main">
             <a:r>
-              <a:t>讲义位置：本课讲义；见逐页母稿映射表</a:t>
+              <a:t>讲述与校准：</a:t>
+            </a:r>
+          </a:p>
+          <a:p xmlns:a="http://schemas.openxmlformats.org/drawingml/2006/main">
+            <a:r>
+              <a:t>15 分钟整理；45 分钟修订验证门材料并提交，缺口优先收窄结论。 每课课外最多60分钟；详见讲义。</a:t>
             </a:r>
           </a:p>
           <a:p xmlns:a="http://schemas.openxmlformats.org/drawingml/2006/main">
@@ -3312,17 +2152,12 @@
           </a:p>
           <a:p xmlns:a="http://schemas.openxmlformats.org/drawingml/2006/main">
             <a:r>
-              <a:t>屏显核对：</a:t>
-            </a:r>
-          </a:p>
-          <a:p xmlns:a="http://schemas.openxmlformats.org/drawingml/2006/main">
-            <a:r>
-              <a:t>```text</a:t>
-            </a:r>
-          </a:p>
-          <a:p xmlns:a="http://schemas.openxmlformats.org/drawingml/2006/main">
-            <a:r>
-              <a:t>评价材料直接进入第 14 课写作</a:t>
+              <a:t>学生动作：</a:t>
+            </a:r>
+          </a:p>
+          <a:p xmlns:a="http://schemas.openxmlformats.org/drawingml/2006/main">
+            <a:r>
+              <a:t>定位实际工件与下一项动作；按既定预算收口。</a:t>
             </a:r>
           </a:p>
           <a:p xmlns:a="http://schemas.openxmlformats.org/drawingml/2006/main">
@@ -3332,57 +2167,7 @@
           </a:p>
           <a:p xmlns:a="http://schemas.openxmlformats.org/drawingml/2006/main">
             <a:r>
-              <a:t>evaluation-report.md</a:t>
-            </a:r>
-          </a:p>
-          <a:p xmlns:a="http://schemas.openxmlformats.org/drawingml/2006/main">
-            <a:r>
-              <a:t>结果对照</a:t>
-            </a:r>
-          </a:p>
-          <a:p xmlns:a="http://schemas.openxmlformats.org/drawingml/2006/main">
-            <a:r>
-              <a:t>判断修订</a:t>
-            </a:r>
-          </a:p>
-          <a:p xmlns:a="http://schemas.openxmlformats.org/drawingml/2006/main">
-            <a:r>
-              <a:t>失败 / 局限</a:t>
-            </a:r>
-          </a:p>
-          <a:p xmlns:a="http://schemas.openxmlformats.org/drawingml/2006/main">
-            <a:r>
-              <a:t>证据与威胁</a:t>
-            </a:r>
-          </a:p>
-          <a:p xmlns:a="http://schemas.openxmlformats.org/drawingml/2006/main">
-            <a:r>
-              <a:t>→</a:t>
-            </a:r>
-          </a:p>
-          <a:p xmlns:a="http://schemas.openxmlformats.org/drawingml/2006/main">
-            <a:r>
-              <a:t>第 14 课论文结构</a:t>
-            </a:r>
-          </a:p>
-          <a:p xmlns:a="http://schemas.openxmlformats.org/drawingml/2006/main">
-            <a:r>
-              <a:t>Results｜对照与结果</a:t>
-            </a:r>
-          </a:p>
-          <a:p xmlns:a="http://schemas.openxmlformats.org/drawingml/2006/main">
-            <a:r>
-              <a:t>Discussion｜局限与替代解释</a:t>
-            </a:r>
-          </a:p>
-          <a:p xmlns:a="http://schemas.openxmlformats.org/drawingml/2006/main">
-            <a:r>
-              <a:t>Disclosure｜人工审核与 AI 使用</a:t>
-            </a:r>
-          </a:p>
-          <a:p xmlns:a="http://schemas.openxmlformats.org/drawingml/2006/main">
-            <a:r>
-              <a:t>```</a:t>
+              <a:t>课堂安排：按本稿下方 90 分钟教学路由安排；此页不另占独立时段。</a:t>
             </a:r>
           </a:p>
           <a:p xmlns:a="http://schemas.openxmlformats.org/drawingml/2006/main">
@@ -3392,7 +2177,32 @@
           </a:p>
           <a:p xmlns:a="http://schemas.openxmlformats.org/drawingml/2006/main">
             <a:r>
-              <a:t>屏显来源页脚：来源：lesson-13/slides.md；课程工件与讲义见 speaker notes。</a:t>
+              <a:t>[Sources]</a:t>
+            </a:r>
+          </a:p>
+          <a:p xmlns:a="http://schemas.openxmlformats.org/drawingml/2006/main">
+            <a:r>
+              <a:t>- Sculley, D. et al. *NeurIPS 2015*, 2503-2511. [Google Research 正式页面](https://research.google/pubs/hidden-technical-debt-in-machine-learning-systems/)。</a:t>
+            </a:r>
+          </a:p>
+          <a:p xmlns:a="http://schemas.openxmlformats.org/drawingml/2006/main">
+            <a:r>
+              <a:t>- Bouthillier, X. et al. *MLSys* 3 (2021). [MLSys 正式页面](https://proceedings.mlsys.org/paper_files/paper/2021/hash/0184b0cd3cfb185989f858a1d9f5c1eb-Abstract.html)。</a:t>
+            </a:r>
+          </a:p>
+          <a:p xmlns:a="http://schemas.openxmlformats.org/drawingml/2006/main">
+            <a:r>
+              <a:t>- Breck, E. et al. *IEEE Big Data 2017*. [Google Research 正式页面](https://research.google/pubs/the-ml-test-score-a-rubric-for-ml-production-readiness-and-technical-debt-reduction/)。</a:t>
+            </a:r>
+          </a:p>
+          <a:p xmlns:a="http://schemas.openxmlformats.org/drawingml/2006/main">
+            <a:r>
+              <a:t>- 阅读规则见 [reading-list.md](../../course/reading-list.md)。</a:t>
+            </a:r>
+          </a:p>
+          <a:p xmlns:a="http://schemas.openxmlformats.org/drawingml/2006/main">
+            <a:r>
+              <a:t>- 验证门条件见 [assignments.md](../../course/assignments.md) Checkpoint 3。</a:t>
             </a:r>
           </a:p>
           <a:p xmlns:a="http://schemas.openxmlformats.org/drawingml/2006/main">
@@ -3402,127 +2212,7 @@
           </a:p>
           <a:p xmlns:a="http://schemas.openxmlformats.org/drawingml/2006/main">
             <a:r>
-              <a:t>教师讲述：</a:t>
-            </a:r>
-          </a:p>
-          <a:p xmlns:a="http://schemas.openxmlformats.org/drawingml/2006/main">
-            <a:r>
-              <a:t>回扣课堂最低产出：一张对照、一项失败/局限和一条判断修订。课后补齐人工审核、证据充分性、威胁有效性、伦理说明和 10 项自查后提交验证门材料包。第 14 课直接使用对照、判断修订与局限段落，不重新组织一套结果。</a:t>
-            </a:r>
-          </a:p>
-          <a:p xmlns:a="http://schemas.openxmlformats.org/drawingml/2006/main">
-            <a:r>
-              <a:t/>
-            </a:r>
-          </a:p>
-          <a:p xmlns:a="http://schemas.openxmlformats.org/drawingml/2006/main">
-            <a:r>
-              <a:t>学生动作：</a:t>
-            </a:r>
-          </a:p>
-          <a:p xmlns:a="http://schemas.openxmlformats.org/drawingml/2006/main">
-            <a:r>
-              <a:t>学生提交退出卡或保存在个人项目。教师收集共性问题，用于第 14 课前调整。</a:t>
-            </a:r>
-          </a:p>
-          <a:p xmlns:a="http://schemas.openxmlformats.org/drawingml/2006/main">
-            <a:r>
-              <a:t/>
-            </a:r>
-          </a:p>
-          <a:p xmlns:a="http://schemas.openxmlformats.org/drawingml/2006/main">
-            <a:r>
-              <a:t>来源与边界：</a:t>
-            </a:r>
-          </a:p>
-          <a:p xmlns:a="http://schemas.openxmlformats.org/drawingml/2006/main">
-            <a:r>
-              <a:t>- Sculley, D. et al. *NeurIPS 2015*, 2503-2511. [Google Research 正式页面](https://research.google/pubs/hidden-technical-debt-in-machine-learning-systems/)。</a:t>
-            </a:r>
-          </a:p>
-          <a:p xmlns:a="http://schemas.openxmlformats.org/drawingml/2006/main">
-            <a:r>
-              <a:t>- Bouthillier, X. et al. *MLSys* 3 (2021). [MLSys 正式页面](https://proceedings.mlsys.org/paper_files/paper/2021/hash/0184b0cd3cfb185989f858a1d9f5c1eb-Abstract.html)。</a:t>
-            </a:r>
-          </a:p>
-          <a:p xmlns:a="http://schemas.openxmlformats.org/drawingml/2006/main">
-            <a:r>
-              <a:t>- Breck, E. et al. *IEEE Big Data 2017*. [Google Research 正式页面](https://research.google/pubs/the-ml-test-score-a-rubric-for-ml-production-readiness-and-technical-debt-reduction/)。</a:t>
-            </a:r>
-          </a:p>
-          <a:p xmlns:a="http://schemas.openxmlformats.org/drawingml/2006/main">
-            <a:r>
-              <a:t>- 阅读规则见 [reading-list.md](../../course/reading-list.md)。</a:t>
-            </a:r>
-          </a:p>
-          <a:p xmlns:a="http://schemas.openxmlformats.org/drawingml/2006/main">
-            <a:r>
-              <a:t>- 验证门条件见 [assignments.md](../../course/assignments.md) Checkpoint 3。</a:t>
-            </a:r>
-          </a:p>
-          <a:p xmlns:a="http://schemas.openxmlformats.org/drawingml/2006/main">
-            <a:r>
-              <a:t/>
-            </a:r>
-          </a:p>
-          <a:p xmlns:a="http://schemas.openxmlformats.org/drawingml/2006/main">
-            <a:r>
-              <a:t>[Sources]</a:t>
-            </a:r>
-          </a:p>
-          <a:p xmlns:a="http://schemas.openxmlformats.org/drawingml/2006/main">
-            <a:r>
-              <a:t/>
-            </a:r>
-          </a:p>
-          <a:p xmlns:a="http://schemas.openxmlformats.org/drawingml/2006/main">
-            <a:r>
-              <a:t>- https://research.google/pubs/hidden-technical-debt-in-machine-learning-systems/</a:t>
-            </a:r>
-          </a:p>
-          <a:p xmlns:a="http://schemas.openxmlformats.org/drawingml/2006/main">
-            <a:r>
-              <a:t/>
-            </a:r>
-          </a:p>
-          <a:p xmlns:a="http://schemas.openxmlformats.org/drawingml/2006/main">
-            <a:r>
-              <a:t>- https://proceedings.mlsys.org/paper_files/paper/2021/hash/0184b0cd3cfb185989f858a1d9f5c1eb-Abstract.html</a:t>
-            </a:r>
-          </a:p>
-          <a:p xmlns:a="http://schemas.openxmlformats.org/drawingml/2006/main">
-            <a:r>
-              <a:t/>
-            </a:r>
-          </a:p>
-          <a:p xmlns:a="http://schemas.openxmlformats.org/drawingml/2006/main">
-            <a:r>
-              <a:t>- https://research.google/pubs/the-ml-test-score-a-rubric-for-ml-production-readiness-and-technical-debt-reduction/</a:t>
-            </a:r>
-          </a:p>
-          <a:p xmlns:a="http://schemas.openxmlformats.org/drawingml/2006/main">
-            <a:r>
-              <a:t/>
-            </a:r>
-          </a:p>
-          <a:p xmlns:a="http://schemas.openxmlformats.org/drawingml/2006/main">
-            <a:r>
-              <a:t>- 本课 handout.md 与 slides.md</a:t>
-            </a:r>
-          </a:p>
-          <a:p xmlns:a="http://schemas.openxmlformats.org/drawingml/2006/main">
-            <a:r>
-              <a:t/>
-            </a:r>
-          </a:p>
-          <a:p xmlns:a="http://schemas.openxmlformats.org/drawingml/2006/main">
-            <a:r>
-              <a:t>- ../../course/reading-card-case.md</a:t>
-            </a:r>
-          </a:p>
-          <a:p xmlns:a="http://schemas.openxmlformats.org/drawingml/2006/main">
-            <a:r>
-              <a:t/>
+              <a:t>本课 handout.md、judgment-task.md；../../course/judgment-path.md。教学构造仅用于方法判断；本人结果以实际记录为准。</a:t>
             </a:r>
           </a:p>
           <a:p xmlns:a="http://schemas.openxmlformats.org/drawingml/2006/main">
@@ -3597,7 +2287,7 @@
           <a:lstStyle xmlns:a="http://schemas.openxmlformats.org/drawingml/2006/main"/>
           <a:p xmlns:a="http://schemas.openxmlformats.org/drawingml/2006/main">
             <a:r>
-              <a:t>页面：P03 评价报告先完成三个可检查字段</a:t>
+              <a:t>页面：P03 总均值改善，能否采用</a:t>
             </a:r>
           </a:p>
           <a:p xmlns:a="http://schemas.openxmlformats.org/drawingml/2006/main">
@@ -3607,7 +2297,12 @@
           </a:p>
           <a:p xmlns:a="http://schemas.openxmlformats.org/drawingml/2006/main">
             <a:r>
-              <a:t>讲义位置：本课讲义；见逐页母稿映射表</a:t>
+              <a:t>讲述与校准：</a:t>
+            </a:r>
+          </a:p>
+          <a:p xmlns:a="http://schemas.openxmlformats.org/drawingml/2006/main">
+            <a:r>
+              <a:t>先独立作答，再同伴比较；以下依据只在校准时揭示。</a:t>
             </a:r>
           </a:p>
           <a:p xmlns:a="http://schemas.openxmlformats.org/drawingml/2006/main">
@@ -3617,17 +2312,7 @@
           </a:p>
           <a:p xmlns:a="http://schemas.openxmlformats.org/drawingml/2006/main">
             <a:r>
-              <a:t>屏显核对：</a:t>
-            </a:r>
-          </a:p>
-          <a:p xmlns:a="http://schemas.openxmlformats.org/drawingml/2006/main">
-            <a:r>
-              <a:t>```text</a:t>
-            </a:r>
-          </a:p>
-          <a:p xmlns:a="http://schemas.openxmlformats.org/drawingml/2006/main">
-            <a:r>
-              <a:t>评价报告先完成三个可检查字段</a:t>
+              <a:t>条件加权差为 -1/8=-0.125；文本等权 card=(0+1/3+1)/3=4/9，free=1/2，差=-1/18。两种估计对象不同，不应混用。T03 负向必须保留；8 条条件不是 8 篇独立论文。丙计数正确但仍不足以支持全面采用/机制；公开构造数据只能支撑此材料的审计。工程题评价坏项拦截与正常项误拒，不能靠少处理记录改善指标。</a:t>
             </a:r>
           </a:p>
           <a:p xmlns:a="http://schemas.openxmlformats.org/drawingml/2006/main">
@@ -3637,32 +2322,12 @@
           </a:p>
           <a:p xmlns:a="http://schemas.openxmlformats.org/drawingml/2006/main">
             <a:r>
-              <a:t>evaluation-report.md</a:t>
-            </a:r>
-          </a:p>
-          <a:p xmlns:a="http://schemas.openxmlformats.org/drawingml/2006/main">
-            <a:r>
-              <a:t>## 结果对照｜输入、条件、运行数、主指标与结果</a:t>
-            </a:r>
-          </a:p>
-          <a:p xmlns:a="http://schemas.openxmlformats.org/drawingml/2006/main">
-            <a:r>
-              <a:t>## 失败或局限｜表现、根因、边界与下一步</a:t>
-            </a:r>
-          </a:p>
-          <a:p xmlns:a="http://schemas.openxmlformats.org/drawingml/2006/main">
-            <a:r>
-              <a:t>## 判断修订｜支持 / 反驳 / 仍不能判断 + 证据理由</a:t>
-            </a:r>
-          </a:p>
-          <a:p xmlns:a="http://schemas.openxmlformats.org/drawingml/2006/main">
-            <a:r>
-              <a:t>课后补全｜人工审核、充分性、威胁、伦理与 10 项自查</a:t>
-            </a:r>
-          </a:p>
-          <a:p xmlns:a="http://schemas.openxmlformats.org/drawingml/2006/main">
-            <a:r>
-              <a:t>```</a:t>
+              <a:t>学生动作：</a:t>
+            </a:r>
+          </a:p>
+          <a:p xmlns:a="http://schemas.openxmlformats.org/drawingml/2006/main">
+            <a:r>
+              <a:t>先独立写决定和证据，后同伴比较；校准后再回写。</a:t>
             </a:r>
           </a:p>
           <a:p xmlns:a="http://schemas.openxmlformats.org/drawingml/2006/main">
@@ -3672,7 +2337,7 @@
           </a:p>
           <a:p xmlns:a="http://schemas.openxmlformats.org/drawingml/2006/main">
             <a:r>
-              <a:t>屏显来源页脚：来源：lesson-13/slides.md；课程工件与讲义见 speaker notes。</a:t>
+              <a:t>课堂安排：按本稿下方 90 分钟教学路由安排；此页不另占独立时段。</a:t>
             </a:r>
           </a:p>
           <a:p xmlns:a="http://schemas.openxmlformats.org/drawingml/2006/main">
@@ -3682,12 +2347,12 @@
           </a:p>
           <a:p xmlns:a="http://schemas.openxmlformats.org/drawingml/2006/main">
             <a:r>
-              <a:t>教师讲述：</a:t>
-            </a:r>
-          </a:p>
-          <a:p xmlns:a="http://schemas.openxmlformats.org/drawingml/2006/main">
-            <a:r>
-              <a:t>明确边界：课堂只把课前已有结果收口为三项最低产出，不现场重跑完整研究。验证门条件仍以 [assignments.md](../../course/assignments.md) Checkpoint 3 为权威来源，其余字段课后补全。</a:t>
+              <a:t>[Sources]</a:t>
+            </a:r>
+          </a:p>
+          <a:p xmlns:a="http://schemas.openxmlformats.org/drawingml/2006/main">
+            <a:r>
+              <a:t>[备课规划.md](../备课规划.md) 第 13 课目标段；[assignments.md](../../course/assignments.md) Checkpoint 3 验证门条件。</a:t>
             </a:r>
           </a:p>
           <a:p xmlns:a="http://schemas.openxmlformats.org/drawingml/2006/main">
@@ -3697,72 +2362,7 @@
           </a:p>
           <a:p xmlns:a="http://schemas.openxmlformats.org/drawingml/2006/main">
             <a:r>
-              <a:t>学生动作：</a:t>
-            </a:r>
-          </a:p>
-          <a:p xmlns:a="http://schemas.openxmlformats.org/drawingml/2006/main">
-            <a:r>
-              <a:t>无。</a:t>
-            </a:r>
-          </a:p>
-          <a:p xmlns:a="http://schemas.openxmlformats.org/drawingml/2006/main">
-            <a:r>
-              <a:t/>
-            </a:r>
-          </a:p>
-          <a:p xmlns:a="http://schemas.openxmlformats.org/drawingml/2006/main">
-            <a:r>
-              <a:t>来源与边界：</a:t>
-            </a:r>
-          </a:p>
-          <a:p xmlns:a="http://schemas.openxmlformats.org/drawingml/2006/main">
-            <a:r>
-              <a:t>[备课规划.md](../备课规划.md) 第 13 课目标段；[assignments.md](../../course/assignments.md) Checkpoint 3 验证门条件。</a:t>
-            </a:r>
-          </a:p>
-          <a:p xmlns:a="http://schemas.openxmlformats.org/drawingml/2006/main">
-            <a:r>
-              <a:t/>
-            </a:r>
-          </a:p>
-          <a:p xmlns:a="http://schemas.openxmlformats.org/drawingml/2006/main">
-            <a:r>
-              <a:t>---</a:t>
-            </a:r>
-          </a:p>
-          <a:p xmlns:a="http://schemas.openxmlformats.org/drawingml/2006/main">
-            <a:r>
-              <a:t/>
-            </a:r>
-          </a:p>
-          <a:p xmlns:a="http://schemas.openxmlformats.org/drawingml/2006/main">
-            <a:r>
-              <a:t>[Sources]</a:t>
-            </a:r>
-          </a:p>
-          <a:p xmlns:a="http://schemas.openxmlformats.org/drawingml/2006/main">
-            <a:r>
-              <a:t/>
-            </a:r>
-          </a:p>
-          <a:p xmlns:a="http://schemas.openxmlformats.org/drawingml/2006/main">
-            <a:r>
-              <a:t>- 本课 handout.md 与 slides.md</a:t>
-            </a:r>
-          </a:p>
-          <a:p xmlns:a="http://schemas.openxmlformats.org/drawingml/2006/main">
-            <a:r>
-              <a:t/>
-            </a:r>
-          </a:p>
-          <a:p xmlns:a="http://schemas.openxmlformats.org/drawingml/2006/main">
-            <a:r>
-              <a:t>- ../../course/reading-card-case.md</a:t>
-            </a:r>
-          </a:p>
-          <a:p xmlns:a="http://schemas.openxmlformats.org/drawingml/2006/main">
-            <a:r>
-              <a:t/>
+              <a:t>本课 handout.md、judgment-task.md；../../course/judgment-path.md。教学构造仅用于方法判断；本人结果以实际记录为准。</a:t>
             </a:r>
           </a:p>
           <a:p xmlns:a="http://schemas.openxmlformats.org/drawingml/2006/main">
@@ -3847,7 +2447,12 @@
           </a:p>
           <a:p xmlns:a="http://schemas.openxmlformats.org/drawingml/2006/main">
             <a:r>
-              <a:t>讲义位置：handout.md §三、结果分析；四、失败审计；五、贯穿案例</a:t>
+              <a:t>讲述与校准：</a:t>
+            </a:r>
+          </a:p>
+          <a:p xmlns:a="http://schemas.openxmlformats.org/drawingml/2006/main">
+            <a:r>
+              <a:t>逐行读结果，先问是否每个材料都改善。学生应找到T02无改善、T03更差。总数不能替代分项，也不据3份构造材料外推真实研究效果。</a:t>
             </a:r>
           </a:p>
           <a:p xmlns:a="http://schemas.openxmlformats.org/drawingml/2006/main">
@@ -3857,32 +2462,12 @@
           </a:p>
           <a:p xmlns:a="http://schemas.openxmlformats.org/drawingml/2006/main">
             <a:r>
-              <a:t>屏显核对：</a:t>
-            </a:r>
-          </a:p>
-          <a:p xmlns:a="http://schemas.openxmlformats.org/drawingml/2006/main">
-            <a:r>
-              <a:t>| 源文本 | 阅读卡遗漏 | 自由摘要遗漏 |</a:t>
-            </a:r>
-          </a:p>
-          <a:p xmlns:a="http://schemas.openxmlformats.org/drawingml/2006/main">
-            <a:r>
-              <a:t>| --- | --- | --- |</a:t>
-            </a:r>
-          </a:p>
-          <a:p xmlns:a="http://schemas.openxmlformats.org/drawingml/2006/main">
-            <a:r>
-              <a:t>| T01 | 0/3 | 2/3 |</a:t>
-            </a:r>
-          </a:p>
-          <a:p xmlns:a="http://schemas.openxmlformats.org/drawingml/2006/main">
-            <a:r>
-              <a:t>| T02 | 1/3 | 1/3 |</a:t>
-            </a:r>
-          </a:p>
-          <a:p xmlns:a="http://schemas.openxmlformats.org/drawingml/2006/main">
-            <a:r>
-              <a:t>| T03 | 2/2 | 1/2 |</a:t>
+              <a:t>学生动作：</a:t>
+            </a:r>
+          </a:p>
+          <a:p xmlns:a="http://schemas.openxmlformats.org/drawingml/2006/main">
+            <a:r>
+              <a:t>选一行，反查其分母来自哪些源文本条件。</a:t>
             </a:r>
           </a:p>
           <a:p xmlns:a="http://schemas.openxmlformats.org/drawingml/2006/main">
@@ -3892,7 +2477,7 @@
           </a:p>
           <a:p xmlns:a="http://schemas.openxmlformats.org/drawingml/2006/main">
             <a:r>
-              <a:t>全为教学构造；三种方向都保留。</a:t>
+              <a:t>课堂安排：按本稿下方 90 分钟教学路由安排；此页不另占独立时段。</a:t>
             </a:r>
           </a:p>
           <a:p xmlns:a="http://schemas.openxmlformats.org/drawingml/2006/main">
@@ -3902,12 +2487,12 @@
           </a:p>
           <a:p xmlns:a="http://schemas.openxmlformats.org/drawingml/2006/main">
             <a:r>
-              <a:t>教师讲述：</a:t>
-            </a:r>
-          </a:p>
-          <a:p xmlns:a="http://schemas.openxmlformats.org/drawingml/2006/main">
-            <a:r>
-              <a:t>逐行读结果，先问是否每个材料都改善。学生应找到T02无改善、T03更差。总数不能替代分项，也不据3份构造材料外推真实研究效果。</a:t>
+              <a:t>[Sources]</a:t>
+            </a:r>
+          </a:p>
+          <a:p xmlns:a="http://schemas.openxmlformats.org/drawingml/2006/main">
+            <a:r>
+              <a:t>./handout.md；课堂示例与构造数据见 ../../course/reading-card-case.md</a:t>
             </a:r>
           </a:p>
           <a:p xmlns:a="http://schemas.openxmlformats.org/drawingml/2006/main">
@@ -3917,72 +2502,7 @@
           </a:p>
           <a:p xmlns:a="http://schemas.openxmlformats.org/drawingml/2006/main">
             <a:r>
-              <a:t>学生动作：</a:t>
-            </a:r>
-          </a:p>
-          <a:p xmlns:a="http://schemas.openxmlformats.org/drawingml/2006/main">
-            <a:r>
-              <a:t>选一行，反查其分母来自哪些源文本条件。</a:t>
-            </a:r>
-          </a:p>
-          <a:p xmlns:a="http://schemas.openxmlformats.org/drawingml/2006/main">
-            <a:r>
-              <a:t/>
-            </a:r>
-          </a:p>
-          <a:p xmlns:a="http://schemas.openxmlformats.org/drawingml/2006/main">
-            <a:r>
-              <a:t>来源与边界：</a:t>
-            </a:r>
-          </a:p>
-          <a:p xmlns:a="http://schemas.openxmlformats.org/drawingml/2006/main">
-            <a:r>
-              <a:t>./handout.md；课堂示例与构造数据见 ../../course/reading-card-case.md</a:t>
-            </a:r>
-          </a:p>
-          <a:p xmlns:a="http://schemas.openxmlformats.org/drawingml/2006/main">
-            <a:r>
-              <a:t/>
-            </a:r>
-          </a:p>
-          <a:p xmlns:a="http://schemas.openxmlformats.org/drawingml/2006/main">
-            <a:r>
-              <a:t>[Sources]</a:t>
-            </a:r>
-          </a:p>
-          <a:p xmlns:a="http://schemas.openxmlformats.org/drawingml/2006/main">
-            <a:r>
-              <a:t/>
-            </a:r>
-          </a:p>
-          <a:p xmlns:a="http://schemas.openxmlformats.org/drawingml/2006/main">
-            <a:r>
-              <a:t>- https://research.google/pubs/the-ml-test-score-a-rubric-for-ml-production-readiness-and-technical-debt-reduction/</a:t>
-            </a:r>
-          </a:p>
-          <a:p xmlns:a="http://schemas.openxmlformats.org/drawingml/2006/main">
-            <a:r>
-              <a:t/>
-            </a:r>
-          </a:p>
-          <a:p xmlns:a="http://schemas.openxmlformats.org/drawingml/2006/main">
-            <a:r>
-              <a:t>- 本课 handout.md 与 slides.md</a:t>
-            </a:r>
-          </a:p>
-          <a:p xmlns:a="http://schemas.openxmlformats.org/drawingml/2006/main">
-            <a:r>
-              <a:t/>
-            </a:r>
-          </a:p>
-          <a:p xmlns:a="http://schemas.openxmlformats.org/drawingml/2006/main">
-            <a:r>
-              <a:t>- ../../course/reading-card-case.md</a:t>
-            </a:r>
-          </a:p>
-          <a:p xmlns:a="http://schemas.openxmlformats.org/drawingml/2006/main">
-            <a:r>
-              <a:t/>
+              <a:t>本课 handout.md、judgment-task.md；../../course/judgment-path.md。</a:t>
             </a:r>
           </a:p>
           <a:p xmlns:a="http://schemas.openxmlformats.org/drawingml/2006/main">
@@ -4067,7 +2587,12 @@
           </a:p>
           <a:p xmlns:a="http://schemas.openxmlformats.org/drawingml/2006/main">
             <a:r>
-              <a:t>讲义位置：本课讲义；见逐页母稿映射表</a:t>
+              <a:t>讲述与校准：</a:t>
+            </a:r>
+          </a:p>
+          <a:p xmlns:a="http://schemas.openxmlformats.org/drawingml/2006/main">
+            <a:r>
+              <a:t>先由科研问题确定主指标。贯穿案例主指标为人工基准限定条件遗漏率；屏显另列运行失败、人工修订代价与权限风险，帮助观察工作流的局限，不要求把每个维度都做成研究假设。评价必须有 baseline、前后对比、对照或与研究问题相称的等价依据。</a:t>
             </a:r>
           </a:p>
           <a:p xmlns:a="http://schemas.openxmlformats.org/drawingml/2006/main">
@@ -4077,17 +2602,12 @@
           </a:p>
           <a:p xmlns:a="http://schemas.openxmlformats.org/drawingml/2006/main">
             <a:r>
-              <a:t>屏显核对：</a:t>
-            </a:r>
-          </a:p>
-          <a:p xmlns:a="http://schemas.openxmlformats.org/drawingml/2006/main">
-            <a:r>
-              <a:t>```text</a:t>
-            </a:r>
-          </a:p>
-          <a:p xmlns:a="http://schemas.openxmlformats.org/drawingml/2006/main">
-            <a:r>
-              <a:t>评价维度由科研问题决定</a:t>
+              <a:t>学生动作：</a:t>
+            </a:r>
+          </a:p>
+          <a:p xmlns:a="http://schemas.openxmlformats.org/drawingml/2006/main">
+            <a:r>
+              <a:t>让学生为自己的工作流选至少 2 个维度，并说明为什么不选其他。</a:t>
             </a:r>
           </a:p>
           <a:p xmlns:a="http://schemas.openxmlformats.org/drawingml/2006/main">
@@ -4097,67 +2617,7 @@
           </a:p>
           <a:p xmlns:a="http://schemas.openxmlformats.org/drawingml/2006/main">
             <a:r>
-              <a:t>工作流是否降低限定条件遗漏率？</a:t>
-            </a:r>
-          </a:p>
-          <a:p xmlns:a="http://schemas.openxmlformats.org/drawingml/2006/main">
-            <a:r>
-              <a:t>主指标</a:t>
-            </a:r>
-          </a:p>
-          <a:p xmlns:a="http://schemas.openxmlformats.org/drawingml/2006/main">
-            <a:r>
-              <a:t>→</a:t>
-            </a:r>
-          </a:p>
-          <a:p xmlns:a="http://schemas.openxmlformats.org/drawingml/2006/main">
-            <a:r>
-              <a:t>人工基准遗漏率</a:t>
-            </a:r>
-          </a:p>
-          <a:p xmlns:a="http://schemas.openxmlformats.org/drawingml/2006/main">
-            <a:r>
-              <a:t>运行风险</a:t>
-            </a:r>
-          </a:p>
-          <a:p xmlns:a="http://schemas.openxmlformats.org/drawingml/2006/main">
-            <a:r>
-              <a:t>→</a:t>
-            </a:r>
-          </a:p>
-          <a:p xmlns:a="http://schemas.openxmlformats.org/drawingml/2006/main">
-            <a:r>
-              <a:t>失败率 / 无效输出</a:t>
-            </a:r>
-          </a:p>
-          <a:p xmlns:a="http://schemas.openxmlformats.org/drawingml/2006/main">
-            <a:r>
-              <a:t>人工代价</a:t>
-            </a:r>
-          </a:p>
-          <a:p xmlns:a="http://schemas.openxmlformats.org/drawingml/2006/main">
-            <a:r>
-              <a:t>→</a:t>
-            </a:r>
-          </a:p>
-          <a:p xmlns:a="http://schemas.openxmlformats.org/drawingml/2006/main">
-            <a:r>
-              <a:t>修订量 / 时间</a:t>
-            </a:r>
-          </a:p>
-          <a:p xmlns:a="http://schemas.openxmlformats.org/drawingml/2006/main">
-            <a:r>
-              <a:t>权限风险</a:t>
-            </a:r>
-          </a:p>
-          <a:p xmlns:a="http://schemas.openxmlformats.org/drawingml/2006/main">
-            <a:r>
-              <a:t>越权 / 外发</a:t>
-            </a:r>
-          </a:p>
-          <a:p xmlns:a="http://schemas.openxmlformats.org/drawingml/2006/main">
-            <a:r>
-              <a:t>```</a:t>
+              <a:t>课堂安排：按本稿下方 90 分钟教学路由安排；此页不另占独立时段。</a:t>
             </a:r>
           </a:p>
           <a:p xmlns:a="http://schemas.openxmlformats.org/drawingml/2006/main">
@@ -4167,7 +2627,12 @@
           </a:p>
           <a:p xmlns:a="http://schemas.openxmlformats.org/drawingml/2006/main">
             <a:r>
-              <a:t>屏显来源页脚：来源：lesson-13/slides.md；课程工件与讲义见 speaker notes。</a:t>
+              <a:t>[Sources]</a:t>
+            </a:r>
+          </a:p>
+          <a:p xmlns:a="http://schemas.openxmlformats.org/drawingml/2006/main">
+            <a:r>
+              <a:t>讲义 §二·2；[备课规划.md](../备课规划.md) 第 13 课评价维度段。</a:t>
             </a:r>
           </a:p>
           <a:p xmlns:a="http://schemas.openxmlformats.org/drawingml/2006/main">
@@ -4177,87 +2642,7 @@
           </a:p>
           <a:p xmlns:a="http://schemas.openxmlformats.org/drawingml/2006/main">
             <a:r>
-              <a:t>教师讲述：</a:t>
-            </a:r>
-          </a:p>
-          <a:p xmlns:a="http://schemas.openxmlformats.org/drawingml/2006/main">
-            <a:r>
-              <a:t>先由科研问题确定主指标。贯穿案例主指标为人工基准限定条件遗漏率；屏显另列运行失败、人工修订代价与权限风险，帮助观察工作流的局限，不要求把每个维度都做成研究假设。评价必须有 baseline、前后对比、对照或与研究问题相称的等价依据。</a:t>
-            </a:r>
-          </a:p>
-          <a:p xmlns:a="http://schemas.openxmlformats.org/drawingml/2006/main">
-            <a:r>
-              <a:t/>
-            </a:r>
-          </a:p>
-          <a:p xmlns:a="http://schemas.openxmlformats.org/drawingml/2006/main">
-            <a:r>
-              <a:t>学生动作：</a:t>
-            </a:r>
-          </a:p>
-          <a:p xmlns:a="http://schemas.openxmlformats.org/drawingml/2006/main">
-            <a:r>
-              <a:t>让学生为自己的工作流选至少 2 个维度，并说明为什么不选其他。</a:t>
-            </a:r>
-          </a:p>
-          <a:p xmlns:a="http://schemas.openxmlformats.org/drawingml/2006/main">
-            <a:r>
-              <a:t/>
-            </a:r>
-          </a:p>
-          <a:p xmlns:a="http://schemas.openxmlformats.org/drawingml/2006/main">
-            <a:r>
-              <a:t>来源与边界：</a:t>
-            </a:r>
-          </a:p>
-          <a:p xmlns:a="http://schemas.openxmlformats.org/drawingml/2006/main">
-            <a:r>
-              <a:t>讲义 §二·2；[备课规划.md](../备课规划.md) 第 13 课评价维度段。</a:t>
-            </a:r>
-          </a:p>
-          <a:p xmlns:a="http://schemas.openxmlformats.org/drawingml/2006/main">
-            <a:r>
-              <a:t/>
-            </a:r>
-          </a:p>
-          <a:p xmlns:a="http://schemas.openxmlformats.org/drawingml/2006/main">
-            <a:r>
-              <a:t>---</a:t>
-            </a:r>
-          </a:p>
-          <a:p xmlns:a="http://schemas.openxmlformats.org/drawingml/2006/main">
-            <a:r>
-              <a:t/>
-            </a:r>
-          </a:p>
-          <a:p xmlns:a="http://schemas.openxmlformats.org/drawingml/2006/main">
-            <a:r>
-              <a:t>[Sources]</a:t>
-            </a:r>
-          </a:p>
-          <a:p xmlns:a="http://schemas.openxmlformats.org/drawingml/2006/main">
-            <a:r>
-              <a:t/>
-            </a:r>
-          </a:p>
-          <a:p xmlns:a="http://schemas.openxmlformats.org/drawingml/2006/main">
-            <a:r>
-              <a:t>- 本课 handout.md 与 slides.md</a:t>
-            </a:r>
-          </a:p>
-          <a:p xmlns:a="http://schemas.openxmlformats.org/drawingml/2006/main">
-            <a:r>
-              <a:t/>
-            </a:r>
-          </a:p>
-          <a:p xmlns:a="http://schemas.openxmlformats.org/drawingml/2006/main">
-            <a:r>
-              <a:t>- ../../course/reading-card-case.md</a:t>
-            </a:r>
-          </a:p>
-          <a:p xmlns:a="http://schemas.openxmlformats.org/drawingml/2006/main">
-            <a:r>
-              <a:t/>
+              <a:t>本课 handout.md、judgment-task.md；../../course/judgment-path.md。</a:t>
             </a:r>
           </a:p>
           <a:p xmlns:a="http://schemas.openxmlformats.org/drawingml/2006/main">
@@ -4342,7 +2727,12 @@
           </a:p>
           <a:p xmlns:a="http://schemas.openxmlformats.org/drawingml/2006/main">
             <a:r>
-              <a:t>讲义位置：handout.md §三、结果分析；四、失败审计；五、贯穿案例</a:t>
+              <a:t>讲述与校准：</a:t>
+            </a:r>
+          </a:p>
+          <a:p xmlns:a="http://schemas.openxmlformats.org/drawingml/2006/main">
+            <a:r>
+              <a:t>阅读卡现有固定材料与标注协议保留在讲义；本页把已有协议扩展为评价对象、角色、独立单位、反馈、预算与判断。人工评价按任务使用盲评或隔离，不强制 ML 划分。</a:t>
             </a:r>
           </a:p>
           <a:p xmlns:a="http://schemas.openxmlformats.org/drawingml/2006/main">
@@ -4352,27 +2742,7 @@
           </a:p>
           <a:p xmlns:a="http://schemas.openxmlformats.org/drawingml/2006/main">
             <a:r>
-              <a:t>屏显核对：</a:t>
-            </a:r>
-          </a:p>
-          <a:p xmlns:a="http://schemas.openxmlformats.org/drawingml/2006/main">
-            <a:r>
-              <a:t>输入：同一批 T01–T03，两个条件各一份固定输出。</a:t>
-            </a:r>
-          </a:p>
-          <a:p xmlns:a="http://schemas.openxmlformats.org/drawingml/2006/main">
-            <a:r>
-              <a:t>基准：人工列出的 8 项应保留条件。</a:t>
-            </a:r>
-          </a:p>
-          <a:p xmlns:a="http://schemas.openxmlformats.org/drawingml/2006/main">
-            <a:r>
-              <a:t>评价：16 条条件×输出标注，核验原文与输出定位。</a:t>
-            </a:r>
-          </a:p>
-          <a:p xmlns:a="http://schemas.openxmlformats.org/drawingml/2006/main">
-            <a:r>
-              <a:t>汇总：各条件缺失数之和 / 基准条件数之和。</a:t>
+              <a:t>参考标注随包提供，是可校准答案，不是已完成独立盲评的证据。先让学生独立标一项再展示参考。脚本不会判断语义，不能把运行成功说成标注正确。</a:t>
             </a:r>
           </a:p>
           <a:p xmlns:a="http://schemas.openxmlformats.org/drawingml/2006/main">
@@ -4382,12 +2752,12 @@
           </a:p>
           <a:p xmlns:a="http://schemas.openxmlformats.org/drawingml/2006/main">
             <a:r>
-              <a:t>教师讲述：</a:t>
-            </a:r>
-          </a:p>
-          <a:p xmlns:a="http://schemas.openxmlformats.org/drawingml/2006/main">
-            <a:r>
-              <a:t>参考标注随包提供，是可校准答案，不是已完成独立盲评的证据。先让学生独立标一项再展示参考。脚本不会判断语义，不能把运行成功说成标注正确。</a:t>
+              <a:t>学生动作：</a:t>
+            </a:r>
+          </a:p>
+          <a:p xmlns:a="http://schemas.openxmlformats.org/drawingml/2006/main">
+            <a:r>
+              <a:t>独立标注一项，展示引用原句后与参考答案核对。</a:t>
             </a:r>
           </a:p>
           <a:p xmlns:a="http://schemas.openxmlformats.org/drawingml/2006/main">
@@ -4397,12 +2767,7 @@
           </a:p>
           <a:p xmlns:a="http://schemas.openxmlformats.org/drawingml/2006/main">
             <a:r>
-              <a:t>学生动作：</a:t>
-            </a:r>
-          </a:p>
-          <a:p xmlns:a="http://schemas.openxmlformats.org/drawingml/2006/main">
-            <a:r>
-              <a:t>独立标注一项，展示引用原句后与参考答案核对。</a:t>
+              <a:t>课堂安排：按本稿下方 90 分钟教学路由安排；此页不另占独立时段。</a:t>
             </a:r>
           </a:p>
           <a:p xmlns:a="http://schemas.openxmlformats.org/drawingml/2006/main">
@@ -4412,7 +2777,7 @@
           </a:p>
           <a:p xmlns:a="http://schemas.openxmlformats.org/drawingml/2006/main">
             <a:r>
-              <a:t>来源与边界：</a:t>
+              <a:t>[Sources]</a:t>
             </a:r>
           </a:p>
           <a:p xmlns:a="http://schemas.openxmlformats.org/drawingml/2006/main">
@@ -4427,42 +2792,7 @@
           </a:p>
           <a:p xmlns:a="http://schemas.openxmlformats.org/drawingml/2006/main">
             <a:r>
-              <a:t>[Sources]</a:t>
-            </a:r>
-          </a:p>
-          <a:p xmlns:a="http://schemas.openxmlformats.org/drawingml/2006/main">
-            <a:r>
-              <a:t/>
-            </a:r>
-          </a:p>
-          <a:p xmlns:a="http://schemas.openxmlformats.org/drawingml/2006/main">
-            <a:r>
-              <a:t>- https://proceedings.mlsys.org/paper_files/paper/2021/hash/0184b0cd3cfb185989f858a1d9f5c1eb-Abstract.html</a:t>
-            </a:r>
-          </a:p>
-          <a:p xmlns:a="http://schemas.openxmlformats.org/drawingml/2006/main">
-            <a:r>
-              <a:t/>
-            </a:r>
-          </a:p>
-          <a:p xmlns:a="http://schemas.openxmlformats.org/drawingml/2006/main">
-            <a:r>
-              <a:t>- 本课 handout.md 与 slides.md</a:t>
-            </a:r>
-          </a:p>
-          <a:p xmlns:a="http://schemas.openxmlformats.org/drawingml/2006/main">
-            <a:r>
-              <a:t/>
-            </a:r>
-          </a:p>
-          <a:p xmlns:a="http://schemas.openxmlformats.org/drawingml/2006/main">
-            <a:r>
-              <a:t>- ../../course/reading-card-case.md</a:t>
-            </a:r>
-          </a:p>
-          <a:p xmlns:a="http://schemas.openxmlformats.org/drawingml/2006/main">
-            <a:r>
-              <a:t/>
+              <a:t>本课 handout.md、judgment-task.md；../../course/judgment-path.md。</a:t>
             </a:r>
           </a:p>
           <a:p xmlns:a="http://schemas.openxmlformats.org/drawingml/2006/main">
@@ -4547,7 +2877,12 @@
           </a:p>
           <a:p xmlns:a="http://schemas.openxmlformats.org/drawingml/2006/main">
             <a:r>
-              <a:t>讲义位置：本课讲义；见逐页母稿映射表</a:t>
+              <a:t>讲述与校准：</a:t>
+            </a:r>
+          </a:p>
+          <a:p xmlns:a="http://schemas.openxmlformats.org/drawingml/2006/main">
+            <a:r>
+              <a:t>评价报告必须回答"工作流改变了哪个研究判断"。如果回答不出，说明评价还停留在功能清单层。组件保留/修改/移除的判断要写依据，不能只写"感觉有用"。</a:t>
             </a:r>
           </a:p>
           <a:p xmlns:a="http://schemas.openxmlformats.org/drawingml/2006/main">
@@ -4557,42 +2892,12 @@
           </a:p>
           <a:p xmlns:a="http://schemas.openxmlformats.org/drawingml/2006/main">
             <a:r>
-              <a:t>屏显核对：</a:t>
-            </a:r>
-          </a:p>
-          <a:p xmlns:a="http://schemas.openxmlformats.org/drawingml/2006/main">
-            <a:r>
-              <a:t>| 评价报告条目 | 本次应写入的判断 |</a:t>
-            </a:r>
-          </a:p>
-          <a:p xmlns:a="http://schemas.openxmlformats.org/drawingml/2006/main">
-            <a:r>
-              <a:t>| --- | --- |</a:t>
-            </a:r>
-          </a:p>
-          <a:p xmlns:a="http://schemas.openxmlformats.org/drawingml/2006/main">
-            <a:r>
-              <a:t>| 结果比较 | 阅读卡 3/8；自由摘要 4/8 |</a:t>
-            </a:r>
-          </a:p>
-          <a:p xmlns:a="http://schemas.openxmlformats.org/drawingml/2006/main">
-            <a:r>
-              <a:t>| Q1 | 仅在构造包内方向一致 |</a:t>
-            </a:r>
-          </a:p>
-          <a:p xmlns:a="http://schemas.openxmlformats.org/drawingml/2006/main">
-            <a:r>
-              <a:t>| H1 与 A2 | 仍不能区分生成机制和评分提示 |</a:t>
-            </a:r>
-          </a:p>
-          <a:p xmlns:a="http://schemas.openxmlformats.org/drawingml/2006/main">
-            <a:r>
-              <a:t>| 采用决定 | 暂不依据本结果决定采用 |</a:t>
-            </a:r>
-          </a:p>
-          <a:p xmlns:a="http://schemas.openxmlformats.org/drawingml/2006/main">
-            <a:r>
-              <a:t>| 下一步 | 区分解释，补测其他质量与范围 |</a:t>
+              <a:t>学生动作：</a:t>
+            </a:r>
+          </a:p>
+          <a:p xmlns:a="http://schemas.openxmlformats.org/drawingml/2006/main">
+            <a:r>
+              <a:t>让学生检查自己的评价报告是否回答了"改变了哪个判断"。</a:t>
             </a:r>
           </a:p>
           <a:p xmlns:a="http://schemas.openxmlformats.org/drawingml/2006/main">
@@ -4602,7 +2907,7 @@
           </a:p>
           <a:p xmlns:a="http://schemas.openxmlformats.org/drawingml/2006/main">
             <a:r>
-              <a:t>保存到 evaluation-report.md，并关联逐项标注。</a:t>
+              <a:t>课堂安排：按本稿下方 90 分钟教学路由安排；此页不另占独立时段。</a:t>
             </a:r>
           </a:p>
           <a:p xmlns:a="http://schemas.openxmlformats.org/drawingml/2006/main">
@@ -4612,12 +2917,12 @@
           </a:p>
           <a:p xmlns:a="http://schemas.openxmlformats.org/drawingml/2006/main">
             <a:r>
-              <a:t>教师讲述：</a:t>
-            </a:r>
-          </a:p>
-          <a:p xmlns:a="http://schemas.openxmlformats.org/drawingml/2006/main">
-            <a:r>
-              <a:t>评价报告必须回答"工作流改变了哪个研究判断"。如果回答不出，说明评价还停留在功能清单层。组件保留/修改/移除的判断要写依据，不能只写"感觉有用"。</a:t>
+              <a:t>[Sources]</a:t>
+            </a:r>
+          </a:p>
+          <a:p xmlns:a="http://schemas.openxmlformats.org/drawingml/2006/main">
+            <a:r>
+              <a:t>本页数值、论文反例与运行 ID 属课程虚构教学示例，不是实际学生实验结果。</a:t>
             </a:r>
           </a:p>
           <a:p xmlns:a="http://schemas.openxmlformats.org/drawingml/2006/main">
@@ -4627,12 +2932,7 @@
           </a:p>
           <a:p xmlns:a="http://schemas.openxmlformats.org/drawingml/2006/main">
             <a:r>
-              <a:t>学生动作：</a:t>
-            </a:r>
-          </a:p>
-          <a:p xmlns:a="http://schemas.openxmlformats.org/drawingml/2006/main">
-            <a:r>
-              <a:t>让学生检查自己的评价报告是否回答了"改变了哪个判断"。</a:t>
+              <a:t>讲义 §二·4；[project-template.md](../../course/project-template.md) §8.5-8.6。</a:t>
             </a:r>
           </a:p>
           <a:p xmlns:a="http://schemas.openxmlformats.org/drawingml/2006/main">
@@ -4642,67 +2942,7 @@
           </a:p>
           <a:p xmlns:a="http://schemas.openxmlformats.org/drawingml/2006/main">
             <a:r>
-              <a:t>来源与边界：</a:t>
-            </a:r>
-          </a:p>
-          <a:p xmlns:a="http://schemas.openxmlformats.org/drawingml/2006/main">
-            <a:r>
-              <a:t>本页数值、论文反例与运行 ID 属课程虚构教学示例，不是实际学生实验结果。</a:t>
-            </a:r>
-          </a:p>
-          <a:p xmlns:a="http://schemas.openxmlformats.org/drawingml/2006/main">
-            <a:r>
-              <a:t/>
-            </a:r>
-          </a:p>
-          <a:p xmlns:a="http://schemas.openxmlformats.org/drawingml/2006/main">
-            <a:r>
-              <a:t>讲义 §二·4；[project-template.md](../../course/project-template.md) §8.5-8.6。</a:t>
-            </a:r>
-          </a:p>
-          <a:p xmlns:a="http://schemas.openxmlformats.org/drawingml/2006/main">
-            <a:r>
-              <a:t/>
-            </a:r>
-          </a:p>
-          <a:p xmlns:a="http://schemas.openxmlformats.org/drawingml/2006/main">
-            <a:r>
-              <a:t>---</a:t>
-            </a:r>
-          </a:p>
-          <a:p xmlns:a="http://schemas.openxmlformats.org/drawingml/2006/main">
-            <a:r>
-              <a:t/>
-            </a:r>
-          </a:p>
-          <a:p xmlns:a="http://schemas.openxmlformats.org/drawingml/2006/main">
-            <a:r>
-              <a:t>[Sources]</a:t>
-            </a:r>
-          </a:p>
-          <a:p xmlns:a="http://schemas.openxmlformats.org/drawingml/2006/main">
-            <a:r>
-              <a:t/>
-            </a:r>
-          </a:p>
-          <a:p xmlns:a="http://schemas.openxmlformats.org/drawingml/2006/main">
-            <a:r>
-              <a:t>- 本课 handout.md 与 slides.md</a:t>
-            </a:r>
-          </a:p>
-          <a:p xmlns:a="http://schemas.openxmlformats.org/drawingml/2006/main">
-            <a:r>
-              <a:t/>
-            </a:r>
-          </a:p>
-          <a:p xmlns:a="http://schemas.openxmlformats.org/drawingml/2006/main">
-            <a:r>
-              <a:t>- ../../course/reading-card-case.md</a:t>
-            </a:r>
-          </a:p>
-          <a:p xmlns:a="http://schemas.openxmlformats.org/drawingml/2006/main">
-            <a:r>
-              <a:t/>
+              <a:t>本课 handout.md、judgment-task.md；../../course/judgment-path.md。</a:t>
             </a:r>
           </a:p>
           <a:p xmlns:a="http://schemas.openxmlformats.org/drawingml/2006/main">
@@ -4787,7 +3027,12 @@
           </a:p>
           <a:p xmlns:a="http://schemas.openxmlformats.org/drawingml/2006/main">
             <a:r>
-              <a:t>讲义位置：handout.md §三、结果分析；四、失败审计；五、贯穿案例</a:t>
+              <a:t>讲述与校准：</a:t>
+            </a:r>
+          </a:p>
+          <a:p xmlns:a="http://schemas.openxmlformats.org/drawingml/2006/main">
+            <a:r>
+              <a:t>三态是对一条明确命题作判断，不是把全项目贴一个支持标签。严禁将H1写成“支持待验证”同时又说没有区分解释。</a:t>
             </a:r>
           </a:p>
           <a:p xmlns:a="http://schemas.openxmlformats.org/drawingml/2006/main">
@@ -4797,32 +3042,12 @@
           </a:p>
           <a:p xmlns:a="http://schemas.openxmlformats.org/drawingml/2006/main">
             <a:r>
-              <a:t>屏显核对：</a:t>
-            </a:r>
-          </a:p>
-          <a:p xmlns:a="http://schemas.openxmlformats.org/drawingml/2006/main">
-            <a:r>
-              <a:t>Q1｜本构造包方向一致：3/8 &lt; 4/8。</a:t>
-            </a:r>
-          </a:p>
-          <a:p xmlns:a="http://schemas.openxmlformats.org/drawingml/2006/main">
-            <a:r>
-              <a:t>H1 / A2｜现有结果不能区分机制与测量解释。</a:t>
-            </a:r>
-          </a:p>
-          <a:p xmlns:a="http://schemas.openxmlformats.org/drawingml/2006/main">
-            <a:r>
-              <a:t>A1｜其他质量错误未测量。</a:t>
-            </a:r>
-          </a:p>
-          <a:p xmlns:a="http://schemas.openxmlformats.org/drawingml/2006/main">
-            <a:r>
-              <a:t>A3｜T03 为负例；不能外推所有材料。</a:t>
-            </a:r>
-          </a:p>
-          <a:p xmlns:a="http://schemas.openxmlformats.org/drawingml/2006/main">
-            <a:r>
-              <a:t>J1｜是否采用，还需质量与资源依据。</a:t>
+              <a:t>学生动作：</a:t>
+            </a:r>
+          </a:p>
+          <a:p xmlns:a="http://schemas.openxmlformats.org/drawingml/2006/main">
+            <a:r>
+              <a:t>把一条笼统“方法有效”拆成已知与未决两行。</a:t>
             </a:r>
           </a:p>
           <a:p xmlns:a="http://schemas.openxmlformats.org/drawingml/2006/main">
@@ -4832,12 +3057,7 @@
           </a:p>
           <a:p xmlns:a="http://schemas.openxmlformats.org/drawingml/2006/main">
             <a:r>
-              <a:t>教师讲述：</a:t>
-            </a:r>
-          </a:p>
-          <a:p xmlns:a="http://schemas.openxmlformats.org/drawingml/2006/main">
-            <a:r>
-              <a:t>三态是对一条明确命题作判断，不是把全项目贴一个支持标签。严禁将H1写成“支持待验证”同时又说没有区分解释。</a:t>
+              <a:t>课堂安排：按本稿下方 90 分钟教学路由安排；此页不另占独立时段。</a:t>
             </a:r>
           </a:p>
           <a:p xmlns:a="http://schemas.openxmlformats.org/drawingml/2006/main">
@@ -4847,12 +3067,12 @@
           </a:p>
           <a:p xmlns:a="http://schemas.openxmlformats.org/drawingml/2006/main">
             <a:r>
-              <a:t>学生动作：</a:t>
-            </a:r>
-          </a:p>
-          <a:p xmlns:a="http://schemas.openxmlformats.org/drawingml/2006/main">
-            <a:r>
-              <a:t>把一条笼统“方法有效”拆成已知与未决两行。</a:t>
+              <a:t>[Sources]</a:t>
+            </a:r>
+          </a:p>
+          <a:p xmlns:a="http://schemas.openxmlformats.org/drawingml/2006/main">
+            <a:r>
+              <a:t>./handout.md；课堂示例与构造数据见 ../../course/reading-card-case.md</a:t>
             </a:r>
           </a:p>
           <a:p xmlns:a="http://schemas.openxmlformats.org/drawingml/2006/main">
@@ -4862,47 +3082,7 @@
           </a:p>
           <a:p xmlns:a="http://schemas.openxmlformats.org/drawingml/2006/main">
             <a:r>
-              <a:t>来源与边界：</a:t>
-            </a:r>
-          </a:p>
-          <a:p xmlns:a="http://schemas.openxmlformats.org/drawingml/2006/main">
-            <a:r>
-              <a:t>./handout.md；课堂示例与构造数据见 ../../course/reading-card-case.md</a:t>
-            </a:r>
-          </a:p>
-          <a:p xmlns:a="http://schemas.openxmlformats.org/drawingml/2006/main">
-            <a:r>
-              <a:t/>
-            </a:r>
-          </a:p>
-          <a:p xmlns:a="http://schemas.openxmlformats.org/drawingml/2006/main">
-            <a:r>
-              <a:t>[Sources]</a:t>
-            </a:r>
-          </a:p>
-          <a:p xmlns:a="http://schemas.openxmlformats.org/drawingml/2006/main">
-            <a:r>
-              <a:t/>
-            </a:r>
-          </a:p>
-          <a:p xmlns:a="http://schemas.openxmlformats.org/drawingml/2006/main">
-            <a:r>
-              <a:t>- 本课 handout.md 与 slides.md</a:t>
-            </a:r>
-          </a:p>
-          <a:p xmlns:a="http://schemas.openxmlformats.org/drawingml/2006/main">
-            <a:r>
-              <a:t/>
-            </a:r>
-          </a:p>
-          <a:p xmlns:a="http://schemas.openxmlformats.org/drawingml/2006/main">
-            <a:r>
-              <a:t>- ../../course/reading-card-case.md</a:t>
-            </a:r>
-          </a:p>
-          <a:p xmlns:a="http://schemas.openxmlformats.org/drawingml/2006/main">
-            <a:r>
-              <a:t/>
+              <a:t>本课 handout.md、judgment-task.md；../../course/judgment-path.md。</a:t>
             </a:r>
           </a:p>
           <a:p xmlns:a="http://schemas.openxmlformats.org/drawingml/2006/main">
@@ -4987,7 +3167,12 @@
           </a:p>
           <a:p xmlns:a="http://schemas.openxmlformats.org/drawingml/2006/main">
             <a:r>
-              <a:t>讲义位置：handout.md §三、结果分析；四、失败审计；五、贯穿案例</a:t>
+              <a:t>讲述与校准：</a:t>
+            </a:r>
+          </a:p>
+          <a:p xmlns:a="http://schemas.openxmlformats.org/drawingml/2006/main">
+            <a:r>
+              <a:t>汇总采用micro口径，不是三个比例的简单平均。先数缺失条目再除8。图中若出现误差线就会暗示不存在的统计量；现有材料不支持。</a:t>
             </a:r>
           </a:p>
           <a:p xmlns:a="http://schemas.openxmlformats.org/drawingml/2006/main">
@@ -4997,17 +3182,12 @@
           </a:p>
           <a:p xmlns:a="http://schemas.openxmlformats.org/drawingml/2006/main">
             <a:r>
-              <a:t>屏显核对：</a:t>
-            </a:r>
-          </a:p>
-          <a:p xmlns:a="http://schemas.openxmlformats.org/drawingml/2006/main">
-            <a:r>
-              <a:t>总遗漏率：阅读卡 3/8 = 0.375；自由摘要 4/8 = 0.500。</a:t>
-            </a:r>
-          </a:p>
-          <a:p xmlns:a="http://schemas.openxmlformats.org/drawingml/2006/main">
-            <a:r>
-              <a:t>差值（阅读卡－自由摘要）：−0.125。</a:t>
+              <a:t>学生动作：</a:t>
+            </a:r>
+          </a:p>
+          <a:p xmlns:a="http://schemas.openxmlformats.org/drawingml/2006/main">
+            <a:r>
+              <a:t>说明为什么总分较好仍不能写“所有文本都更好”。</a:t>
             </a:r>
           </a:p>
           <a:p xmlns:a="http://schemas.openxmlformats.org/drawingml/2006/main">
@@ -5017,12 +3197,7 @@
           </a:p>
           <a:p xmlns:a="http://schemas.openxmlformats.org/drawingml/2006/main">
             <a:r>
-              <a:t>T02 无改善；T03 阅读卡反而多遗漏一项。</a:t>
-            </a:r>
-          </a:p>
-          <a:p xmlns:a="http://schemas.openxmlformats.org/drawingml/2006/main">
-            <a:r>
-              <a:t>无随机重复，不画误差线，不作显著性判断。</a:t>
+              <a:t>课堂安排：按本稿下方 90 分钟教学路由安排；此页不另占独立时段。</a:t>
             </a:r>
           </a:p>
           <a:p xmlns:a="http://schemas.openxmlformats.org/drawingml/2006/main">
@@ -5032,12 +3207,12 @@
           </a:p>
           <a:p xmlns:a="http://schemas.openxmlformats.org/drawingml/2006/main">
             <a:r>
-              <a:t>教师讲述：</a:t>
-            </a:r>
-          </a:p>
-          <a:p xmlns:a="http://schemas.openxmlformats.org/drawingml/2006/main">
-            <a:r>
-              <a:t>汇总采用micro口径，不是三个比例的简单平均。先数缺失条目再除8。图中若出现误差线就会暗示不存在的统计量；现有材料不支持。</a:t>
+              <a:t>[Sources]</a:t>
+            </a:r>
+          </a:p>
+          <a:p xmlns:a="http://schemas.openxmlformats.org/drawingml/2006/main">
+            <a:r>
+              <a:t>./handout.md；课堂示例与构造数据见 ../../course/reading-card-case.md</a:t>
             </a:r>
           </a:p>
           <a:p xmlns:a="http://schemas.openxmlformats.org/drawingml/2006/main">
@@ -5047,62 +3222,7 @@
           </a:p>
           <a:p xmlns:a="http://schemas.openxmlformats.org/drawingml/2006/main">
             <a:r>
-              <a:t>学生动作：</a:t>
-            </a:r>
-          </a:p>
-          <a:p xmlns:a="http://schemas.openxmlformats.org/drawingml/2006/main">
-            <a:r>
-              <a:t>说明为什么总分较好仍不能写“所有文本都更好”。</a:t>
-            </a:r>
-          </a:p>
-          <a:p xmlns:a="http://schemas.openxmlformats.org/drawingml/2006/main">
-            <a:r>
-              <a:t/>
-            </a:r>
-          </a:p>
-          <a:p xmlns:a="http://schemas.openxmlformats.org/drawingml/2006/main">
-            <a:r>
-              <a:t>来源与边界：</a:t>
-            </a:r>
-          </a:p>
-          <a:p xmlns:a="http://schemas.openxmlformats.org/drawingml/2006/main">
-            <a:r>
-              <a:t>./handout.md；课堂示例与构造数据见 ../../course/reading-card-case.md</a:t>
-            </a:r>
-          </a:p>
-          <a:p xmlns:a="http://schemas.openxmlformats.org/drawingml/2006/main">
-            <a:r>
-              <a:t/>
-            </a:r>
-          </a:p>
-          <a:p xmlns:a="http://schemas.openxmlformats.org/drawingml/2006/main">
-            <a:r>
-              <a:t>[Sources]</a:t>
-            </a:r>
-          </a:p>
-          <a:p xmlns:a="http://schemas.openxmlformats.org/drawingml/2006/main">
-            <a:r>
-              <a:t/>
-            </a:r>
-          </a:p>
-          <a:p xmlns:a="http://schemas.openxmlformats.org/drawingml/2006/main">
-            <a:r>
-              <a:t>- 本课 handout.md 与 slides.md</a:t>
-            </a:r>
-          </a:p>
-          <a:p xmlns:a="http://schemas.openxmlformats.org/drawingml/2006/main">
-            <a:r>
-              <a:t/>
-            </a:r>
-          </a:p>
-          <a:p xmlns:a="http://schemas.openxmlformats.org/drawingml/2006/main">
-            <a:r>
-              <a:t>- ../../course/reading-card-case.md</a:t>
-            </a:r>
-          </a:p>
-          <a:p xmlns:a="http://schemas.openxmlformats.org/drawingml/2006/main">
-            <a:r>
-              <a:t/>
+              <a:t>本课 handout.md、judgment-task.md；../../course/judgment-path.md。</a:t>
             </a:r>
           </a:p>
           <a:p xmlns:a="http://schemas.openxmlformats.org/drawingml/2006/main">
@@ -7741,7 +5861,7 @@
                 <a:ea typeface="微软雅黑"/>
                 <a:cs typeface="微软雅黑"/>
               </a:rPr>
-              <a:t>3 份教学构造文本，不代表真实论文总体。</a:t>
+              <a:t>阅读卡：构造文本与固定输出，限定结果范围。</a:t>
             </a:r>
           </a:p>
         </p:txBody>
@@ -7800,7 +5920,7 @@
                 <a:ea typeface="微软雅黑"/>
                 <a:cs typeface="微软雅黑"/>
               </a:rPr>
-              <a:t>固定输出回放，不估计模型随机波动。</a:t>
+              <a:t>RSI：500 次模拟重复，非工业任务。</a:t>
             </a:r>
           </a:p>
         </p:txBody>
@@ -7859,7 +5979,7 @@
                 <a:ea typeface="微软雅黑"/>
                 <a:cs typeface="微软雅黑"/>
               </a:rPr>
-              <a:t>参考标注需人工核验，不等于独立盲评。</a:t>
+              <a:t>参与选优的留出反馈属于开发证据。</a:t>
             </a:r>
           </a:p>
         </p:txBody>
@@ -7918,7 +6038,7 @@
                 <a:ea typeface="微软雅黑"/>
                 <a:cs typeface="微软雅黑"/>
               </a:rPr>
-              <a:t>只测限定条件遗漏，未覆盖全部质量。</a:t>
+              <a:t>区间跨零，不等于机制被推翻。</a:t>
             </a:r>
           </a:p>
         </p:txBody>
@@ -10900,149 +9020,22 @@
       </p:grpSpPr>
       <p:sp>
         <p:nvSpPr>
-          <p:cNvPr id="4" name="Text Placeholder 3">
-            <a:extLst xmlns:a="http://schemas.openxmlformats.org/drawingml/2006/main">
-              <a:ext uri="{FF2B5EF4-FFF2-40B4-BE49-F238E27FC236}">
-                <a16:creationId xmlns:a16="http://schemas.microsoft.com/office/drawing/2014/main" id="{4D941B40-7A0A-534E-3563-CA11753C8E3F}"/>
-              </a:ext>
-            </a:extLst>
-          </p:cNvPr>
-          <p:cNvSpPr>
-            <a:spLocks xmlns:a="http://schemas.openxmlformats.org/drawingml/2006/main" noGrp="1"/>
-          </p:cNvSpPr>
-          <p:nvPr>
-            <p:ph type="body" idx="14"/>
-          </p:nvPr>
-        </p:nvSpPr>
-        <p:spPr>
-          <a:xfrm xmlns:a="http://schemas.openxmlformats.org/drawingml/2006/main">
-            <a:off x="1028700" y="57150"/>
-            <a:ext cx="10668000" cy="571500"/>
-          </a:xfrm>
-        </p:spPr>
-        <p:txBody>
-          <a:bodyPr xmlns:a="http://schemas.openxmlformats.org/drawingml/2006/main" lIns="0" tIns="0" rIns="0" bIns="0" anchor="ctr"/>
-          <a:lstStyle xmlns:a="http://schemas.openxmlformats.org/drawingml/2006/main"/>
-          <a:p xmlns:a="http://schemas.openxmlformats.org/drawingml/2006/main">
-            <a:pPr algn="l">
-              <a:lnSpc>
-                <a:spcPct val="118000"/>
-              </a:lnSpc>
-              <a:buNone/>
-            </a:pPr>
-            <a:r>
-              <a:rPr sz="3000" b="1">
-                <a:solidFill>
-                  <a:srgbClr val="FFFFFF"/>
-                </a:solidFill>
-                <a:latin typeface="微软雅黑"/>
-                <a:ea typeface="微软雅黑"/>
-                <a:cs typeface="微软雅黑"/>
-              </a:rPr>
-              <a:t>实践停留页：完成三件最低产出</a:t>
-            </a:r>
-            <a:endParaRPr/>
-          </a:p>
-        </p:txBody>
-      </p:sp>
-      <p:sp>
-        <p:nvSpPr>
-          <p:cNvPr id="5" name="Slide Number Placeholder 4">
-            <a:extLst xmlns:a="http://schemas.openxmlformats.org/drawingml/2006/main">
-              <a:ext uri="{FF2B5EF4-FFF2-40B4-BE49-F238E27FC236}">
-                <a16:creationId xmlns:a16="http://schemas.microsoft.com/office/drawing/2014/main" id="{EBA5909F-738E-F60C-BE8C-B3F1D94548E5}"/>
-              </a:ext>
-            </a:extLst>
-          </p:cNvPr>
-          <p:cNvSpPr>
-            <a:spLocks xmlns:a="http://schemas.openxmlformats.org/drawingml/2006/main" noGrp="1"/>
-          </p:cNvSpPr>
-          <p:nvPr>
-            <p:ph type="sldNum" idx="10"/>
-          </p:nvPr>
-        </p:nvSpPr>
-        <p:spPr/>
-        <p:txBody>
-          <a:bodyPr xmlns:a="http://schemas.openxmlformats.org/drawingml/2006/main"/>
-          <a:lstStyle xmlns:a="http://schemas.openxmlformats.org/drawingml/2006/main"/>
-          <a:p xmlns:a="http://schemas.openxmlformats.org/drawingml/2006/main">
-            <a:fld id="{90F7333B-44AC-F7E9-D49D-FE92F45E0477}" type="slidenum">
-              <a:t>17</a:t>
-            </a:fld>
-            <a:endParaRPr/>
-          </a:p>
-        </p:txBody>
-      </p:sp>
-      <p:sp>
-        <p:nvSpPr>
-          <p:cNvPr id="6" name="brand-header">
-            <a:extLst xmlns:a="http://schemas.openxmlformats.org/drawingml/2006/main">
-              <a:ext uri="{FF2B5EF4-FFF2-40B4-BE49-F238E27FC236}">
-                <a16:creationId xmlns:a16="http://schemas.microsoft.com/office/drawing/2014/main" id="{80A4F2AF-EC29-4FDE-AB8C-7344F9094900}"/>
-              </a:ext>
-            </a:extLst>
-          </p:cNvPr>
-          <p:cNvSpPr>
-            <a:spLocks xmlns:a="http://schemas.openxmlformats.org/drawingml/2006/main" noGrp="1"/>
-          </p:cNvSpPr>
-          <p:nvPr/>
-        </p:nvSpPr>
-        <p:spPr>
-          <a:xfrm xmlns:a="http://schemas.openxmlformats.org/drawingml/2006/main">
-            <a:off x="0" y="0"/>
-            <a:ext cx="11887200" cy="685800"/>
-          </a:xfrm>
-          <a:prstGeom xmlns:a="http://schemas.openxmlformats.org/drawingml/2006/main" prst="rect">
-            <a:avLst/>
-          </a:prstGeom>
-          <a:solidFill xmlns:a="http://schemas.openxmlformats.org/drawingml/2006/main">
-            <a:srgbClr val="C8161E"/>
-          </a:solidFill>
-          <a:ln xmlns:a="http://schemas.openxmlformats.org/drawingml/2006/main" w="0">
-            <a:noFill/>
-          </a:ln>
-        </p:spPr>
-      </p:sp>
-      <p:pic>
-        <p:nvPicPr>
-          <p:cNvPr id="25" name=""/>
-          <p:cNvPicPr>
-            <a:picLocks xmlns:a="http://schemas.openxmlformats.org/drawingml/2006/main" noChangeAspect="1"/>
-          </p:cNvPicPr>
-          <p:nvPr/>
-        </p:nvPicPr>
-        <p:blipFill>
-          <a:blip xmlns:r="http://schemas.openxmlformats.org/officeDocument/2006/relationships" xmlns:a="http://schemas.openxmlformats.org/drawingml/2006/main" r:embed="R54906bbc26ba45ee"/>
-          <a:stretch xmlns:a="http://schemas.openxmlformats.org/drawingml/2006/main"/>
-        </p:blipFill>
-        <p:spPr>
-          <a:xfrm xmlns:a="http://schemas.openxmlformats.org/drawingml/2006/main">
-            <a:off x="323850" y="76200"/>
-            <a:ext cx="533400" cy="533400"/>
-          </a:xfrm>
-          <a:prstGeom xmlns:a="http://schemas.openxmlformats.org/drawingml/2006/main" prst="rect">
-            <a:avLst/>
-          </a:prstGeom>
-        </p:spPr>
-      </p:pic>
-      <p:sp>
-        <p:nvSpPr>
-          <p:cNvPr id="8" name="brand-title">
-            <a:extLst xmlns:a="http://schemas.openxmlformats.org/drawingml/2006/main">
-              <a:ext uri="{FF2B5EF4-FFF2-40B4-BE49-F238E27FC236}">
-                <a16:creationId xmlns:a16="http://schemas.microsoft.com/office/drawing/2014/main" id="{B14DAF7D-F387-4945-8BE2-F97459345026}"/>
-              </a:ext>
-            </a:extLst>
-          </p:cNvPr>
-          <p:cNvSpPr>
-            <a:spLocks xmlns:a="http://schemas.openxmlformats.org/drawingml/2006/main" noGrp="1"/>
-          </p:cNvSpPr>
-          <p:nvPr/>
-        </p:nvSpPr>
-        <p:spPr>
-          <a:xfrm xmlns:a="http://schemas.openxmlformats.org/drawingml/2006/main">
-            <a:off x="1028700" y="66675"/>
-            <a:ext cx="10477500" cy="552450"/>
+          <p:cNvPr id="7" name="judgment-title">
+            <a:extLst xmlns:a="http://schemas.openxmlformats.org/drawingml/2006/main">
+              <a:ext uri="{FF2B5EF4-FFF2-40B4-BE49-F238E27FC236}">
+                <a16:creationId xmlns:a16="http://schemas.microsoft.com/office/drawing/2014/main" id="{5F868A63-2EF5-4DE3-92C7-F1A90D059412}"/>
+              </a:ext>
+            </a:extLst>
+          </p:cNvPr>
+          <p:cNvSpPr>
+            <a:spLocks xmlns:a="http://schemas.openxmlformats.org/drawingml/2006/main" noGrp="1"/>
+          </p:cNvSpPr>
+          <p:nvPr/>
+        </p:nvSpPr>
+        <p:spPr>
+          <a:xfrm xmlns:a="http://schemas.openxmlformats.org/drawingml/2006/main">
+            <a:off x="1028700" y="76200"/>
+            <a:ext cx="10687050" cy="514350"/>
           </a:xfrm>
           <a:prstGeom xmlns:a="http://schemas.openxmlformats.org/drawingml/2006/main" prst="rect">
             <a:avLst/>
@@ -11053,14 +9046,21 @@
           </a:ln>
         </p:spPr>
         <p:txBody>
-          <a:bodyPr xmlns:a="http://schemas.openxmlformats.org/drawingml/2006/main" lIns="0" tIns="0" rIns="0" bIns="0" anchor="ctr"/>
-          <a:lstStyle xmlns:a="http://schemas.openxmlformats.org/drawingml/2006/main"/>
+          <a:bodyPr xmlns:a="http://schemas.openxmlformats.org/drawingml/2006/main" lIns="0" tIns="0" rIns="0" bIns="0" anchor="t"/>
+          <a:lstStyle xmlns:a="http://schemas.openxmlformats.org/drawingml/2006/main">
+            <a:defPPr algn="l">
+              <a:defRPr sz="3000" b="1">
+                <a:solidFill>
+                  <a:srgbClr val="FFFFFF"/>
+                </a:solidFill>
+                <a:latin typeface="微软雅黑"/>
+                <a:ea typeface="微软雅黑"/>
+                <a:cs typeface="微软雅黑"/>
+              </a:defRPr>
+            </a:defPPr>
+          </a:lstStyle>
           <a:p xmlns:a="http://schemas.openxmlformats.org/drawingml/2006/main">
             <a:pPr algn="l">
-              <a:lnSpc>
-                <a:spcPct val="118000"/>
-              </a:lnSpc>
-              <a:buNone/>
               <a:defRPr sz="3000" b="1">
                 <a:solidFill>
                   <a:srgbClr val="FFFFFF"/>
@@ -11079,29 +9079,29 @@
                 <a:ea typeface="微软雅黑"/>
                 <a:cs typeface="微软雅黑"/>
               </a:rPr>
-              <a:t>实践停留页：完成三件最低产出</a:t>
-            </a:r>
-          </a:p>
-        </p:txBody>
-      </p:sp>
-      <p:sp>
-        <p:nvSpPr>
-          <p:cNvPr id="9" name="source">
-            <a:extLst xmlns:a="http://schemas.openxmlformats.org/drawingml/2006/main">
-              <a:ext uri="{FF2B5EF4-FFF2-40B4-BE49-F238E27FC236}">
-                <a16:creationId xmlns:a16="http://schemas.microsoft.com/office/drawing/2014/main" id="{688D1864-8BB6-47B1-8742-28511401201E}"/>
-              </a:ext>
-            </a:extLst>
-          </p:cNvPr>
-          <p:cNvSpPr>
-            <a:spLocks xmlns:a="http://schemas.openxmlformats.org/drawingml/2006/main" noGrp="1"/>
-          </p:cNvSpPr>
-          <p:nvPr/>
-        </p:nvSpPr>
-        <p:spPr>
-          <a:xfrm xmlns:a="http://schemas.openxmlformats.org/drawingml/2006/main">
-            <a:off x="609600" y="6067425"/>
-            <a:ext cx="10763250" cy="209550"/>
+              <a:t>本人项目：决定、核验与回写</a:t>
+            </a:r>
+          </a:p>
+        </p:txBody>
+      </p:sp>
+      <p:sp>
+        <p:nvSpPr>
+          <p:cNvPr id="2" name="judgment-body-0">
+            <a:extLst xmlns:a="http://schemas.openxmlformats.org/drawingml/2006/main">
+              <a:ext uri="{FF2B5EF4-FFF2-40B4-BE49-F238E27FC236}">
+                <a16:creationId xmlns:a16="http://schemas.microsoft.com/office/drawing/2014/main" id="{3D5717BE-3D1F-4D4C-9C8D-CFA9D8AD9D7C}"/>
+              </a:ext>
+            </a:extLst>
+          </p:cNvPr>
+          <p:cNvSpPr>
+            <a:spLocks xmlns:a="http://schemas.openxmlformats.org/drawingml/2006/main" noGrp="1"/>
+          </p:cNvSpPr>
+          <p:nvPr/>
+        </p:nvSpPr>
+        <p:spPr>
+          <a:xfrm xmlns:a="http://schemas.openxmlformats.org/drawingml/2006/main">
+            <a:off x="666750" y="1066800"/>
+            <a:ext cx="10858500" cy="1476375"/>
           </a:xfrm>
           <a:prstGeom xmlns:a="http://schemas.openxmlformats.org/drawingml/2006/main" prst="rect">
             <a:avLst/>
@@ -11113,16 +9113,23 @@
         </p:spPr>
         <p:txBody>
           <a:bodyPr xmlns:a="http://schemas.openxmlformats.org/drawingml/2006/main" lIns="0" tIns="0" rIns="0" bIns="0" anchor="t"/>
-          <a:lstStyle xmlns:a="http://schemas.openxmlformats.org/drawingml/2006/main"/>
+          <a:lstStyle xmlns:a="http://schemas.openxmlformats.org/drawingml/2006/main">
+            <a:defPPr algn="l">
+              <a:defRPr sz="2400" b="0">
+                <a:solidFill>
+                  <a:srgbClr val="263746"/>
+                </a:solidFill>
+                <a:latin typeface="微软雅黑"/>
+                <a:ea typeface="微软雅黑"/>
+                <a:cs typeface="微软雅黑"/>
+              </a:defRPr>
+            </a:defPPr>
+          </a:lstStyle>
           <a:p xmlns:a="http://schemas.openxmlformats.org/drawingml/2006/main">
             <a:pPr algn="l">
-              <a:lnSpc>
-                <a:spcPct val="118000"/>
-              </a:lnSpc>
-              <a:buNone/>
-              <a:defRPr sz="1100" b="0">
-                <a:solidFill>
-                  <a:srgbClr val="66727D"/>
+              <a:defRPr sz="2400" b="0">
+                <a:solidFill>
+                  <a:srgbClr val="263746"/>
                 </a:solidFill>
                 <a:latin typeface="微软雅黑"/>
                 <a:ea typeface="微软雅黑"/>
@@ -11130,98 +9137,37 @@
               </a:defRPr>
             </a:pPr>
             <a:r>
-              <a:rPr sz="1100" b="0">
-                <a:solidFill>
-                  <a:srgbClr val="66727D"/>
+              <a:rPr sz="2400" b="0">
+                <a:solidFill>
+                  <a:srgbClr val="263746"/>
                 </a:solidFill>
                 <a:latin typeface="微软雅黑"/>
                 <a:ea typeface="微软雅黑"/>
                 <a:cs typeface="微软雅黑"/>
               </a:rPr>
-              <a:t>来源：lesson-13/slides.md；课程工件与讲义见 speaker notes</a:t>
-            </a:r>
-          </a:p>
-        </p:txBody>
-      </p:sp>
-      <p:sp>
-        <p:nvSpPr>
-          <p:cNvPr id="10" name="num-0">
-            <a:extLst xmlns:a="http://schemas.openxmlformats.org/drawingml/2006/main">
-              <a:ext uri="{FF2B5EF4-FFF2-40B4-BE49-F238E27FC236}">
-                <a16:creationId xmlns:a16="http://schemas.microsoft.com/office/drawing/2014/main" id="{9445F035-E492-4AC0-B626-871355E82126}"/>
-              </a:ext>
-            </a:extLst>
-          </p:cNvPr>
-          <p:cNvSpPr>
-            <a:spLocks xmlns:a="http://schemas.openxmlformats.org/drawingml/2006/main" noGrp="1"/>
-          </p:cNvSpPr>
-          <p:nvPr/>
-        </p:nvSpPr>
-        <p:spPr>
-          <a:xfrm xmlns:a="http://schemas.openxmlformats.org/drawingml/2006/main">
-            <a:off x="666750" y="1524000"/>
-            <a:ext cx="323850" cy="1016000"/>
-          </a:xfrm>
-          <a:prstGeom xmlns:a="http://schemas.openxmlformats.org/drawingml/2006/main" prst="rect">
-            <a:avLst/>
-          </a:prstGeom>
-          <a:solidFill xmlns:a="http://schemas.openxmlformats.org/drawingml/2006/main">
-            <a:srgbClr val="1F4D78"/>
-          </a:solidFill>
-          <a:ln xmlns:a="http://schemas.openxmlformats.org/drawingml/2006/main" w="0">
-            <a:noFill/>
-          </a:ln>
-        </p:spPr>
-        <p:txBody>
-          <a:bodyPr xmlns:a="http://schemas.openxmlformats.org/drawingml/2006/main" lIns="0" tIns="0" rIns="0" bIns="0" anchor="ctr"/>
-          <a:lstStyle xmlns:a="http://schemas.openxmlformats.org/drawingml/2006/main"/>
-          <a:p xmlns:a="http://schemas.openxmlformats.org/drawingml/2006/main">
-            <a:pPr algn="ctr">
-              <a:lnSpc>
-                <a:spcPct val="118000"/>
-              </a:lnSpc>
-              <a:buNone/>
-              <a:defRPr sz="1800" b="1">
-                <a:solidFill>
-                  <a:srgbClr val="FFFFFF"/>
-                </a:solidFill>
-                <a:latin typeface="微软雅黑"/>
-                <a:ea typeface="微软雅黑"/>
-                <a:cs typeface="微软雅黑"/>
-              </a:defRPr>
-            </a:pPr>
-            <a:r>
-              <a:rPr sz="1800" b="1">
-                <a:solidFill>
-                  <a:srgbClr val="FFFFFF"/>
-                </a:solidFill>
-                <a:latin typeface="微软雅黑"/>
-                <a:ea typeface="微软雅黑"/>
-                <a:cs typeface="微软雅黑"/>
-              </a:rPr>
-              <a:t>1</a:t>
-            </a:r>
-          </a:p>
-        </p:txBody>
-      </p:sp>
-      <p:sp>
-        <p:nvSpPr>
-          <p:cNvPr id="11" name="row-0">
-            <a:extLst xmlns:a="http://schemas.openxmlformats.org/drawingml/2006/main">
-              <a:ext uri="{FF2B5EF4-FFF2-40B4-BE49-F238E27FC236}">
-                <a16:creationId xmlns:a16="http://schemas.microsoft.com/office/drawing/2014/main" id="{2DFA4062-4E8C-4D30-9C98-A408E4DD159D}"/>
-              </a:ext>
-            </a:extLst>
-          </p:cNvPr>
-          <p:cNvSpPr>
-            <a:spLocks xmlns:a="http://schemas.openxmlformats.org/drawingml/2006/main" noGrp="1"/>
-          </p:cNvSpPr>
-          <p:nvPr/>
-        </p:nvSpPr>
-        <p:spPr>
-          <a:xfrm xmlns:a="http://schemas.openxmlformats.org/drawingml/2006/main">
-            <a:off x="1143000" y="1524000"/>
-            <a:ext cx="6191250" cy="1016000"/>
+              <a:t>在同一输入上比较 baseline 与实质修改版，分别报告正确处理、误拒、失败和成本；实际执行证据与构造输出分开。给出结论强度与一项采用/修订/停止决定。</a:t>
+            </a:r>
+          </a:p>
+        </p:txBody>
+      </p:sp>
+      <p:sp>
+        <p:nvSpPr>
+          <p:cNvPr id="3" name="judgment-body-1">
+            <a:extLst xmlns:a="http://schemas.openxmlformats.org/drawingml/2006/main">
+              <a:ext uri="{FF2B5EF4-FFF2-40B4-BE49-F238E27FC236}">
+                <a16:creationId xmlns:a16="http://schemas.microsoft.com/office/drawing/2014/main" id="{399570C4-AFD3-40C8-B1D1-8DB22AE752F1}"/>
+              </a:ext>
+            </a:extLst>
+          </p:cNvPr>
+          <p:cNvSpPr>
+            <a:spLocks xmlns:a="http://schemas.openxmlformats.org/drawingml/2006/main" noGrp="1"/>
+          </p:cNvSpPr>
+          <p:nvPr/>
+        </p:nvSpPr>
+        <p:spPr>
+          <a:xfrm xmlns:a="http://schemas.openxmlformats.org/drawingml/2006/main">
+            <a:off x="666750" y="2724150"/>
+            <a:ext cx="10858500" cy="1524000"/>
           </a:xfrm>
           <a:prstGeom xmlns:a="http://schemas.openxmlformats.org/drawingml/2006/main" prst="rect">
             <a:avLst/>
@@ -11232,17 +9178,24 @@
           </a:ln>
         </p:spPr>
         <p:txBody>
-          <a:bodyPr xmlns:a="http://schemas.openxmlformats.org/drawingml/2006/main" lIns="0" tIns="0" rIns="0" bIns="0" anchor="ctr"/>
-          <a:lstStyle xmlns:a="http://schemas.openxmlformats.org/drawingml/2006/main"/>
+          <a:bodyPr xmlns:a="http://schemas.openxmlformats.org/drawingml/2006/main" lIns="0" tIns="0" rIns="0" bIns="0" anchor="t"/>
+          <a:lstStyle xmlns:a="http://schemas.openxmlformats.org/drawingml/2006/main">
+            <a:defPPr algn="l">
+              <a:defRPr sz="2400" b="0">
+                <a:solidFill>
+                  <a:srgbClr val="263746"/>
+                </a:solidFill>
+                <a:latin typeface="微软雅黑"/>
+                <a:ea typeface="微软雅黑"/>
+                <a:cs typeface="微软雅黑"/>
+              </a:defRPr>
+            </a:defPPr>
+          </a:lstStyle>
           <a:p xmlns:a="http://schemas.openxmlformats.org/drawingml/2006/main">
             <a:pPr algn="l">
-              <a:lnSpc>
-                <a:spcPct val="118000"/>
-              </a:lnSpc>
-              <a:buNone/>
-              <a:defRPr sz="2200" b="0">
-                <a:solidFill>
-                  <a:srgbClr val="27333D"/>
+              <a:defRPr sz="2400" b="0">
+                <a:solidFill>
+                  <a:srgbClr val="263746"/>
                 </a:solidFill>
                 <a:latin typeface="微软雅黑"/>
                 <a:ea typeface="微软雅黑"/>
@@ -11250,128 +9203,37 @@
               </a:defRPr>
             </a:pPr>
             <a:r>
-              <a:rPr sz="2200" b="0">
-                <a:solidFill>
-                  <a:srgbClr val="27333D"/>
+              <a:rPr sz="2400" b="0">
+                <a:solidFill>
+                  <a:srgbClr val="263746"/>
                 </a:solidFill>
                 <a:latin typeface="微软雅黑"/>
                 <a:ea typeface="微软雅黑"/>
                 <a:cs typeface="微软雅黑"/>
               </a:rPr>
-              <a:t>一张对照｜输入、条件、运行数、指标、结果</a:t>
-            </a:r>
-          </a:p>
-        </p:txBody>
-      </p:sp>
-      <p:sp>
-        <p:nvSpPr>
-          <p:cNvPr id="12" name="row-rule-0">
-            <a:extLst xmlns:a="http://schemas.openxmlformats.org/drawingml/2006/main">
-              <a:ext uri="{FF2B5EF4-FFF2-40B4-BE49-F238E27FC236}">
-                <a16:creationId xmlns:a16="http://schemas.microsoft.com/office/drawing/2014/main" id="{C1B7C796-84A1-4873-9104-EC03977678D5}"/>
-              </a:ext>
-            </a:extLst>
-          </p:cNvPr>
-          <p:cNvSpPr>
-            <a:spLocks xmlns:a="http://schemas.openxmlformats.org/drawingml/2006/main" noGrp="1"/>
-          </p:cNvSpPr>
-          <p:nvPr/>
-        </p:nvSpPr>
-        <p:spPr>
-          <a:xfrm xmlns:a="http://schemas.openxmlformats.org/drawingml/2006/main">
-            <a:off x="1143000" y="2578100"/>
-            <a:ext cx="6191250" cy="14288"/>
-          </a:xfrm>
-          <a:prstGeom xmlns:a="http://schemas.openxmlformats.org/drawingml/2006/main" prst="rect">
-            <a:avLst/>
-          </a:prstGeom>
-          <a:solidFill xmlns:a="http://schemas.openxmlformats.org/drawingml/2006/main">
-            <a:srgbClr val="CDD5DB"/>
-          </a:solidFill>
-          <a:ln xmlns:a="http://schemas.openxmlformats.org/drawingml/2006/main" w="0">
-            <a:noFill/>
-          </a:ln>
-        </p:spPr>
-      </p:sp>
-      <p:sp>
-        <p:nvSpPr>
-          <p:cNvPr id="13" name="num-1">
-            <a:extLst xmlns:a="http://schemas.openxmlformats.org/drawingml/2006/main">
-              <a:ext uri="{FF2B5EF4-FFF2-40B4-BE49-F238E27FC236}">
-                <a16:creationId xmlns:a16="http://schemas.microsoft.com/office/drawing/2014/main" id="{EA5D4021-BE4D-4957-8411-AED345E1276B}"/>
-              </a:ext>
-            </a:extLst>
-          </p:cNvPr>
-          <p:cNvSpPr>
-            <a:spLocks xmlns:a="http://schemas.openxmlformats.org/drawingml/2006/main" noGrp="1"/>
-          </p:cNvSpPr>
-          <p:nvPr/>
-        </p:nvSpPr>
-        <p:spPr>
-          <a:xfrm xmlns:a="http://schemas.openxmlformats.org/drawingml/2006/main">
-            <a:off x="666750" y="2635250"/>
-            <a:ext cx="323850" cy="1016000"/>
-          </a:xfrm>
-          <a:prstGeom xmlns:a="http://schemas.openxmlformats.org/drawingml/2006/main" prst="rect">
-            <a:avLst/>
-          </a:prstGeom>
-          <a:solidFill xmlns:a="http://schemas.openxmlformats.org/drawingml/2006/main">
-            <a:srgbClr val="1F4D78"/>
-          </a:solidFill>
-          <a:ln xmlns:a="http://schemas.openxmlformats.org/drawingml/2006/main" w="0">
-            <a:noFill/>
-          </a:ln>
-        </p:spPr>
-        <p:txBody>
-          <a:bodyPr xmlns:a="http://schemas.openxmlformats.org/drawingml/2006/main" lIns="0" tIns="0" rIns="0" bIns="0" anchor="ctr"/>
-          <a:lstStyle xmlns:a="http://schemas.openxmlformats.org/drawingml/2006/main"/>
-          <a:p xmlns:a="http://schemas.openxmlformats.org/drawingml/2006/main">
-            <a:pPr algn="ctr">
-              <a:lnSpc>
-                <a:spcPct val="118000"/>
-              </a:lnSpc>
-              <a:buNone/>
-              <a:defRPr sz="1800" b="1">
-                <a:solidFill>
-                  <a:srgbClr val="FFFFFF"/>
-                </a:solidFill>
-                <a:latin typeface="微软雅黑"/>
-                <a:ea typeface="微软雅黑"/>
-                <a:cs typeface="微软雅黑"/>
-              </a:defRPr>
-            </a:pPr>
-            <a:r>
-              <a:rPr sz="1800" b="1">
-                <a:solidFill>
-                  <a:srgbClr val="FFFFFF"/>
-                </a:solidFill>
-                <a:latin typeface="微软雅黑"/>
-                <a:ea typeface="微软雅黑"/>
-                <a:cs typeface="微软雅黑"/>
-              </a:rPr>
-              <a:t>2</a:t>
-            </a:r>
-          </a:p>
-        </p:txBody>
-      </p:sp>
-      <p:sp>
-        <p:nvSpPr>
-          <p:cNvPr id="14" name="row-1">
-            <a:extLst xmlns:a="http://schemas.openxmlformats.org/drawingml/2006/main">
-              <a:ext uri="{FF2B5EF4-FFF2-40B4-BE49-F238E27FC236}">
-                <a16:creationId xmlns:a16="http://schemas.microsoft.com/office/drawing/2014/main" id="{08EA6E16-C328-4BC4-9B0C-C5886DCF2F1E}"/>
-              </a:ext>
-            </a:extLst>
-          </p:cNvPr>
-          <p:cNvSpPr>
-            <a:spLocks xmlns:a="http://schemas.openxmlformats.org/drawingml/2006/main" noGrp="1"/>
-          </p:cNvSpPr>
-          <p:nvPr/>
-        </p:nvSpPr>
-        <p:spPr>
-          <a:xfrm xmlns:a="http://schemas.openxmlformats.org/drawingml/2006/main">
-            <a:off x="1143000" y="2635250"/>
-            <a:ext cx="6191250" cy="1016000"/>
+              <a:t>从汇总回到每条记录；核对分母守恒、评价器只读、开发材料与最终证据身份；无改善亦可达标。</a:t>
+            </a:r>
+          </a:p>
+        </p:txBody>
+      </p:sp>
+      <p:sp>
+        <p:nvSpPr>
+          <p:cNvPr id="4" name="judgment-body-2">
+            <a:extLst xmlns:a="http://schemas.openxmlformats.org/drawingml/2006/main">
+              <a:ext uri="{FF2B5EF4-FFF2-40B4-BE49-F238E27FC236}">
+                <a16:creationId xmlns:a16="http://schemas.microsoft.com/office/drawing/2014/main" id="{E79FFE29-E92A-4739-BB3B-D6A6C5165E9C}"/>
+              </a:ext>
+            </a:extLst>
+          </p:cNvPr>
+          <p:cNvSpPr>
+            <a:spLocks xmlns:a="http://schemas.openxmlformats.org/drawingml/2006/main" noGrp="1"/>
+          </p:cNvSpPr>
+          <p:nvPr/>
+        </p:nvSpPr>
+        <p:spPr>
+          <a:xfrm xmlns:a="http://schemas.openxmlformats.org/drawingml/2006/main">
+            <a:off x="666750" y="4457700"/>
+            <a:ext cx="10858500" cy="1466850"/>
           </a:xfrm>
           <a:prstGeom xmlns:a="http://schemas.openxmlformats.org/drawingml/2006/main" prst="rect">
             <a:avLst/>
@@ -11382,17 +9244,24 @@
           </a:ln>
         </p:spPr>
         <p:txBody>
-          <a:bodyPr xmlns:a="http://schemas.openxmlformats.org/drawingml/2006/main" lIns="0" tIns="0" rIns="0" bIns="0" anchor="ctr"/>
-          <a:lstStyle xmlns:a="http://schemas.openxmlformats.org/drawingml/2006/main"/>
+          <a:bodyPr xmlns:a="http://schemas.openxmlformats.org/drawingml/2006/main" lIns="0" tIns="0" rIns="0" bIns="0" anchor="t"/>
+          <a:lstStyle xmlns:a="http://schemas.openxmlformats.org/drawingml/2006/main">
+            <a:defPPr algn="l">
+              <a:defRPr sz="2200" b="0">
+                <a:solidFill>
+                  <a:srgbClr val="1F4D78"/>
+                </a:solidFill>
+                <a:latin typeface="微软雅黑"/>
+                <a:ea typeface="微软雅黑"/>
+                <a:cs typeface="微软雅黑"/>
+              </a:defRPr>
+            </a:defPPr>
+          </a:lstStyle>
           <a:p xmlns:a="http://schemas.openxmlformats.org/drawingml/2006/main">
             <a:pPr algn="l">
-              <a:lnSpc>
-                <a:spcPct val="118000"/>
-              </a:lnSpc>
-              <a:buNone/>
               <a:defRPr sz="2200" b="0">
                 <a:solidFill>
-                  <a:srgbClr val="27333D"/>
+                  <a:srgbClr val="1F4D78"/>
                 </a:solidFill>
                 <a:latin typeface="微软雅黑"/>
                 <a:ea typeface="微软雅黑"/>
@@ -11402,126 +9271,35 @@
             <a:r>
               <a:rPr sz="2200" b="0">
                 <a:solidFill>
-                  <a:srgbClr val="27333D"/>
+                  <a:srgbClr val="1F4D78"/>
                 </a:solidFill>
                 <a:latin typeface="微软雅黑"/>
                 <a:ea typeface="微软雅黑"/>
                 <a:cs typeface="微软雅黑"/>
               </a:rPr>
-              <a:t>一项失败或局限｜表现、根因、边界、下一步</a:t>
-            </a:r>
-          </a:p>
-        </p:txBody>
-      </p:sp>
-      <p:sp>
-        <p:nvSpPr>
-          <p:cNvPr id="15" name="row-rule-1">
-            <a:extLst xmlns:a="http://schemas.openxmlformats.org/drawingml/2006/main">
-              <a:ext uri="{FF2B5EF4-FFF2-40B4-BE49-F238E27FC236}">
-                <a16:creationId xmlns:a16="http://schemas.microsoft.com/office/drawing/2014/main" id="{2C25FC32-FFB0-46D8-8FB3-5B44A44D138D}"/>
-              </a:ext>
-            </a:extLst>
-          </p:cNvPr>
-          <p:cNvSpPr>
-            <a:spLocks xmlns:a="http://schemas.openxmlformats.org/drawingml/2006/main" noGrp="1"/>
-          </p:cNvSpPr>
-          <p:nvPr/>
-        </p:nvSpPr>
-        <p:spPr>
-          <a:xfrm xmlns:a="http://schemas.openxmlformats.org/drawingml/2006/main">
-            <a:off x="1143000" y="3689350"/>
-            <a:ext cx="6191250" cy="14288"/>
-          </a:xfrm>
-          <a:prstGeom xmlns:a="http://schemas.openxmlformats.org/drawingml/2006/main" prst="rect">
-            <a:avLst/>
-          </a:prstGeom>
-          <a:solidFill xmlns:a="http://schemas.openxmlformats.org/drawingml/2006/main">
-            <a:srgbClr val="CDD5DB"/>
-          </a:solidFill>
-          <a:ln xmlns:a="http://schemas.openxmlformats.org/drawingml/2006/main" w="0">
-            <a:noFill/>
-          </a:ln>
-        </p:spPr>
-      </p:sp>
-      <p:sp>
-        <p:nvSpPr>
-          <p:cNvPr id="16" name="num-2">
-            <a:extLst xmlns:a="http://schemas.openxmlformats.org/drawingml/2006/main">
-              <a:ext uri="{FF2B5EF4-FFF2-40B4-BE49-F238E27FC236}">
-                <a16:creationId xmlns:a16="http://schemas.microsoft.com/office/drawing/2014/main" id="{741A00EB-3CE3-41D7-B24B-9311C551D097}"/>
-              </a:ext>
-            </a:extLst>
-          </p:cNvPr>
-          <p:cNvSpPr>
-            <a:spLocks xmlns:a="http://schemas.openxmlformats.org/drawingml/2006/main" noGrp="1"/>
-          </p:cNvSpPr>
-          <p:nvPr/>
-        </p:nvSpPr>
-        <p:spPr>
-          <a:xfrm xmlns:a="http://schemas.openxmlformats.org/drawingml/2006/main">
-            <a:off x="666750" y="3746500"/>
-            <a:ext cx="323850" cy="1016000"/>
-          </a:xfrm>
-          <a:prstGeom xmlns:a="http://schemas.openxmlformats.org/drawingml/2006/main" prst="rect">
-            <a:avLst/>
-          </a:prstGeom>
-          <a:solidFill xmlns:a="http://schemas.openxmlformats.org/drawingml/2006/main">
-            <a:srgbClr val="C8161E"/>
-          </a:solidFill>
-          <a:ln xmlns:a="http://schemas.openxmlformats.org/drawingml/2006/main" w="0">
-            <a:noFill/>
-          </a:ln>
-        </p:spPr>
-        <p:txBody>
-          <a:bodyPr xmlns:a="http://schemas.openxmlformats.org/drawingml/2006/main" lIns="0" tIns="0" rIns="0" bIns="0" anchor="ctr"/>
-          <a:lstStyle xmlns:a="http://schemas.openxmlformats.org/drawingml/2006/main"/>
-          <a:p xmlns:a="http://schemas.openxmlformats.org/drawingml/2006/main">
-            <a:pPr algn="ctr">
-              <a:lnSpc>
-                <a:spcPct val="118000"/>
-              </a:lnSpc>
-              <a:buNone/>
-              <a:defRPr sz="1800" b="1">
-                <a:solidFill>
-                  <a:srgbClr val="C8161E"/>
-                </a:solidFill>
-                <a:latin typeface="微软雅黑"/>
-                <a:ea typeface="微软雅黑"/>
-                <a:cs typeface="微软雅黑"/>
-              </a:defRPr>
-            </a:pPr>
-            <a:r>
-              <a:rPr sz="1800" b="1">
-                <a:solidFill>
-                  <a:srgbClr val="C8161E"/>
-                </a:solidFill>
-                <a:latin typeface="微软雅黑"/>
-                <a:ea typeface="微软雅黑"/>
-                <a:cs typeface="微软雅黑"/>
-              </a:rPr>
-              <a:t>3</a:t>
-            </a:r>
-          </a:p>
-        </p:txBody>
-      </p:sp>
-      <p:sp>
-        <p:nvSpPr>
-          <p:cNvPr id="17" name="row-2">
-            <a:extLst xmlns:a="http://schemas.openxmlformats.org/drawingml/2006/main">
-              <a:ext uri="{FF2B5EF4-FFF2-40B4-BE49-F238E27FC236}">
-                <a16:creationId xmlns:a16="http://schemas.microsoft.com/office/drawing/2014/main" id="{680D7DA6-D6BB-4421-A338-D49B388ADC49}"/>
-              </a:ext>
-            </a:extLst>
-          </p:cNvPr>
-          <p:cNvSpPr>
-            <a:spLocks xmlns:a="http://schemas.openxmlformats.org/drawingml/2006/main" noGrp="1"/>
-          </p:cNvSpPr>
-          <p:nvPr/>
-        </p:nvSpPr>
-        <p:spPr>
-          <a:xfrm xmlns:a="http://schemas.openxmlformats.org/drawingml/2006/main">
-            <a:off x="1143000" y="3746500"/>
-            <a:ext cx="6191250" cy="1016000"/>
+              <a:t>保存：验证门：本人实际比较、评价报告和后续决定</a:t>
+            </a:r>
+          </a:p>
+        </p:txBody>
+      </p:sp>
+      <p:sp>
+        <p:nvSpPr>
+          <p:cNvPr id="5" name="judgment-source">
+            <a:extLst xmlns:a="http://schemas.openxmlformats.org/drawingml/2006/main">
+              <a:ext uri="{FF2B5EF4-FFF2-40B4-BE49-F238E27FC236}">
+                <a16:creationId xmlns:a16="http://schemas.microsoft.com/office/drawing/2014/main" id="{337D6375-856E-4BF1-A50F-B04CD425161B}"/>
+              </a:ext>
+            </a:extLst>
+          </p:cNvPr>
+          <p:cNvSpPr>
+            <a:spLocks xmlns:a="http://schemas.openxmlformats.org/drawingml/2006/main" noGrp="1"/>
+          </p:cNvSpPr>
+          <p:nvPr/>
+        </p:nvSpPr>
+        <p:spPr>
+          <a:xfrm xmlns:a="http://schemas.openxmlformats.org/drawingml/2006/main">
+            <a:off x="666750" y="6276975"/>
+            <a:ext cx="10572750" cy="209550"/>
           </a:xfrm>
           <a:prstGeom xmlns:a="http://schemas.openxmlformats.org/drawingml/2006/main" prst="rect">
             <a:avLst/>
@@ -11532,17 +9310,24 @@
           </a:ln>
         </p:spPr>
         <p:txBody>
-          <a:bodyPr xmlns:a="http://schemas.openxmlformats.org/drawingml/2006/main" lIns="0" tIns="0" rIns="0" bIns="0" anchor="ctr"/>
-          <a:lstStyle xmlns:a="http://schemas.openxmlformats.org/drawingml/2006/main"/>
+          <a:bodyPr xmlns:a="http://schemas.openxmlformats.org/drawingml/2006/main" lIns="0" tIns="0" rIns="0" bIns="0" anchor="t"/>
+          <a:lstStyle xmlns:a="http://schemas.openxmlformats.org/drawingml/2006/main">
+            <a:defPPr algn="l">
+              <a:defRPr sz="1100" b="0">
+                <a:solidFill>
+                  <a:srgbClr val="667684"/>
+                </a:solidFill>
+                <a:latin typeface="微软雅黑"/>
+                <a:ea typeface="微软雅黑"/>
+                <a:cs typeface="微软雅黑"/>
+              </a:defRPr>
+            </a:defPPr>
+          </a:lstStyle>
           <a:p xmlns:a="http://schemas.openxmlformats.org/drawingml/2006/main">
             <a:pPr algn="l">
-              <a:lnSpc>
-                <a:spcPct val="118000"/>
-              </a:lnSpc>
-              <a:buNone/>
-              <a:defRPr sz="2200" b="0">
-                <a:solidFill>
-                  <a:srgbClr val="27333D"/>
+              <a:defRPr sz="1100" b="0">
+                <a:solidFill>
+                  <a:srgbClr val="667684"/>
                 </a:solidFill>
                 <a:latin typeface="微软雅黑"/>
                 <a:ea typeface="微软雅黑"/>
@@ -11550,67 +9335,37 @@
               </a:defRPr>
             </a:pPr>
             <a:r>
-              <a:rPr sz="2200" b="0">
-                <a:solidFill>
-                  <a:srgbClr val="27333D"/>
+              <a:rPr sz="1100" b="0">
+                <a:solidFill>
+                  <a:srgbClr val="667684"/>
                 </a:solidFill>
                 <a:latin typeface="微软雅黑"/>
                 <a:ea typeface="微软雅黑"/>
                 <a:cs typeface="微软雅黑"/>
               </a:rPr>
-              <a:t>一条判断修订｜支持 / 反驳 / 仍不能判断</a:t>
-            </a:r>
-          </a:p>
-        </p:txBody>
-      </p:sp>
-      <p:sp>
-        <p:nvSpPr>
-          <p:cNvPr id="18" name="practice-side">
-            <a:extLst xmlns:a="http://schemas.openxmlformats.org/drawingml/2006/main">
-              <a:ext uri="{FF2B5EF4-FFF2-40B4-BE49-F238E27FC236}">
-                <a16:creationId xmlns:a16="http://schemas.microsoft.com/office/drawing/2014/main" id="{BAC3B011-F981-434B-8F9C-A35A05F50990}"/>
-              </a:ext>
-            </a:extLst>
-          </p:cNvPr>
-          <p:cNvSpPr>
-            <a:spLocks xmlns:a="http://schemas.openxmlformats.org/drawingml/2006/main" noGrp="1"/>
-          </p:cNvSpPr>
-          <p:nvPr/>
-        </p:nvSpPr>
-        <p:spPr>
-          <a:xfrm xmlns:a="http://schemas.openxmlformats.org/drawingml/2006/main">
-            <a:off x="7905750" y="1666875"/>
-            <a:ext cx="3429000" cy="2619375"/>
-          </a:xfrm>
-          <a:prstGeom xmlns:a="http://schemas.openxmlformats.org/drawingml/2006/main" prst="rect">
-            <a:avLst/>
-          </a:prstGeom>
-          <a:solidFill xmlns:a="http://schemas.openxmlformats.org/drawingml/2006/main">
-            <a:srgbClr val="F4F6F8"/>
-          </a:solidFill>
-          <a:ln xmlns:a="http://schemas.openxmlformats.org/drawingml/2006/main" w="0">
-            <a:noFill/>
-          </a:ln>
-        </p:spPr>
-      </p:sp>
-      <p:sp>
-        <p:nvSpPr>
-          <p:cNvPr id="19" name="practice-h">
-            <a:extLst xmlns:a="http://schemas.openxmlformats.org/drawingml/2006/main">
-              <a:ext uri="{FF2B5EF4-FFF2-40B4-BE49-F238E27FC236}">
-                <a16:creationId xmlns:a16="http://schemas.microsoft.com/office/drawing/2014/main" id="{FEFD2E8B-BF50-488C-BB94-F502A4494EF0}"/>
-              </a:ext>
-            </a:extLst>
-          </p:cNvPr>
-          <p:cNvSpPr>
-            <a:spLocks xmlns:a="http://schemas.openxmlformats.org/drawingml/2006/main" noGrp="1"/>
-          </p:cNvSpPr>
-          <p:nvPr/>
-        </p:nvSpPr>
-        <p:spPr>
-          <a:xfrm xmlns:a="http://schemas.openxmlformats.org/drawingml/2006/main">
-            <a:off x="8191500" y="1952625"/>
-            <a:ext cx="2857500" cy="361950"/>
+              <a:t>来源：本课判断任务与讲义；构造材料及真实来源按材料包标识</a:t>
+            </a:r>
+          </a:p>
+        </p:txBody>
+      </p:sp>
+      <p:sp>
+        <p:nvSpPr>
+          <p:cNvPr id="6" name="judgment-page">
+            <a:extLst xmlns:a="http://schemas.openxmlformats.org/drawingml/2006/main">
+              <a:ext uri="{FF2B5EF4-FFF2-40B4-BE49-F238E27FC236}">
+                <a16:creationId xmlns:a16="http://schemas.microsoft.com/office/drawing/2014/main" id="{2BC81828-0FEB-4EFA-95D8-9B3E3E288827}"/>
+              </a:ext>
+            </a:extLst>
+          </p:cNvPr>
+          <p:cNvSpPr>
+            <a:spLocks xmlns:a="http://schemas.openxmlformats.org/drawingml/2006/main" noGrp="1"/>
+          </p:cNvSpPr>
+          <p:nvPr/>
+        </p:nvSpPr>
+        <p:spPr>
+          <a:xfrm xmlns:a="http://schemas.openxmlformats.org/drawingml/2006/main">
+            <a:off x="11715750" y="6562725"/>
+            <a:ext cx="238125" cy="171450"/>
           </a:xfrm>
           <a:prstGeom xmlns:a="http://schemas.openxmlformats.org/drawingml/2006/main" prst="rect">
             <a:avLst/>
@@ -11622,16 +9377,23 @@
         </p:spPr>
         <p:txBody>
           <a:bodyPr xmlns:a="http://schemas.openxmlformats.org/drawingml/2006/main" lIns="0" tIns="0" rIns="0" bIns="0" anchor="t"/>
-          <a:lstStyle xmlns:a="http://schemas.openxmlformats.org/drawingml/2006/main"/>
+          <a:lstStyle xmlns:a="http://schemas.openxmlformats.org/drawingml/2006/main">
+            <a:defPPr algn="l">
+              <a:defRPr sz="900" b="0">
+                <a:solidFill>
+                  <a:srgbClr val="A5A5A5"/>
+                </a:solidFill>
+                <a:latin typeface="微软雅黑"/>
+                <a:ea typeface="微软雅黑"/>
+                <a:cs typeface="微软雅黑"/>
+              </a:defRPr>
+            </a:defPPr>
+          </a:lstStyle>
           <a:p xmlns:a="http://schemas.openxmlformats.org/drawingml/2006/main">
             <a:pPr algn="l">
-              <a:lnSpc>
-                <a:spcPct val="118000"/>
-              </a:lnSpc>
-              <a:buNone/>
-              <a:defRPr sz="2200" b="1">
-                <a:solidFill>
-                  <a:srgbClr val="1F4D78"/>
+              <a:defRPr sz="900" b="0">
+                <a:solidFill>
+                  <a:srgbClr val="A5A5A5"/>
                 </a:solidFill>
                 <a:latin typeface="微软雅黑"/>
                 <a:ea typeface="微软雅黑"/>
@@ -11639,133 +9401,15 @@
               </a:defRPr>
             </a:pPr>
             <a:r>
-              <a:rPr sz="2200" b="1">
-                <a:solidFill>
-                  <a:srgbClr val="1F4D78"/>
+              <a:rPr sz="900" b="0">
+                <a:solidFill>
+                  <a:srgbClr val="A5A5A5"/>
                 </a:solidFill>
                 <a:latin typeface="微软雅黑"/>
                 <a:ea typeface="微软雅黑"/>
                 <a:cs typeface="微软雅黑"/>
               </a:rPr>
-              <a:t>evaluation-report.md</a:t>
-            </a:r>
-          </a:p>
-        </p:txBody>
-      </p:sp>
-      <p:sp>
-        <p:nvSpPr>
-          <p:cNvPr id="20" name="practice-note">
-            <a:extLst xmlns:a="http://schemas.openxmlformats.org/drawingml/2006/main">
-              <a:ext uri="{FF2B5EF4-FFF2-40B4-BE49-F238E27FC236}">
-                <a16:creationId xmlns:a16="http://schemas.microsoft.com/office/drawing/2014/main" id="{F24E8C3D-5D58-4251-A865-AEF6D6972E32}"/>
-              </a:ext>
-            </a:extLst>
-          </p:cNvPr>
-          <p:cNvSpPr>
-            <a:spLocks xmlns:a="http://schemas.openxmlformats.org/drawingml/2006/main" noGrp="1"/>
-          </p:cNvSpPr>
-          <p:nvPr/>
-        </p:nvSpPr>
-        <p:spPr>
-          <a:xfrm xmlns:a="http://schemas.openxmlformats.org/drawingml/2006/main">
-            <a:off x="8191500" y="2619375"/>
-            <a:ext cx="2762250" cy="1428750"/>
-          </a:xfrm>
-          <a:prstGeom xmlns:a="http://schemas.openxmlformats.org/drawingml/2006/main" prst="rect">
-            <a:avLst/>
-          </a:prstGeom>
-          <a:noFill xmlns:a="http://schemas.openxmlformats.org/drawingml/2006/main"/>
-          <a:ln xmlns:a="http://schemas.openxmlformats.org/drawingml/2006/main" w="0">
-            <a:noFill/>
-          </a:ln>
-        </p:spPr>
-        <p:txBody>
-          <a:bodyPr xmlns:a="http://schemas.openxmlformats.org/drawingml/2006/main" lIns="0" tIns="0" rIns="0" bIns="0" anchor="t"/>
-          <a:lstStyle xmlns:a="http://schemas.openxmlformats.org/drawingml/2006/main"/>
-          <a:p xmlns:a="http://schemas.openxmlformats.org/drawingml/2006/main">
-            <a:pPr algn="l">
-              <a:lnSpc>
-                <a:spcPct val="118000"/>
-              </a:lnSpc>
-              <a:buNone/>
-              <a:defRPr sz="2200" b="0">
-                <a:solidFill>
-                  <a:srgbClr val="27333D"/>
-                </a:solidFill>
-                <a:latin typeface="微软雅黑"/>
-                <a:ea typeface="微软雅黑"/>
-                <a:cs typeface="微软雅黑"/>
-              </a:defRPr>
-            </a:pPr>
-            <a:r>
-              <a:rPr sz="2200" b="0">
-                <a:solidFill>
-                  <a:srgbClr val="27333D"/>
-                </a:solidFill>
-                <a:latin typeface="微软雅黑"/>
-                <a:ea typeface="微软雅黑"/>
-                <a:cs typeface="微软雅黑"/>
-              </a:rPr>
-              <a:t>完成标志</a:t>
-            </a:r>
-          </a:p>
-          <a:p xmlns:a="http://schemas.openxmlformats.org/drawingml/2006/main">
-            <a:r>
-              <a:t/>
-            </a:r>
-          </a:p>
-          <a:p xmlns:a="http://schemas.openxmlformats.org/drawingml/2006/main">
-            <a:pPr algn="l">
-              <a:lnSpc>
-                <a:spcPct val="118000"/>
-              </a:lnSpc>
-              <a:buNone/>
-              <a:defRPr sz="2200" b="0">
-                <a:solidFill>
-                  <a:srgbClr val="27333D"/>
-                </a:solidFill>
-                <a:latin typeface="微软雅黑"/>
-                <a:ea typeface="微软雅黑"/>
-                <a:cs typeface="微软雅黑"/>
-              </a:defRPr>
-            </a:pPr>
-            <a:r>
-              <a:rPr sz="2200" b="0">
-                <a:solidFill>
-                  <a:srgbClr val="27333D"/>
-                </a:solidFill>
-                <a:latin typeface="微软雅黑"/>
-                <a:ea typeface="微软雅黑"/>
-                <a:cs typeface="微软雅黑"/>
-              </a:rPr>
-              <a:t>三项都有证据项</a:t>
-            </a:r>
-          </a:p>
-          <a:p xmlns:a="http://schemas.openxmlformats.org/drawingml/2006/main">
-            <a:pPr algn="l">
-              <a:lnSpc>
-                <a:spcPct val="118000"/>
-              </a:lnSpc>
-              <a:buNone/>
-              <a:defRPr sz="2200" b="0">
-                <a:solidFill>
-                  <a:srgbClr val="27333D"/>
-                </a:solidFill>
-                <a:latin typeface="微软雅黑"/>
-                <a:ea typeface="微软雅黑"/>
-                <a:cs typeface="微软雅黑"/>
-              </a:defRPr>
-            </a:pPr>
-            <a:r>
-              <a:rPr sz="2200" b="0">
-                <a:solidFill>
-                  <a:srgbClr val="27333D"/>
-                </a:solidFill>
-                <a:latin typeface="微软雅黑"/>
-                <a:ea typeface="微软雅黑"/>
-                <a:cs typeface="微软雅黑"/>
-              </a:rPr>
-              <a:t>并保留未决解释</a:t>
+              <a:t>17</a:t>
             </a:r>
           </a:p>
         </p:txBody>
@@ -12387,7 +10031,7 @@
                 <a:ea typeface="微软雅黑"/>
                 <a:cs typeface="微软雅黑"/>
               </a:rPr>
-              <a:t>同伴问题</a:t>
+              <a:t>迁移题</a:t>
             </a:r>
           </a:p>
           <a:p xmlns:a="http://schemas.openxmlformats.org/drawingml/2006/main">
@@ -12414,7 +10058,34 @@
                 <a:ea typeface="微软雅黑"/>
                 <a:cs typeface="微软雅黑"/>
               </a:rPr>
-              <a:t>契约 / 评价 / 证据 / 伦理</a:t>
+              <a:t>测试参与开发？</a:t>
+            </a:r>
+          </a:p>
+          <a:p xmlns:a="http://schemas.openxmlformats.org/drawingml/2006/main">
+            <a:pPr algn="ctr">
+              <a:lnSpc>
+                <a:spcPct val="118000"/>
+              </a:lnSpc>
+              <a:buNone/>
+              <a:defRPr sz="2200" b="1">
+                <a:solidFill>
+                  <a:srgbClr val="1F4D78"/>
+                </a:solidFill>
+                <a:latin typeface="微软雅黑"/>
+                <a:ea typeface="微软雅黑"/>
+                <a:cs typeface="微软雅黑"/>
+              </a:defRPr>
+            </a:pPr>
+            <a:r>
+              <a:rPr sz="2200" b="1">
+                <a:solidFill>
+                  <a:srgbClr val="1F4D78"/>
+                </a:solidFill>
+                <a:latin typeface="微软雅黑"/>
+                <a:ea typeface="微软雅黑"/>
+                <a:cs typeface="微软雅黑"/>
+              </a:rPr>
+              <a:t>结论／下一步</a:t>
             </a:r>
           </a:p>
         </p:txBody>
@@ -14477,149 +12148,22 @@
       </p:grpSpPr>
       <p:sp>
         <p:nvSpPr>
-          <p:cNvPr id="4" name="Text Placeholder 3">
-            <a:extLst xmlns:a="http://schemas.openxmlformats.org/drawingml/2006/main">
-              <a:ext uri="{FF2B5EF4-FFF2-40B4-BE49-F238E27FC236}">
-                <a16:creationId xmlns:a16="http://schemas.microsoft.com/office/drawing/2014/main" id="{4D941B40-7A0A-534E-3563-CA11753C8E3F}"/>
-              </a:ext>
-            </a:extLst>
-          </p:cNvPr>
-          <p:cNvSpPr>
-            <a:spLocks xmlns:a="http://schemas.openxmlformats.org/drawingml/2006/main" noGrp="1"/>
-          </p:cNvSpPr>
-          <p:nvPr>
-            <p:ph type="body" idx="14"/>
-          </p:nvPr>
-        </p:nvSpPr>
-        <p:spPr>
-          <a:xfrm xmlns:a="http://schemas.openxmlformats.org/drawingml/2006/main">
-            <a:off x="1028700" y="57150"/>
-            <a:ext cx="10668000" cy="571500"/>
-          </a:xfrm>
-        </p:spPr>
-        <p:txBody>
-          <a:bodyPr xmlns:a="http://schemas.openxmlformats.org/drawingml/2006/main" lIns="0" tIns="0" rIns="0" bIns="0" anchor="ctr"/>
-          <a:lstStyle xmlns:a="http://schemas.openxmlformats.org/drawingml/2006/main"/>
-          <a:p xmlns:a="http://schemas.openxmlformats.org/drawingml/2006/main">
-            <a:pPr algn="l">
-              <a:lnSpc>
-                <a:spcPct val="118000"/>
-              </a:lnSpc>
-              <a:buNone/>
-            </a:pPr>
-            <a:r>
-              <a:rPr sz="3000" b="1">
-                <a:solidFill>
-                  <a:srgbClr val="FFFFFF"/>
-                </a:solidFill>
-                <a:latin typeface="微软雅黑"/>
-                <a:ea typeface="微软雅黑"/>
-                <a:cs typeface="微软雅黑"/>
-              </a:rPr>
-              <a:t>评价材料直接进入第 14 课写作</a:t>
-            </a:r>
-            <a:endParaRPr/>
-          </a:p>
-        </p:txBody>
-      </p:sp>
-      <p:sp>
-        <p:nvSpPr>
-          <p:cNvPr id="5" name="Slide Number Placeholder 4">
-            <a:extLst xmlns:a="http://schemas.openxmlformats.org/drawingml/2006/main">
-              <a:ext uri="{FF2B5EF4-FFF2-40B4-BE49-F238E27FC236}">
-                <a16:creationId xmlns:a16="http://schemas.microsoft.com/office/drawing/2014/main" id="{EBA5909F-738E-F60C-BE8C-B3F1D94548E5}"/>
-              </a:ext>
-            </a:extLst>
-          </p:cNvPr>
-          <p:cNvSpPr>
-            <a:spLocks xmlns:a="http://schemas.openxmlformats.org/drawingml/2006/main" noGrp="1"/>
-          </p:cNvSpPr>
-          <p:nvPr>
-            <p:ph type="sldNum" idx="10"/>
-          </p:nvPr>
-        </p:nvSpPr>
-        <p:spPr/>
-        <p:txBody>
-          <a:bodyPr xmlns:a="http://schemas.openxmlformats.org/drawingml/2006/main"/>
-          <a:lstStyle xmlns:a="http://schemas.openxmlformats.org/drawingml/2006/main"/>
-          <a:p xmlns:a="http://schemas.openxmlformats.org/drawingml/2006/main">
-            <a:fld id="{844E025A-983C-6D44-79C6-4612AACD43FC}" type="slidenum">
-              <a:t>20</a:t>
-            </a:fld>
-            <a:endParaRPr/>
-          </a:p>
-        </p:txBody>
-      </p:sp>
-      <p:sp>
-        <p:nvSpPr>
-          <p:cNvPr id="6" name="brand-header">
-            <a:extLst xmlns:a="http://schemas.openxmlformats.org/drawingml/2006/main">
-              <a:ext uri="{FF2B5EF4-FFF2-40B4-BE49-F238E27FC236}">
-                <a16:creationId xmlns:a16="http://schemas.microsoft.com/office/drawing/2014/main" id="{25442F73-AC2E-4E5C-A840-A747C0EC964E}"/>
-              </a:ext>
-            </a:extLst>
-          </p:cNvPr>
-          <p:cNvSpPr>
-            <a:spLocks xmlns:a="http://schemas.openxmlformats.org/drawingml/2006/main" noGrp="1"/>
-          </p:cNvSpPr>
-          <p:nvPr/>
-        </p:nvSpPr>
-        <p:spPr>
-          <a:xfrm xmlns:a="http://schemas.openxmlformats.org/drawingml/2006/main">
-            <a:off x="0" y="0"/>
-            <a:ext cx="11887200" cy="685800"/>
-          </a:xfrm>
-          <a:prstGeom xmlns:a="http://schemas.openxmlformats.org/drawingml/2006/main" prst="rect">
-            <a:avLst/>
-          </a:prstGeom>
-          <a:solidFill xmlns:a="http://schemas.openxmlformats.org/drawingml/2006/main">
-            <a:srgbClr val="C8161E"/>
-          </a:solidFill>
-          <a:ln xmlns:a="http://schemas.openxmlformats.org/drawingml/2006/main" w="0">
-            <a:noFill/>
-          </a:ln>
-        </p:spPr>
-      </p:sp>
-      <p:pic>
-        <p:nvPicPr>
-          <p:cNvPr id="28" name=""/>
-          <p:cNvPicPr>
-            <a:picLocks xmlns:a="http://schemas.openxmlformats.org/drawingml/2006/main" noChangeAspect="1"/>
-          </p:cNvPicPr>
-          <p:nvPr/>
-        </p:nvPicPr>
-        <p:blipFill>
-          <a:blip xmlns:r="http://schemas.openxmlformats.org/officeDocument/2006/relationships" xmlns:a="http://schemas.openxmlformats.org/drawingml/2006/main" r:embed="Ra14f7487ab144e33"/>
-          <a:stretch xmlns:a="http://schemas.openxmlformats.org/drawingml/2006/main"/>
-        </p:blipFill>
-        <p:spPr>
-          <a:xfrm xmlns:a="http://schemas.openxmlformats.org/drawingml/2006/main">
-            <a:off x="323850" y="76200"/>
-            <a:ext cx="533400" cy="533400"/>
-          </a:xfrm>
-          <a:prstGeom xmlns:a="http://schemas.openxmlformats.org/drawingml/2006/main" prst="rect">
-            <a:avLst/>
-          </a:prstGeom>
-        </p:spPr>
-      </p:pic>
-      <p:sp>
-        <p:nvSpPr>
-          <p:cNvPr id="8" name="brand-title">
-            <a:extLst xmlns:a="http://schemas.openxmlformats.org/drawingml/2006/main">
-              <a:ext uri="{FF2B5EF4-FFF2-40B4-BE49-F238E27FC236}">
-                <a16:creationId xmlns:a16="http://schemas.microsoft.com/office/drawing/2014/main" id="{834B78B6-270C-48E9-80FB-2B0347AF0A3C}"/>
-              </a:ext>
-            </a:extLst>
-          </p:cNvPr>
-          <p:cNvSpPr>
-            <a:spLocks xmlns:a="http://schemas.openxmlformats.org/drawingml/2006/main" noGrp="1"/>
-          </p:cNvSpPr>
-          <p:nvPr/>
-        </p:nvSpPr>
-        <p:spPr>
-          <a:xfrm xmlns:a="http://schemas.openxmlformats.org/drawingml/2006/main">
-            <a:off x="1028700" y="66675"/>
-            <a:ext cx="10477500" cy="552450"/>
+          <p:cNvPr id="7" name="judgment-title">
+            <a:extLst xmlns:a="http://schemas.openxmlformats.org/drawingml/2006/main">
+              <a:ext uri="{FF2B5EF4-FFF2-40B4-BE49-F238E27FC236}">
+                <a16:creationId xmlns:a16="http://schemas.microsoft.com/office/drawing/2014/main" id="{85CF728C-867A-4559-A9E5-A3CAD183A245}"/>
+              </a:ext>
+            </a:extLst>
+          </p:cNvPr>
+          <p:cNvSpPr>
+            <a:spLocks xmlns:a="http://schemas.openxmlformats.org/drawingml/2006/main" noGrp="1"/>
+          </p:cNvSpPr>
+          <p:nvPr/>
+        </p:nvSpPr>
+        <p:spPr>
+          <a:xfrm xmlns:a="http://schemas.openxmlformats.org/drawingml/2006/main">
+            <a:off x="1028700" y="76200"/>
+            <a:ext cx="10687050" cy="514350"/>
           </a:xfrm>
           <a:prstGeom xmlns:a="http://schemas.openxmlformats.org/drawingml/2006/main" prst="rect">
             <a:avLst/>
@@ -14630,14 +12174,21 @@
           </a:ln>
         </p:spPr>
         <p:txBody>
-          <a:bodyPr xmlns:a="http://schemas.openxmlformats.org/drawingml/2006/main" lIns="0" tIns="0" rIns="0" bIns="0" anchor="ctr"/>
-          <a:lstStyle xmlns:a="http://schemas.openxmlformats.org/drawingml/2006/main"/>
+          <a:bodyPr xmlns:a="http://schemas.openxmlformats.org/drawingml/2006/main" lIns="0" tIns="0" rIns="0" bIns="0" anchor="t"/>
+          <a:lstStyle xmlns:a="http://schemas.openxmlformats.org/drawingml/2006/main">
+            <a:defPPr algn="l">
+              <a:defRPr sz="3000" b="1">
+                <a:solidFill>
+                  <a:srgbClr val="FFFFFF"/>
+                </a:solidFill>
+                <a:latin typeface="微软雅黑"/>
+                <a:ea typeface="微软雅黑"/>
+                <a:cs typeface="微软雅黑"/>
+              </a:defRPr>
+            </a:defPPr>
+          </a:lstStyle>
           <a:p xmlns:a="http://schemas.openxmlformats.org/drawingml/2006/main">
             <a:pPr algn="l">
-              <a:lnSpc>
-                <a:spcPct val="118000"/>
-              </a:lnSpc>
-              <a:buNone/>
               <a:defRPr sz="3000" b="1">
                 <a:solidFill>
                   <a:srgbClr val="FFFFFF"/>
@@ -14656,29 +12207,29 @@
                 <a:ea typeface="微软雅黑"/>
                 <a:cs typeface="微软雅黑"/>
               </a:rPr>
-              <a:t>评价材料直接进入第 14 课写作</a:t>
-            </a:r>
-          </a:p>
-        </p:txBody>
-      </p:sp>
-      <p:sp>
-        <p:nvSpPr>
-          <p:cNvPr id="9" name="source">
-            <a:extLst xmlns:a="http://schemas.openxmlformats.org/drawingml/2006/main">
-              <a:ext uri="{FF2B5EF4-FFF2-40B4-BE49-F238E27FC236}">
-                <a16:creationId xmlns:a16="http://schemas.microsoft.com/office/drawing/2014/main" id="{E56F65F0-10F7-47D6-AA77-C62E9DA19281}"/>
-              </a:ext>
-            </a:extLst>
-          </p:cNvPr>
-          <p:cNvSpPr>
-            <a:spLocks xmlns:a="http://schemas.openxmlformats.org/drawingml/2006/main" noGrp="1"/>
-          </p:cNvSpPr>
-          <p:nvPr/>
-        </p:nvSpPr>
-        <p:spPr>
-          <a:xfrm xmlns:a="http://schemas.openxmlformats.org/drawingml/2006/main">
-            <a:off x="609600" y="6067425"/>
-            <a:ext cx="10763250" cy="209550"/>
+              <a:t>保留本课决定，准备下一课输入</a:t>
+            </a:r>
+          </a:p>
+        </p:txBody>
+      </p:sp>
+      <p:sp>
+        <p:nvSpPr>
+          <p:cNvPr id="2" name="judgment-body-0">
+            <a:extLst xmlns:a="http://schemas.openxmlformats.org/drawingml/2006/main">
+              <a:ext uri="{FF2B5EF4-FFF2-40B4-BE49-F238E27FC236}">
+                <a16:creationId xmlns:a16="http://schemas.microsoft.com/office/drawing/2014/main" id="{FE83BC1D-7B07-454E-B809-03A9D511B70E}"/>
+              </a:ext>
+            </a:extLst>
+          </p:cNvPr>
+          <p:cNvSpPr>
+            <a:spLocks xmlns:a="http://schemas.openxmlformats.org/drawingml/2006/main" noGrp="1"/>
+          </p:cNvSpPr>
+          <p:nvPr/>
+        </p:nvSpPr>
+        <p:spPr>
+          <a:xfrm xmlns:a="http://schemas.openxmlformats.org/drawingml/2006/main">
+            <a:off x="666750" y="1066800"/>
+            <a:ext cx="10858500" cy="1009650"/>
           </a:xfrm>
           <a:prstGeom xmlns:a="http://schemas.openxmlformats.org/drawingml/2006/main" prst="rect">
             <a:avLst/>
@@ -14690,16 +12241,23 @@
         </p:spPr>
         <p:txBody>
           <a:bodyPr xmlns:a="http://schemas.openxmlformats.org/drawingml/2006/main" lIns="0" tIns="0" rIns="0" bIns="0" anchor="t"/>
-          <a:lstStyle xmlns:a="http://schemas.openxmlformats.org/drawingml/2006/main"/>
+          <a:lstStyle xmlns:a="http://schemas.openxmlformats.org/drawingml/2006/main">
+            <a:defPPr algn="l">
+              <a:defRPr sz="2400" b="0">
+                <a:solidFill>
+                  <a:srgbClr val="263746"/>
+                </a:solidFill>
+                <a:latin typeface="微软雅黑"/>
+                <a:ea typeface="微软雅黑"/>
+                <a:cs typeface="微软雅黑"/>
+              </a:defRPr>
+            </a:defPPr>
+          </a:lstStyle>
           <a:p xmlns:a="http://schemas.openxmlformats.org/drawingml/2006/main">
             <a:pPr algn="l">
-              <a:lnSpc>
-                <a:spcPct val="118000"/>
-              </a:lnSpc>
-              <a:buNone/>
-              <a:defRPr sz="1100" b="0">
-                <a:solidFill>
-                  <a:srgbClr val="66727D"/>
+              <a:defRPr sz="2400" b="0">
+                <a:solidFill>
+                  <a:srgbClr val="263746"/>
                 </a:solidFill>
                 <a:latin typeface="微软雅黑"/>
                 <a:ea typeface="微软雅黑"/>
@@ -14707,97 +12265,37 @@
               </a:defRPr>
             </a:pPr>
             <a:r>
-              <a:rPr sz="1100" b="0">
-                <a:solidFill>
-                  <a:srgbClr val="66727D"/>
+              <a:rPr sz="2400" b="0">
+                <a:solidFill>
+                  <a:srgbClr val="263746"/>
                 </a:solidFill>
                 <a:latin typeface="微软雅黑"/>
                 <a:ea typeface="微软雅黑"/>
                 <a:cs typeface="微软雅黑"/>
               </a:rPr>
-              <a:t>来源：lesson-13/slides.md；课程工件与讲义见 speaker notes</a:t>
-            </a:r>
-          </a:p>
-        </p:txBody>
-      </p:sp>
-      <p:sp>
-        <p:nvSpPr>
-          <p:cNvPr id="10" name="doc-15-bg">
-            <a:extLst xmlns:a="http://schemas.openxmlformats.org/drawingml/2006/main">
-              <a:ext uri="{FF2B5EF4-FFF2-40B4-BE49-F238E27FC236}">
-                <a16:creationId xmlns:a16="http://schemas.microsoft.com/office/drawing/2014/main" id="{83624BE2-34D0-4904-820E-5884DBDFC0BF}"/>
-              </a:ext>
-            </a:extLst>
-          </p:cNvPr>
-          <p:cNvSpPr>
-            <a:spLocks xmlns:a="http://schemas.openxmlformats.org/drawingml/2006/main" noGrp="1"/>
-          </p:cNvSpPr>
-          <p:nvPr/>
-        </p:nvSpPr>
-        <p:spPr>
-          <a:xfrm xmlns:a="http://schemas.openxmlformats.org/drawingml/2006/main">
-            <a:off x="762000" y="1571625"/>
-            <a:ext cx="4762500" cy="3429000"/>
-          </a:xfrm>
-          <a:prstGeom xmlns:a="http://schemas.openxmlformats.org/drawingml/2006/main" prst="rect">
-            <a:avLst/>
-          </a:prstGeom>
-          <a:solidFill xmlns:a="http://schemas.openxmlformats.org/drawingml/2006/main">
-            <a:srgbClr val="F4F6F8"/>
-          </a:solidFill>
-          <a:ln xmlns:a="http://schemas.openxmlformats.org/drawingml/2006/main" w="0">
-            <a:noFill/>
-          </a:ln>
-        </p:spPr>
-      </p:sp>
-      <p:sp>
-        <p:nvSpPr>
-          <p:cNvPr id="11" name="doc-15-title-bg">
-            <a:extLst xmlns:a="http://schemas.openxmlformats.org/drawingml/2006/main">
-              <a:ext uri="{FF2B5EF4-FFF2-40B4-BE49-F238E27FC236}">
-                <a16:creationId xmlns:a16="http://schemas.microsoft.com/office/drawing/2014/main" id="{60FDAC97-DD0A-4F1D-820A-7AFEFCF977C3}"/>
-              </a:ext>
-            </a:extLst>
-          </p:cNvPr>
-          <p:cNvSpPr>
-            <a:spLocks xmlns:a="http://schemas.openxmlformats.org/drawingml/2006/main" noGrp="1"/>
-          </p:cNvSpPr>
-          <p:nvPr/>
-        </p:nvSpPr>
-        <p:spPr>
-          <a:xfrm xmlns:a="http://schemas.openxmlformats.org/drawingml/2006/main">
-            <a:off x="762000" y="1571625"/>
-            <a:ext cx="3429000" cy="323850"/>
-          </a:xfrm>
-          <a:prstGeom xmlns:a="http://schemas.openxmlformats.org/drawingml/2006/main" prst="rect">
-            <a:avLst/>
-          </a:prstGeom>
-          <a:solidFill xmlns:a="http://schemas.openxmlformats.org/drawingml/2006/main">
-            <a:srgbClr val="1F4D78"/>
-          </a:solidFill>
-          <a:ln xmlns:a="http://schemas.openxmlformats.org/drawingml/2006/main" w="0">
-            <a:noFill/>
-          </a:ln>
-        </p:spPr>
-      </p:sp>
-      <p:sp>
-        <p:nvSpPr>
-          <p:cNvPr id="12" name="doc-15-title">
-            <a:extLst xmlns:a="http://schemas.openxmlformats.org/drawingml/2006/main">
-              <a:ext uri="{FF2B5EF4-FFF2-40B4-BE49-F238E27FC236}">
-                <a16:creationId xmlns:a16="http://schemas.microsoft.com/office/drawing/2014/main" id="{48EFE941-60D1-4E61-BF67-57D554A31FE9}"/>
-              </a:ext>
-            </a:extLst>
-          </p:cNvPr>
-          <p:cNvSpPr>
-            <a:spLocks xmlns:a="http://schemas.openxmlformats.org/drawingml/2006/main" noGrp="1"/>
-          </p:cNvSpPr>
-          <p:nvPr/>
-        </p:nvSpPr>
-        <p:spPr>
-          <a:xfrm xmlns:a="http://schemas.openxmlformats.org/drawingml/2006/main">
-            <a:off x="838200" y="1590675"/>
-            <a:ext cx="3276600" cy="285750"/>
+              <a:t>L14 直接用此证据写论证段与短报告。</a:t>
+            </a:r>
+          </a:p>
+        </p:txBody>
+      </p:sp>
+      <p:sp>
+        <p:nvSpPr>
+          <p:cNvPr id="3" name="judgment-body-1">
+            <a:extLst xmlns:a="http://schemas.openxmlformats.org/drawingml/2006/main">
+              <a:ext uri="{FF2B5EF4-FFF2-40B4-BE49-F238E27FC236}">
+                <a16:creationId xmlns:a16="http://schemas.microsoft.com/office/drawing/2014/main" id="{2179B4E6-74FF-480E-928C-5A48AD813BE6}"/>
+              </a:ext>
+            </a:extLst>
+          </p:cNvPr>
+          <p:cNvSpPr>
+            <a:spLocks xmlns:a="http://schemas.openxmlformats.org/drawingml/2006/main" noGrp="1"/>
+          </p:cNvSpPr>
+          <p:nvPr/>
+        </p:nvSpPr>
+        <p:spPr>
+          <a:xfrm xmlns:a="http://schemas.openxmlformats.org/drawingml/2006/main">
+            <a:off x="666750" y="2238375"/>
+            <a:ext cx="10858500" cy="2076450"/>
           </a:xfrm>
           <a:prstGeom xmlns:a="http://schemas.openxmlformats.org/drawingml/2006/main" prst="rect">
             <a:avLst/>
@@ -14808,17 +12306,24 @@
           </a:ln>
         </p:spPr>
         <p:txBody>
-          <a:bodyPr xmlns:a="http://schemas.openxmlformats.org/drawingml/2006/main" lIns="0" tIns="0" rIns="0" bIns="0" anchor="ctr"/>
-          <a:lstStyle xmlns:a="http://schemas.openxmlformats.org/drawingml/2006/main"/>
+          <a:bodyPr xmlns:a="http://schemas.openxmlformats.org/drawingml/2006/main" lIns="0" tIns="0" rIns="0" bIns="0" anchor="t"/>
+          <a:lstStyle xmlns:a="http://schemas.openxmlformats.org/drawingml/2006/main">
+            <a:defPPr algn="l">
+              <a:defRPr sz="2400" b="0">
+                <a:solidFill>
+                  <a:srgbClr val="263746"/>
+                </a:solidFill>
+                <a:latin typeface="微软雅黑"/>
+                <a:ea typeface="微软雅黑"/>
+                <a:cs typeface="微软雅黑"/>
+              </a:defRPr>
+            </a:defPPr>
+          </a:lstStyle>
           <a:p xmlns:a="http://schemas.openxmlformats.org/drawingml/2006/main">
             <a:pPr algn="l">
-              <a:lnSpc>
-                <a:spcPct val="118000"/>
-              </a:lnSpc>
-              <a:buNone/>
-              <a:defRPr sz="1800" b="1">
-                <a:solidFill>
-                  <a:srgbClr val="FFFFFF"/>
+              <a:defRPr sz="2400" b="0">
+                <a:solidFill>
+                  <a:srgbClr val="263746"/>
                 </a:solidFill>
                 <a:latin typeface="微软雅黑"/>
                 <a:ea typeface="微软雅黑"/>
@@ -14826,37 +12331,37 @@
               </a:defRPr>
             </a:pPr>
             <a:r>
-              <a:rPr sz="1800" b="1">
-                <a:solidFill>
-                  <a:srgbClr val="FFFFFF"/>
+              <a:rPr sz="2400" b="0">
+                <a:solidFill>
+                  <a:srgbClr val="263746"/>
                 </a:solidFill>
                 <a:latin typeface="微软雅黑"/>
                 <a:ea typeface="微软雅黑"/>
                 <a:cs typeface="微软雅黑"/>
               </a:rPr>
-              <a:t>evaluation-report.md</a:t>
-            </a:r>
-          </a:p>
-        </p:txBody>
-      </p:sp>
-      <p:sp>
-        <p:nvSpPr>
-          <p:cNvPr id="13" name="doc-15-line-0">
-            <a:extLst xmlns:a="http://schemas.openxmlformats.org/drawingml/2006/main">
-              <a:ext uri="{FF2B5EF4-FFF2-40B4-BE49-F238E27FC236}">
-                <a16:creationId xmlns:a16="http://schemas.microsoft.com/office/drawing/2014/main" id="{38E35CAC-BD86-4497-940B-22CDD990EA3E}"/>
-              </a:ext>
-            </a:extLst>
-          </p:cNvPr>
-          <p:cNvSpPr>
-            <a:spLocks xmlns:a="http://schemas.openxmlformats.org/drawingml/2006/main" noGrp="1"/>
-          </p:cNvSpPr>
-          <p:nvPr/>
-        </p:nvSpPr>
-        <p:spPr>
-          <a:xfrm xmlns:a="http://schemas.openxmlformats.org/drawingml/2006/main">
-            <a:off x="990600" y="2066925"/>
-            <a:ext cx="4305300" cy="671513"/>
+              <a:t>回写已有项目：验证门：本人实际比较、评价报告和后续决定</a:t>
+            </a:r>
+          </a:p>
+        </p:txBody>
+      </p:sp>
+      <p:sp>
+        <p:nvSpPr>
+          <p:cNvPr id="4" name="judgment-body-2">
+            <a:extLst xmlns:a="http://schemas.openxmlformats.org/drawingml/2006/main">
+              <a:ext uri="{FF2B5EF4-FFF2-40B4-BE49-F238E27FC236}">
+                <a16:creationId xmlns:a16="http://schemas.microsoft.com/office/drawing/2014/main" id="{6BFD1679-5AFB-4EB2-8E76-C89562850E92}"/>
+              </a:ext>
+            </a:extLst>
+          </p:cNvPr>
+          <p:cNvSpPr>
+            <a:spLocks xmlns:a="http://schemas.openxmlformats.org/drawingml/2006/main" noGrp="1"/>
+          </p:cNvSpPr>
+          <p:nvPr/>
+        </p:nvSpPr>
+        <p:spPr>
+          <a:xfrm xmlns:a="http://schemas.openxmlformats.org/drawingml/2006/main">
+            <a:off x="666750" y="4495800"/>
+            <a:ext cx="10858500" cy="1409700"/>
           </a:xfrm>
           <a:prstGeom xmlns:a="http://schemas.openxmlformats.org/drawingml/2006/main" prst="rect">
             <a:avLst/>
@@ -14867,17 +12372,24 @@
           </a:ln>
         </p:spPr>
         <p:txBody>
-          <a:bodyPr xmlns:a="http://schemas.openxmlformats.org/drawingml/2006/main" lIns="0" tIns="0" rIns="0" bIns="0" anchor="ctr"/>
-          <a:lstStyle xmlns:a="http://schemas.openxmlformats.org/drawingml/2006/main"/>
+          <a:bodyPr xmlns:a="http://schemas.openxmlformats.org/drawingml/2006/main" lIns="0" tIns="0" rIns="0" bIns="0" anchor="t"/>
+          <a:lstStyle xmlns:a="http://schemas.openxmlformats.org/drawingml/2006/main">
+            <a:defPPr algn="l">
+              <a:defRPr sz="2200" b="0">
+                <a:solidFill>
+                  <a:srgbClr val="1F4D78"/>
+                </a:solidFill>
+                <a:latin typeface="微软雅黑"/>
+                <a:ea typeface="微软雅黑"/>
+                <a:cs typeface="微软雅黑"/>
+              </a:defRPr>
+            </a:defPPr>
+          </a:lstStyle>
           <a:p xmlns:a="http://schemas.openxmlformats.org/drawingml/2006/main">
             <a:pPr algn="l">
-              <a:lnSpc>
-                <a:spcPct val="118000"/>
-              </a:lnSpc>
-              <a:buNone/>
               <a:defRPr sz="2200" b="0">
                 <a:solidFill>
-                  <a:srgbClr val="27333D"/>
+                  <a:srgbClr val="1F4D78"/>
                 </a:solidFill>
                 <a:latin typeface="微软雅黑"/>
                 <a:ea typeface="微软雅黑"/>
@@ -14887,35 +12399,35 @@
             <a:r>
               <a:rPr sz="2200" b="0">
                 <a:solidFill>
-                  <a:srgbClr val="27333D"/>
+                  <a:srgbClr val="1F4D78"/>
                 </a:solidFill>
                 <a:latin typeface="微软雅黑"/>
                 <a:ea typeface="微软雅黑"/>
                 <a:cs typeface="微软雅黑"/>
               </a:rPr>
-              <a:t>结果对照</a:t>
-            </a:r>
-          </a:p>
-        </p:txBody>
-      </p:sp>
-      <p:sp>
-        <p:nvSpPr>
-          <p:cNvPr id="14" name="doc-15-line-1">
-            <a:extLst xmlns:a="http://schemas.openxmlformats.org/drawingml/2006/main">
-              <a:ext uri="{FF2B5EF4-FFF2-40B4-BE49-F238E27FC236}">
-                <a16:creationId xmlns:a16="http://schemas.microsoft.com/office/drawing/2014/main" id="{789CAE4D-0F20-44A1-AE28-1D58F3F85ECE}"/>
-              </a:ext>
-            </a:extLst>
-          </p:cNvPr>
-          <p:cNvSpPr>
-            <a:spLocks xmlns:a="http://schemas.openxmlformats.org/drawingml/2006/main" noGrp="1"/>
-          </p:cNvSpPr>
-          <p:nvPr/>
-        </p:nvSpPr>
-        <p:spPr>
-          <a:xfrm xmlns:a="http://schemas.openxmlformats.org/drawingml/2006/main">
-            <a:off x="990600" y="2752725"/>
-            <a:ext cx="4305300" cy="671513"/>
+              <a:t>研究门材料按既定预算整理提交；不叠加新必读。</a:t>
+            </a:r>
+          </a:p>
+        </p:txBody>
+      </p:sp>
+      <p:sp>
+        <p:nvSpPr>
+          <p:cNvPr id="5" name="judgment-source">
+            <a:extLst xmlns:a="http://schemas.openxmlformats.org/drawingml/2006/main">
+              <a:ext uri="{FF2B5EF4-FFF2-40B4-BE49-F238E27FC236}">
+                <a16:creationId xmlns:a16="http://schemas.microsoft.com/office/drawing/2014/main" id="{70F66326-EDDC-4613-A2AA-8F035937CC6C}"/>
+              </a:ext>
+            </a:extLst>
+          </p:cNvPr>
+          <p:cNvSpPr>
+            <a:spLocks xmlns:a="http://schemas.openxmlformats.org/drawingml/2006/main" noGrp="1"/>
+          </p:cNvSpPr>
+          <p:nvPr/>
+        </p:nvSpPr>
+        <p:spPr>
+          <a:xfrm xmlns:a="http://schemas.openxmlformats.org/drawingml/2006/main">
+            <a:off x="666750" y="6276975"/>
+            <a:ext cx="10572750" cy="209550"/>
           </a:xfrm>
           <a:prstGeom xmlns:a="http://schemas.openxmlformats.org/drawingml/2006/main" prst="rect">
             <a:avLst/>
@@ -14926,17 +12438,24 @@
           </a:ln>
         </p:spPr>
         <p:txBody>
-          <a:bodyPr xmlns:a="http://schemas.openxmlformats.org/drawingml/2006/main" lIns="0" tIns="0" rIns="0" bIns="0" anchor="ctr"/>
-          <a:lstStyle xmlns:a="http://schemas.openxmlformats.org/drawingml/2006/main"/>
+          <a:bodyPr xmlns:a="http://schemas.openxmlformats.org/drawingml/2006/main" lIns="0" tIns="0" rIns="0" bIns="0" anchor="t"/>
+          <a:lstStyle xmlns:a="http://schemas.openxmlformats.org/drawingml/2006/main">
+            <a:defPPr algn="l">
+              <a:defRPr sz="1100" b="0">
+                <a:solidFill>
+                  <a:srgbClr val="667684"/>
+                </a:solidFill>
+                <a:latin typeface="微软雅黑"/>
+                <a:ea typeface="微软雅黑"/>
+                <a:cs typeface="微软雅黑"/>
+              </a:defRPr>
+            </a:defPPr>
+          </a:lstStyle>
           <a:p xmlns:a="http://schemas.openxmlformats.org/drawingml/2006/main">
             <a:pPr algn="l">
-              <a:lnSpc>
-                <a:spcPct val="118000"/>
-              </a:lnSpc>
-              <a:buNone/>
-              <a:defRPr sz="2200" b="0">
-                <a:solidFill>
-                  <a:srgbClr val="27333D"/>
+              <a:defRPr sz="1100" b="0">
+                <a:solidFill>
+                  <a:srgbClr val="667684"/>
                 </a:solidFill>
                 <a:latin typeface="微软雅黑"/>
                 <a:ea typeface="微软雅黑"/>
@@ -14944,37 +12463,37 @@
               </a:defRPr>
             </a:pPr>
             <a:r>
-              <a:rPr sz="2200" b="0">
-                <a:solidFill>
-                  <a:srgbClr val="27333D"/>
+              <a:rPr sz="1100" b="0">
+                <a:solidFill>
+                  <a:srgbClr val="667684"/>
                 </a:solidFill>
                 <a:latin typeface="微软雅黑"/>
                 <a:ea typeface="微软雅黑"/>
                 <a:cs typeface="微软雅黑"/>
               </a:rPr>
-              <a:t>判断修订</a:t>
-            </a:r>
-          </a:p>
-        </p:txBody>
-      </p:sp>
-      <p:sp>
-        <p:nvSpPr>
-          <p:cNvPr id="15" name="doc-15-line-2">
-            <a:extLst xmlns:a="http://schemas.openxmlformats.org/drawingml/2006/main">
-              <a:ext uri="{FF2B5EF4-FFF2-40B4-BE49-F238E27FC236}">
-                <a16:creationId xmlns:a16="http://schemas.microsoft.com/office/drawing/2014/main" id="{22C93E29-2AE2-4BEB-B55B-631CA95D0D91}"/>
-              </a:ext>
-            </a:extLst>
-          </p:cNvPr>
-          <p:cNvSpPr>
-            <a:spLocks xmlns:a="http://schemas.openxmlformats.org/drawingml/2006/main" noGrp="1"/>
-          </p:cNvSpPr>
-          <p:nvPr/>
-        </p:nvSpPr>
-        <p:spPr>
-          <a:xfrm xmlns:a="http://schemas.openxmlformats.org/drawingml/2006/main">
-            <a:off x="990600" y="3438525"/>
-            <a:ext cx="4305300" cy="671513"/>
+              <a:t>来源：本课判断任务与讲义；构造材料及真实来源按材料包标识</a:t>
+            </a:r>
+          </a:p>
+        </p:txBody>
+      </p:sp>
+      <p:sp>
+        <p:nvSpPr>
+          <p:cNvPr id="6" name="judgment-page">
+            <a:extLst xmlns:a="http://schemas.openxmlformats.org/drawingml/2006/main">
+              <a:ext uri="{FF2B5EF4-FFF2-40B4-BE49-F238E27FC236}">
+                <a16:creationId xmlns:a16="http://schemas.microsoft.com/office/drawing/2014/main" id="{54D389E2-5A61-4449-BAFE-5D6489DBD32C}"/>
+              </a:ext>
+            </a:extLst>
+          </p:cNvPr>
+          <p:cNvSpPr>
+            <a:spLocks xmlns:a="http://schemas.openxmlformats.org/drawingml/2006/main" noGrp="1"/>
+          </p:cNvSpPr>
+          <p:nvPr/>
+        </p:nvSpPr>
+        <p:spPr>
+          <a:xfrm xmlns:a="http://schemas.openxmlformats.org/drawingml/2006/main">
+            <a:off x="11715750" y="6562725"/>
+            <a:ext cx="238125" cy="171450"/>
           </a:xfrm>
           <a:prstGeom xmlns:a="http://schemas.openxmlformats.org/drawingml/2006/main" prst="rect">
             <a:avLst/>
@@ -14985,17 +12504,24 @@
           </a:ln>
         </p:spPr>
         <p:txBody>
-          <a:bodyPr xmlns:a="http://schemas.openxmlformats.org/drawingml/2006/main" lIns="0" tIns="0" rIns="0" bIns="0" anchor="ctr"/>
-          <a:lstStyle xmlns:a="http://schemas.openxmlformats.org/drawingml/2006/main"/>
+          <a:bodyPr xmlns:a="http://schemas.openxmlformats.org/drawingml/2006/main" lIns="0" tIns="0" rIns="0" bIns="0" anchor="t"/>
+          <a:lstStyle xmlns:a="http://schemas.openxmlformats.org/drawingml/2006/main">
+            <a:defPPr algn="l">
+              <a:defRPr sz="900" b="0">
+                <a:solidFill>
+                  <a:srgbClr val="A5A5A5"/>
+                </a:solidFill>
+                <a:latin typeface="微软雅黑"/>
+                <a:ea typeface="微软雅黑"/>
+                <a:cs typeface="微软雅黑"/>
+              </a:defRPr>
+            </a:defPPr>
+          </a:lstStyle>
           <a:p xmlns:a="http://schemas.openxmlformats.org/drawingml/2006/main">
             <a:pPr algn="l">
-              <a:lnSpc>
-                <a:spcPct val="118000"/>
-              </a:lnSpc>
-              <a:buNone/>
-              <a:defRPr sz="2200" b="0">
-                <a:solidFill>
-                  <a:srgbClr val="27333D"/>
+              <a:defRPr sz="900" b="0">
+                <a:solidFill>
+                  <a:srgbClr val="A5A5A5"/>
                 </a:solidFill>
                 <a:latin typeface="微软雅黑"/>
                 <a:ea typeface="微软雅黑"/>
@@ -15003,429 +12529,15 @@
               </a:defRPr>
             </a:pPr>
             <a:r>
-              <a:rPr sz="2200" b="0">
-                <a:solidFill>
-                  <a:srgbClr val="27333D"/>
+              <a:rPr sz="900" b="0">
+                <a:solidFill>
+                  <a:srgbClr val="A5A5A5"/>
                 </a:solidFill>
                 <a:latin typeface="微软雅黑"/>
                 <a:ea typeface="微软雅黑"/>
                 <a:cs typeface="微软雅黑"/>
               </a:rPr>
-              <a:t>失败 / 局限</a:t>
-            </a:r>
-          </a:p>
-        </p:txBody>
-      </p:sp>
-      <p:sp>
-        <p:nvSpPr>
-          <p:cNvPr id="16" name="doc-15-line-3">
-            <a:extLst xmlns:a="http://schemas.openxmlformats.org/drawingml/2006/main">
-              <a:ext uri="{FF2B5EF4-FFF2-40B4-BE49-F238E27FC236}">
-                <a16:creationId xmlns:a16="http://schemas.microsoft.com/office/drawing/2014/main" id="{DC4BC316-EA99-4F3B-B80B-435CBFD53404}"/>
-              </a:ext>
-            </a:extLst>
-          </p:cNvPr>
-          <p:cNvSpPr>
-            <a:spLocks xmlns:a="http://schemas.openxmlformats.org/drawingml/2006/main" noGrp="1"/>
-          </p:cNvSpPr>
-          <p:nvPr/>
-        </p:nvSpPr>
-        <p:spPr>
-          <a:xfrm xmlns:a="http://schemas.openxmlformats.org/drawingml/2006/main">
-            <a:off x="990600" y="4124325"/>
-            <a:ext cx="4305300" cy="671513"/>
-          </a:xfrm>
-          <a:prstGeom xmlns:a="http://schemas.openxmlformats.org/drawingml/2006/main" prst="rect">
-            <a:avLst/>
-          </a:prstGeom>
-          <a:noFill xmlns:a="http://schemas.openxmlformats.org/drawingml/2006/main"/>
-          <a:ln xmlns:a="http://schemas.openxmlformats.org/drawingml/2006/main" w="0">
-            <a:noFill/>
-          </a:ln>
-        </p:spPr>
-        <p:txBody>
-          <a:bodyPr xmlns:a="http://schemas.openxmlformats.org/drawingml/2006/main" lIns="0" tIns="0" rIns="0" bIns="0" anchor="ctr"/>
-          <a:lstStyle xmlns:a="http://schemas.openxmlformats.org/drawingml/2006/main"/>
-          <a:p xmlns:a="http://schemas.openxmlformats.org/drawingml/2006/main">
-            <a:pPr algn="l">
-              <a:lnSpc>
-                <a:spcPct val="118000"/>
-              </a:lnSpc>
-              <a:buNone/>
-              <a:defRPr sz="2200" b="0">
-                <a:solidFill>
-                  <a:srgbClr val="27333D"/>
-                </a:solidFill>
-                <a:latin typeface="微软雅黑"/>
-                <a:ea typeface="微软雅黑"/>
-                <a:cs typeface="微软雅黑"/>
-              </a:defRPr>
-            </a:pPr>
-            <a:r>
-              <a:rPr sz="2200" b="0">
-                <a:solidFill>
-                  <a:srgbClr val="27333D"/>
-                </a:solidFill>
-                <a:latin typeface="微软雅黑"/>
-                <a:ea typeface="微软雅黑"/>
-                <a:cs typeface="微软雅黑"/>
-              </a:rPr>
-              <a:t>证据与威胁</a:t>
-            </a:r>
-          </a:p>
-        </p:txBody>
-      </p:sp>
-      <p:sp>
-        <p:nvSpPr>
-          <p:cNvPr id="17" name="to14">
-            <a:extLst xmlns:a="http://schemas.openxmlformats.org/drawingml/2006/main">
-              <a:ext uri="{FF2B5EF4-FFF2-40B4-BE49-F238E27FC236}">
-                <a16:creationId xmlns:a16="http://schemas.microsoft.com/office/drawing/2014/main" id="{3C4B0D77-0A3E-4C73-AEEA-4A280571E200}"/>
-              </a:ext>
-            </a:extLst>
-          </p:cNvPr>
-          <p:cNvSpPr>
-            <a:spLocks xmlns:a="http://schemas.openxmlformats.org/drawingml/2006/main" noGrp="1"/>
-          </p:cNvSpPr>
-          <p:nvPr/>
-        </p:nvSpPr>
-        <p:spPr>
-          <a:xfrm xmlns:a="http://schemas.openxmlformats.org/drawingml/2006/main">
-            <a:off x="5810250" y="2952750"/>
-            <a:ext cx="762000" cy="323850"/>
-          </a:xfrm>
-          <a:prstGeom xmlns:a="http://schemas.openxmlformats.org/drawingml/2006/main" prst="rect">
-            <a:avLst/>
-          </a:prstGeom>
-          <a:noFill xmlns:a="http://schemas.openxmlformats.org/drawingml/2006/main"/>
-          <a:ln xmlns:a="http://schemas.openxmlformats.org/drawingml/2006/main" w="0">
-            <a:noFill/>
-          </a:ln>
-        </p:spPr>
-        <p:txBody>
-          <a:bodyPr xmlns:a="http://schemas.openxmlformats.org/drawingml/2006/main" lIns="0" tIns="0" rIns="0" bIns="0" anchor="ctr"/>
-          <a:lstStyle xmlns:a="http://schemas.openxmlformats.org/drawingml/2006/main"/>
-          <a:p xmlns:a="http://schemas.openxmlformats.org/drawingml/2006/main">
-            <a:pPr algn="ctr">
-              <a:lnSpc>
-                <a:spcPct val="118000"/>
-              </a:lnSpc>
-              <a:buNone/>
-              <a:defRPr sz="2400" b="0">
-                <a:solidFill>
-                  <a:srgbClr val="1F4D78"/>
-                </a:solidFill>
-                <a:latin typeface="微软雅黑"/>
-                <a:ea typeface="微软雅黑"/>
-                <a:cs typeface="微软雅黑"/>
-              </a:defRPr>
-            </a:pPr>
-            <a:r>
-              <a:rPr sz="2400" b="0">
-                <a:solidFill>
-                  <a:srgbClr val="1F4D78"/>
-                </a:solidFill>
-                <a:latin typeface="微软雅黑"/>
-                <a:ea typeface="微软雅黑"/>
-                <a:cs typeface="微软雅黑"/>
-              </a:rPr>
-              <a:t>→</a:t>
-            </a:r>
-          </a:p>
-        </p:txBody>
-      </p:sp>
-      <p:sp>
-        <p:nvSpPr>
-          <p:cNvPr id="18" name="doc-16-bg">
-            <a:extLst xmlns:a="http://schemas.openxmlformats.org/drawingml/2006/main">
-              <a:ext uri="{FF2B5EF4-FFF2-40B4-BE49-F238E27FC236}">
-                <a16:creationId xmlns:a16="http://schemas.microsoft.com/office/drawing/2014/main" id="{FCA9384D-6A1D-4B9F-9704-703BBD8A3510}"/>
-              </a:ext>
-            </a:extLst>
-          </p:cNvPr>
-          <p:cNvSpPr>
-            <a:spLocks xmlns:a="http://schemas.openxmlformats.org/drawingml/2006/main" noGrp="1"/>
-          </p:cNvSpPr>
-          <p:nvPr/>
-        </p:nvSpPr>
-        <p:spPr>
-          <a:xfrm xmlns:a="http://schemas.openxmlformats.org/drawingml/2006/main">
-            <a:off x="6858000" y="1571625"/>
-            <a:ext cx="4476750" cy="3429000"/>
-          </a:xfrm>
-          <a:prstGeom xmlns:a="http://schemas.openxmlformats.org/drawingml/2006/main" prst="rect">
-            <a:avLst/>
-          </a:prstGeom>
-          <a:solidFill xmlns:a="http://schemas.openxmlformats.org/drawingml/2006/main">
-            <a:srgbClr val="F4F6F8"/>
-          </a:solidFill>
-          <a:ln xmlns:a="http://schemas.openxmlformats.org/drawingml/2006/main" w="0">
-            <a:noFill/>
-          </a:ln>
-        </p:spPr>
-      </p:sp>
-      <p:sp>
-        <p:nvSpPr>
-          <p:cNvPr id="19" name="doc-16-title-bg">
-            <a:extLst xmlns:a="http://schemas.openxmlformats.org/drawingml/2006/main">
-              <a:ext uri="{FF2B5EF4-FFF2-40B4-BE49-F238E27FC236}">
-                <a16:creationId xmlns:a16="http://schemas.microsoft.com/office/drawing/2014/main" id="{463AEB6A-220D-4C60-B3C0-FAB1F463CB48}"/>
-              </a:ext>
-            </a:extLst>
-          </p:cNvPr>
-          <p:cNvSpPr>
-            <a:spLocks xmlns:a="http://schemas.openxmlformats.org/drawingml/2006/main" noGrp="1"/>
-          </p:cNvSpPr>
-          <p:nvPr/>
-        </p:nvSpPr>
-        <p:spPr>
-          <a:xfrm xmlns:a="http://schemas.openxmlformats.org/drawingml/2006/main">
-            <a:off x="6858000" y="1571625"/>
-            <a:ext cx="3429000" cy="323850"/>
-          </a:xfrm>
-          <a:prstGeom xmlns:a="http://schemas.openxmlformats.org/drawingml/2006/main" prst="rect">
-            <a:avLst/>
-          </a:prstGeom>
-          <a:solidFill xmlns:a="http://schemas.openxmlformats.org/drawingml/2006/main">
-            <a:srgbClr val="2E7D5B"/>
-          </a:solidFill>
-          <a:ln xmlns:a="http://schemas.openxmlformats.org/drawingml/2006/main" w="0">
-            <a:noFill/>
-          </a:ln>
-        </p:spPr>
-      </p:sp>
-      <p:sp>
-        <p:nvSpPr>
-          <p:cNvPr id="20" name="doc-16-title">
-            <a:extLst xmlns:a="http://schemas.openxmlformats.org/drawingml/2006/main">
-              <a:ext uri="{FF2B5EF4-FFF2-40B4-BE49-F238E27FC236}">
-                <a16:creationId xmlns:a16="http://schemas.microsoft.com/office/drawing/2014/main" id="{1C697B70-2DC7-4C23-A2D5-19D4C7705E03}"/>
-              </a:ext>
-            </a:extLst>
-          </p:cNvPr>
-          <p:cNvSpPr>
-            <a:spLocks xmlns:a="http://schemas.openxmlformats.org/drawingml/2006/main" noGrp="1"/>
-          </p:cNvSpPr>
-          <p:nvPr/>
-        </p:nvSpPr>
-        <p:spPr>
-          <a:xfrm xmlns:a="http://schemas.openxmlformats.org/drawingml/2006/main">
-            <a:off x="6934200" y="1590675"/>
-            <a:ext cx="3276600" cy="285750"/>
-          </a:xfrm>
-          <a:prstGeom xmlns:a="http://schemas.openxmlformats.org/drawingml/2006/main" prst="rect">
-            <a:avLst/>
-          </a:prstGeom>
-          <a:noFill xmlns:a="http://schemas.openxmlformats.org/drawingml/2006/main"/>
-          <a:ln xmlns:a="http://schemas.openxmlformats.org/drawingml/2006/main" w="0">
-            <a:noFill/>
-          </a:ln>
-        </p:spPr>
-        <p:txBody>
-          <a:bodyPr xmlns:a="http://schemas.openxmlformats.org/drawingml/2006/main" lIns="0" tIns="0" rIns="0" bIns="0" anchor="ctr"/>
-          <a:lstStyle xmlns:a="http://schemas.openxmlformats.org/drawingml/2006/main"/>
-          <a:p xmlns:a="http://schemas.openxmlformats.org/drawingml/2006/main">
-            <a:pPr algn="l">
-              <a:lnSpc>
-                <a:spcPct val="118000"/>
-              </a:lnSpc>
-              <a:buNone/>
-              <a:defRPr sz="1800" b="1">
-                <a:solidFill>
-                  <a:srgbClr val="FFFFFF"/>
-                </a:solidFill>
-                <a:latin typeface="微软雅黑"/>
-                <a:ea typeface="微软雅黑"/>
-                <a:cs typeface="微软雅黑"/>
-              </a:defRPr>
-            </a:pPr>
-            <a:r>
-              <a:rPr sz="1800" b="1">
-                <a:solidFill>
-                  <a:srgbClr val="FFFFFF"/>
-                </a:solidFill>
-                <a:latin typeface="微软雅黑"/>
-                <a:ea typeface="微软雅黑"/>
-                <a:cs typeface="微软雅黑"/>
-              </a:rPr>
-              <a:t>第 14 课论文结构</a:t>
-            </a:r>
-          </a:p>
-        </p:txBody>
-      </p:sp>
-      <p:sp>
-        <p:nvSpPr>
-          <p:cNvPr id="21" name="doc-16-line-0">
-            <a:extLst xmlns:a="http://schemas.openxmlformats.org/drawingml/2006/main">
-              <a:ext uri="{FF2B5EF4-FFF2-40B4-BE49-F238E27FC236}">
-                <a16:creationId xmlns:a16="http://schemas.microsoft.com/office/drawing/2014/main" id="{B6E61F73-156C-474B-B068-3C32474C8964}"/>
-              </a:ext>
-            </a:extLst>
-          </p:cNvPr>
-          <p:cNvSpPr>
-            <a:spLocks xmlns:a="http://schemas.openxmlformats.org/drawingml/2006/main" noGrp="1"/>
-          </p:cNvSpPr>
-          <p:nvPr/>
-        </p:nvSpPr>
-        <p:spPr>
-          <a:xfrm xmlns:a="http://schemas.openxmlformats.org/drawingml/2006/main">
-            <a:off x="7086600" y="2066925"/>
-            <a:ext cx="4019550" cy="895350"/>
-          </a:xfrm>
-          <a:prstGeom xmlns:a="http://schemas.openxmlformats.org/drawingml/2006/main" prst="rect">
-            <a:avLst/>
-          </a:prstGeom>
-          <a:noFill xmlns:a="http://schemas.openxmlformats.org/drawingml/2006/main"/>
-          <a:ln xmlns:a="http://schemas.openxmlformats.org/drawingml/2006/main" w="0">
-            <a:noFill/>
-          </a:ln>
-        </p:spPr>
-        <p:txBody>
-          <a:bodyPr xmlns:a="http://schemas.openxmlformats.org/drawingml/2006/main" lIns="0" tIns="0" rIns="0" bIns="0" anchor="ctr"/>
-          <a:lstStyle xmlns:a="http://schemas.openxmlformats.org/drawingml/2006/main"/>
-          <a:p xmlns:a="http://schemas.openxmlformats.org/drawingml/2006/main">
-            <a:pPr algn="l">
-              <a:lnSpc>
-                <a:spcPct val="118000"/>
-              </a:lnSpc>
-              <a:buNone/>
-              <a:defRPr sz="2200" b="0">
-                <a:solidFill>
-                  <a:srgbClr val="27333D"/>
-                </a:solidFill>
-                <a:latin typeface="微软雅黑"/>
-                <a:ea typeface="微软雅黑"/>
-                <a:cs typeface="微软雅黑"/>
-              </a:defRPr>
-            </a:pPr>
-            <a:r>
-              <a:rPr sz="2200" b="0">
-                <a:solidFill>
-                  <a:srgbClr val="27333D"/>
-                </a:solidFill>
-                <a:latin typeface="微软雅黑"/>
-                <a:ea typeface="微软雅黑"/>
-                <a:cs typeface="微软雅黑"/>
-              </a:rPr>
-              <a:t>Results｜对照与结果</a:t>
-            </a:r>
-          </a:p>
-        </p:txBody>
-      </p:sp>
-      <p:sp>
-        <p:nvSpPr>
-          <p:cNvPr id="22" name="doc-16-line-1">
-            <a:extLst xmlns:a="http://schemas.openxmlformats.org/drawingml/2006/main">
-              <a:ext uri="{FF2B5EF4-FFF2-40B4-BE49-F238E27FC236}">
-                <a16:creationId xmlns:a16="http://schemas.microsoft.com/office/drawing/2014/main" id="{70293B27-B9AE-4DD4-A47B-8087AAA520A7}"/>
-              </a:ext>
-            </a:extLst>
-          </p:cNvPr>
-          <p:cNvSpPr>
-            <a:spLocks xmlns:a="http://schemas.openxmlformats.org/drawingml/2006/main" noGrp="1"/>
-          </p:cNvSpPr>
-          <p:nvPr/>
-        </p:nvSpPr>
-        <p:spPr>
-          <a:xfrm xmlns:a="http://schemas.openxmlformats.org/drawingml/2006/main">
-            <a:off x="7086600" y="2981325"/>
-            <a:ext cx="4019550" cy="895350"/>
-          </a:xfrm>
-          <a:prstGeom xmlns:a="http://schemas.openxmlformats.org/drawingml/2006/main" prst="rect">
-            <a:avLst/>
-          </a:prstGeom>
-          <a:noFill xmlns:a="http://schemas.openxmlformats.org/drawingml/2006/main"/>
-          <a:ln xmlns:a="http://schemas.openxmlformats.org/drawingml/2006/main" w="0">
-            <a:noFill/>
-          </a:ln>
-        </p:spPr>
-        <p:txBody>
-          <a:bodyPr xmlns:a="http://schemas.openxmlformats.org/drawingml/2006/main" lIns="0" tIns="0" rIns="0" bIns="0" anchor="ctr"/>
-          <a:lstStyle xmlns:a="http://schemas.openxmlformats.org/drawingml/2006/main"/>
-          <a:p xmlns:a="http://schemas.openxmlformats.org/drawingml/2006/main">
-            <a:pPr algn="l">
-              <a:lnSpc>
-                <a:spcPct val="118000"/>
-              </a:lnSpc>
-              <a:buNone/>
-              <a:defRPr sz="2200" b="0">
-                <a:solidFill>
-                  <a:srgbClr val="27333D"/>
-                </a:solidFill>
-                <a:latin typeface="微软雅黑"/>
-                <a:ea typeface="微软雅黑"/>
-                <a:cs typeface="微软雅黑"/>
-              </a:defRPr>
-            </a:pPr>
-            <a:r>
-              <a:rPr sz="2200" b="0">
-                <a:solidFill>
-                  <a:srgbClr val="27333D"/>
-                </a:solidFill>
-                <a:latin typeface="微软雅黑"/>
-                <a:ea typeface="微软雅黑"/>
-                <a:cs typeface="微软雅黑"/>
-              </a:rPr>
-              <a:t>Discussion｜局限与替代解释</a:t>
-            </a:r>
-          </a:p>
-        </p:txBody>
-      </p:sp>
-      <p:sp>
-        <p:nvSpPr>
-          <p:cNvPr id="23" name="doc-16-line-2">
-            <a:extLst xmlns:a="http://schemas.openxmlformats.org/drawingml/2006/main">
-              <a:ext uri="{FF2B5EF4-FFF2-40B4-BE49-F238E27FC236}">
-                <a16:creationId xmlns:a16="http://schemas.microsoft.com/office/drawing/2014/main" id="{1CA24C00-ECBB-43B0-8541-875A820F6B0B}"/>
-              </a:ext>
-            </a:extLst>
-          </p:cNvPr>
-          <p:cNvSpPr>
-            <a:spLocks xmlns:a="http://schemas.openxmlformats.org/drawingml/2006/main" noGrp="1"/>
-          </p:cNvSpPr>
-          <p:nvPr/>
-        </p:nvSpPr>
-        <p:spPr>
-          <a:xfrm xmlns:a="http://schemas.openxmlformats.org/drawingml/2006/main">
-            <a:off x="7086600" y="3895725"/>
-            <a:ext cx="4019550" cy="895350"/>
-          </a:xfrm>
-          <a:prstGeom xmlns:a="http://schemas.openxmlformats.org/drawingml/2006/main" prst="rect">
-            <a:avLst/>
-          </a:prstGeom>
-          <a:noFill xmlns:a="http://schemas.openxmlformats.org/drawingml/2006/main"/>
-          <a:ln xmlns:a="http://schemas.openxmlformats.org/drawingml/2006/main" w="0">
-            <a:noFill/>
-          </a:ln>
-        </p:spPr>
-        <p:txBody>
-          <a:bodyPr xmlns:a="http://schemas.openxmlformats.org/drawingml/2006/main" lIns="0" tIns="0" rIns="0" bIns="0" anchor="ctr"/>
-          <a:lstStyle xmlns:a="http://schemas.openxmlformats.org/drawingml/2006/main"/>
-          <a:p xmlns:a="http://schemas.openxmlformats.org/drawingml/2006/main">
-            <a:pPr algn="l">
-              <a:lnSpc>
-                <a:spcPct val="118000"/>
-              </a:lnSpc>
-              <a:buNone/>
-              <a:defRPr sz="2200" b="0">
-                <a:solidFill>
-                  <a:srgbClr val="27333D"/>
-                </a:solidFill>
-                <a:latin typeface="微软雅黑"/>
-                <a:ea typeface="微软雅黑"/>
-                <a:cs typeface="微软雅黑"/>
-              </a:defRPr>
-            </a:pPr>
-            <a:r>
-              <a:rPr sz="2200" b="0">
-                <a:solidFill>
-                  <a:srgbClr val="27333D"/>
-                </a:solidFill>
-                <a:latin typeface="微软雅黑"/>
-                <a:ea typeface="微软雅黑"/>
-                <a:cs typeface="微软雅黑"/>
-              </a:rPr>
-              <a:t>Disclosure｜人工审核与 AI 使用</a:t>
+              <a:t>20</a:t>
             </a:r>
           </a:p>
         </p:txBody>
@@ -15454,149 +12566,22 @@
       </p:grpSpPr>
       <p:sp>
         <p:nvSpPr>
-          <p:cNvPr id="4" name="Text Placeholder 3">
-            <a:extLst xmlns:a="http://schemas.openxmlformats.org/drawingml/2006/main">
-              <a:ext uri="{FF2B5EF4-FFF2-40B4-BE49-F238E27FC236}">
-                <a16:creationId xmlns:a16="http://schemas.microsoft.com/office/drawing/2014/main" id="{4D941B40-7A0A-534E-3563-CA11753C8E3F}"/>
-              </a:ext>
-            </a:extLst>
-          </p:cNvPr>
-          <p:cNvSpPr>
-            <a:spLocks xmlns:a="http://schemas.openxmlformats.org/drawingml/2006/main" noGrp="1"/>
-          </p:cNvSpPr>
-          <p:nvPr>
-            <p:ph type="body" idx="14"/>
-          </p:nvPr>
-        </p:nvSpPr>
-        <p:spPr>
-          <a:xfrm xmlns:a="http://schemas.openxmlformats.org/drawingml/2006/main">
-            <a:off x="1028700" y="57150"/>
-            <a:ext cx="10668000" cy="571500"/>
-          </a:xfrm>
-        </p:spPr>
-        <p:txBody>
-          <a:bodyPr xmlns:a="http://schemas.openxmlformats.org/drawingml/2006/main" lIns="0" tIns="0" rIns="0" bIns="0" anchor="ctr"/>
-          <a:lstStyle xmlns:a="http://schemas.openxmlformats.org/drawingml/2006/main"/>
-          <a:p xmlns:a="http://schemas.openxmlformats.org/drawingml/2006/main">
-            <a:pPr algn="l">
-              <a:lnSpc>
-                <a:spcPct val="118000"/>
-              </a:lnSpc>
-              <a:buNone/>
-            </a:pPr>
-            <a:r>
-              <a:rPr sz="3000" b="1">
-                <a:solidFill>
-                  <a:srgbClr val="FFFFFF"/>
-                </a:solidFill>
-                <a:latin typeface="微软雅黑"/>
-                <a:ea typeface="微软雅黑"/>
-                <a:cs typeface="微软雅黑"/>
-              </a:rPr>
-              <a:t>评价报告先完成三个可检查字段</a:t>
-            </a:r>
-            <a:endParaRPr/>
-          </a:p>
-        </p:txBody>
-      </p:sp>
-      <p:sp>
-        <p:nvSpPr>
-          <p:cNvPr id="5" name="Slide Number Placeholder 4">
-            <a:extLst xmlns:a="http://schemas.openxmlformats.org/drawingml/2006/main">
-              <a:ext uri="{FF2B5EF4-FFF2-40B4-BE49-F238E27FC236}">
-                <a16:creationId xmlns:a16="http://schemas.microsoft.com/office/drawing/2014/main" id="{EBA5909F-738E-F60C-BE8C-B3F1D94548E5}"/>
-              </a:ext>
-            </a:extLst>
-          </p:cNvPr>
-          <p:cNvSpPr>
-            <a:spLocks xmlns:a="http://schemas.openxmlformats.org/drawingml/2006/main" noGrp="1"/>
-          </p:cNvSpPr>
-          <p:nvPr>
-            <p:ph type="sldNum" idx="10"/>
-          </p:nvPr>
-        </p:nvSpPr>
-        <p:spPr/>
-        <p:txBody>
-          <a:bodyPr xmlns:a="http://schemas.openxmlformats.org/drawingml/2006/main"/>
-          <a:lstStyle xmlns:a="http://schemas.openxmlformats.org/drawingml/2006/main"/>
-          <a:p xmlns:a="http://schemas.openxmlformats.org/drawingml/2006/main">
-            <a:fld id="{202359C0-8A7A-196E-DD58-8E6569619F09}" type="slidenum">
-              <a:t>3</a:t>
-            </a:fld>
-            <a:endParaRPr/>
-          </a:p>
-        </p:txBody>
-      </p:sp>
-      <p:sp>
-        <p:nvSpPr>
-          <p:cNvPr id="6" name="brand-header">
-            <a:extLst xmlns:a="http://schemas.openxmlformats.org/drawingml/2006/main">
-              <a:ext uri="{FF2B5EF4-FFF2-40B4-BE49-F238E27FC236}">
-                <a16:creationId xmlns:a16="http://schemas.microsoft.com/office/drawing/2014/main" id="{9DFDCB3F-394D-44FA-B090-C1343A6ECA1C}"/>
-              </a:ext>
-            </a:extLst>
-          </p:cNvPr>
-          <p:cNvSpPr>
-            <a:spLocks xmlns:a="http://schemas.openxmlformats.org/drawingml/2006/main" noGrp="1"/>
-          </p:cNvSpPr>
-          <p:nvPr/>
-        </p:nvSpPr>
-        <p:spPr>
-          <a:xfrm xmlns:a="http://schemas.openxmlformats.org/drawingml/2006/main">
-            <a:off x="0" y="0"/>
-            <a:ext cx="11887200" cy="685800"/>
-          </a:xfrm>
-          <a:prstGeom xmlns:a="http://schemas.openxmlformats.org/drawingml/2006/main" prst="rect">
-            <a:avLst/>
-          </a:prstGeom>
-          <a:solidFill xmlns:a="http://schemas.openxmlformats.org/drawingml/2006/main">
-            <a:srgbClr val="C8161E"/>
-          </a:solidFill>
-          <a:ln xmlns:a="http://schemas.openxmlformats.org/drawingml/2006/main" w="0">
-            <a:noFill/>
-          </a:ln>
-        </p:spPr>
-      </p:sp>
-      <p:pic>
-        <p:nvPicPr>
-          <p:cNvPr id="21" name=""/>
-          <p:cNvPicPr>
-            <a:picLocks xmlns:a="http://schemas.openxmlformats.org/drawingml/2006/main" noChangeAspect="1"/>
-          </p:cNvPicPr>
-          <p:nvPr/>
-        </p:nvPicPr>
-        <p:blipFill>
-          <a:blip xmlns:r="http://schemas.openxmlformats.org/officeDocument/2006/relationships" xmlns:a="http://schemas.openxmlformats.org/drawingml/2006/main" r:embed="Rfe51af5e49324956"/>
-          <a:stretch xmlns:a="http://schemas.openxmlformats.org/drawingml/2006/main"/>
-        </p:blipFill>
-        <p:spPr>
-          <a:xfrm xmlns:a="http://schemas.openxmlformats.org/drawingml/2006/main">
-            <a:off x="323850" y="76200"/>
-            <a:ext cx="533400" cy="533400"/>
-          </a:xfrm>
-          <a:prstGeom xmlns:a="http://schemas.openxmlformats.org/drawingml/2006/main" prst="rect">
-            <a:avLst/>
-          </a:prstGeom>
-        </p:spPr>
-      </p:pic>
-      <p:sp>
-        <p:nvSpPr>
-          <p:cNvPr id="8" name="brand-title">
-            <a:extLst xmlns:a="http://schemas.openxmlformats.org/drawingml/2006/main">
-              <a:ext uri="{FF2B5EF4-FFF2-40B4-BE49-F238E27FC236}">
-                <a16:creationId xmlns:a16="http://schemas.microsoft.com/office/drawing/2014/main" id="{76FE2125-625A-4FB2-9A9C-CF33179BDCD8}"/>
-              </a:ext>
-            </a:extLst>
-          </p:cNvPr>
-          <p:cNvSpPr>
-            <a:spLocks xmlns:a="http://schemas.openxmlformats.org/drawingml/2006/main" noGrp="1"/>
-          </p:cNvSpPr>
-          <p:nvPr/>
-        </p:nvSpPr>
-        <p:spPr>
-          <a:xfrm xmlns:a="http://schemas.openxmlformats.org/drawingml/2006/main">
-            <a:off x="1028700" y="66675"/>
-            <a:ext cx="10477500" cy="552450"/>
+          <p:cNvPr id="7" name="judgment-title">
+            <a:extLst xmlns:a="http://schemas.openxmlformats.org/drawingml/2006/main">
+              <a:ext uri="{FF2B5EF4-FFF2-40B4-BE49-F238E27FC236}">
+                <a16:creationId xmlns:a16="http://schemas.microsoft.com/office/drawing/2014/main" id="{9BB884B8-C303-4A36-8E2F-1A60B18CC3AA}"/>
+              </a:ext>
+            </a:extLst>
+          </p:cNvPr>
+          <p:cNvSpPr>
+            <a:spLocks xmlns:a="http://schemas.openxmlformats.org/drawingml/2006/main" noGrp="1"/>
+          </p:cNvSpPr>
+          <p:nvPr/>
+        </p:nvSpPr>
+        <p:spPr>
+          <a:xfrm xmlns:a="http://schemas.openxmlformats.org/drawingml/2006/main">
+            <a:off x="1028700" y="76200"/>
+            <a:ext cx="10687050" cy="514350"/>
           </a:xfrm>
           <a:prstGeom xmlns:a="http://schemas.openxmlformats.org/drawingml/2006/main" prst="rect">
             <a:avLst/>
@@ -15607,14 +12592,21 @@
           </a:ln>
         </p:spPr>
         <p:txBody>
-          <a:bodyPr xmlns:a="http://schemas.openxmlformats.org/drawingml/2006/main" lIns="0" tIns="0" rIns="0" bIns="0" anchor="ctr"/>
-          <a:lstStyle xmlns:a="http://schemas.openxmlformats.org/drawingml/2006/main"/>
+          <a:bodyPr xmlns:a="http://schemas.openxmlformats.org/drawingml/2006/main" lIns="0" tIns="0" rIns="0" bIns="0" anchor="t"/>
+          <a:lstStyle xmlns:a="http://schemas.openxmlformats.org/drawingml/2006/main">
+            <a:defPPr algn="l">
+              <a:defRPr sz="3000" b="1">
+                <a:solidFill>
+                  <a:srgbClr val="FFFFFF"/>
+                </a:solidFill>
+                <a:latin typeface="微软雅黑"/>
+                <a:ea typeface="微软雅黑"/>
+                <a:cs typeface="微软雅黑"/>
+              </a:defRPr>
+            </a:defPPr>
+          </a:lstStyle>
           <a:p xmlns:a="http://schemas.openxmlformats.org/drawingml/2006/main">
             <a:pPr algn="l">
-              <a:lnSpc>
-                <a:spcPct val="118000"/>
-              </a:lnSpc>
-              <a:buNone/>
               <a:defRPr sz="3000" b="1">
                 <a:solidFill>
                   <a:srgbClr val="FFFFFF"/>
@@ -15633,29 +12625,29 @@
                 <a:ea typeface="微软雅黑"/>
                 <a:cs typeface="微软雅黑"/>
               </a:rPr>
-              <a:t>评价报告先完成三个可检查字段</a:t>
-            </a:r>
-          </a:p>
-        </p:txBody>
-      </p:sp>
-      <p:sp>
-        <p:nvSpPr>
-          <p:cNvPr id="9" name="source">
-            <a:extLst xmlns:a="http://schemas.openxmlformats.org/drawingml/2006/main">
-              <a:ext uri="{FF2B5EF4-FFF2-40B4-BE49-F238E27FC236}">
-                <a16:creationId xmlns:a16="http://schemas.microsoft.com/office/drawing/2014/main" id="{7A6BABA3-E842-45EF-8968-FEF37A795E4C}"/>
-              </a:ext>
-            </a:extLst>
-          </p:cNvPr>
-          <p:cNvSpPr>
-            <a:spLocks xmlns:a="http://schemas.openxmlformats.org/drawingml/2006/main" noGrp="1"/>
-          </p:cNvSpPr>
-          <p:nvPr/>
-        </p:nvSpPr>
-        <p:spPr>
-          <a:xfrm xmlns:a="http://schemas.openxmlformats.org/drawingml/2006/main">
-            <a:off x="609600" y="6067425"/>
-            <a:ext cx="10763250" cy="209550"/>
+              <a:t>总均值改善，能否采用</a:t>
+            </a:r>
+          </a:p>
+        </p:txBody>
+      </p:sp>
+      <p:sp>
+        <p:nvSpPr>
+          <p:cNvPr id="2" name="judgment-body-0">
+            <a:extLst xmlns:a="http://schemas.openxmlformats.org/drawingml/2006/main">
+              <a:ext uri="{FF2B5EF4-FFF2-40B4-BE49-F238E27FC236}">
+                <a16:creationId xmlns:a16="http://schemas.microsoft.com/office/drawing/2014/main" id="{A29DEC3F-776B-425B-ACEB-84E362F99594}"/>
+              </a:ext>
+            </a:extLst>
+          </p:cNvPr>
+          <p:cNvSpPr>
+            <a:spLocks xmlns:a="http://schemas.openxmlformats.org/drawingml/2006/main" noGrp="1"/>
+          </p:cNvSpPr>
+          <p:nvPr/>
+        </p:nvSpPr>
+        <p:spPr>
+          <a:xfrm xmlns:a="http://schemas.openxmlformats.org/drawingml/2006/main">
+            <a:off x="666750" y="1066800"/>
+            <a:ext cx="10858500" cy="1009650"/>
           </a:xfrm>
           <a:prstGeom xmlns:a="http://schemas.openxmlformats.org/drawingml/2006/main" prst="rect">
             <a:avLst/>
@@ -15667,16 +12659,23 @@
         </p:spPr>
         <p:txBody>
           <a:bodyPr xmlns:a="http://schemas.openxmlformats.org/drawingml/2006/main" lIns="0" tIns="0" rIns="0" bIns="0" anchor="t"/>
-          <a:lstStyle xmlns:a="http://schemas.openxmlformats.org/drawingml/2006/main"/>
+          <a:lstStyle xmlns:a="http://schemas.openxmlformats.org/drawingml/2006/main">
+            <a:defPPr algn="l">
+              <a:defRPr sz="2400" b="0">
+                <a:solidFill>
+                  <a:srgbClr val="263746"/>
+                </a:solidFill>
+                <a:latin typeface="微软雅黑"/>
+                <a:ea typeface="微软雅黑"/>
+                <a:cs typeface="微软雅黑"/>
+              </a:defRPr>
+            </a:defPPr>
+          </a:lstStyle>
           <a:p xmlns:a="http://schemas.openxmlformats.org/drawingml/2006/main">
             <a:pPr algn="l">
-              <a:lnSpc>
-                <a:spcPct val="118000"/>
-              </a:lnSpc>
-              <a:buNone/>
-              <a:defRPr sz="1100" b="0">
-                <a:solidFill>
-                  <a:srgbClr val="66727D"/>
+              <a:defRPr sz="2400" b="0">
+                <a:solidFill>
+                  <a:srgbClr val="263746"/>
                 </a:solidFill>
                 <a:latin typeface="微软雅黑"/>
                 <a:ea typeface="微软雅黑"/>
@@ -15684,97 +12683,83 @@
               </a:defRPr>
             </a:pPr>
             <a:r>
-              <a:rPr sz="1100" b="0">
-                <a:solidFill>
-                  <a:srgbClr val="66727D"/>
+              <a:rPr sz="2400" b="0">
+                <a:solidFill>
+                  <a:srgbClr val="263746"/>
                 </a:solidFill>
                 <a:latin typeface="微软雅黑"/>
                 <a:ea typeface="微软雅黑"/>
                 <a:cs typeface="微软雅黑"/>
               </a:rPr>
-              <a:t>来源：lesson-13/slides.md；课程工件与讲义见 speaker notes</a:t>
-            </a:r>
-          </a:p>
-        </p:txBody>
-      </p:sp>
-      <p:sp>
-        <p:nvSpPr>
-          <p:cNvPr id="10" name="doc-9-bg">
-            <a:extLst xmlns:a="http://schemas.openxmlformats.org/drawingml/2006/main">
-              <a:ext uri="{FF2B5EF4-FFF2-40B4-BE49-F238E27FC236}">
-                <a16:creationId xmlns:a16="http://schemas.microsoft.com/office/drawing/2014/main" id="{F29E8BDA-286A-4815-9A1F-62EB90FFBCAC}"/>
-              </a:ext>
-            </a:extLst>
-          </p:cNvPr>
-          <p:cNvSpPr>
-            <a:spLocks xmlns:a="http://schemas.openxmlformats.org/drawingml/2006/main" noGrp="1"/>
-          </p:cNvSpPr>
-          <p:nvPr/>
-        </p:nvSpPr>
-        <p:spPr>
-          <a:xfrm xmlns:a="http://schemas.openxmlformats.org/drawingml/2006/main">
-            <a:off x="762000" y="1333500"/>
-            <a:ext cx="10668000" cy="4286250"/>
-          </a:xfrm>
-          <a:prstGeom xmlns:a="http://schemas.openxmlformats.org/drawingml/2006/main" prst="rect">
-            <a:avLst/>
-          </a:prstGeom>
-          <a:solidFill xmlns:a="http://schemas.openxmlformats.org/drawingml/2006/main">
-            <a:srgbClr val="F4F6F8"/>
-          </a:solidFill>
-          <a:ln xmlns:a="http://schemas.openxmlformats.org/drawingml/2006/main" w="0">
-            <a:noFill/>
-          </a:ln>
-        </p:spPr>
-      </p:sp>
-      <p:sp>
-        <p:nvSpPr>
-          <p:cNvPr id="11" name="doc-9-title-bg">
-            <a:extLst xmlns:a="http://schemas.openxmlformats.org/drawingml/2006/main">
-              <a:ext uri="{FF2B5EF4-FFF2-40B4-BE49-F238E27FC236}">
-                <a16:creationId xmlns:a16="http://schemas.microsoft.com/office/drawing/2014/main" id="{35AB1FC8-302C-42E2-9486-634E203A0E4D}"/>
-              </a:ext>
-            </a:extLst>
-          </p:cNvPr>
-          <p:cNvSpPr>
-            <a:spLocks xmlns:a="http://schemas.openxmlformats.org/drawingml/2006/main" noGrp="1"/>
-          </p:cNvSpPr>
-          <p:nvPr/>
-        </p:nvSpPr>
-        <p:spPr>
-          <a:xfrm xmlns:a="http://schemas.openxmlformats.org/drawingml/2006/main">
-            <a:off x="762000" y="1333500"/>
-            <a:ext cx="3429000" cy="323850"/>
-          </a:xfrm>
-          <a:prstGeom xmlns:a="http://schemas.openxmlformats.org/drawingml/2006/main" prst="rect">
-            <a:avLst/>
-          </a:prstGeom>
-          <a:solidFill xmlns:a="http://schemas.openxmlformats.org/drawingml/2006/main">
-            <a:srgbClr val="1F4D78"/>
-          </a:solidFill>
-          <a:ln xmlns:a="http://schemas.openxmlformats.org/drawingml/2006/main" w="0">
-            <a:noFill/>
-          </a:ln>
-        </p:spPr>
-      </p:sp>
-      <p:sp>
-        <p:nvSpPr>
-          <p:cNvPr id="12" name="doc-9-title">
-            <a:extLst xmlns:a="http://schemas.openxmlformats.org/drawingml/2006/main">
-              <a:ext uri="{FF2B5EF4-FFF2-40B4-BE49-F238E27FC236}">
-                <a16:creationId xmlns:a16="http://schemas.microsoft.com/office/drawing/2014/main" id="{A6EAE291-47BE-4143-9541-3C8357EA02D2}"/>
-              </a:ext>
-            </a:extLst>
-          </p:cNvPr>
-          <p:cNvSpPr>
-            <a:spLocks xmlns:a="http://schemas.openxmlformats.org/drawingml/2006/main" noGrp="1"/>
-          </p:cNvSpPr>
-          <p:nvPr/>
-        </p:nvSpPr>
-        <p:spPr>
-          <a:xfrm xmlns:a="http://schemas.openxmlformats.org/drawingml/2006/main">
-            <a:off x="838200" y="1352550"/>
-            <a:ext cx="3276600" cy="285750"/>
+              <a:t>T01｜0/3 vs 2/3</a:t>
+            </a:r>
+          </a:p>
+          <a:p xmlns:a="http://schemas.openxmlformats.org/drawingml/2006/main">
+            <a:pPr algn="l">
+              <a:defRPr sz="2400" b="0">
+                <a:solidFill>
+                  <a:srgbClr val="263746"/>
+                </a:solidFill>
+                <a:latin typeface="微软雅黑"/>
+                <a:ea typeface="微软雅黑"/>
+                <a:cs typeface="微软雅黑"/>
+              </a:defRPr>
+            </a:pPr>
+            <a:r>
+              <a:rPr sz="2400" b="0">
+                <a:solidFill>
+                  <a:srgbClr val="263746"/>
+                </a:solidFill>
+                <a:latin typeface="微软雅黑"/>
+                <a:ea typeface="微软雅黑"/>
+                <a:cs typeface="微软雅黑"/>
+              </a:rPr>
+              <a:t>T02｜1/3 vs 1/3</a:t>
+            </a:r>
+          </a:p>
+          <a:p xmlns:a="http://schemas.openxmlformats.org/drawingml/2006/main">
+            <a:pPr algn="l">
+              <a:defRPr sz="2400" b="0">
+                <a:solidFill>
+                  <a:srgbClr val="263746"/>
+                </a:solidFill>
+                <a:latin typeface="微软雅黑"/>
+                <a:ea typeface="微软雅黑"/>
+                <a:cs typeface="微软雅黑"/>
+              </a:defRPr>
+            </a:pPr>
+            <a:r>
+              <a:rPr sz="2400" b="0">
+                <a:solidFill>
+                  <a:srgbClr val="263746"/>
+                </a:solidFill>
+                <a:latin typeface="微软雅黑"/>
+                <a:ea typeface="微软雅黑"/>
+                <a:cs typeface="微软雅黑"/>
+              </a:rPr>
+              <a:t>T03｜2/2 vs 1/2</a:t>
+            </a:r>
+          </a:p>
+        </p:txBody>
+      </p:sp>
+      <p:sp>
+        <p:nvSpPr>
+          <p:cNvPr id="3" name="judgment-body-1">
+            <a:extLst xmlns:a="http://schemas.openxmlformats.org/drawingml/2006/main">
+              <a:ext uri="{FF2B5EF4-FFF2-40B4-BE49-F238E27FC236}">
+                <a16:creationId xmlns:a16="http://schemas.microsoft.com/office/drawing/2014/main" id="{CB551622-6066-4E9E-9979-CC751923AAEB}"/>
+              </a:ext>
+            </a:extLst>
+          </p:cNvPr>
+          <p:cNvSpPr>
+            <a:spLocks xmlns:a="http://schemas.openxmlformats.org/drawingml/2006/main" noGrp="1"/>
+          </p:cNvSpPr>
+          <p:nvPr/>
+        </p:nvSpPr>
+        <p:spPr>
+          <a:xfrm xmlns:a="http://schemas.openxmlformats.org/drawingml/2006/main">
+            <a:off x="666750" y="2238375"/>
+            <a:ext cx="10858500" cy="2076450"/>
           </a:xfrm>
           <a:prstGeom xmlns:a="http://schemas.openxmlformats.org/drawingml/2006/main" prst="rect">
             <a:avLst/>
@@ -15785,17 +12770,24 @@
           </a:ln>
         </p:spPr>
         <p:txBody>
-          <a:bodyPr xmlns:a="http://schemas.openxmlformats.org/drawingml/2006/main" lIns="0" tIns="0" rIns="0" bIns="0" anchor="ctr"/>
-          <a:lstStyle xmlns:a="http://schemas.openxmlformats.org/drawingml/2006/main"/>
+          <a:bodyPr xmlns:a="http://schemas.openxmlformats.org/drawingml/2006/main" lIns="0" tIns="0" rIns="0" bIns="0" anchor="t"/>
+          <a:lstStyle xmlns:a="http://schemas.openxmlformats.org/drawingml/2006/main">
+            <a:defPPr algn="l">
+              <a:defRPr sz="2400" b="0">
+                <a:solidFill>
+                  <a:srgbClr val="263746"/>
+                </a:solidFill>
+                <a:latin typeface="微软雅黑"/>
+                <a:ea typeface="微软雅黑"/>
+                <a:cs typeface="微软雅黑"/>
+              </a:defRPr>
+            </a:defPPr>
+          </a:lstStyle>
           <a:p xmlns:a="http://schemas.openxmlformats.org/drawingml/2006/main">
             <a:pPr algn="l">
-              <a:lnSpc>
-                <a:spcPct val="118000"/>
-              </a:lnSpc>
-              <a:buNone/>
-              <a:defRPr sz="1800" b="1">
-                <a:solidFill>
-                  <a:srgbClr val="FFFFFF"/>
+              <a:defRPr sz="2400" b="0">
+                <a:solidFill>
+                  <a:srgbClr val="263746"/>
                 </a:solidFill>
                 <a:latin typeface="微软雅黑"/>
                 <a:ea typeface="微软雅黑"/>
@@ -15803,37 +12795,60 @@
               </a:defRPr>
             </a:pPr>
             <a:r>
-              <a:rPr sz="1800" b="1">
-                <a:solidFill>
-                  <a:srgbClr val="FFFFFF"/>
+              <a:rPr sz="2400" b="0">
+                <a:solidFill>
+                  <a:srgbClr val="263746"/>
                 </a:solidFill>
                 <a:latin typeface="微软雅黑"/>
                 <a:ea typeface="微软雅黑"/>
                 <a:cs typeface="微软雅黑"/>
               </a:rPr>
-              <a:t>evaluation-report.md</a:t>
-            </a:r>
-          </a:p>
-        </p:txBody>
-      </p:sp>
-      <p:sp>
-        <p:nvSpPr>
-          <p:cNvPr id="13" name="doc-9-line-0">
-            <a:extLst xmlns:a="http://schemas.openxmlformats.org/drawingml/2006/main">
-              <a:ext uri="{FF2B5EF4-FFF2-40B4-BE49-F238E27FC236}">
-                <a16:creationId xmlns:a16="http://schemas.microsoft.com/office/drawing/2014/main" id="{38D8ACDE-1259-4DE8-B9ED-254155FDAB39}"/>
-              </a:ext>
-            </a:extLst>
-          </p:cNvPr>
-          <p:cNvSpPr>
-            <a:spLocks xmlns:a="http://schemas.openxmlformats.org/drawingml/2006/main" noGrp="1"/>
-          </p:cNvSpPr>
-          <p:nvPr/>
-        </p:nvSpPr>
-        <p:spPr>
-          <a:xfrm xmlns:a="http://schemas.openxmlformats.org/drawingml/2006/main">
-            <a:off x="990600" y="1828800"/>
-            <a:ext cx="10210800" cy="885825"/>
+              <a:t>条件加权：3/8 vs 4/8</a:t>
+            </a:r>
+          </a:p>
+          <a:p xmlns:a="http://schemas.openxmlformats.org/drawingml/2006/main">
+            <a:pPr algn="l">
+              <a:defRPr sz="2400" b="0">
+                <a:solidFill>
+                  <a:srgbClr val="263746"/>
+                </a:solidFill>
+                <a:latin typeface="微软雅黑"/>
+                <a:ea typeface="微软雅黑"/>
+                <a:cs typeface="微软雅黑"/>
+              </a:defRPr>
+            </a:pPr>
+            <a:r>
+              <a:rPr sz="2400" b="0">
+                <a:solidFill>
+                  <a:srgbClr val="263746"/>
+                </a:solidFill>
+                <a:latin typeface="微软雅黑"/>
+                <a:ea typeface="微软雅黑"/>
+                <a:cs typeface="微软雅黑"/>
+              </a:rPr>
+              <a:t>文本等权：4/9 vs 1/2</a:t>
+            </a:r>
+          </a:p>
+        </p:txBody>
+      </p:sp>
+      <p:sp>
+        <p:nvSpPr>
+          <p:cNvPr id="4" name="judgment-body-2">
+            <a:extLst xmlns:a="http://schemas.openxmlformats.org/drawingml/2006/main">
+              <a:ext uri="{FF2B5EF4-FFF2-40B4-BE49-F238E27FC236}">
+                <a16:creationId xmlns:a16="http://schemas.microsoft.com/office/drawing/2014/main" id="{9FE0BA8A-3A9A-4E41-A56D-D5A58E27AA2C}"/>
+              </a:ext>
+            </a:extLst>
+          </p:cNvPr>
+          <p:cNvSpPr>
+            <a:spLocks xmlns:a="http://schemas.openxmlformats.org/drawingml/2006/main" noGrp="1"/>
+          </p:cNvSpPr>
+          <p:nvPr/>
+        </p:nvSpPr>
+        <p:spPr>
+          <a:xfrm xmlns:a="http://schemas.openxmlformats.org/drawingml/2006/main">
+            <a:off x="666750" y="4495800"/>
+            <a:ext cx="10858500" cy="1409700"/>
           </a:xfrm>
           <a:prstGeom xmlns:a="http://schemas.openxmlformats.org/drawingml/2006/main" prst="rect">
             <a:avLst/>
@@ -15844,17 +12859,24 @@
           </a:ln>
         </p:spPr>
         <p:txBody>
-          <a:bodyPr xmlns:a="http://schemas.openxmlformats.org/drawingml/2006/main" lIns="0" tIns="0" rIns="0" bIns="0" anchor="ctr"/>
-          <a:lstStyle xmlns:a="http://schemas.openxmlformats.org/drawingml/2006/main"/>
+          <a:bodyPr xmlns:a="http://schemas.openxmlformats.org/drawingml/2006/main" lIns="0" tIns="0" rIns="0" bIns="0" anchor="t"/>
+          <a:lstStyle xmlns:a="http://schemas.openxmlformats.org/drawingml/2006/main">
+            <a:defPPr algn="l">
+              <a:defRPr sz="2200" b="0">
+                <a:solidFill>
+                  <a:srgbClr val="1F4D78"/>
+                </a:solidFill>
+                <a:latin typeface="微软雅黑"/>
+                <a:ea typeface="微软雅黑"/>
+                <a:cs typeface="微软雅黑"/>
+              </a:defRPr>
+            </a:defPPr>
+          </a:lstStyle>
           <a:p xmlns:a="http://schemas.openxmlformats.org/drawingml/2006/main">
             <a:pPr algn="l">
-              <a:lnSpc>
-                <a:spcPct val="118000"/>
-              </a:lnSpc>
-              <a:buNone/>
               <a:defRPr sz="2200" b="0">
                 <a:solidFill>
-                  <a:srgbClr val="27333D"/>
+                  <a:srgbClr val="1F4D78"/>
                 </a:solidFill>
                 <a:latin typeface="微软雅黑"/>
                 <a:ea typeface="微软雅黑"/>
@@ -15864,35 +12886,35 @@
             <a:r>
               <a:rPr sz="2200" b="0">
                 <a:solidFill>
-                  <a:srgbClr val="27333D"/>
+                  <a:srgbClr val="1F4D78"/>
                 </a:solidFill>
                 <a:latin typeface="微软雅黑"/>
                 <a:ea typeface="微软雅黑"/>
                 <a:cs typeface="微软雅黑"/>
               </a:rPr>
-              <a:t>## 结果对照｜输入、条件、运行数、主指标与结果</a:t>
-            </a:r>
-          </a:p>
-        </p:txBody>
-      </p:sp>
-      <p:sp>
-        <p:nvSpPr>
-          <p:cNvPr id="14" name="doc-9-line-1">
-            <a:extLst xmlns:a="http://schemas.openxmlformats.org/drawingml/2006/main">
-              <a:ext uri="{FF2B5EF4-FFF2-40B4-BE49-F238E27FC236}">
-                <a16:creationId xmlns:a16="http://schemas.microsoft.com/office/drawing/2014/main" id="{2B06B9DA-23D3-4556-935C-D1C79B496E9A}"/>
-              </a:ext>
-            </a:extLst>
-          </p:cNvPr>
-          <p:cNvSpPr>
-            <a:spLocks xmlns:a="http://schemas.openxmlformats.org/drawingml/2006/main" noGrp="1"/>
-          </p:cNvSpPr>
-          <p:nvPr/>
-        </p:nvSpPr>
-        <p:spPr>
-          <a:xfrm xmlns:a="http://schemas.openxmlformats.org/drawingml/2006/main">
-            <a:off x="990600" y="2728913"/>
-            <a:ext cx="10210800" cy="885825"/>
+              <a:t>保留 T03；说明样本单位、选优历史与成本，再给研究决定。</a:t>
+            </a:r>
+          </a:p>
+        </p:txBody>
+      </p:sp>
+      <p:sp>
+        <p:nvSpPr>
+          <p:cNvPr id="5" name="judgment-source">
+            <a:extLst xmlns:a="http://schemas.openxmlformats.org/drawingml/2006/main">
+              <a:ext uri="{FF2B5EF4-FFF2-40B4-BE49-F238E27FC236}">
+                <a16:creationId xmlns:a16="http://schemas.microsoft.com/office/drawing/2014/main" id="{2988C690-A923-4D39-9DB2-31EFDDC2F9F9}"/>
+              </a:ext>
+            </a:extLst>
+          </p:cNvPr>
+          <p:cNvSpPr>
+            <a:spLocks xmlns:a="http://schemas.openxmlformats.org/drawingml/2006/main" noGrp="1"/>
+          </p:cNvSpPr>
+          <p:nvPr/>
+        </p:nvSpPr>
+        <p:spPr>
+          <a:xfrm xmlns:a="http://schemas.openxmlformats.org/drawingml/2006/main">
+            <a:off x="666750" y="6276975"/>
+            <a:ext cx="10572750" cy="209550"/>
           </a:xfrm>
           <a:prstGeom xmlns:a="http://schemas.openxmlformats.org/drawingml/2006/main" prst="rect">
             <a:avLst/>
@@ -15903,17 +12925,24 @@
           </a:ln>
         </p:spPr>
         <p:txBody>
-          <a:bodyPr xmlns:a="http://schemas.openxmlformats.org/drawingml/2006/main" lIns="0" tIns="0" rIns="0" bIns="0" anchor="ctr"/>
-          <a:lstStyle xmlns:a="http://schemas.openxmlformats.org/drawingml/2006/main"/>
+          <a:bodyPr xmlns:a="http://schemas.openxmlformats.org/drawingml/2006/main" lIns="0" tIns="0" rIns="0" bIns="0" anchor="t"/>
+          <a:lstStyle xmlns:a="http://schemas.openxmlformats.org/drawingml/2006/main">
+            <a:defPPr algn="l">
+              <a:defRPr sz="1100" b="0">
+                <a:solidFill>
+                  <a:srgbClr val="667684"/>
+                </a:solidFill>
+                <a:latin typeface="微软雅黑"/>
+                <a:ea typeface="微软雅黑"/>
+                <a:cs typeface="微软雅黑"/>
+              </a:defRPr>
+            </a:defPPr>
+          </a:lstStyle>
           <a:p xmlns:a="http://schemas.openxmlformats.org/drawingml/2006/main">
             <a:pPr algn="l">
-              <a:lnSpc>
-                <a:spcPct val="118000"/>
-              </a:lnSpc>
-              <a:buNone/>
-              <a:defRPr sz="2200" b="0">
-                <a:solidFill>
-                  <a:srgbClr val="27333D"/>
+              <a:defRPr sz="1100" b="0">
+                <a:solidFill>
+                  <a:srgbClr val="667684"/>
                 </a:solidFill>
                 <a:latin typeface="微软雅黑"/>
                 <a:ea typeface="微软雅黑"/>
@@ -15921,37 +12950,37 @@
               </a:defRPr>
             </a:pPr>
             <a:r>
-              <a:rPr sz="2200" b="0">
-                <a:solidFill>
-                  <a:srgbClr val="27333D"/>
+              <a:rPr sz="1100" b="0">
+                <a:solidFill>
+                  <a:srgbClr val="667684"/>
                 </a:solidFill>
                 <a:latin typeface="微软雅黑"/>
                 <a:ea typeface="微软雅黑"/>
                 <a:cs typeface="微软雅黑"/>
               </a:rPr>
-              <a:t>## 失败或局限｜表现、根因、边界与下一步</a:t>
-            </a:r>
-          </a:p>
-        </p:txBody>
-      </p:sp>
-      <p:sp>
-        <p:nvSpPr>
-          <p:cNvPr id="15" name="doc-9-line-2">
-            <a:extLst xmlns:a="http://schemas.openxmlformats.org/drawingml/2006/main">
-              <a:ext uri="{FF2B5EF4-FFF2-40B4-BE49-F238E27FC236}">
-                <a16:creationId xmlns:a16="http://schemas.microsoft.com/office/drawing/2014/main" id="{B33481FF-295D-4072-B14B-B568E1377BFC}"/>
-              </a:ext>
-            </a:extLst>
-          </p:cNvPr>
-          <p:cNvSpPr>
-            <a:spLocks xmlns:a="http://schemas.openxmlformats.org/drawingml/2006/main" noGrp="1"/>
-          </p:cNvSpPr>
-          <p:nvPr/>
-        </p:nvSpPr>
-        <p:spPr>
-          <a:xfrm xmlns:a="http://schemas.openxmlformats.org/drawingml/2006/main">
-            <a:off x="990600" y="3629025"/>
-            <a:ext cx="10210800" cy="885825"/>
+              <a:t>来源：本课判断任务与讲义；构造材料及真实来源按材料包标识</a:t>
+            </a:r>
+          </a:p>
+        </p:txBody>
+      </p:sp>
+      <p:sp>
+        <p:nvSpPr>
+          <p:cNvPr id="6" name="judgment-page">
+            <a:extLst xmlns:a="http://schemas.openxmlformats.org/drawingml/2006/main">
+              <a:ext uri="{FF2B5EF4-FFF2-40B4-BE49-F238E27FC236}">
+                <a16:creationId xmlns:a16="http://schemas.microsoft.com/office/drawing/2014/main" id="{5677C6E3-611B-4BA0-A49F-71E36A9BCDDC}"/>
+              </a:ext>
+            </a:extLst>
+          </p:cNvPr>
+          <p:cNvSpPr>
+            <a:spLocks xmlns:a="http://schemas.openxmlformats.org/drawingml/2006/main" noGrp="1"/>
+          </p:cNvSpPr>
+          <p:nvPr/>
+        </p:nvSpPr>
+        <p:spPr>
+          <a:xfrm xmlns:a="http://schemas.openxmlformats.org/drawingml/2006/main">
+            <a:off x="11715750" y="6562725"/>
+            <a:ext cx="238125" cy="171450"/>
           </a:xfrm>
           <a:prstGeom xmlns:a="http://schemas.openxmlformats.org/drawingml/2006/main" prst="rect">
             <a:avLst/>
@@ -15962,17 +12991,24 @@
           </a:ln>
         </p:spPr>
         <p:txBody>
-          <a:bodyPr xmlns:a="http://schemas.openxmlformats.org/drawingml/2006/main" lIns="0" tIns="0" rIns="0" bIns="0" anchor="ctr"/>
-          <a:lstStyle xmlns:a="http://schemas.openxmlformats.org/drawingml/2006/main"/>
+          <a:bodyPr xmlns:a="http://schemas.openxmlformats.org/drawingml/2006/main" lIns="0" tIns="0" rIns="0" bIns="0" anchor="t"/>
+          <a:lstStyle xmlns:a="http://schemas.openxmlformats.org/drawingml/2006/main">
+            <a:defPPr algn="l">
+              <a:defRPr sz="900" b="0">
+                <a:solidFill>
+                  <a:srgbClr val="A5A5A5"/>
+                </a:solidFill>
+                <a:latin typeface="微软雅黑"/>
+                <a:ea typeface="微软雅黑"/>
+                <a:cs typeface="微软雅黑"/>
+              </a:defRPr>
+            </a:defPPr>
+          </a:lstStyle>
           <a:p xmlns:a="http://schemas.openxmlformats.org/drawingml/2006/main">
             <a:pPr algn="l">
-              <a:lnSpc>
-                <a:spcPct val="118000"/>
-              </a:lnSpc>
-              <a:buNone/>
-              <a:defRPr sz="2200" b="0">
-                <a:solidFill>
-                  <a:srgbClr val="27333D"/>
+              <a:defRPr sz="900" b="0">
+                <a:solidFill>
+                  <a:srgbClr val="A5A5A5"/>
                 </a:solidFill>
                 <a:latin typeface="微软雅黑"/>
                 <a:ea typeface="微软雅黑"/>
@@ -15980,74 +13016,15 @@
               </a:defRPr>
             </a:pPr>
             <a:r>
-              <a:rPr sz="2200" b="0">
-                <a:solidFill>
-                  <a:srgbClr val="27333D"/>
+              <a:rPr sz="900" b="0">
+                <a:solidFill>
+                  <a:srgbClr val="A5A5A5"/>
                 </a:solidFill>
                 <a:latin typeface="微软雅黑"/>
                 <a:ea typeface="微软雅黑"/>
                 <a:cs typeface="微软雅黑"/>
               </a:rPr>
-              <a:t>## 判断修订｜支持 / 反驳 / 仍不能判断 + 证据理由</a:t>
-            </a:r>
-          </a:p>
-        </p:txBody>
-      </p:sp>
-      <p:sp>
-        <p:nvSpPr>
-          <p:cNvPr id="16" name="doc-9-line-3">
-            <a:extLst xmlns:a="http://schemas.openxmlformats.org/drawingml/2006/main">
-              <a:ext uri="{FF2B5EF4-FFF2-40B4-BE49-F238E27FC236}">
-                <a16:creationId xmlns:a16="http://schemas.microsoft.com/office/drawing/2014/main" id="{607F3BE3-C660-4784-BC79-28C3EA8E4986}"/>
-              </a:ext>
-            </a:extLst>
-          </p:cNvPr>
-          <p:cNvSpPr>
-            <a:spLocks xmlns:a="http://schemas.openxmlformats.org/drawingml/2006/main" noGrp="1"/>
-          </p:cNvSpPr>
-          <p:nvPr/>
-        </p:nvSpPr>
-        <p:spPr>
-          <a:xfrm xmlns:a="http://schemas.openxmlformats.org/drawingml/2006/main">
-            <a:off x="990600" y="4529138"/>
-            <a:ext cx="10210800" cy="885825"/>
-          </a:xfrm>
-          <a:prstGeom xmlns:a="http://schemas.openxmlformats.org/drawingml/2006/main" prst="rect">
-            <a:avLst/>
-          </a:prstGeom>
-          <a:noFill xmlns:a="http://schemas.openxmlformats.org/drawingml/2006/main"/>
-          <a:ln xmlns:a="http://schemas.openxmlformats.org/drawingml/2006/main" w="0">
-            <a:noFill/>
-          </a:ln>
-        </p:spPr>
-        <p:txBody>
-          <a:bodyPr xmlns:a="http://schemas.openxmlformats.org/drawingml/2006/main" lIns="0" tIns="0" rIns="0" bIns="0" anchor="ctr"/>
-          <a:lstStyle xmlns:a="http://schemas.openxmlformats.org/drawingml/2006/main"/>
-          <a:p xmlns:a="http://schemas.openxmlformats.org/drawingml/2006/main">
-            <a:pPr algn="l">
-              <a:lnSpc>
-                <a:spcPct val="118000"/>
-              </a:lnSpc>
-              <a:buNone/>
-              <a:defRPr sz="2200" b="0">
-                <a:solidFill>
-                  <a:srgbClr val="27333D"/>
-                </a:solidFill>
-                <a:latin typeface="微软雅黑"/>
-                <a:ea typeface="微软雅黑"/>
-                <a:cs typeface="微软雅黑"/>
-              </a:defRPr>
-            </a:pPr>
-            <a:r>
-              <a:rPr sz="2200" b="0">
-                <a:solidFill>
-                  <a:srgbClr val="27333D"/>
-                </a:solidFill>
-                <a:latin typeface="微软雅黑"/>
-                <a:ea typeface="微软雅黑"/>
-                <a:cs typeface="微软雅黑"/>
-              </a:rPr>
-              <a:t>课后补全｜人工审核、充分性、威胁、伦理与 10 项自查</a:t>
+              <a:t>3</a:t>
             </a:r>
           </a:p>
         </p:txBody>
@@ -17773,7 +14750,7 @@
                 <a:ea typeface="微软雅黑"/>
                 <a:cs typeface="微软雅黑"/>
               </a:rPr>
-              <a:t>输入</a:t>
+              <a:t>对象／角色</a:t>
             </a:r>
           </a:p>
         </p:txBody>
@@ -17832,7 +14809,7 @@
                 <a:ea typeface="微软雅黑"/>
                 <a:cs typeface="微软雅黑"/>
               </a:rPr>
-              <a:t>同一批 T01–T03，两个条件各一份固定输出。</a:t>
+              <a:t>结果、机制、工作流；开发与最终证据分开。</a:t>
             </a:r>
           </a:p>
         </p:txBody>
@@ -17921,7 +14898,7 @@
                 <a:ea typeface="微软雅黑"/>
                 <a:cs typeface="微软雅黑"/>
               </a:rPr>
-              <a:t>基准</a:t>
+              <a:t>独立单位</a:t>
             </a:r>
           </a:p>
         </p:txBody>
@@ -17980,7 +14957,7 @@
                 <a:ea typeface="微软雅黑"/>
                 <a:cs typeface="微软雅黑"/>
               </a:rPr>
-              <a:t>人工列出的 8 项应保留条件。</a:t>
+              <a:t>按任务、材料或独立运行；相关记录分组。</a:t>
             </a:r>
           </a:p>
         </p:txBody>
@@ -18069,7 +15046,7 @@
                 <a:ea typeface="微软雅黑"/>
                 <a:cs typeface="微软雅黑"/>
               </a:rPr>
-              <a:t>评价</a:t>
+              <a:t>反馈使用</a:t>
             </a:r>
           </a:p>
         </p:txBody>
@@ -18128,7 +15105,7 @@
                 <a:ea typeface="微软雅黑"/>
                 <a:cs typeface="微软雅黑"/>
               </a:rPr>
-              <a:t>16 条条件×输出标注，核验原文与输出定位。</a:t>
+              <a:t>候选冻结后揭示最终评价，不再用于选优。</a:t>
             </a:r>
           </a:p>
         </p:txBody>
@@ -18217,7 +15194,7 @@
                 <a:ea typeface="微软雅黑"/>
                 <a:cs typeface="微软雅黑"/>
               </a:rPr>
-              <a:t>汇总</a:t>
+              <a:t>预算／判断</a:t>
             </a:r>
           </a:p>
         </p:txBody>
@@ -18276,7 +15253,7 @@
                 <a:ea typeface="微软雅黑"/>
                 <a:cs typeface="微软雅黑"/>
               </a:rPr>
-              <a:t>各条件缺失数之和 / 基准条件数之和。</a:t>
+              <a:t>搜索次数、成本、区间与改变判断条件。</a:t>
             </a:r>
           </a:p>
         </p:txBody>
